--- a/site/docs/MIE402_Lecture02_Sampling_Jupyter_PreLab1_Fall2026.pptx
+++ b/site/docs/MIE402_Lecture02_Sampling_Jupyter_PreLab1_Fall2026.pptx
@@ -2,34 +2,34 @@
 <file path=ppt/presentation.xml><?xml version="1.0" encoding="utf-8"?>
 <p:presentation xmlns:p="http://schemas.openxmlformats.org/presentationml/2006/main">
   <p:sldMasterIdLst>
-    <p:sldMasterId xmlns:r="http://schemas.openxmlformats.org/officeDocument/2006/relationships" id="2147483648" r:id="Rc6f1c819927a41ad"/>
+    <p:sldMasterId xmlns:r="http://schemas.openxmlformats.org/officeDocument/2006/relationships" id="2147483648" r:id="Rf94b0d50e98c447a"/>
   </p:sldMasterIdLst>
   <p:notesMasterIdLst>
-    <p:notesMasterId xmlns:r="http://schemas.openxmlformats.org/officeDocument/2006/relationships" r:id="R0ebb238c09e74a9d"/>
+    <p:notesMasterId xmlns:r="http://schemas.openxmlformats.org/officeDocument/2006/relationships" r:id="Rced3ce7d23b14c21"/>
   </p:notesMasterIdLst>
   <p:sldIdLst>
-    <p:sldId xmlns:r="http://schemas.openxmlformats.org/officeDocument/2006/relationships" id="256" r:id="Radaadb01c6104683"/>
-    <p:sldId xmlns:r="http://schemas.openxmlformats.org/officeDocument/2006/relationships" id="257" r:id="Rc1209a4d3d5b4fea"/>
-    <p:sldId xmlns:r="http://schemas.openxmlformats.org/officeDocument/2006/relationships" id="258" r:id="R49affbb8000e474c"/>
-    <p:sldId xmlns:r="http://schemas.openxmlformats.org/officeDocument/2006/relationships" id="259" r:id="Rc0124a4ba499481e"/>
-    <p:sldId xmlns:r="http://schemas.openxmlformats.org/officeDocument/2006/relationships" id="260" r:id="Rb55d6bc35e7b4130"/>
-    <p:sldId xmlns:r="http://schemas.openxmlformats.org/officeDocument/2006/relationships" id="261" r:id="Rf6b32d0971a341c6"/>
-    <p:sldId xmlns:r="http://schemas.openxmlformats.org/officeDocument/2006/relationships" id="262" r:id="R5c112cef51834e6e"/>
-    <p:sldId xmlns:r="http://schemas.openxmlformats.org/officeDocument/2006/relationships" id="263" r:id="R853a128e1c7b4b08"/>
-    <p:sldId xmlns:r="http://schemas.openxmlformats.org/officeDocument/2006/relationships" id="264" r:id="Rc35eff6b62444047"/>
-    <p:sldId xmlns:r="http://schemas.openxmlformats.org/officeDocument/2006/relationships" id="265" r:id="Re4a1ad60780346e5"/>
-    <p:sldId xmlns:r="http://schemas.openxmlformats.org/officeDocument/2006/relationships" id="266" r:id="Rd0061490e58a41da"/>
-    <p:sldId xmlns:r="http://schemas.openxmlformats.org/officeDocument/2006/relationships" id="267" r:id="Rc6e182798f624eb9"/>
-    <p:sldId xmlns:r="http://schemas.openxmlformats.org/officeDocument/2006/relationships" id="268" r:id="R4c0266f8cbbf483f"/>
-    <p:sldId xmlns:r="http://schemas.openxmlformats.org/officeDocument/2006/relationships" id="269" r:id="Rba165f3c762a427d"/>
-    <p:sldId xmlns:r="http://schemas.openxmlformats.org/officeDocument/2006/relationships" id="270" r:id="R0e2a96993f414c19"/>
-    <p:sldId xmlns:r="http://schemas.openxmlformats.org/officeDocument/2006/relationships" id="271" r:id="R2fe443bd063c449e"/>
-    <p:sldId xmlns:r="http://schemas.openxmlformats.org/officeDocument/2006/relationships" id="272" r:id="Rc0c704c09b1948d6"/>
-    <p:sldId xmlns:r="http://schemas.openxmlformats.org/officeDocument/2006/relationships" id="273" r:id="R9f96d2afba3f4d5c"/>
-    <p:sldId xmlns:r="http://schemas.openxmlformats.org/officeDocument/2006/relationships" id="274" r:id="Rde534e6f4b0c4b8b"/>
-    <p:sldId xmlns:r="http://schemas.openxmlformats.org/officeDocument/2006/relationships" id="275" r:id="R3727d696c773428c"/>
-    <p:sldId xmlns:r="http://schemas.openxmlformats.org/officeDocument/2006/relationships" id="276" r:id="Rb8ebd95efb2440b2"/>
-    <p:sldId xmlns:r="http://schemas.openxmlformats.org/officeDocument/2006/relationships" id="277" r:id="Ra47f12587afb4e80"/>
+    <p:sldId xmlns:r="http://schemas.openxmlformats.org/officeDocument/2006/relationships" id="256" r:id="Ra8e08303cdcf476f"/>
+    <p:sldId xmlns:r="http://schemas.openxmlformats.org/officeDocument/2006/relationships" id="257" r:id="R0bef36d055664864"/>
+    <p:sldId xmlns:r="http://schemas.openxmlformats.org/officeDocument/2006/relationships" id="258" r:id="R9ea24af863464044"/>
+    <p:sldId xmlns:r="http://schemas.openxmlformats.org/officeDocument/2006/relationships" id="259" r:id="R38ab37ea21d74c3e"/>
+    <p:sldId xmlns:r="http://schemas.openxmlformats.org/officeDocument/2006/relationships" id="260" r:id="R92fa41d594b747c0"/>
+    <p:sldId xmlns:r="http://schemas.openxmlformats.org/officeDocument/2006/relationships" id="261" r:id="R68fa65d4fa1e4cc0"/>
+    <p:sldId xmlns:r="http://schemas.openxmlformats.org/officeDocument/2006/relationships" id="262" r:id="R0e6cebc60f444739"/>
+    <p:sldId xmlns:r="http://schemas.openxmlformats.org/officeDocument/2006/relationships" id="263" r:id="Re77b0ed97b8d41a7"/>
+    <p:sldId xmlns:r="http://schemas.openxmlformats.org/officeDocument/2006/relationships" id="264" r:id="Red5b76ca1a5e4c43"/>
+    <p:sldId xmlns:r="http://schemas.openxmlformats.org/officeDocument/2006/relationships" id="265" r:id="R896b227a6df14185"/>
+    <p:sldId xmlns:r="http://schemas.openxmlformats.org/officeDocument/2006/relationships" id="266" r:id="R6d1e465075fd405f"/>
+    <p:sldId xmlns:r="http://schemas.openxmlformats.org/officeDocument/2006/relationships" id="267" r:id="Rdcb8b2991f8c4e10"/>
+    <p:sldId xmlns:r="http://schemas.openxmlformats.org/officeDocument/2006/relationships" id="268" r:id="R70d67b5562334a44"/>
+    <p:sldId xmlns:r="http://schemas.openxmlformats.org/officeDocument/2006/relationships" id="269" r:id="R64796aa21c914221"/>
+    <p:sldId xmlns:r="http://schemas.openxmlformats.org/officeDocument/2006/relationships" id="270" r:id="Raff2149416b94032"/>
+    <p:sldId xmlns:r="http://schemas.openxmlformats.org/officeDocument/2006/relationships" id="271" r:id="Rd42c592af15a44c8"/>
+    <p:sldId xmlns:r="http://schemas.openxmlformats.org/officeDocument/2006/relationships" id="272" r:id="R18072564e0bd4bd3"/>
+    <p:sldId xmlns:r="http://schemas.openxmlformats.org/officeDocument/2006/relationships" id="273" r:id="R1c0749c5b3e14c9a"/>
+    <p:sldId xmlns:r="http://schemas.openxmlformats.org/officeDocument/2006/relationships" id="274" r:id="R2d8c55ad9e144db6"/>
+    <p:sldId xmlns:r="http://schemas.openxmlformats.org/officeDocument/2006/relationships" id="275" r:id="R06cbef156b0f452e"/>
+    <p:sldId xmlns:r="http://schemas.openxmlformats.org/officeDocument/2006/relationships" id="276" r:id="R51561a2e96dc41f9"/>
+    <p:sldId xmlns:r="http://schemas.openxmlformats.org/officeDocument/2006/relationships" id="277" r:id="Rf5088b71151c494f"/>
   </p:sldIdLst>
   <p:sldSz cx="12192000" cy="6858000"/>
   <p:notesSz cx="6858000" cy="9144000"/>
@@ -653,7 +653,7 @@
           </a:p>
           <a:p xmlns:a="http://schemas.openxmlformats.org/drawingml/2006/main">
             <a:r>
-              <a:t>Explain fs, dt, duration, and n. Point out that np.arange(n)/fs avoids accidentally including an extra endpoint. Relate longer record duration to finer FFT frequency spacing.</a:t>
+              <a:t>Explain fs, dt, duration, and n. Point out that np.arange(n)/fs avoids an extra endpoint. Relate record duration to FFT-bin spacing. Students only need to understand what the variables mean so they can interpret the output.</a:t>
             </a:r>
           </a:p>
           <a:p xmlns:a="http://schemas.openxmlformats.org/drawingml/2006/main">
@@ -923,7 +923,7 @@
           </a:p>
           <a:p xmlns:a="http://schemas.openxmlformats.org/drawingml/2006/main">
             <a:r>
-              <a:t>Trace one pass through the loop. Then explain how the same instructions repeat for each sample rate. Show that mean and RMS can stay close to theory even when the 42 Hz component aliases. This is the main reason students must inspect spectra.</a:t>
+              <a:t>Trace one pass through the prepared loop so students understand the output. Their task starts after execution: record mean and RMS, calculate samples per 42 Hz cycle, compute percent error, and compare the time histories.</a:t>
             </a:r>
           </a:p>
           <a:p xmlns:a="http://schemas.openxmlformats.org/drawingml/2006/main">
@@ -1103,7 +1103,7 @@
           </a:p>
           <a:p xmlns:a="http://schemas.openxmlformats.org/drawingml/2006/main">
             <a:r>
-              <a:t>Explain the sequence without deriving the FFT. The window reduces leakage near peaks. The coherent-gain correction restores approximate amplitude. rfft keeps the nonnegative half for a real signal. Doubling the interior bins creates a one-sided amplitude spectrum.</a:t>
+              <a:t>Explain the purpose of each prepared operation without deriving the FFT. The window reduces leakage. The coherent-gain factor corrects amplitude. rfft keeps nonnegative frequencies. Students use the output to identify peaks and test their predictions.</a:t>
             </a:r>
           </a:p>
           <a:p xmlns:a="http://schemas.openxmlformats.org/drawingml/2006/main">
@@ -1373,7 +1373,7 @@
           </a:p>
           <a:p xmlns:a="http://schemas.openxmlformats.org/drawingml/2006/main">
             <a:r>
-              <a:t>Explain grading expectations. Short answers should include numbers, units, and a reason. A statement such as the graph is wrong is incomplete. Students must identify the Nyquist limit and the false frequency.</a:t>
+              <a:t>Explain the 20-point structure. All code is prepared. Students earn credit for calculations, a completed comparison table, predictions, interpretation, and a measurement-design decision. Answers need numbers, units, and reasons.</a:t>
             </a:r>
           </a:p>
           <a:p xmlns:a="http://schemas.openxmlformats.org/drawingml/2006/main">
@@ -1463,7 +1463,7 @@
           </a:p>
           <a:p xmlns:a="http://schemas.openxmlformats.org/drawingml/2006/main">
             <a:r>
-              <a:t>Read the goals briefly. Tell students the notebook contains all required code. Their main responsibility is to run it carefully and explain the results in their own words.</a:t>
+              <a:t>Read the goals briefly. Tell students all Python code is provided. Their work is to calculate, predict, extract values from the output, compare cases, and explain the engineering meaning.</a:t>
             </a:r>
           </a:p>
           <a:p xmlns:a="http://schemas.openxmlformats.org/drawingml/2006/main">
@@ -2441,7 +2441,7 @@
   </p:cSld>
   <p:clrMap bg1="lt1" tx1="dk1" bg2="lt2" tx2="dk2" accent1="accent1" accent2="accent2" accent3="accent3" accent4="accent4" accent5="accent5" accent6="accent6" hlink="hlink" folHlink="folHlink"/>
   <p:sldLayoutIdLst>
-    <p:sldLayoutId xmlns:r="http://schemas.openxmlformats.org/officeDocument/2006/relationships" id="2147483649" r:id="R4360fbd8594e4837"/>
+    <p:sldLayoutId xmlns:r="http://schemas.openxmlformats.org/officeDocument/2006/relationships" id="2147483649" r:id="Rbb8475b5135046c1"/>
   </p:sldLayoutIdLst>
   <p:txStyles>
     <p:titleStyle>
@@ -2992,7 +2992,7 @@
           <p:cNvPr id="6" name="text">
             <a:extLst xmlns:a="http://schemas.openxmlformats.org/drawingml/2006/main">
               <a:ext uri="{FF2B5EF4-FFF2-40B4-BE49-F238E27FC236}">
-                <a16:creationId xmlns:a16="http://schemas.microsoft.com/office/drawing/2014/main" id="{49C5E1A4-71BB-4E79-B97E-5856AF934836}"/>
+                <a16:creationId xmlns:a16="http://schemas.microsoft.com/office/drawing/2014/main" id="{E6880D69-6244-4445-AE47-DC8AA021928D}"/>
               </a:ext>
             </a:extLst>
           </p:cNvPr>
@@ -3049,7 +3049,7 @@
           <p:cNvPr id="2" name="text">
             <a:extLst xmlns:a="http://schemas.openxmlformats.org/drawingml/2006/main">
               <a:ext uri="{FF2B5EF4-FFF2-40B4-BE49-F238E27FC236}">
-                <a16:creationId xmlns:a16="http://schemas.microsoft.com/office/drawing/2014/main" id="{DAB0FD75-202C-4C43-9B7D-819027B74C8B}"/>
+                <a16:creationId xmlns:a16="http://schemas.microsoft.com/office/drawing/2014/main" id="{DD799470-9C9E-4E42-B87F-285C7A169285}"/>
               </a:ext>
             </a:extLst>
           </p:cNvPr>
@@ -3129,7 +3129,7 @@
           <p:cNvPr id="3" name="text">
             <a:extLst xmlns:a="http://schemas.openxmlformats.org/drawingml/2006/main">
               <a:ext uri="{FF2B5EF4-FFF2-40B4-BE49-F238E27FC236}">
-                <a16:creationId xmlns:a16="http://schemas.microsoft.com/office/drawing/2014/main" id="{A60C4B17-7C09-4F2B-948E-04D7A9DD30A7}"/>
+                <a16:creationId xmlns:a16="http://schemas.microsoft.com/office/drawing/2014/main" id="{F3293DEF-C1A4-4397-AE1A-4A157E678CDB}"/>
               </a:ext>
             </a:extLst>
           </p:cNvPr>
@@ -3186,7 +3186,7 @@
           <p:cNvPr id="4" name="text">
             <a:extLst xmlns:a="http://schemas.openxmlformats.org/drawingml/2006/main">
               <a:ext uri="{FF2B5EF4-FFF2-40B4-BE49-F238E27FC236}">
-                <a16:creationId xmlns:a16="http://schemas.microsoft.com/office/drawing/2014/main" id="{1C0F2079-C972-4879-9FB4-63A90A3A4031}"/>
+                <a16:creationId xmlns:a16="http://schemas.microsoft.com/office/drawing/2014/main" id="{FAFCED3D-6356-4863-9BA1-A89BF67F4346}"/>
               </a:ext>
             </a:extLst>
           </p:cNvPr>
@@ -3243,7 +3243,7 @@
           <p:cNvPr id="5" name="page">
             <a:extLst xmlns:a="http://schemas.openxmlformats.org/drawingml/2006/main">
               <a:ext uri="{FF2B5EF4-FFF2-40B4-BE49-F238E27FC236}">
-                <a16:creationId xmlns:a16="http://schemas.microsoft.com/office/drawing/2014/main" id="{648AABC9-B11E-4824-AF1F-44F0289D0058}"/>
+                <a16:creationId xmlns:a16="http://schemas.microsoft.com/office/drawing/2014/main" id="{3104B6CA-D39F-4EE7-987F-FC122895C4B0}"/>
               </a:ext>
             </a:extLst>
           </p:cNvPr>
@@ -3298,7 +3298,7 @@
     </p:spTree>
     <p:extLst>
       <p:ext uri="{BB962C8B-B14F-4D97-AF65-F5344CB8AC3E}">
-        <p14:creationId xmlns:p14="http://schemas.microsoft.com/office/powerpoint/2010/main" val="1916215070"/>
+        <p14:creationId xmlns:p14="http://schemas.microsoft.com/office/powerpoint/2010/main" val="1471046099"/>
       </p:ext>
     </p:extLst>
   </p:cSld>
@@ -3329,7 +3329,7 @@
           <p:cNvPr id="8" name="course">
             <a:extLst xmlns:a="http://schemas.openxmlformats.org/drawingml/2006/main">
               <a:ext uri="{FF2B5EF4-FFF2-40B4-BE49-F238E27FC236}">
-                <a16:creationId xmlns:a16="http://schemas.microsoft.com/office/drawing/2014/main" id="{131DF16D-4D97-45C9-BB4B-395A6CE160F3}"/>
+                <a16:creationId xmlns:a16="http://schemas.microsoft.com/office/drawing/2014/main" id="{A960548D-DA3E-4BDD-A26F-4589D2EA1B82}"/>
               </a:ext>
             </a:extLst>
           </p:cNvPr>
@@ -3386,7 +3386,7 @@
           <p:cNvPr id="2" name="title">
             <a:extLst xmlns:a="http://schemas.openxmlformats.org/drawingml/2006/main">
               <a:ext uri="{FF2B5EF4-FFF2-40B4-BE49-F238E27FC236}">
-                <a16:creationId xmlns:a16="http://schemas.microsoft.com/office/drawing/2014/main" id="{3DE7FA4E-EADC-41FE-9E20-8F84DA0C7DC9}"/>
+                <a16:creationId xmlns:a16="http://schemas.microsoft.com/office/drawing/2014/main" id="{98634465-E081-4B4B-9480-A4C898790A39}"/>
               </a:ext>
             </a:extLst>
           </p:cNvPr>
@@ -3443,7 +3443,7 @@
           <p:cNvPr id="3" name="page">
             <a:extLst xmlns:a="http://schemas.openxmlformats.org/drawingml/2006/main">
               <a:ext uri="{FF2B5EF4-FFF2-40B4-BE49-F238E27FC236}">
-                <a16:creationId xmlns:a16="http://schemas.microsoft.com/office/drawing/2014/main" id="{8EDCDA1A-AC73-43BF-A4E9-226E916B61D5}"/>
+                <a16:creationId xmlns:a16="http://schemas.microsoft.com/office/drawing/2014/main" id="{DA2471D6-3CC8-43EF-B75C-036D9060F3D4}"/>
               </a:ext>
             </a:extLst>
           </p:cNvPr>
@@ -3500,7 +3500,7 @@
           <p:cNvPr id="4" name="text">
             <a:extLst xmlns:a="http://schemas.openxmlformats.org/drawingml/2006/main">
               <a:ext uri="{FF2B5EF4-FFF2-40B4-BE49-F238E27FC236}">
-                <a16:creationId xmlns:a16="http://schemas.microsoft.com/office/drawing/2014/main" id="{C79944A5-4CBB-4B40-85EE-7C916A06A59F}"/>
+                <a16:creationId xmlns:a16="http://schemas.microsoft.com/office/drawing/2014/main" id="{A3A8A3F1-A3BF-4D85-B0AD-DFD054BBB0A7}"/>
               </a:ext>
             </a:extLst>
           </p:cNvPr>
@@ -3557,7 +3557,7 @@
           <p:cNvPr id="5" name="text">
             <a:extLst xmlns:a="http://schemas.openxmlformats.org/drawingml/2006/main">
               <a:ext uri="{FF2B5EF4-FFF2-40B4-BE49-F238E27FC236}">
-                <a16:creationId xmlns:a16="http://schemas.microsoft.com/office/drawing/2014/main" id="{F072A94C-8FFA-4FB7-ADE6-19FAC71DAC70}"/>
+                <a16:creationId xmlns:a16="http://schemas.microsoft.com/office/drawing/2014/main" id="{B905F51D-EA9F-4F03-813B-8928F2C9B905}"/>
               </a:ext>
             </a:extLst>
           </p:cNvPr>
@@ -3614,7 +3614,7 @@
           <p:cNvPr id="6" name="text">
             <a:extLst xmlns:a="http://schemas.openxmlformats.org/drawingml/2006/main">
               <a:ext uri="{FF2B5EF4-FFF2-40B4-BE49-F238E27FC236}">
-                <a16:creationId xmlns:a16="http://schemas.microsoft.com/office/drawing/2014/main" id="{9F95536F-D75E-4158-8362-E8DF8F858E8E}"/>
+                <a16:creationId xmlns:a16="http://schemas.microsoft.com/office/drawing/2014/main" id="{5BD60EC4-B04D-4EB1-A45E-6B255F810049}"/>
               </a:ext>
             </a:extLst>
           </p:cNvPr>
@@ -3671,7 +3671,7 @@
           <p:cNvPr id="7" name="text">
             <a:extLst xmlns:a="http://schemas.openxmlformats.org/drawingml/2006/main">
               <a:ext uri="{FF2B5EF4-FFF2-40B4-BE49-F238E27FC236}">
-                <a16:creationId xmlns:a16="http://schemas.microsoft.com/office/drawing/2014/main" id="{5BD1FAAF-C4FE-43C6-8F1F-37A57F33896B}"/>
+                <a16:creationId xmlns:a16="http://schemas.microsoft.com/office/drawing/2014/main" id="{5AF4F533-75E3-4D88-847D-2CDB28A7D9A2}"/>
               </a:ext>
             </a:extLst>
           </p:cNvPr>
@@ -3726,7 +3726,7 @@
     </p:spTree>
     <p:extLst>
       <p:ext uri="{BB962C8B-B14F-4D97-AF65-F5344CB8AC3E}">
-        <p14:creationId xmlns:p14="http://schemas.microsoft.com/office/powerpoint/2010/main" val="1159063099"/>
+        <p14:creationId xmlns:p14="http://schemas.microsoft.com/office/powerpoint/2010/main" val="657241021"/>
       </p:ext>
     </p:extLst>
   </p:cSld>
@@ -3757,7 +3757,7 @@
           <p:cNvPr id="6" name="course">
             <a:extLst xmlns:a="http://schemas.openxmlformats.org/drawingml/2006/main">
               <a:ext uri="{FF2B5EF4-FFF2-40B4-BE49-F238E27FC236}">
-                <a16:creationId xmlns:a16="http://schemas.microsoft.com/office/drawing/2014/main" id="{242D1660-D2B9-42AD-9629-0A1453891A23}"/>
+                <a16:creationId xmlns:a16="http://schemas.microsoft.com/office/drawing/2014/main" id="{F6160E71-7991-40DD-855E-9B4300BA082F}"/>
               </a:ext>
             </a:extLst>
           </p:cNvPr>
@@ -3814,7 +3814,7 @@
           <p:cNvPr id="2" name="title">
             <a:extLst xmlns:a="http://schemas.openxmlformats.org/drawingml/2006/main">
               <a:ext uri="{FF2B5EF4-FFF2-40B4-BE49-F238E27FC236}">
-                <a16:creationId xmlns:a16="http://schemas.microsoft.com/office/drawing/2014/main" id="{66DB06D1-6354-4BDB-A383-2CB1F1DA7067}"/>
+                <a16:creationId xmlns:a16="http://schemas.microsoft.com/office/drawing/2014/main" id="{98B34B3C-B284-4B0F-810C-13FEB67AC8F2}"/>
               </a:ext>
             </a:extLst>
           </p:cNvPr>
@@ -3871,7 +3871,7 @@
           <p:cNvPr id="3" name="page">
             <a:extLst xmlns:a="http://schemas.openxmlformats.org/drawingml/2006/main">
               <a:ext uri="{FF2B5EF4-FFF2-40B4-BE49-F238E27FC236}">
-                <a16:creationId xmlns:a16="http://schemas.microsoft.com/office/drawing/2014/main" id="{EE4D3180-DDCC-4617-B8D7-F43453E8820D}"/>
+                <a16:creationId xmlns:a16="http://schemas.microsoft.com/office/drawing/2014/main" id="{645D884C-77D5-4968-A58B-FAC2DB4BB247}"/>
               </a:ext>
             </a:extLst>
           </p:cNvPr>
@@ -3928,7 +3928,7 @@
           <p:cNvPr id="4" name="code">
             <a:extLst xmlns:a="http://schemas.openxmlformats.org/drawingml/2006/main">
               <a:ext uri="{FF2B5EF4-FFF2-40B4-BE49-F238E27FC236}">
-                <a16:creationId xmlns:a16="http://schemas.microsoft.com/office/drawing/2014/main" id="{828FA193-15DE-4247-B9A6-25A33CFEA441}"/>
+                <a16:creationId xmlns:a16="http://schemas.microsoft.com/office/drawing/2014/main" id="{821F4B8B-B4A9-4E12-8A9E-9C72AA9CA828}"/>
               </a:ext>
             </a:extLst>
           </p:cNvPr>
@@ -4107,7 +4107,7 @@
           <p:cNvPr id="5" name="text">
             <a:extLst xmlns:a="http://schemas.openxmlformats.org/drawingml/2006/main">
               <a:ext uri="{FF2B5EF4-FFF2-40B4-BE49-F238E27FC236}">
-                <a16:creationId xmlns:a16="http://schemas.microsoft.com/office/drawing/2014/main" id="{2545AA3F-10BD-45BD-86AF-ACEA58A55967}"/>
+                <a16:creationId xmlns:a16="http://schemas.microsoft.com/office/drawing/2014/main" id="{97B3126D-C554-426D-B86A-E7360BD4BE92}"/>
               </a:ext>
             </a:extLst>
           </p:cNvPr>
@@ -4154,7 +4154,7 @@
                 <a:ea typeface="Calibri"/>
                 <a:cs typeface="Calibri"/>
               </a:rPr>
-              <a:t>For this one-second record, frequency-bin spacing is Δf = 1/duration = 1 Hz.</a:t>
+              <a:t>Students read these settings and analyze the resulting data. They do not modify the code.</a:t>
             </a:r>
           </a:p>
         </p:txBody>
@@ -4162,7 +4162,7 @@
     </p:spTree>
     <p:extLst>
       <p:ext uri="{BB962C8B-B14F-4D97-AF65-F5344CB8AC3E}">
-        <p14:creationId xmlns:p14="http://schemas.microsoft.com/office/powerpoint/2010/main" val="6017949"/>
+        <p14:creationId xmlns:p14="http://schemas.microsoft.com/office/powerpoint/2010/main" val="731681512"/>
       </p:ext>
     </p:extLst>
   </p:cSld>
@@ -4193,7 +4193,7 @@
           <p:cNvPr id="12" name="course">
             <a:extLst xmlns:a="http://schemas.openxmlformats.org/drawingml/2006/main">
               <a:ext uri="{FF2B5EF4-FFF2-40B4-BE49-F238E27FC236}">
-                <a16:creationId xmlns:a16="http://schemas.microsoft.com/office/drawing/2014/main" id="{0DA9422F-4508-42B1-8C3A-C33CD3F60022}"/>
+                <a16:creationId xmlns:a16="http://schemas.microsoft.com/office/drawing/2014/main" id="{14FB4301-42CF-4361-9B74-123F7FCE7AF3}"/>
               </a:ext>
             </a:extLst>
           </p:cNvPr>
@@ -4250,7 +4250,7 @@
           <p:cNvPr id="2" name="title">
             <a:extLst xmlns:a="http://schemas.openxmlformats.org/drawingml/2006/main">
               <a:ext uri="{FF2B5EF4-FFF2-40B4-BE49-F238E27FC236}">
-                <a16:creationId xmlns:a16="http://schemas.microsoft.com/office/drawing/2014/main" id="{AA162FE8-8D10-486A-BF0D-7C168CE7560A}"/>
+                <a16:creationId xmlns:a16="http://schemas.microsoft.com/office/drawing/2014/main" id="{E61E267E-1C42-4F4B-92A4-7C43F65BE173}"/>
               </a:ext>
             </a:extLst>
           </p:cNvPr>
@@ -4307,7 +4307,7 @@
           <p:cNvPr id="3" name="page">
             <a:extLst xmlns:a="http://schemas.openxmlformats.org/drawingml/2006/main">
               <a:ext uri="{FF2B5EF4-FFF2-40B4-BE49-F238E27FC236}">
-                <a16:creationId xmlns:a16="http://schemas.microsoft.com/office/drawing/2014/main" id="{4F7848E6-B129-4C43-BFED-828EA9820CFF}"/>
+                <a16:creationId xmlns:a16="http://schemas.microsoft.com/office/drawing/2014/main" id="{F32B6940-365D-4FC0-BFA5-E6D4DC44ABD0}"/>
               </a:ext>
             </a:extLst>
           </p:cNvPr>
@@ -4364,7 +4364,7 @@
           <p:cNvPr id="4" name="text">
             <a:extLst xmlns:a="http://schemas.openxmlformats.org/drawingml/2006/main">
               <a:ext uri="{FF2B5EF4-FFF2-40B4-BE49-F238E27FC236}">
-                <a16:creationId xmlns:a16="http://schemas.microsoft.com/office/drawing/2014/main" id="{7BADDEBA-CB21-45A9-9B4C-E3C3898B4B19}"/>
+                <a16:creationId xmlns:a16="http://schemas.microsoft.com/office/drawing/2014/main" id="{A84237AE-5413-455E-86AA-99FBB6EE1332}"/>
               </a:ext>
             </a:extLst>
           </p:cNvPr>
@@ -4421,7 +4421,7 @@
           <p:cNvPr id="5" name="text">
             <a:extLst xmlns:a="http://schemas.openxmlformats.org/drawingml/2006/main">
               <a:ext uri="{FF2B5EF4-FFF2-40B4-BE49-F238E27FC236}">
-                <a16:creationId xmlns:a16="http://schemas.microsoft.com/office/drawing/2014/main" id="{1C3BF778-E22D-4FDE-A8C0-FEEBDADF2377}"/>
+                <a16:creationId xmlns:a16="http://schemas.microsoft.com/office/drawing/2014/main" id="{338B8A29-1878-4BE5-AEAD-4DAADE0E30BE}"/>
               </a:ext>
             </a:extLst>
           </p:cNvPr>
@@ -4478,7 +4478,7 @@
           <p:cNvPr id="6" name="text">
             <a:extLst xmlns:a="http://schemas.openxmlformats.org/drawingml/2006/main">
               <a:ext uri="{FF2B5EF4-FFF2-40B4-BE49-F238E27FC236}">
-                <a16:creationId xmlns:a16="http://schemas.microsoft.com/office/drawing/2014/main" id="{154AD827-DEF8-4733-8CBB-96DFA2A8AC64}"/>
+                <a16:creationId xmlns:a16="http://schemas.microsoft.com/office/drawing/2014/main" id="{77E0E44E-4CC8-4D27-A252-109EE16CA3D7}"/>
               </a:ext>
             </a:extLst>
           </p:cNvPr>
@@ -4535,7 +4535,7 @@
           <p:cNvPr id="7" name="text">
             <a:extLst xmlns:a="http://schemas.openxmlformats.org/drawingml/2006/main">
               <a:ext uri="{FF2B5EF4-FFF2-40B4-BE49-F238E27FC236}">
-                <a16:creationId xmlns:a16="http://schemas.microsoft.com/office/drawing/2014/main" id="{3D2F1D7F-3823-430C-8313-6BBEDBFE5592}"/>
+                <a16:creationId xmlns:a16="http://schemas.microsoft.com/office/drawing/2014/main" id="{A50550A6-12D0-43F8-AD68-13912BD70987}"/>
               </a:ext>
             </a:extLst>
           </p:cNvPr>
@@ -4592,7 +4592,7 @@
           <p:cNvPr id="8" name="text">
             <a:extLst xmlns:a="http://schemas.openxmlformats.org/drawingml/2006/main">
               <a:ext uri="{FF2B5EF4-FFF2-40B4-BE49-F238E27FC236}">
-                <a16:creationId xmlns:a16="http://schemas.microsoft.com/office/drawing/2014/main" id="{EE887525-91BC-4706-9669-A77604E129CA}"/>
+                <a16:creationId xmlns:a16="http://schemas.microsoft.com/office/drawing/2014/main" id="{9F44123E-AB17-42DA-BADC-1484357263F7}"/>
               </a:ext>
             </a:extLst>
           </p:cNvPr>
@@ -4649,7 +4649,7 @@
           <p:cNvPr id="9" name="text">
             <a:extLst xmlns:a="http://schemas.openxmlformats.org/drawingml/2006/main">
               <a:ext uri="{FF2B5EF4-FFF2-40B4-BE49-F238E27FC236}">
-                <a16:creationId xmlns:a16="http://schemas.microsoft.com/office/drawing/2014/main" id="{20CD67EC-F0B8-49D3-B4A3-2EBEA91D72B6}"/>
+                <a16:creationId xmlns:a16="http://schemas.microsoft.com/office/drawing/2014/main" id="{56F12702-43C3-47A1-8701-1618B68533C5}"/>
               </a:ext>
             </a:extLst>
           </p:cNvPr>
@@ -4706,7 +4706,7 @@
           <p:cNvPr id="10" name="text">
             <a:extLst xmlns:a="http://schemas.openxmlformats.org/drawingml/2006/main">
               <a:ext uri="{FF2B5EF4-FFF2-40B4-BE49-F238E27FC236}">
-                <a16:creationId xmlns:a16="http://schemas.microsoft.com/office/drawing/2014/main" id="{E49EBCA4-04B2-4423-973E-A1A9E19AF0CE}"/>
+                <a16:creationId xmlns:a16="http://schemas.microsoft.com/office/drawing/2014/main" id="{C8A58CCA-8D98-4FD8-AF02-7F0035273EAE}"/>
               </a:ext>
             </a:extLst>
           </p:cNvPr>
@@ -4763,7 +4763,7 @@
           <p:cNvPr id="11" name="text">
             <a:extLst xmlns:a="http://schemas.openxmlformats.org/drawingml/2006/main">
               <a:ext uri="{FF2B5EF4-FFF2-40B4-BE49-F238E27FC236}">
-                <a16:creationId xmlns:a16="http://schemas.microsoft.com/office/drawing/2014/main" id="{B208750D-3E3D-46A4-A6D3-8D88944634D1}"/>
+                <a16:creationId xmlns:a16="http://schemas.microsoft.com/office/drawing/2014/main" id="{11D191EA-FD29-4255-8246-282DD7C101E1}"/>
               </a:ext>
             </a:extLst>
           </p:cNvPr>
@@ -4818,7 +4818,7 @@
     </p:spTree>
     <p:extLst>
       <p:ext uri="{BB962C8B-B14F-4D97-AF65-F5344CB8AC3E}">
-        <p14:creationId xmlns:p14="http://schemas.microsoft.com/office/powerpoint/2010/main" val="1991876967"/>
+        <p14:creationId xmlns:p14="http://schemas.microsoft.com/office/powerpoint/2010/main" val="743460673"/>
       </p:ext>
     </p:extLst>
   </p:cSld>
@@ -4849,7 +4849,7 @@
           <p:cNvPr id="12" name="course">
             <a:extLst xmlns:a="http://schemas.openxmlformats.org/drawingml/2006/main">
               <a:ext uri="{FF2B5EF4-FFF2-40B4-BE49-F238E27FC236}">
-                <a16:creationId xmlns:a16="http://schemas.microsoft.com/office/drawing/2014/main" id="{5BC9B808-7B60-4557-985D-1E6EA4AC1F80}"/>
+                <a16:creationId xmlns:a16="http://schemas.microsoft.com/office/drawing/2014/main" id="{292D0884-7B20-465C-BA3F-723D9123B17A}"/>
               </a:ext>
             </a:extLst>
           </p:cNvPr>
@@ -4906,7 +4906,7 @@
           <p:cNvPr id="2" name="title">
             <a:extLst xmlns:a="http://schemas.openxmlformats.org/drawingml/2006/main">
               <a:ext uri="{FF2B5EF4-FFF2-40B4-BE49-F238E27FC236}">
-                <a16:creationId xmlns:a16="http://schemas.microsoft.com/office/drawing/2014/main" id="{C12F5549-9034-4AC4-90AC-943F22B83531}"/>
+                <a16:creationId xmlns:a16="http://schemas.microsoft.com/office/drawing/2014/main" id="{12F490D6-D0BD-414A-9A99-493D7B744C4E}"/>
               </a:ext>
             </a:extLst>
           </p:cNvPr>
@@ -4963,7 +4963,7 @@
           <p:cNvPr id="3" name="page">
             <a:extLst xmlns:a="http://schemas.openxmlformats.org/drawingml/2006/main">
               <a:ext uri="{FF2B5EF4-FFF2-40B4-BE49-F238E27FC236}">
-                <a16:creationId xmlns:a16="http://schemas.microsoft.com/office/drawing/2014/main" id="{F4C1D242-BBD1-450C-A2DB-87161D1C217E}"/>
+                <a16:creationId xmlns:a16="http://schemas.microsoft.com/office/drawing/2014/main" id="{04C64AAB-0C62-4C31-9601-501E924861DA}"/>
               </a:ext>
             </a:extLst>
           </p:cNvPr>
@@ -5020,7 +5020,7 @@
           <p:cNvPr id="4" name="text">
             <a:extLst xmlns:a="http://schemas.openxmlformats.org/drawingml/2006/main">
               <a:ext uri="{FF2B5EF4-FFF2-40B4-BE49-F238E27FC236}">
-                <a16:creationId xmlns:a16="http://schemas.microsoft.com/office/drawing/2014/main" id="{B62687E5-4071-49D6-972B-C2EEDBEE0A2F}"/>
+                <a16:creationId xmlns:a16="http://schemas.microsoft.com/office/drawing/2014/main" id="{FC27E336-6228-41E1-8C29-487523370674}"/>
               </a:ext>
             </a:extLst>
           </p:cNvPr>
@@ -5077,7 +5077,7 @@
           <p:cNvPr id="5" name="text">
             <a:extLst xmlns:a="http://schemas.openxmlformats.org/drawingml/2006/main">
               <a:ext uri="{FF2B5EF4-FFF2-40B4-BE49-F238E27FC236}">
-                <a16:creationId xmlns:a16="http://schemas.microsoft.com/office/drawing/2014/main" id="{F3A5B04E-8A40-42C1-8FC3-1C8468831825}"/>
+                <a16:creationId xmlns:a16="http://schemas.microsoft.com/office/drawing/2014/main" id="{97B9CBDD-79CB-4862-BA40-453CE8BC947F}"/>
               </a:ext>
             </a:extLst>
           </p:cNvPr>
@@ -5134,7 +5134,7 @@
           <p:cNvPr id="6" name="text">
             <a:extLst xmlns:a="http://schemas.openxmlformats.org/drawingml/2006/main">
               <a:ext uri="{FF2B5EF4-FFF2-40B4-BE49-F238E27FC236}">
-                <a16:creationId xmlns:a16="http://schemas.microsoft.com/office/drawing/2014/main" id="{9F1C8410-67F3-4763-80B4-16346D3F7689}"/>
+                <a16:creationId xmlns:a16="http://schemas.microsoft.com/office/drawing/2014/main" id="{BFC90542-5624-47E6-96CE-BEF4E8C9FF74}"/>
               </a:ext>
             </a:extLst>
           </p:cNvPr>
@@ -5191,7 +5191,7 @@
           <p:cNvPr id="7" name="text">
             <a:extLst xmlns:a="http://schemas.openxmlformats.org/drawingml/2006/main">
               <a:ext uri="{FF2B5EF4-FFF2-40B4-BE49-F238E27FC236}">
-                <a16:creationId xmlns:a16="http://schemas.microsoft.com/office/drawing/2014/main" id="{A2C401AC-4539-4339-8535-5CDFF64E8DB5}"/>
+                <a16:creationId xmlns:a16="http://schemas.microsoft.com/office/drawing/2014/main" id="{86CC2515-68DA-4839-852E-7B19EE2D37D6}"/>
               </a:ext>
             </a:extLst>
           </p:cNvPr>
@@ -5248,7 +5248,7 @@
           <p:cNvPr id="8" name="text">
             <a:extLst xmlns:a="http://schemas.openxmlformats.org/drawingml/2006/main">
               <a:ext uri="{FF2B5EF4-FFF2-40B4-BE49-F238E27FC236}">
-                <a16:creationId xmlns:a16="http://schemas.microsoft.com/office/drawing/2014/main" id="{DDA2B895-B081-467B-92DA-FC9C4C2D2D04}"/>
+                <a16:creationId xmlns:a16="http://schemas.microsoft.com/office/drawing/2014/main" id="{691BCA60-755D-4BD7-80AA-7ABB229C2EF6}"/>
               </a:ext>
             </a:extLst>
           </p:cNvPr>
@@ -5305,7 +5305,7 @@
           <p:cNvPr id="9" name="text">
             <a:extLst xmlns:a="http://schemas.openxmlformats.org/drawingml/2006/main">
               <a:ext uri="{FF2B5EF4-FFF2-40B4-BE49-F238E27FC236}">
-                <a16:creationId xmlns:a16="http://schemas.microsoft.com/office/drawing/2014/main" id="{455A951C-F4E0-48BF-B0A4-E56B8EBC7B0F}"/>
+                <a16:creationId xmlns:a16="http://schemas.microsoft.com/office/drawing/2014/main" id="{5EA9DDD7-A8AC-4028-8E83-BDB11B75DA02}"/>
               </a:ext>
             </a:extLst>
           </p:cNvPr>
@@ -5362,7 +5362,7 @@
           <p:cNvPr id="10" name="text">
             <a:extLst xmlns:a="http://schemas.openxmlformats.org/drawingml/2006/main">
               <a:ext uri="{FF2B5EF4-FFF2-40B4-BE49-F238E27FC236}">
-                <a16:creationId xmlns:a16="http://schemas.microsoft.com/office/drawing/2014/main" id="{15E96D72-5563-4FFC-A6FD-9E33DDBB9367}"/>
+                <a16:creationId xmlns:a16="http://schemas.microsoft.com/office/drawing/2014/main" id="{1442B973-3935-4CFD-BCE8-5D7427E0DB34}"/>
               </a:ext>
             </a:extLst>
           </p:cNvPr>
@@ -5419,7 +5419,7 @@
           <p:cNvPr id="11" name="text">
             <a:extLst xmlns:a="http://schemas.openxmlformats.org/drawingml/2006/main">
               <a:ext uri="{FF2B5EF4-FFF2-40B4-BE49-F238E27FC236}">
-                <a16:creationId xmlns:a16="http://schemas.microsoft.com/office/drawing/2014/main" id="{924A929C-2849-4380-8A9C-FA9C7659E3D3}"/>
+                <a16:creationId xmlns:a16="http://schemas.microsoft.com/office/drawing/2014/main" id="{0D3365B4-54E3-48C5-AE62-1B1BC9D60141}"/>
               </a:ext>
             </a:extLst>
           </p:cNvPr>
@@ -5474,7 +5474,7 @@
     </p:spTree>
     <p:extLst>
       <p:ext uri="{BB962C8B-B14F-4D97-AF65-F5344CB8AC3E}">
-        <p14:creationId xmlns:p14="http://schemas.microsoft.com/office/powerpoint/2010/main" val="436682457"/>
+        <p14:creationId xmlns:p14="http://schemas.microsoft.com/office/powerpoint/2010/main" val="1332020624"/>
       </p:ext>
     </p:extLst>
   </p:cSld>
@@ -5505,7 +5505,7 @@
           <p:cNvPr id="6" name="course">
             <a:extLst xmlns:a="http://schemas.openxmlformats.org/drawingml/2006/main">
               <a:ext uri="{FF2B5EF4-FFF2-40B4-BE49-F238E27FC236}">
-                <a16:creationId xmlns:a16="http://schemas.microsoft.com/office/drawing/2014/main" id="{83E8ECE1-130E-439F-89F6-F2BA2954725F}"/>
+                <a16:creationId xmlns:a16="http://schemas.microsoft.com/office/drawing/2014/main" id="{2BBDEB80-0E70-4B69-8875-372442861745}"/>
               </a:ext>
             </a:extLst>
           </p:cNvPr>
@@ -5562,7 +5562,7 @@
           <p:cNvPr id="2" name="title">
             <a:extLst xmlns:a="http://schemas.openxmlformats.org/drawingml/2006/main">
               <a:ext uri="{FF2B5EF4-FFF2-40B4-BE49-F238E27FC236}">
-                <a16:creationId xmlns:a16="http://schemas.microsoft.com/office/drawing/2014/main" id="{A099C832-92E5-467C-AD37-2DDBF864BC94}"/>
+                <a16:creationId xmlns:a16="http://schemas.microsoft.com/office/drawing/2014/main" id="{F7AEEAD2-CAD2-43F0-98F6-FD7D39B544E9}"/>
               </a:ext>
             </a:extLst>
           </p:cNvPr>
@@ -5609,7 +5609,7 @@
                 <a:ea typeface="Calibri"/>
                 <a:cs typeface="Calibri"/>
               </a:rPr>
-              <a:t>The sampling loop</a:t>
+              <a:t>The prepared sampling analysis</a:t>
             </a:r>
           </a:p>
         </p:txBody>
@@ -5619,7 +5619,7 @@
           <p:cNvPr id="3" name="page">
             <a:extLst xmlns:a="http://schemas.openxmlformats.org/drawingml/2006/main">
               <a:ext uri="{FF2B5EF4-FFF2-40B4-BE49-F238E27FC236}">
-                <a16:creationId xmlns:a16="http://schemas.microsoft.com/office/drawing/2014/main" id="{62D209F9-AFE6-4357-9F0D-98FC02E35EC7}"/>
+                <a16:creationId xmlns:a16="http://schemas.microsoft.com/office/drawing/2014/main" id="{9C61FBAE-11D2-426B-A730-ABB9B5A4E5B5}"/>
               </a:ext>
             </a:extLst>
           </p:cNvPr>
@@ -5676,7 +5676,7 @@
           <p:cNvPr id="4" name="code">
             <a:extLst xmlns:a="http://schemas.openxmlformats.org/drawingml/2006/main">
               <a:ext uri="{FF2B5EF4-FFF2-40B4-BE49-F238E27FC236}">
-                <a16:creationId xmlns:a16="http://schemas.microsoft.com/office/drawing/2014/main" id="{417EBCB4-6984-40BD-8E39-AD88C4C23B41}"/>
+                <a16:creationId xmlns:a16="http://schemas.microsoft.com/office/drawing/2014/main" id="{870D6C95-8C2D-47F2-BC60-6815291CDDA9}"/>
               </a:ext>
             </a:extLst>
           </p:cNvPr>
@@ -5725,7 +5725,7 @@
                 <a:ea typeface="Consolas"/>
                 <a:cs typeface="Consolas"/>
               </a:rPr>
-              <a:t>sample_rates = [336.0, 126.0, 72.0, 48.0]</a:t>
+              <a:t>for fs in sample_rates:</a:t>
             </a:r>
           </a:p>
           <a:p xmlns:a="http://schemas.openxmlformats.org/drawingml/2006/main">
@@ -5748,12 +5748,7 @@
                 <a:ea typeface="Consolas"/>
                 <a:cs typeface="Consolas"/>
               </a:rPr>
-              <a:t>records = {}</a:t>
-            </a:r>
-          </a:p>
-          <a:p xmlns:a="http://schemas.openxmlformats.org/drawingml/2006/main">
-            <a:r>
-              <a:t/>
+              <a:t>    n = int(round(duration*fs))</a:t>
             </a:r>
           </a:p>
           <a:p xmlns:a="http://schemas.openxmlformats.org/drawingml/2006/main">
@@ -5776,7 +5771,7 @@
                 <a:ea typeface="Consolas"/>
                 <a:cs typeface="Consolas"/>
               </a:rPr>
-              <a:t>for fs in sample_rates:</a:t>
+              <a:t>    t = np.arange(n)/fs</a:t>
             </a:r>
           </a:p>
           <a:p xmlns:a="http://schemas.openxmlformats.org/drawingml/2006/main">
@@ -5799,7 +5794,7 @@
                 <a:ea typeface="Consolas"/>
                 <a:cs typeface="Consolas"/>
               </a:rPr>
-              <a:t>    n = int(round(duration*fs))</a:t>
+              <a:t>    x = signal(t)</a:t>
             </a:r>
           </a:p>
           <a:p xmlns:a="http://schemas.openxmlformats.org/drawingml/2006/main">
@@ -5822,7 +5817,7 @@
                 <a:ea typeface="Consolas"/>
                 <a:cs typeface="Consolas"/>
               </a:rPr>
-              <a:t>    t = np.arange(n)/fs</a:t>
+              <a:t>    records[fs] = (t, x)</a:t>
             </a:r>
           </a:p>
           <a:p xmlns:a="http://schemas.openxmlformats.org/drawingml/2006/main">
@@ -5845,7 +5840,7 @@
                 <a:ea typeface="Consolas"/>
                 <a:cs typeface="Consolas"/>
               </a:rPr>
-              <a:t>    x = signal(t)</a:t>
+              <a:t>    sample_mean, sample_rms = mean_and_rms(x)</a:t>
             </a:r>
           </a:p>
           <a:p xmlns:a="http://schemas.openxmlformats.org/drawingml/2006/main">
@@ -5868,30 +5863,7 @@
                 <a:ea typeface="Consolas"/>
                 <a:cs typeface="Consolas"/>
               </a:rPr>
-              <a:t>    records[fs] = (t, x)</a:t>
-            </a:r>
-          </a:p>
-          <a:p xmlns:a="http://schemas.openxmlformats.org/drawingml/2006/main">
-            <a:pPr>
-              <a:defRPr sz="1725" b="0">
-                <a:solidFill>
-                  <a:srgbClr val="202124"/>
-                </a:solidFill>
-                <a:latin typeface="Consolas"/>
-                <a:ea typeface="Consolas"/>
-                <a:cs typeface="Consolas"/>
-              </a:defRPr>
-            </a:pPr>
-            <a:r>
-              <a:rPr sz="1725" b="0">
-                <a:solidFill>
-                  <a:srgbClr val="202124"/>
-                </a:solidFill>
-                <a:latin typeface="Consolas"/>
-                <a:ea typeface="Consolas"/>
-                <a:cs typeface="Consolas"/>
-              </a:rPr>
-              <a:t>    print(fs, np.mean(x), np.sqrt(np.mean(x**2)))</a:t>
+              <a:t>    print(fs, sample_mean, sample_rms)</a:t>
             </a:r>
           </a:p>
         </p:txBody>
@@ -5901,7 +5873,7 @@
           <p:cNvPr id="5" name="text">
             <a:extLst xmlns:a="http://schemas.openxmlformats.org/drawingml/2006/main">
               <a:ext uri="{FF2B5EF4-FFF2-40B4-BE49-F238E27FC236}">
-                <a16:creationId xmlns:a16="http://schemas.microsoft.com/office/drawing/2014/main" id="{3BF868E7-75E0-4BAD-9574-208121B3A26D}"/>
+                <a16:creationId xmlns:a16="http://schemas.microsoft.com/office/drawing/2014/main" id="{ED48EA8B-3158-4D81-9CC8-C3B452D5668F}"/>
               </a:ext>
             </a:extLst>
           </p:cNvPr>
@@ -5948,7 +5920,7 @@
                 <a:ea typeface="Calibri"/>
                 <a:cs typeface="Calibri"/>
               </a:rPr>
-              <a:t>A dictionary stores each time array and sampled signal under its sample rate.</a:t>
+              <a:t>Students transfer the printed values to an analysis table and calculate RMS percent error.</a:t>
             </a:r>
           </a:p>
         </p:txBody>
@@ -5956,7 +5928,7 @@
     </p:spTree>
     <p:extLst>
       <p:ext uri="{BB962C8B-B14F-4D97-AF65-F5344CB8AC3E}">
-        <p14:creationId xmlns:p14="http://schemas.microsoft.com/office/powerpoint/2010/main" val="406124264"/>
+        <p14:creationId xmlns:p14="http://schemas.microsoft.com/office/powerpoint/2010/main" val="1643068932"/>
       </p:ext>
     </p:extLst>
   </p:cSld>
@@ -5987,7 +5959,7 @@
           <p:cNvPr id="12" name="course">
             <a:extLst xmlns:a="http://schemas.openxmlformats.org/drawingml/2006/main">
               <a:ext uri="{FF2B5EF4-FFF2-40B4-BE49-F238E27FC236}">
-                <a16:creationId xmlns:a16="http://schemas.microsoft.com/office/drawing/2014/main" id="{67ADC500-E4CE-4DDF-920F-6BD7D3CD040D}"/>
+                <a16:creationId xmlns:a16="http://schemas.microsoft.com/office/drawing/2014/main" id="{F60C2681-C659-4AD6-A3D5-D134EBC0FB12}"/>
               </a:ext>
             </a:extLst>
           </p:cNvPr>
@@ -6044,7 +6016,7 @@
           <p:cNvPr id="2" name="title">
             <a:extLst xmlns:a="http://schemas.openxmlformats.org/drawingml/2006/main">
               <a:ext uri="{FF2B5EF4-FFF2-40B4-BE49-F238E27FC236}">
-                <a16:creationId xmlns:a16="http://schemas.microsoft.com/office/drawing/2014/main" id="{B8625BBF-B74F-44FC-9DD3-BD95E7EE3C0D}"/>
+                <a16:creationId xmlns:a16="http://schemas.microsoft.com/office/drawing/2014/main" id="{C86B01E4-6BAC-43FC-BD69-24223508D644}"/>
               </a:ext>
             </a:extLst>
           </p:cNvPr>
@@ -6101,7 +6073,7 @@
           <p:cNvPr id="3" name="page">
             <a:extLst xmlns:a="http://schemas.openxmlformats.org/drawingml/2006/main">
               <a:ext uri="{FF2B5EF4-FFF2-40B4-BE49-F238E27FC236}">
-                <a16:creationId xmlns:a16="http://schemas.microsoft.com/office/drawing/2014/main" id="{2C905156-2B2B-4741-937D-8ADE71A8F709}"/>
+                <a16:creationId xmlns:a16="http://schemas.microsoft.com/office/drawing/2014/main" id="{F5711892-6845-40A1-8348-3EE4CF1A9B3E}"/>
               </a:ext>
             </a:extLst>
           </p:cNvPr>
@@ -6158,7 +6130,7 @@
           <p:cNvPr id="4" name="text">
             <a:extLst xmlns:a="http://schemas.openxmlformats.org/drawingml/2006/main">
               <a:ext uri="{FF2B5EF4-FFF2-40B4-BE49-F238E27FC236}">
-                <a16:creationId xmlns:a16="http://schemas.microsoft.com/office/drawing/2014/main" id="{5049C7B5-E449-42D8-BB75-8474657D2023}"/>
+                <a16:creationId xmlns:a16="http://schemas.microsoft.com/office/drawing/2014/main" id="{D8B13FF0-FBB6-462F-84D4-A30817EA057B}"/>
               </a:ext>
             </a:extLst>
           </p:cNvPr>
@@ -6215,7 +6187,7 @@
           <p:cNvPr id="5" name="text">
             <a:extLst xmlns:a="http://schemas.openxmlformats.org/drawingml/2006/main">
               <a:ext uri="{FF2B5EF4-FFF2-40B4-BE49-F238E27FC236}">
-                <a16:creationId xmlns:a16="http://schemas.microsoft.com/office/drawing/2014/main" id="{8F13144A-34CB-4367-9265-525B8F85BF3C}"/>
+                <a16:creationId xmlns:a16="http://schemas.microsoft.com/office/drawing/2014/main" id="{62416061-3C3E-43D4-B474-DBBB8976EABA}"/>
               </a:ext>
             </a:extLst>
           </p:cNvPr>
@@ -6272,7 +6244,7 @@
           <p:cNvPr id="6" name="text">
             <a:extLst xmlns:a="http://schemas.openxmlformats.org/drawingml/2006/main">
               <a:ext uri="{FF2B5EF4-FFF2-40B4-BE49-F238E27FC236}">
-                <a16:creationId xmlns:a16="http://schemas.microsoft.com/office/drawing/2014/main" id="{87D63D5C-4970-486C-973D-6F3811BED9D8}"/>
+                <a16:creationId xmlns:a16="http://schemas.microsoft.com/office/drawing/2014/main" id="{83C180B5-B289-4A74-B5F8-C39FCD76CA13}"/>
               </a:ext>
             </a:extLst>
           </p:cNvPr>
@@ -6329,7 +6301,7 @@
           <p:cNvPr id="7" name="text">
             <a:extLst xmlns:a="http://schemas.openxmlformats.org/drawingml/2006/main">
               <a:ext uri="{FF2B5EF4-FFF2-40B4-BE49-F238E27FC236}">
-                <a16:creationId xmlns:a16="http://schemas.microsoft.com/office/drawing/2014/main" id="{EEC9DC31-6B35-4E4A-888A-4DED7579FEDA}"/>
+                <a16:creationId xmlns:a16="http://schemas.microsoft.com/office/drawing/2014/main" id="{E6662309-D6C4-46EA-A497-DDB32CBA7532}"/>
               </a:ext>
             </a:extLst>
           </p:cNvPr>
@@ -6386,7 +6358,7 @@
           <p:cNvPr id="8" name="text">
             <a:extLst xmlns:a="http://schemas.openxmlformats.org/drawingml/2006/main">
               <a:ext uri="{FF2B5EF4-FFF2-40B4-BE49-F238E27FC236}">
-                <a16:creationId xmlns:a16="http://schemas.microsoft.com/office/drawing/2014/main" id="{6B8FDD6B-BE1F-42E8-835C-FD63ABAEB10E}"/>
+                <a16:creationId xmlns:a16="http://schemas.microsoft.com/office/drawing/2014/main" id="{E0BF97C9-A033-445B-BCE9-728B14194AB9}"/>
               </a:ext>
             </a:extLst>
           </p:cNvPr>
@@ -6443,7 +6415,7 @@
           <p:cNvPr id="9" name="text">
             <a:extLst xmlns:a="http://schemas.openxmlformats.org/drawingml/2006/main">
               <a:ext uri="{FF2B5EF4-FFF2-40B4-BE49-F238E27FC236}">
-                <a16:creationId xmlns:a16="http://schemas.microsoft.com/office/drawing/2014/main" id="{22D68FA4-A7D3-4CD9-BCD7-FCB775919761}"/>
+                <a16:creationId xmlns:a16="http://schemas.microsoft.com/office/drawing/2014/main" id="{DABAA696-116A-4F03-AFE1-33854F8F2ECD}"/>
               </a:ext>
             </a:extLst>
           </p:cNvPr>
@@ -6500,7 +6472,7 @@
           <p:cNvPr id="10" name="text">
             <a:extLst xmlns:a="http://schemas.openxmlformats.org/drawingml/2006/main">
               <a:ext uri="{FF2B5EF4-FFF2-40B4-BE49-F238E27FC236}">
-                <a16:creationId xmlns:a16="http://schemas.microsoft.com/office/drawing/2014/main" id="{EEAA3085-1E76-4225-BD49-394E62B8FB99}"/>
+                <a16:creationId xmlns:a16="http://schemas.microsoft.com/office/drawing/2014/main" id="{E8F09A39-9C1B-4611-9762-A4A0BE7C4231}"/>
               </a:ext>
             </a:extLst>
           </p:cNvPr>
@@ -6557,7 +6529,7 @@
           <p:cNvPr id="11" name="text">
             <a:extLst xmlns:a="http://schemas.openxmlformats.org/drawingml/2006/main">
               <a:ext uri="{FF2B5EF4-FFF2-40B4-BE49-F238E27FC236}">
-                <a16:creationId xmlns:a16="http://schemas.microsoft.com/office/drawing/2014/main" id="{15C92CFC-9CC8-4379-ADE5-8BB59764AACC}"/>
+                <a16:creationId xmlns:a16="http://schemas.microsoft.com/office/drawing/2014/main" id="{CF11160B-609C-4502-A322-8D35BEDF8816}"/>
               </a:ext>
             </a:extLst>
           </p:cNvPr>
@@ -6612,7 +6584,7 @@
     </p:spTree>
     <p:extLst>
       <p:ext uri="{BB962C8B-B14F-4D97-AF65-F5344CB8AC3E}">
-        <p14:creationId xmlns:p14="http://schemas.microsoft.com/office/powerpoint/2010/main" val="1028568190"/>
+        <p14:creationId xmlns:p14="http://schemas.microsoft.com/office/powerpoint/2010/main" val="1606445025"/>
       </p:ext>
     </p:extLst>
   </p:cSld>
@@ -6643,7 +6615,7 @@
           <p:cNvPr id="6" name="course">
             <a:extLst xmlns:a="http://schemas.openxmlformats.org/drawingml/2006/main">
               <a:ext uri="{FF2B5EF4-FFF2-40B4-BE49-F238E27FC236}">
-                <a16:creationId xmlns:a16="http://schemas.microsoft.com/office/drawing/2014/main" id="{B2FAB313-7E17-47AC-9161-0FD55D596880}"/>
+                <a16:creationId xmlns:a16="http://schemas.microsoft.com/office/drawing/2014/main" id="{539FFB4A-2E4E-46C2-85E5-C929E0EE89B3}"/>
               </a:ext>
             </a:extLst>
           </p:cNvPr>
@@ -6700,7 +6672,7 @@
           <p:cNvPr id="2" name="title">
             <a:extLst xmlns:a="http://schemas.openxmlformats.org/drawingml/2006/main">
               <a:ext uri="{FF2B5EF4-FFF2-40B4-BE49-F238E27FC236}">
-                <a16:creationId xmlns:a16="http://schemas.microsoft.com/office/drawing/2014/main" id="{1FA4C7A3-CB02-4E39-B2D3-3A09A164067D}"/>
+                <a16:creationId xmlns:a16="http://schemas.microsoft.com/office/drawing/2014/main" id="{28BC5523-706B-4CE9-B800-32F342EAF038}"/>
               </a:ext>
             </a:extLst>
           </p:cNvPr>
@@ -6747,7 +6719,7 @@
                 <a:ea typeface="Calibri"/>
                 <a:cs typeface="Calibri"/>
               </a:rPr>
-              <a:t>One-sided FFT calculation</a:t>
+              <a:t>The prepared FFT analysis</a:t>
             </a:r>
           </a:p>
         </p:txBody>
@@ -6757,7 +6729,7 @@
           <p:cNvPr id="3" name="page">
             <a:extLst xmlns:a="http://schemas.openxmlformats.org/drawingml/2006/main">
               <a:ext uri="{FF2B5EF4-FFF2-40B4-BE49-F238E27FC236}">
-                <a16:creationId xmlns:a16="http://schemas.microsoft.com/office/drawing/2014/main" id="{AF63A08B-78AC-406F-9F6D-96D73866FB6A}"/>
+                <a16:creationId xmlns:a16="http://schemas.microsoft.com/office/drawing/2014/main" id="{D78AD75C-1216-4209-90E4-3D7F356A7295}"/>
               </a:ext>
             </a:extLst>
           </p:cNvPr>
@@ -6814,7 +6786,7 @@
           <p:cNvPr id="4" name="code">
             <a:extLst xmlns:a="http://schemas.openxmlformats.org/drawingml/2006/main">
               <a:ext uri="{FF2B5EF4-FFF2-40B4-BE49-F238E27FC236}">
-                <a16:creationId xmlns:a16="http://schemas.microsoft.com/office/drawing/2014/main" id="{E00CC5A0-41B6-4B87-9A60-C5D8CC720A4C}"/>
+                <a16:creationId xmlns:a16="http://schemas.microsoft.com/office/drawing/2014/main" id="{91E6D633-97B1-4AD1-8F13-B549A5F4F458}"/>
               </a:ext>
             </a:extLst>
           </p:cNvPr>
@@ -6863,7 +6835,7 @@
                 <a:ea typeface="Consolas"/>
                 <a:cs typeface="Consolas"/>
               </a:rPr>
-              <a:t>n = len(x)</a:t>
+              <a:t>X = np.fft.rfft(x*window)</a:t>
             </a:r>
           </a:p>
           <a:p xmlns:a="http://schemas.openxmlformats.org/drawingml/2006/main">
@@ -6886,7 +6858,7 @@
                 <a:ea typeface="Consolas"/>
                 <a:cs typeface="Consolas"/>
               </a:rPr>
-              <a:t>window = np.hanning(n)</a:t>
+              <a:t>magnitude = np.abs(X)/(n*coherent_gain)</a:t>
             </a:r>
           </a:p>
           <a:p xmlns:a="http://schemas.openxmlformats.org/drawingml/2006/main">
@@ -6909,12 +6881,7 @@
                 <a:ea typeface="Consolas"/>
                 <a:cs typeface="Consolas"/>
               </a:rPr>
-              <a:t>coherent_gain = np.mean(window)</a:t>
-            </a:r>
-          </a:p>
-          <a:p xmlns:a="http://schemas.openxmlformats.org/drawingml/2006/main">
-            <a:r>
-              <a:t/>
+              <a:t>magnitude[1:-1] *= 2</a:t>
             </a:r>
           </a:p>
           <a:p xmlns:a="http://schemas.openxmlformats.org/drawingml/2006/main">
@@ -6937,7 +6904,12 @@
                 <a:ea typeface="Consolas"/>
                 <a:cs typeface="Consolas"/>
               </a:rPr>
-              <a:t>X = np.fft.rfft(x*window)</a:t>
+              <a:t>frequency = np.fft.rfftfreq(n, d=1/fs)</a:t>
+            </a:r>
+          </a:p>
+          <a:p xmlns:a="http://schemas.openxmlformats.org/drawingml/2006/main">
+            <a:r>
+              <a:t/>
             </a:r>
           </a:p>
           <a:p xmlns:a="http://schemas.openxmlformats.org/drawingml/2006/main">
@@ -6960,7 +6932,7 @@
                 <a:ea typeface="Consolas"/>
                 <a:cs typeface="Consolas"/>
               </a:rPr>
-              <a:t>magnitude = np.abs(X)/(n*coherent_gain)</a:t>
+              <a:t># Read the dominant frequencies from the output.</a:t>
             </a:r>
           </a:p>
           <a:p xmlns:a="http://schemas.openxmlformats.org/drawingml/2006/main">
@@ -6983,30 +6955,7 @@
                 <a:ea typeface="Consolas"/>
                 <a:cs typeface="Consolas"/>
               </a:rPr>
-              <a:t>magnitude[1:-1] *= 2</a:t>
-            </a:r>
-          </a:p>
-          <a:p xmlns:a="http://schemas.openxmlformats.org/drawingml/2006/main">
-            <a:pPr>
-              <a:defRPr sz="1725" b="0">
-                <a:solidFill>
-                  <a:srgbClr val="202124"/>
-                </a:solidFill>
-                <a:latin typeface="Consolas"/>
-                <a:ea typeface="Consolas"/>
-                <a:cs typeface="Consolas"/>
-              </a:defRPr>
-            </a:pPr>
-            <a:r>
-              <a:rPr sz="1725" b="0">
-                <a:solidFill>
-                  <a:srgbClr val="202124"/>
-                </a:solidFill>
-                <a:latin typeface="Consolas"/>
-                <a:ea typeface="Consolas"/>
-                <a:cs typeface="Consolas"/>
-              </a:rPr>
-              <a:t>frequency = np.fft.rfftfreq(n, d=1/fs)</a:t>
+              <a:t># Compare them with predictions made before execution.</a:t>
             </a:r>
           </a:p>
         </p:txBody>
@@ -7016,7 +6965,7 @@
           <p:cNvPr id="5" name="text">
             <a:extLst xmlns:a="http://schemas.openxmlformats.org/drawingml/2006/main">
               <a:ext uri="{FF2B5EF4-FFF2-40B4-BE49-F238E27FC236}">
-                <a16:creationId xmlns:a16="http://schemas.microsoft.com/office/drawing/2014/main" id="{20ED0A63-F708-435E-956F-3BA148C3D00B}"/>
+                <a16:creationId xmlns:a16="http://schemas.microsoft.com/office/drawing/2014/main" id="{CA5B35C3-F64A-46DB-A041-1E3D422E649E}"/>
               </a:ext>
             </a:extLst>
           </p:cNvPr>
@@ -7063,7 +7012,7 @@
                 <a:ea typeface="Calibri"/>
                 <a:cs typeface="Calibri"/>
               </a:rPr>
-              <a:t>The notebook applies a Hann window and corrects its amplitude loss.</a:t>
+              <a:t>Students interpret the FFT output. They do not write or complete these lines.</a:t>
             </a:r>
           </a:p>
         </p:txBody>
@@ -7071,7 +7020,7 @@
     </p:spTree>
     <p:extLst>
       <p:ext uri="{BB962C8B-B14F-4D97-AF65-F5344CB8AC3E}">
-        <p14:creationId xmlns:p14="http://schemas.microsoft.com/office/powerpoint/2010/main" val="585644582"/>
+        <p14:creationId xmlns:p14="http://schemas.microsoft.com/office/powerpoint/2010/main" val="1378241636"/>
       </p:ext>
     </p:extLst>
   </p:cSld>
@@ -7102,7 +7051,7 @@
           <p:cNvPr id="10" name="course">
             <a:extLst xmlns:a="http://schemas.openxmlformats.org/drawingml/2006/main">
               <a:ext uri="{FF2B5EF4-FFF2-40B4-BE49-F238E27FC236}">
-                <a16:creationId xmlns:a16="http://schemas.microsoft.com/office/drawing/2014/main" id="{873AE4CA-B055-42C4-91E2-CC72257E05E8}"/>
+                <a16:creationId xmlns:a16="http://schemas.microsoft.com/office/drawing/2014/main" id="{7227EE61-FB31-49BE-938E-1B2154DFDDDA}"/>
               </a:ext>
             </a:extLst>
           </p:cNvPr>
@@ -7159,7 +7108,7 @@
           <p:cNvPr id="2" name="title">
             <a:extLst xmlns:a="http://schemas.openxmlformats.org/drawingml/2006/main">
               <a:ext uri="{FF2B5EF4-FFF2-40B4-BE49-F238E27FC236}">
-                <a16:creationId xmlns:a16="http://schemas.microsoft.com/office/drawing/2014/main" id="{69B6250D-2F14-430B-9467-082702F94B9B}"/>
+                <a16:creationId xmlns:a16="http://schemas.microsoft.com/office/drawing/2014/main" id="{0768EED4-C4EE-48C9-B651-718A45EB84F0}"/>
               </a:ext>
             </a:extLst>
           </p:cNvPr>
@@ -7216,7 +7165,7 @@
           <p:cNvPr id="3" name="page">
             <a:extLst xmlns:a="http://schemas.openxmlformats.org/drawingml/2006/main">
               <a:ext uri="{FF2B5EF4-FFF2-40B4-BE49-F238E27FC236}">
-                <a16:creationId xmlns:a16="http://schemas.microsoft.com/office/drawing/2014/main" id="{49D5A5B3-7CB5-4F44-895C-30027C6FB980}"/>
+                <a16:creationId xmlns:a16="http://schemas.microsoft.com/office/drawing/2014/main" id="{B5DB12ED-3BCE-439F-9C6F-5AD08BDC4D4F}"/>
               </a:ext>
             </a:extLst>
           </p:cNvPr>
@@ -7273,7 +7222,7 @@
           <p:cNvPr id="4" name="text">
             <a:extLst xmlns:a="http://schemas.openxmlformats.org/drawingml/2006/main">
               <a:ext uri="{FF2B5EF4-FFF2-40B4-BE49-F238E27FC236}">
-                <a16:creationId xmlns:a16="http://schemas.microsoft.com/office/drawing/2014/main" id="{61AFCC8B-963B-4ADB-A38F-9274D2444280}"/>
+                <a16:creationId xmlns:a16="http://schemas.microsoft.com/office/drawing/2014/main" id="{BB6617B9-B34F-4BAE-A50A-0AFB9822B209}"/>
               </a:ext>
             </a:extLst>
           </p:cNvPr>
@@ -7330,7 +7279,7 @@
           <p:cNvPr id="5" name="text">
             <a:extLst xmlns:a="http://schemas.openxmlformats.org/drawingml/2006/main">
               <a:ext uri="{FF2B5EF4-FFF2-40B4-BE49-F238E27FC236}">
-                <a16:creationId xmlns:a16="http://schemas.microsoft.com/office/drawing/2014/main" id="{A5321BA4-F400-45E2-A4C5-5F0AA1C3E327}"/>
+                <a16:creationId xmlns:a16="http://schemas.microsoft.com/office/drawing/2014/main" id="{24435039-3F85-45F9-8C3B-EE1D0C5DF831}"/>
               </a:ext>
             </a:extLst>
           </p:cNvPr>
@@ -7387,7 +7336,7 @@
           <p:cNvPr id="6" name="text">
             <a:extLst xmlns:a="http://schemas.openxmlformats.org/drawingml/2006/main">
               <a:ext uri="{FF2B5EF4-FFF2-40B4-BE49-F238E27FC236}">
-                <a16:creationId xmlns:a16="http://schemas.microsoft.com/office/drawing/2014/main" id="{94EF7C13-F04E-470F-A69A-CFCE75B7A375}"/>
+                <a16:creationId xmlns:a16="http://schemas.microsoft.com/office/drawing/2014/main" id="{9E8B7720-ECB2-4FA3-9783-A8D26731890C}"/>
               </a:ext>
             </a:extLst>
           </p:cNvPr>
@@ -7444,7 +7393,7 @@
           <p:cNvPr id="7" name="text">
             <a:extLst xmlns:a="http://schemas.openxmlformats.org/drawingml/2006/main">
               <a:ext uri="{FF2B5EF4-FFF2-40B4-BE49-F238E27FC236}">
-                <a16:creationId xmlns:a16="http://schemas.microsoft.com/office/drawing/2014/main" id="{E59F1DCD-AD49-4604-A7E8-1E4F5CF0A069}"/>
+                <a16:creationId xmlns:a16="http://schemas.microsoft.com/office/drawing/2014/main" id="{ACCD9F31-C36C-4682-B7D9-EF543AB3D535}"/>
               </a:ext>
             </a:extLst>
           </p:cNvPr>
@@ -7501,7 +7450,7 @@
           <p:cNvPr id="8" name="text">
             <a:extLst xmlns:a="http://schemas.openxmlformats.org/drawingml/2006/main">
               <a:ext uri="{FF2B5EF4-FFF2-40B4-BE49-F238E27FC236}">
-                <a16:creationId xmlns:a16="http://schemas.microsoft.com/office/drawing/2014/main" id="{D8D0DDC9-EF75-4C3B-AEF5-A86EA406E9BD}"/>
+                <a16:creationId xmlns:a16="http://schemas.microsoft.com/office/drawing/2014/main" id="{EAE09A38-4305-4D62-B6A3-4DF3CA30B023}"/>
               </a:ext>
             </a:extLst>
           </p:cNvPr>
@@ -7558,7 +7507,7 @@
           <p:cNvPr id="9" name="text">
             <a:extLst xmlns:a="http://schemas.openxmlformats.org/drawingml/2006/main">
               <a:ext uri="{FF2B5EF4-FFF2-40B4-BE49-F238E27FC236}">
-                <a16:creationId xmlns:a16="http://schemas.microsoft.com/office/drawing/2014/main" id="{2E42048B-D160-4814-B42E-A90B9ACA6975}"/>
+                <a16:creationId xmlns:a16="http://schemas.microsoft.com/office/drawing/2014/main" id="{3B164C96-C91A-41C7-91B1-83B3F2623E57}"/>
               </a:ext>
             </a:extLst>
           </p:cNvPr>
@@ -7613,7 +7562,7 @@
     </p:spTree>
     <p:extLst>
       <p:ext uri="{BB962C8B-B14F-4D97-AF65-F5344CB8AC3E}">
-        <p14:creationId xmlns:p14="http://schemas.microsoft.com/office/powerpoint/2010/main" val="2041971371"/>
+        <p14:creationId xmlns:p14="http://schemas.microsoft.com/office/powerpoint/2010/main" val="22262647"/>
       </p:ext>
     </p:extLst>
   </p:cSld>
@@ -7644,7 +7593,7 @@
           <p:cNvPr id="9" name="course">
             <a:extLst xmlns:a="http://schemas.openxmlformats.org/drawingml/2006/main">
               <a:ext uri="{FF2B5EF4-FFF2-40B4-BE49-F238E27FC236}">
-                <a16:creationId xmlns:a16="http://schemas.microsoft.com/office/drawing/2014/main" id="{75CADDFF-2724-43F1-A5BC-2EE1576F3DF2}"/>
+                <a16:creationId xmlns:a16="http://schemas.microsoft.com/office/drawing/2014/main" id="{382407BE-F854-409B-8C9D-F5058DAD7A7A}"/>
               </a:ext>
             </a:extLst>
           </p:cNvPr>
@@ -7701,7 +7650,7 @@
           <p:cNvPr id="2" name="title">
             <a:extLst xmlns:a="http://schemas.openxmlformats.org/drawingml/2006/main">
               <a:ext uri="{FF2B5EF4-FFF2-40B4-BE49-F238E27FC236}">
-                <a16:creationId xmlns:a16="http://schemas.microsoft.com/office/drawing/2014/main" id="{E45171CF-AEBD-4DFF-A7F1-F36481314BCC}"/>
+                <a16:creationId xmlns:a16="http://schemas.microsoft.com/office/drawing/2014/main" id="{195A9A26-5E50-4BA5-8D72-442D35A0A71C}"/>
               </a:ext>
             </a:extLst>
           </p:cNvPr>
@@ -7758,7 +7707,7 @@
           <p:cNvPr id="3" name="page">
             <a:extLst xmlns:a="http://schemas.openxmlformats.org/drawingml/2006/main">
               <a:ext uri="{FF2B5EF4-FFF2-40B4-BE49-F238E27FC236}">
-                <a16:creationId xmlns:a16="http://schemas.microsoft.com/office/drawing/2014/main" id="{F516F658-8671-414B-8B95-44013372A947}"/>
+                <a16:creationId xmlns:a16="http://schemas.microsoft.com/office/drawing/2014/main" id="{CDE41A73-B86C-42BA-B72B-5DC7746056F9}"/>
               </a:ext>
             </a:extLst>
           </p:cNvPr>
@@ -7815,7 +7764,7 @@
           <p:cNvPr id="4" name="text">
             <a:extLst xmlns:a="http://schemas.openxmlformats.org/drawingml/2006/main">
               <a:ext uri="{FF2B5EF4-FFF2-40B4-BE49-F238E27FC236}">
-                <a16:creationId xmlns:a16="http://schemas.microsoft.com/office/drawing/2014/main" id="{3E3709B1-5745-4AE3-AD59-E654426406A1}"/>
+                <a16:creationId xmlns:a16="http://schemas.microsoft.com/office/drawing/2014/main" id="{50376216-3F34-45B0-B5AA-1D15DBC8C6E4}"/>
               </a:ext>
             </a:extLst>
           </p:cNvPr>
@@ -7872,7 +7821,7 @@
           <p:cNvPr id="5" name="text">
             <a:extLst xmlns:a="http://schemas.openxmlformats.org/drawingml/2006/main">
               <a:ext uri="{FF2B5EF4-FFF2-40B4-BE49-F238E27FC236}">
-                <a16:creationId xmlns:a16="http://schemas.microsoft.com/office/drawing/2014/main" id="{5336225C-B64D-4302-B280-77DEFCB93C8F}"/>
+                <a16:creationId xmlns:a16="http://schemas.microsoft.com/office/drawing/2014/main" id="{CAF6D8AC-76F7-4E51-AA33-52B67CBFD640}"/>
               </a:ext>
             </a:extLst>
           </p:cNvPr>
@@ -7929,7 +7878,7 @@
           <p:cNvPr id="6" name="text">
             <a:extLst xmlns:a="http://schemas.openxmlformats.org/drawingml/2006/main">
               <a:ext uri="{FF2B5EF4-FFF2-40B4-BE49-F238E27FC236}">
-                <a16:creationId xmlns:a16="http://schemas.microsoft.com/office/drawing/2014/main" id="{7EED137D-3CE7-4633-BCD7-AAB843659519}"/>
+                <a16:creationId xmlns:a16="http://schemas.microsoft.com/office/drawing/2014/main" id="{4C4614D1-47B2-48D9-AC45-7E2E30F549AC}"/>
               </a:ext>
             </a:extLst>
           </p:cNvPr>
@@ -7986,7 +7935,7 @@
           <p:cNvPr id="7" name="text">
             <a:extLst xmlns:a="http://schemas.openxmlformats.org/drawingml/2006/main">
               <a:ext uri="{FF2B5EF4-FFF2-40B4-BE49-F238E27FC236}">
-                <a16:creationId xmlns:a16="http://schemas.microsoft.com/office/drawing/2014/main" id="{A2B78106-7A64-4898-AA7B-E9CA9CCD1568}"/>
+                <a16:creationId xmlns:a16="http://schemas.microsoft.com/office/drawing/2014/main" id="{69C6D9B3-FC7B-409D-9FBC-EB9795DB9CD9}"/>
               </a:ext>
             </a:extLst>
           </p:cNvPr>
@@ -8043,7 +7992,7 @@
           <p:cNvPr id="8" name="text">
             <a:extLst xmlns:a="http://schemas.openxmlformats.org/drawingml/2006/main">
               <a:ext uri="{FF2B5EF4-FFF2-40B4-BE49-F238E27FC236}">
-                <a16:creationId xmlns:a16="http://schemas.microsoft.com/office/drawing/2014/main" id="{8EF79C6D-723A-4C99-BC02-BBFCF74B09E0}"/>
+                <a16:creationId xmlns:a16="http://schemas.microsoft.com/office/drawing/2014/main" id="{75E39673-2D32-45A0-B15F-703CAE027E7F}"/>
               </a:ext>
             </a:extLst>
           </p:cNvPr>
@@ -8098,7 +8047,7 @@
     </p:spTree>
     <p:extLst>
       <p:ext uri="{BB962C8B-B14F-4D97-AF65-F5344CB8AC3E}">
-        <p14:creationId xmlns:p14="http://schemas.microsoft.com/office/powerpoint/2010/main" val="2136929863"/>
+        <p14:creationId xmlns:p14="http://schemas.microsoft.com/office/powerpoint/2010/main" val="1502373141"/>
       </p:ext>
     </p:extLst>
   </p:cSld>
@@ -8129,7 +8078,7 @@
           <p:cNvPr id="12" name="course">
             <a:extLst xmlns:a="http://schemas.openxmlformats.org/drawingml/2006/main">
               <a:ext uri="{FF2B5EF4-FFF2-40B4-BE49-F238E27FC236}">
-                <a16:creationId xmlns:a16="http://schemas.microsoft.com/office/drawing/2014/main" id="{860CC3D7-8AA0-451B-AA26-078B9D616C94}"/>
+                <a16:creationId xmlns:a16="http://schemas.microsoft.com/office/drawing/2014/main" id="{2C515B10-E412-4CEB-9962-57FA27CC6A30}"/>
               </a:ext>
             </a:extLst>
           </p:cNvPr>
@@ -8186,7 +8135,7 @@
           <p:cNvPr id="2" name="title">
             <a:extLst xmlns:a="http://schemas.openxmlformats.org/drawingml/2006/main">
               <a:ext uri="{FF2B5EF4-FFF2-40B4-BE49-F238E27FC236}">
-                <a16:creationId xmlns:a16="http://schemas.microsoft.com/office/drawing/2014/main" id="{5A77AFFD-4042-41F6-8260-EACF4941208B}"/>
+                <a16:creationId xmlns:a16="http://schemas.microsoft.com/office/drawing/2014/main" id="{E14F5FED-F56D-4264-9AE3-6B8D115A2895}"/>
               </a:ext>
             </a:extLst>
           </p:cNvPr>
@@ -8233,7 +8182,7 @@
                 <a:ea typeface="Calibri"/>
                 <a:cs typeface="Calibri"/>
               </a:rPr>
-              <a:t>Required student responses</a:t>
+              <a:t>Required data analysis</a:t>
             </a:r>
           </a:p>
         </p:txBody>
@@ -8243,7 +8192,7 @@
           <p:cNvPr id="3" name="page">
             <a:extLst xmlns:a="http://schemas.openxmlformats.org/drawingml/2006/main">
               <a:ext uri="{FF2B5EF4-FFF2-40B4-BE49-F238E27FC236}">
-                <a16:creationId xmlns:a16="http://schemas.microsoft.com/office/drawing/2014/main" id="{B1C6FECF-5F8B-4577-AB25-1F464E1DA301}"/>
+                <a16:creationId xmlns:a16="http://schemas.microsoft.com/office/drawing/2014/main" id="{C584FC53-BFBA-4BFC-9523-A643D7CD8500}"/>
               </a:ext>
             </a:extLst>
           </p:cNvPr>
@@ -8300,7 +8249,7 @@
           <p:cNvPr id="4" name="text">
             <a:extLst xmlns:a="http://schemas.openxmlformats.org/drawingml/2006/main">
               <a:ext uri="{FF2B5EF4-FFF2-40B4-BE49-F238E27FC236}">
-                <a16:creationId xmlns:a16="http://schemas.microsoft.com/office/drawing/2014/main" id="{330981C6-6787-4868-90D2-87B9A1050C94}"/>
+                <a16:creationId xmlns:a16="http://schemas.microsoft.com/office/drawing/2014/main" id="{00ABF2DD-25D4-4062-BD7E-45B8446B4C7F}"/>
               </a:ext>
             </a:extLst>
           </p:cNvPr>
@@ -8357,7 +8306,7 @@
           <p:cNvPr id="5" name="text">
             <a:extLst xmlns:a="http://schemas.openxmlformats.org/drawingml/2006/main">
               <a:ext uri="{FF2B5EF4-FFF2-40B4-BE49-F238E27FC236}">
-                <a16:creationId xmlns:a16="http://schemas.microsoft.com/office/drawing/2014/main" id="{57FB69C4-D3E9-4CD1-AB0D-147577D6CF14}"/>
+                <a16:creationId xmlns:a16="http://schemas.microsoft.com/office/drawing/2014/main" id="{62D174AD-9F16-4D26-BE7A-EEEFA74B7BA0}"/>
               </a:ext>
             </a:extLst>
           </p:cNvPr>
@@ -8404,7 +8353,7 @@
                 <a:ea typeface="Calibri"/>
                 <a:cs typeface="Calibri"/>
               </a:rPr>
-              <a:t>Show the theoretical mean and RMS calculation</a:t>
+              <a:t>Calculate theoretical mean and RMS, then compute RMS percent errors</a:t>
             </a:r>
           </a:p>
         </p:txBody>
@@ -8414,7 +8363,7 @@
           <p:cNvPr id="6" name="text">
             <a:extLst xmlns:a="http://schemas.openxmlformats.org/drawingml/2006/main">
               <a:ext uri="{FF2B5EF4-FFF2-40B4-BE49-F238E27FC236}">
-                <a16:creationId xmlns:a16="http://schemas.microsoft.com/office/drawing/2014/main" id="{D135B928-F00D-4605-8B34-1AF2968E32A1}"/>
+                <a16:creationId xmlns:a16="http://schemas.microsoft.com/office/drawing/2014/main" id="{2CF65E71-9EA5-4537-BDDA-4041607E2731}"/>
               </a:ext>
             </a:extLst>
           </p:cNvPr>
@@ -8471,7 +8420,7 @@
           <p:cNvPr id="7" name="text">
             <a:extLst xmlns:a="http://schemas.openxmlformats.org/drawingml/2006/main">
               <a:ext uri="{FF2B5EF4-FFF2-40B4-BE49-F238E27FC236}">
-                <a16:creationId xmlns:a16="http://schemas.microsoft.com/office/drawing/2014/main" id="{359D0079-639A-4B5D-B806-24DCB1017E8D}"/>
+                <a16:creationId xmlns:a16="http://schemas.microsoft.com/office/drawing/2014/main" id="{EE561BDD-042F-4B13-B0E7-15C094091DFC}"/>
               </a:ext>
             </a:extLst>
           </p:cNvPr>
@@ -8518,7 +8467,7 @@
                 <a:ea typeface="Calibri"/>
                 <a:cs typeface="Calibri"/>
               </a:rPr>
-              <a:t>Compare sampled mean and RMS values with theory</a:t>
+              <a:t>Predict every FFT peak before viewing the spectra</a:t>
             </a:r>
           </a:p>
         </p:txBody>
@@ -8528,7 +8477,7 @@
           <p:cNvPr id="8" name="text">
             <a:extLst xmlns:a="http://schemas.openxmlformats.org/drawingml/2006/main">
               <a:ext uri="{FF2B5EF4-FFF2-40B4-BE49-F238E27FC236}">
-                <a16:creationId xmlns:a16="http://schemas.microsoft.com/office/drawing/2014/main" id="{1F0982CF-53F1-4177-9835-C7151DC8FF14}"/>
+                <a16:creationId xmlns:a16="http://schemas.microsoft.com/office/drawing/2014/main" id="{0F2F3E36-CDF7-4443-B7E4-3B4AE69AEFEF}"/>
               </a:ext>
             </a:extLst>
           </p:cNvPr>
@@ -8585,7 +8534,7 @@
           <p:cNvPr id="9" name="text">
             <a:extLst xmlns:a="http://schemas.openxmlformats.org/drawingml/2006/main">
               <a:ext uri="{FF2B5EF4-FFF2-40B4-BE49-F238E27FC236}">
-                <a16:creationId xmlns:a16="http://schemas.microsoft.com/office/drawing/2014/main" id="{89211967-913D-4CD1-B636-E7D6175D2791}"/>
+                <a16:creationId xmlns:a16="http://schemas.microsoft.com/office/drawing/2014/main" id="{91FFC997-C763-4952-8BD6-9D09ECBA4829}"/>
               </a:ext>
             </a:extLst>
           </p:cNvPr>
@@ -8632,7 +8581,7 @@
                 <a:ea typeface="Calibri"/>
                 <a:cs typeface="Calibri"/>
               </a:rPr>
-              <a:t>List the two dominant frequencies for every sample rate</a:t>
+              <a:t>Compare predicted and observed peaks and explain aliasing</a:t>
             </a:r>
           </a:p>
         </p:txBody>
@@ -8642,7 +8591,7 @@
           <p:cNvPr id="10" name="text">
             <a:extLst xmlns:a="http://schemas.openxmlformats.org/drawingml/2006/main">
               <a:ext uri="{FF2B5EF4-FFF2-40B4-BE49-F238E27FC236}">
-                <a16:creationId xmlns:a16="http://schemas.microsoft.com/office/drawing/2014/main" id="{55F98D50-E711-4E78-A15B-DC93ED843285}"/>
+                <a16:creationId xmlns:a16="http://schemas.microsoft.com/office/drawing/2014/main" id="{24F5E090-F5B8-46F9-81B6-B1040DE74A0F}"/>
               </a:ext>
             </a:extLst>
           </p:cNvPr>
@@ -8699,7 +8648,7 @@
           <p:cNvPr id="11" name="text">
             <a:extLst xmlns:a="http://schemas.openxmlformats.org/drawingml/2006/main">
               <a:ext uri="{FF2B5EF4-FFF2-40B4-BE49-F238E27FC236}">
-                <a16:creationId xmlns:a16="http://schemas.microsoft.com/office/drawing/2014/main" id="{91FD5CE4-B849-4555-A0B7-87CA849F456B}"/>
+                <a16:creationId xmlns:a16="http://schemas.microsoft.com/office/drawing/2014/main" id="{6B34BDA8-E691-41A4-A512-130F56E69D2C}"/>
               </a:ext>
             </a:extLst>
           </p:cNvPr>
@@ -8746,7 +8695,7 @@
                 <a:ea typeface="Calibri"/>
                 <a:cs typeface="Calibri"/>
               </a:rPr>
-              <a:t>Explain the aliased frequencies and connect the result to Lab 1</a:t>
+              <a:t>Choose a sample rate and duration for a new measurement and justify both</a:t>
             </a:r>
           </a:p>
         </p:txBody>
@@ -8754,7 +8703,7 @@
     </p:spTree>
     <p:extLst>
       <p:ext uri="{BB962C8B-B14F-4D97-AF65-F5344CB8AC3E}">
-        <p14:creationId xmlns:p14="http://schemas.microsoft.com/office/powerpoint/2010/main" val="816985452"/>
+        <p14:creationId xmlns:p14="http://schemas.microsoft.com/office/powerpoint/2010/main" val="226394027"/>
       </p:ext>
     </p:extLst>
   </p:cSld>
@@ -8785,7 +8734,7 @@
           <p:cNvPr id="12" name="course">
             <a:extLst xmlns:a="http://schemas.openxmlformats.org/drawingml/2006/main">
               <a:ext uri="{FF2B5EF4-FFF2-40B4-BE49-F238E27FC236}">
-                <a16:creationId xmlns:a16="http://schemas.microsoft.com/office/drawing/2014/main" id="{0AE815AA-2297-4F4D-AAD7-CFC360645D98}"/>
+                <a16:creationId xmlns:a16="http://schemas.microsoft.com/office/drawing/2014/main" id="{1B5E944B-5900-4B17-9FDC-73FFAAAB7F1E}"/>
               </a:ext>
             </a:extLst>
           </p:cNvPr>
@@ -8842,7 +8791,7 @@
           <p:cNvPr id="2" name="title">
             <a:extLst xmlns:a="http://schemas.openxmlformats.org/drawingml/2006/main">
               <a:ext uri="{FF2B5EF4-FFF2-40B4-BE49-F238E27FC236}">
-                <a16:creationId xmlns:a16="http://schemas.microsoft.com/office/drawing/2014/main" id="{1FD640B6-D0EB-4B9B-9BCE-4DB1DC355F63}"/>
+                <a16:creationId xmlns:a16="http://schemas.microsoft.com/office/drawing/2014/main" id="{E9C35B37-8D01-46D1-9B9F-F0FA9F1AAFD6}"/>
               </a:ext>
             </a:extLst>
           </p:cNvPr>
@@ -8899,7 +8848,7 @@
           <p:cNvPr id="3" name="page">
             <a:extLst xmlns:a="http://schemas.openxmlformats.org/drawingml/2006/main">
               <a:ext uri="{FF2B5EF4-FFF2-40B4-BE49-F238E27FC236}">
-                <a16:creationId xmlns:a16="http://schemas.microsoft.com/office/drawing/2014/main" id="{6A81784A-69E7-4255-8641-3ED6BDE778E5}"/>
+                <a16:creationId xmlns:a16="http://schemas.microsoft.com/office/drawing/2014/main" id="{09D095AF-1CA0-4EFB-90B6-3D21A8CEF6BE}"/>
               </a:ext>
             </a:extLst>
           </p:cNvPr>
@@ -8956,7 +8905,7 @@
           <p:cNvPr id="4" name="text">
             <a:extLst xmlns:a="http://schemas.openxmlformats.org/drawingml/2006/main">
               <a:ext uri="{FF2B5EF4-FFF2-40B4-BE49-F238E27FC236}">
-                <a16:creationId xmlns:a16="http://schemas.microsoft.com/office/drawing/2014/main" id="{E6C6FF18-4575-40D8-9E37-6CA29E844EC3}"/>
+                <a16:creationId xmlns:a16="http://schemas.microsoft.com/office/drawing/2014/main" id="{79ADC1DE-B830-4CF1-944C-814B3F1A10F0}"/>
               </a:ext>
             </a:extLst>
           </p:cNvPr>
@@ -9013,7 +8962,7 @@
           <p:cNvPr id="5" name="text">
             <a:extLst xmlns:a="http://schemas.openxmlformats.org/drawingml/2006/main">
               <a:ext uri="{FF2B5EF4-FFF2-40B4-BE49-F238E27FC236}">
-                <a16:creationId xmlns:a16="http://schemas.microsoft.com/office/drawing/2014/main" id="{56D2ABD8-82BE-4466-86FA-CF89DDB619FE}"/>
+                <a16:creationId xmlns:a16="http://schemas.microsoft.com/office/drawing/2014/main" id="{472C652E-CC69-4341-BE3A-F7B2335B7DD7}"/>
               </a:ext>
             </a:extLst>
           </p:cNvPr>
@@ -9070,7 +9019,7 @@
           <p:cNvPr id="6" name="text">
             <a:extLst xmlns:a="http://schemas.openxmlformats.org/drawingml/2006/main">
               <a:ext uri="{FF2B5EF4-FFF2-40B4-BE49-F238E27FC236}">
-                <a16:creationId xmlns:a16="http://schemas.microsoft.com/office/drawing/2014/main" id="{7F0310DA-C5CD-435F-853E-F5039EC8A2A2}"/>
+                <a16:creationId xmlns:a16="http://schemas.microsoft.com/office/drawing/2014/main" id="{F20F3F84-52D7-4EA5-8FF9-3AEDCB5F2B64}"/>
               </a:ext>
             </a:extLst>
           </p:cNvPr>
@@ -9127,7 +9076,7 @@
           <p:cNvPr id="7" name="text">
             <a:extLst xmlns:a="http://schemas.openxmlformats.org/drawingml/2006/main">
               <a:ext uri="{FF2B5EF4-FFF2-40B4-BE49-F238E27FC236}">
-                <a16:creationId xmlns:a16="http://schemas.microsoft.com/office/drawing/2014/main" id="{0C53DEDA-B02E-48BA-8AB4-BCC835877047}"/>
+                <a16:creationId xmlns:a16="http://schemas.microsoft.com/office/drawing/2014/main" id="{5FC631A5-1F8C-4A02-BCDC-8EAEAFD72CD5}"/>
               </a:ext>
             </a:extLst>
           </p:cNvPr>
@@ -9174,7 +9123,7 @@
                 <a:ea typeface="Calibri"/>
                 <a:cs typeface="Calibri"/>
               </a:rPr>
-              <a:t>Run code and Markdown cells in a Jupyter notebook</a:t>
+              <a:t>Run prepared analysis cells in a Jupyter notebook</a:t>
             </a:r>
           </a:p>
         </p:txBody>
@@ -9184,7 +9133,7 @@
           <p:cNvPr id="8" name="text">
             <a:extLst xmlns:a="http://schemas.openxmlformats.org/drawingml/2006/main">
               <a:ext uri="{FF2B5EF4-FFF2-40B4-BE49-F238E27FC236}">
-                <a16:creationId xmlns:a16="http://schemas.microsoft.com/office/drawing/2014/main" id="{AB746F2C-2B4B-41EB-9366-574646F94185}"/>
+                <a16:creationId xmlns:a16="http://schemas.microsoft.com/office/drawing/2014/main" id="{196A452A-8204-4823-A117-717DA3BEB6E1}"/>
               </a:ext>
             </a:extLst>
           </p:cNvPr>
@@ -9241,7 +9190,7 @@
           <p:cNvPr id="9" name="text">
             <a:extLst xmlns:a="http://schemas.openxmlformats.org/drawingml/2006/main">
               <a:ext uri="{FF2B5EF4-FFF2-40B4-BE49-F238E27FC236}">
-                <a16:creationId xmlns:a16="http://schemas.microsoft.com/office/drawing/2014/main" id="{D070FBCF-9BFE-45DB-8BE7-36BA744EDB7C}"/>
+                <a16:creationId xmlns:a16="http://schemas.microsoft.com/office/drawing/2014/main" id="{92ACA28E-18E5-48B9-9786-6A34C46A2B57}"/>
               </a:ext>
             </a:extLst>
           </p:cNvPr>
@@ -9298,7 +9247,7 @@
           <p:cNvPr id="10" name="text">
             <a:extLst xmlns:a="http://schemas.openxmlformats.org/drawingml/2006/main">
               <a:ext uri="{FF2B5EF4-FFF2-40B4-BE49-F238E27FC236}">
-                <a16:creationId xmlns:a16="http://schemas.microsoft.com/office/drawing/2014/main" id="{B071073C-C44F-479A-B0DD-B9FB8D06250A}"/>
+                <a16:creationId xmlns:a16="http://schemas.microsoft.com/office/drawing/2014/main" id="{6A5B676F-631D-4D3F-8CA4-E31B7686ECED}"/>
               </a:ext>
             </a:extLst>
           </p:cNvPr>
@@ -9355,7 +9304,7 @@
           <p:cNvPr id="11" name="text">
             <a:extLst xmlns:a="http://schemas.openxmlformats.org/drawingml/2006/main">
               <a:ext uri="{FF2B5EF4-FFF2-40B4-BE49-F238E27FC236}">
-                <a16:creationId xmlns:a16="http://schemas.microsoft.com/office/drawing/2014/main" id="{EFC4778E-BAA3-4567-94A5-C42996FDCC53}"/>
+                <a16:creationId xmlns:a16="http://schemas.microsoft.com/office/drawing/2014/main" id="{4A5E2657-98A0-4373-B3EE-F7F1833B2A1F}"/>
               </a:ext>
             </a:extLst>
           </p:cNvPr>
@@ -9410,7 +9359,7 @@
     </p:spTree>
     <p:extLst>
       <p:ext uri="{BB962C8B-B14F-4D97-AF65-F5344CB8AC3E}">
-        <p14:creationId xmlns:p14="http://schemas.microsoft.com/office/powerpoint/2010/main" val="1351093549"/>
+        <p14:creationId xmlns:p14="http://schemas.microsoft.com/office/powerpoint/2010/main" val="1585465589"/>
       </p:ext>
     </p:extLst>
   </p:cSld>
@@ -9441,7 +9390,7 @@
           <p:cNvPr id="13" name="course">
             <a:extLst xmlns:a="http://schemas.openxmlformats.org/drawingml/2006/main">
               <a:ext uri="{FF2B5EF4-FFF2-40B4-BE49-F238E27FC236}">
-                <a16:creationId xmlns:a16="http://schemas.microsoft.com/office/drawing/2014/main" id="{B5C7B9C8-1556-4E81-91EF-FAC866E36717}"/>
+                <a16:creationId xmlns:a16="http://schemas.microsoft.com/office/drawing/2014/main" id="{DCCEEE79-CBD2-437E-8AB1-C62B164E091D}"/>
               </a:ext>
             </a:extLst>
           </p:cNvPr>
@@ -9498,7 +9447,7 @@
           <p:cNvPr id="2" name="title">
             <a:extLst xmlns:a="http://schemas.openxmlformats.org/drawingml/2006/main">
               <a:ext uri="{FF2B5EF4-FFF2-40B4-BE49-F238E27FC236}">
-                <a16:creationId xmlns:a16="http://schemas.microsoft.com/office/drawing/2014/main" id="{A7EC4247-6B46-4A3A-A0C7-871D79FF816B}"/>
+                <a16:creationId xmlns:a16="http://schemas.microsoft.com/office/drawing/2014/main" id="{3B88D519-C9CE-43CE-9029-33AE5BE115FA}"/>
               </a:ext>
             </a:extLst>
           </p:cNvPr>
@@ -9555,7 +9504,7 @@
           <p:cNvPr id="3" name="page">
             <a:extLst xmlns:a="http://schemas.openxmlformats.org/drawingml/2006/main">
               <a:ext uri="{FF2B5EF4-FFF2-40B4-BE49-F238E27FC236}">
-                <a16:creationId xmlns:a16="http://schemas.microsoft.com/office/drawing/2014/main" id="{3B7E227C-38C3-471F-874C-DC696431C0C5}"/>
+                <a16:creationId xmlns:a16="http://schemas.microsoft.com/office/drawing/2014/main" id="{734DE9E0-BC58-442F-8C6F-4902B31E3083}"/>
               </a:ext>
             </a:extLst>
           </p:cNvPr>
@@ -9612,7 +9561,7 @@
           <p:cNvPr id="4" name="text">
             <a:extLst xmlns:a="http://schemas.openxmlformats.org/drawingml/2006/main">
               <a:ext uri="{FF2B5EF4-FFF2-40B4-BE49-F238E27FC236}">
-                <a16:creationId xmlns:a16="http://schemas.microsoft.com/office/drawing/2014/main" id="{00E6A981-F231-4206-82B1-00AE611EC43F}"/>
+                <a16:creationId xmlns:a16="http://schemas.microsoft.com/office/drawing/2014/main" id="{FC0A5FB1-2DC4-4339-B72E-9F471D71D8DC}"/>
               </a:ext>
             </a:extLst>
           </p:cNvPr>
@@ -9669,7 +9618,7 @@
           <p:cNvPr id="5" name="text">
             <a:extLst xmlns:a="http://schemas.openxmlformats.org/drawingml/2006/main">
               <a:ext uri="{FF2B5EF4-FFF2-40B4-BE49-F238E27FC236}">
-                <a16:creationId xmlns:a16="http://schemas.microsoft.com/office/drawing/2014/main" id="{C6233AD0-68BC-47DE-8985-088A17FA8A75}"/>
+                <a16:creationId xmlns:a16="http://schemas.microsoft.com/office/drawing/2014/main" id="{8A3FCB8B-E880-49A7-9E43-F09DC07C178D}"/>
               </a:ext>
             </a:extLst>
           </p:cNvPr>
@@ -9726,7 +9675,7 @@
           <p:cNvPr id="6" name="text">
             <a:extLst xmlns:a="http://schemas.openxmlformats.org/drawingml/2006/main">
               <a:ext uri="{FF2B5EF4-FFF2-40B4-BE49-F238E27FC236}">
-                <a16:creationId xmlns:a16="http://schemas.microsoft.com/office/drawing/2014/main" id="{7B796A43-2117-400E-B2F5-6183EB73DA24}"/>
+                <a16:creationId xmlns:a16="http://schemas.microsoft.com/office/drawing/2014/main" id="{9721B461-1CA1-4676-8695-B5B88BF97467}"/>
               </a:ext>
             </a:extLst>
           </p:cNvPr>
@@ -9783,7 +9732,7 @@
           <p:cNvPr id="7" name="text">
             <a:extLst xmlns:a="http://schemas.openxmlformats.org/drawingml/2006/main">
               <a:ext uri="{FF2B5EF4-FFF2-40B4-BE49-F238E27FC236}">
-                <a16:creationId xmlns:a16="http://schemas.microsoft.com/office/drawing/2014/main" id="{2F17D70D-D038-4DB4-80C4-902782A96016}"/>
+                <a16:creationId xmlns:a16="http://schemas.microsoft.com/office/drawing/2014/main" id="{DADCB236-1A34-42C3-8F19-CC490A5BA630}"/>
               </a:ext>
             </a:extLst>
           </p:cNvPr>
@@ -9840,7 +9789,7 @@
           <p:cNvPr id="8" name="text">
             <a:extLst xmlns:a="http://schemas.openxmlformats.org/drawingml/2006/main">
               <a:ext uri="{FF2B5EF4-FFF2-40B4-BE49-F238E27FC236}">
-                <a16:creationId xmlns:a16="http://schemas.microsoft.com/office/drawing/2014/main" id="{660E96AF-B938-4792-8A47-41D0178C792D}"/>
+                <a16:creationId xmlns:a16="http://schemas.microsoft.com/office/drawing/2014/main" id="{53EBE5A9-1A60-4990-9361-EB9F2035C068}"/>
               </a:ext>
             </a:extLst>
           </p:cNvPr>
@@ -9897,7 +9846,7 @@
           <p:cNvPr id="9" name="text">
             <a:extLst xmlns:a="http://schemas.openxmlformats.org/drawingml/2006/main">
               <a:ext uri="{FF2B5EF4-FFF2-40B4-BE49-F238E27FC236}">
-                <a16:creationId xmlns:a16="http://schemas.microsoft.com/office/drawing/2014/main" id="{56E289E7-032F-4445-91C9-4B0EFE4848E7}"/>
+                <a16:creationId xmlns:a16="http://schemas.microsoft.com/office/drawing/2014/main" id="{A57FFC79-A10B-475A-8B9C-96ABC3291241}"/>
               </a:ext>
             </a:extLst>
           </p:cNvPr>
@@ -9954,7 +9903,7 @@
           <p:cNvPr id="10" name="text">
             <a:extLst xmlns:a="http://schemas.openxmlformats.org/drawingml/2006/main">
               <a:ext uri="{FF2B5EF4-FFF2-40B4-BE49-F238E27FC236}">
-                <a16:creationId xmlns:a16="http://schemas.microsoft.com/office/drawing/2014/main" id="{A3067205-378D-4020-BE2A-578E5C3D0CF2}"/>
+                <a16:creationId xmlns:a16="http://schemas.microsoft.com/office/drawing/2014/main" id="{0DEA1642-1D33-47FD-88DB-B4F84E42EC0E}"/>
               </a:ext>
             </a:extLst>
           </p:cNvPr>
@@ -10011,7 +9960,7 @@
           <p:cNvPr id="11" name="text">
             <a:extLst xmlns:a="http://schemas.openxmlformats.org/drawingml/2006/main">
               <a:ext uri="{FF2B5EF4-FFF2-40B4-BE49-F238E27FC236}">
-                <a16:creationId xmlns:a16="http://schemas.microsoft.com/office/drawing/2014/main" id="{8B4F97BF-9342-4C2F-9072-A1E573D091E9}"/>
+                <a16:creationId xmlns:a16="http://schemas.microsoft.com/office/drawing/2014/main" id="{7635DD1E-E3B3-418C-9D21-1AB6A0874B8C}"/>
               </a:ext>
             </a:extLst>
           </p:cNvPr>
@@ -10068,7 +10017,7 @@
           <p:cNvPr id="12" name="text">
             <a:extLst xmlns:a="http://schemas.openxmlformats.org/drawingml/2006/main">
               <a:ext uri="{FF2B5EF4-FFF2-40B4-BE49-F238E27FC236}">
-                <a16:creationId xmlns:a16="http://schemas.microsoft.com/office/drawing/2014/main" id="{E9C82278-0DC4-4FB7-976E-9B46FF24FE1D}"/>
+                <a16:creationId xmlns:a16="http://schemas.microsoft.com/office/drawing/2014/main" id="{96760160-499F-4766-9993-1BFD210DC59B}"/>
               </a:ext>
             </a:extLst>
           </p:cNvPr>
@@ -10123,7 +10072,7 @@
     </p:spTree>
     <p:extLst>
       <p:ext uri="{BB962C8B-B14F-4D97-AF65-F5344CB8AC3E}">
-        <p14:creationId xmlns:p14="http://schemas.microsoft.com/office/powerpoint/2010/main" val="1661416537"/>
+        <p14:creationId xmlns:p14="http://schemas.microsoft.com/office/powerpoint/2010/main" val="1412626432"/>
       </p:ext>
     </p:extLst>
   </p:cSld>
@@ -10154,7 +10103,7 @@
           <p:cNvPr id="12" name="course">
             <a:extLst xmlns:a="http://schemas.openxmlformats.org/drawingml/2006/main">
               <a:ext uri="{FF2B5EF4-FFF2-40B4-BE49-F238E27FC236}">
-                <a16:creationId xmlns:a16="http://schemas.microsoft.com/office/drawing/2014/main" id="{41371900-FAD9-476A-A2C4-092264238CEF}"/>
+                <a16:creationId xmlns:a16="http://schemas.microsoft.com/office/drawing/2014/main" id="{2EC8AFC1-CF23-443A-959A-6231F90D6AFF}"/>
               </a:ext>
             </a:extLst>
           </p:cNvPr>
@@ -10211,7 +10160,7 @@
           <p:cNvPr id="2" name="title">
             <a:extLst xmlns:a="http://schemas.openxmlformats.org/drawingml/2006/main">
               <a:ext uri="{FF2B5EF4-FFF2-40B4-BE49-F238E27FC236}">
-                <a16:creationId xmlns:a16="http://schemas.microsoft.com/office/drawing/2014/main" id="{04700CCA-D118-4448-8A42-C137CAA25218}"/>
+                <a16:creationId xmlns:a16="http://schemas.microsoft.com/office/drawing/2014/main" id="{FABD792D-DF6D-4471-8034-88CB800F52CD}"/>
               </a:ext>
             </a:extLst>
           </p:cNvPr>
@@ -10268,7 +10217,7 @@
           <p:cNvPr id="3" name="page">
             <a:extLst xmlns:a="http://schemas.openxmlformats.org/drawingml/2006/main">
               <a:ext uri="{FF2B5EF4-FFF2-40B4-BE49-F238E27FC236}">
-                <a16:creationId xmlns:a16="http://schemas.microsoft.com/office/drawing/2014/main" id="{4E28673D-CDCA-4547-BF03-81A6953D8EC5}"/>
+                <a16:creationId xmlns:a16="http://schemas.microsoft.com/office/drawing/2014/main" id="{587916DE-1D99-4665-8FE7-FAE6DA164164}"/>
               </a:ext>
             </a:extLst>
           </p:cNvPr>
@@ -10325,7 +10274,7 @@
           <p:cNvPr id="4" name="text">
             <a:extLst xmlns:a="http://schemas.openxmlformats.org/drawingml/2006/main">
               <a:ext uri="{FF2B5EF4-FFF2-40B4-BE49-F238E27FC236}">
-                <a16:creationId xmlns:a16="http://schemas.microsoft.com/office/drawing/2014/main" id="{A0AA0BA8-AFFB-43FB-BF89-839265B3A620}"/>
+                <a16:creationId xmlns:a16="http://schemas.microsoft.com/office/drawing/2014/main" id="{0C97733B-A04B-4A77-B952-C72ACC009404}"/>
               </a:ext>
             </a:extLst>
           </p:cNvPr>
@@ -10382,7 +10331,7 @@
           <p:cNvPr id="5" name="text">
             <a:extLst xmlns:a="http://schemas.openxmlformats.org/drawingml/2006/main">
               <a:ext uri="{FF2B5EF4-FFF2-40B4-BE49-F238E27FC236}">
-                <a16:creationId xmlns:a16="http://schemas.microsoft.com/office/drawing/2014/main" id="{48851B51-2EBD-415F-8448-080A5B4310FD}"/>
+                <a16:creationId xmlns:a16="http://schemas.microsoft.com/office/drawing/2014/main" id="{517CA938-E691-4751-900C-60BDA6094F45}"/>
               </a:ext>
             </a:extLst>
           </p:cNvPr>
@@ -10439,7 +10388,7 @@
           <p:cNvPr id="6" name="text">
             <a:extLst xmlns:a="http://schemas.openxmlformats.org/drawingml/2006/main">
               <a:ext uri="{FF2B5EF4-FFF2-40B4-BE49-F238E27FC236}">
-                <a16:creationId xmlns:a16="http://schemas.microsoft.com/office/drawing/2014/main" id="{EF8290CC-E3A8-41BB-AD1D-1B7971832475}"/>
+                <a16:creationId xmlns:a16="http://schemas.microsoft.com/office/drawing/2014/main" id="{93B029C3-F085-41D4-9820-B4436AD19C39}"/>
               </a:ext>
             </a:extLst>
           </p:cNvPr>
@@ -10496,7 +10445,7 @@
           <p:cNvPr id="7" name="text">
             <a:extLst xmlns:a="http://schemas.openxmlformats.org/drawingml/2006/main">
               <a:ext uri="{FF2B5EF4-FFF2-40B4-BE49-F238E27FC236}">
-                <a16:creationId xmlns:a16="http://schemas.microsoft.com/office/drawing/2014/main" id="{98422B35-CA7A-4098-8724-999F652D3672}"/>
+                <a16:creationId xmlns:a16="http://schemas.microsoft.com/office/drawing/2014/main" id="{058C8609-58B4-470F-9E15-935C7F89AEF0}"/>
               </a:ext>
             </a:extLst>
           </p:cNvPr>
@@ -10553,7 +10502,7 @@
           <p:cNvPr id="8" name="text">
             <a:extLst xmlns:a="http://schemas.openxmlformats.org/drawingml/2006/main">
               <a:ext uri="{FF2B5EF4-FFF2-40B4-BE49-F238E27FC236}">
-                <a16:creationId xmlns:a16="http://schemas.microsoft.com/office/drawing/2014/main" id="{A034A8F1-307A-4410-8A4B-58DEE3D53D24}"/>
+                <a16:creationId xmlns:a16="http://schemas.microsoft.com/office/drawing/2014/main" id="{D7F12CC4-1FA3-4D65-9FE8-BCC2D5C79897}"/>
               </a:ext>
             </a:extLst>
           </p:cNvPr>
@@ -10610,7 +10559,7 @@
           <p:cNvPr id="9" name="text">
             <a:extLst xmlns:a="http://schemas.openxmlformats.org/drawingml/2006/main">
               <a:ext uri="{FF2B5EF4-FFF2-40B4-BE49-F238E27FC236}">
-                <a16:creationId xmlns:a16="http://schemas.microsoft.com/office/drawing/2014/main" id="{F30CB452-CDF7-4D8E-A813-164E280C9279}"/>
+                <a16:creationId xmlns:a16="http://schemas.microsoft.com/office/drawing/2014/main" id="{5F87E4F9-510A-4222-8416-6B8E0E2671A2}"/>
               </a:ext>
             </a:extLst>
           </p:cNvPr>
@@ -10667,7 +10616,7 @@
           <p:cNvPr id="10" name="text">
             <a:extLst xmlns:a="http://schemas.openxmlformats.org/drawingml/2006/main">
               <a:ext uri="{FF2B5EF4-FFF2-40B4-BE49-F238E27FC236}">
-                <a16:creationId xmlns:a16="http://schemas.microsoft.com/office/drawing/2014/main" id="{ED52B036-0250-49C2-8676-F4D4CAD7A4D4}"/>
+                <a16:creationId xmlns:a16="http://schemas.microsoft.com/office/drawing/2014/main" id="{037C13ED-057D-4965-B0CA-2FC886B3F64A}"/>
               </a:ext>
             </a:extLst>
           </p:cNvPr>
@@ -10724,7 +10673,7 @@
           <p:cNvPr id="11" name="text">
             <a:extLst xmlns:a="http://schemas.openxmlformats.org/drawingml/2006/main">
               <a:ext uri="{FF2B5EF4-FFF2-40B4-BE49-F238E27FC236}">
-                <a16:creationId xmlns:a16="http://schemas.microsoft.com/office/drawing/2014/main" id="{A4222D27-E9B3-4028-AEA9-6A65784EFE8B}"/>
+                <a16:creationId xmlns:a16="http://schemas.microsoft.com/office/drawing/2014/main" id="{2EDD0FFB-373B-456C-A697-66133E337380}"/>
               </a:ext>
             </a:extLst>
           </p:cNvPr>
@@ -10779,7 +10728,7 @@
     </p:spTree>
     <p:extLst>
       <p:ext uri="{BB962C8B-B14F-4D97-AF65-F5344CB8AC3E}">
-        <p14:creationId xmlns:p14="http://schemas.microsoft.com/office/powerpoint/2010/main" val="963248597"/>
+        <p14:creationId xmlns:p14="http://schemas.microsoft.com/office/powerpoint/2010/main" val="1549688585"/>
       </p:ext>
     </p:extLst>
   </p:cSld>
@@ -10810,7 +10759,7 @@
           <p:cNvPr id="13" name="course">
             <a:extLst xmlns:a="http://schemas.openxmlformats.org/drawingml/2006/main">
               <a:ext uri="{FF2B5EF4-FFF2-40B4-BE49-F238E27FC236}">
-                <a16:creationId xmlns:a16="http://schemas.microsoft.com/office/drawing/2014/main" id="{5FC33377-4D47-4943-B60C-2997FB772D5F}"/>
+                <a16:creationId xmlns:a16="http://schemas.microsoft.com/office/drawing/2014/main" id="{18BCE9DF-2F04-4E35-8BE2-C68CFA72D0B7}"/>
               </a:ext>
             </a:extLst>
           </p:cNvPr>
@@ -10867,7 +10816,7 @@
           <p:cNvPr id="2" name="title">
             <a:extLst xmlns:a="http://schemas.openxmlformats.org/drawingml/2006/main">
               <a:ext uri="{FF2B5EF4-FFF2-40B4-BE49-F238E27FC236}">
-                <a16:creationId xmlns:a16="http://schemas.microsoft.com/office/drawing/2014/main" id="{B9D4EDEC-15E9-4AFF-B6F3-9338D259D802}"/>
+                <a16:creationId xmlns:a16="http://schemas.microsoft.com/office/drawing/2014/main" id="{B0555774-86BA-4D15-B0A0-4D42D14CE7D1}"/>
               </a:ext>
             </a:extLst>
           </p:cNvPr>
@@ -10924,7 +10873,7 @@
           <p:cNvPr id="3" name="page">
             <a:extLst xmlns:a="http://schemas.openxmlformats.org/drawingml/2006/main">
               <a:ext uri="{FF2B5EF4-FFF2-40B4-BE49-F238E27FC236}">
-                <a16:creationId xmlns:a16="http://schemas.microsoft.com/office/drawing/2014/main" id="{A26F9655-DB98-47F9-ACD3-F576A9B6F6FF}"/>
+                <a16:creationId xmlns:a16="http://schemas.microsoft.com/office/drawing/2014/main" id="{F0918913-4DE6-4A03-9749-9B786895C2ED}"/>
               </a:ext>
             </a:extLst>
           </p:cNvPr>
@@ -10981,7 +10930,7 @@
           <p:cNvPr id="4" name="text">
             <a:extLst xmlns:a="http://schemas.openxmlformats.org/drawingml/2006/main">
               <a:ext uri="{FF2B5EF4-FFF2-40B4-BE49-F238E27FC236}">
-                <a16:creationId xmlns:a16="http://schemas.microsoft.com/office/drawing/2014/main" id="{771EF924-4453-440E-BC15-7E612D145BDF}"/>
+                <a16:creationId xmlns:a16="http://schemas.microsoft.com/office/drawing/2014/main" id="{C3A1EFB7-B807-4FFE-9A92-12952A7A576A}"/>
               </a:ext>
             </a:extLst>
           </p:cNvPr>
@@ -11038,7 +10987,7 @@
           <p:cNvPr id="5" name="text">
             <a:extLst xmlns:a="http://schemas.openxmlformats.org/drawingml/2006/main">
               <a:ext uri="{FF2B5EF4-FFF2-40B4-BE49-F238E27FC236}">
-                <a16:creationId xmlns:a16="http://schemas.microsoft.com/office/drawing/2014/main" id="{EAC44125-8D67-478D-99C5-29201433A6B6}"/>
+                <a16:creationId xmlns:a16="http://schemas.microsoft.com/office/drawing/2014/main" id="{E9D5E372-7C87-4F83-9F25-695814F84279}"/>
               </a:ext>
             </a:extLst>
           </p:cNvPr>
@@ -11095,7 +11044,7 @@
           <p:cNvPr id="6" name="text">
             <a:extLst xmlns:a="http://schemas.openxmlformats.org/drawingml/2006/main">
               <a:ext uri="{FF2B5EF4-FFF2-40B4-BE49-F238E27FC236}">
-                <a16:creationId xmlns:a16="http://schemas.microsoft.com/office/drawing/2014/main" id="{9C411CA9-5515-45D9-9251-84086A9EAC95}"/>
+                <a16:creationId xmlns:a16="http://schemas.microsoft.com/office/drawing/2014/main" id="{89B46BE1-09F0-4B19-AB56-3F075B8D9414}"/>
               </a:ext>
             </a:extLst>
           </p:cNvPr>
@@ -11152,7 +11101,7 @@
           <p:cNvPr id="7" name="text">
             <a:extLst xmlns:a="http://schemas.openxmlformats.org/drawingml/2006/main">
               <a:ext uri="{FF2B5EF4-FFF2-40B4-BE49-F238E27FC236}">
-                <a16:creationId xmlns:a16="http://schemas.microsoft.com/office/drawing/2014/main" id="{7A146079-9768-47E7-8F7A-89794499DB9A}"/>
+                <a16:creationId xmlns:a16="http://schemas.microsoft.com/office/drawing/2014/main" id="{4C62C89B-E7BB-4DED-BEEA-8153DC2568B0}"/>
               </a:ext>
             </a:extLst>
           </p:cNvPr>
@@ -11209,7 +11158,7 @@
           <p:cNvPr id="8" name="text">
             <a:extLst xmlns:a="http://schemas.openxmlformats.org/drawingml/2006/main">
               <a:ext uri="{FF2B5EF4-FFF2-40B4-BE49-F238E27FC236}">
-                <a16:creationId xmlns:a16="http://schemas.microsoft.com/office/drawing/2014/main" id="{DE5D4EE9-89B0-458D-92F8-5129AEDFE9E4}"/>
+                <a16:creationId xmlns:a16="http://schemas.microsoft.com/office/drawing/2014/main" id="{A37BD46F-029B-4C21-8F96-0B90A96960BD}"/>
               </a:ext>
             </a:extLst>
           </p:cNvPr>
@@ -11266,7 +11215,7 @@
           <p:cNvPr id="9" name="text">
             <a:extLst xmlns:a="http://schemas.openxmlformats.org/drawingml/2006/main">
               <a:ext uri="{FF2B5EF4-FFF2-40B4-BE49-F238E27FC236}">
-                <a16:creationId xmlns:a16="http://schemas.microsoft.com/office/drawing/2014/main" id="{5287F734-2833-4560-9881-9797A5D4DAF8}"/>
+                <a16:creationId xmlns:a16="http://schemas.microsoft.com/office/drawing/2014/main" id="{63C866AE-3240-43CC-ABE2-34F4CF927A01}"/>
               </a:ext>
             </a:extLst>
           </p:cNvPr>
@@ -11323,7 +11272,7 @@
           <p:cNvPr id="10" name="text">
             <a:extLst xmlns:a="http://schemas.openxmlformats.org/drawingml/2006/main">
               <a:ext uri="{FF2B5EF4-FFF2-40B4-BE49-F238E27FC236}">
-                <a16:creationId xmlns:a16="http://schemas.microsoft.com/office/drawing/2014/main" id="{A4062D26-48BC-46B2-B3D4-412BA0F2EAA7}"/>
+                <a16:creationId xmlns:a16="http://schemas.microsoft.com/office/drawing/2014/main" id="{067CF665-A993-4F52-AB75-7386329EFA46}"/>
               </a:ext>
             </a:extLst>
           </p:cNvPr>
@@ -11380,7 +11329,7 @@
           <p:cNvPr id="11" name="text">
             <a:extLst xmlns:a="http://schemas.openxmlformats.org/drawingml/2006/main">
               <a:ext uri="{FF2B5EF4-FFF2-40B4-BE49-F238E27FC236}">
-                <a16:creationId xmlns:a16="http://schemas.microsoft.com/office/drawing/2014/main" id="{445DBFE5-67B1-45C5-B83E-C4F1A6F174BA}"/>
+                <a16:creationId xmlns:a16="http://schemas.microsoft.com/office/drawing/2014/main" id="{D2ADFB01-0D9D-4FBF-B69A-8784D2DEDFBC}"/>
               </a:ext>
             </a:extLst>
           </p:cNvPr>
@@ -11437,7 +11386,7 @@
           <p:cNvPr id="12" name="text">
             <a:extLst xmlns:a="http://schemas.openxmlformats.org/drawingml/2006/main">
               <a:ext uri="{FF2B5EF4-FFF2-40B4-BE49-F238E27FC236}">
-                <a16:creationId xmlns:a16="http://schemas.microsoft.com/office/drawing/2014/main" id="{801D1EDE-CDF7-4A29-A5E5-918655E3B95D}"/>
+                <a16:creationId xmlns:a16="http://schemas.microsoft.com/office/drawing/2014/main" id="{C47AE377-FD52-455B-8816-FA9DE29DA66B}"/>
               </a:ext>
             </a:extLst>
           </p:cNvPr>
@@ -11492,7 +11441,7 @@
     </p:spTree>
     <p:extLst>
       <p:ext uri="{BB962C8B-B14F-4D97-AF65-F5344CB8AC3E}">
-        <p14:creationId xmlns:p14="http://schemas.microsoft.com/office/powerpoint/2010/main" val="1482042371"/>
+        <p14:creationId xmlns:p14="http://schemas.microsoft.com/office/powerpoint/2010/main" val="1519689381"/>
       </p:ext>
     </p:extLst>
   </p:cSld>
@@ -11523,7 +11472,7 @@
           <p:cNvPr id="10" name="course">
             <a:extLst xmlns:a="http://schemas.openxmlformats.org/drawingml/2006/main">
               <a:ext uri="{FF2B5EF4-FFF2-40B4-BE49-F238E27FC236}">
-                <a16:creationId xmlns:a16="http://schemas.microsoft.com/office/drawing/2014/main" id="{3A6C53AE-E9AC-41FC-A0AC-AA480067166E}"/>
+                <a16:creationId xmlns:a16="http://schemas.microsoft.com/office/drawing/2014/main" id="{5161F60D-8E53-4482-8401-A698D42F35F4}"/>
               </a:ext>
             </a:extLst>
           </p:cNvPr>
@@ -11580,7 +11529,7 @@
           <p:cNvPr id="2" name="title">
             <a:extLst xmlns:a="http://schemas.openxmlformats.org/drawingml/2006/main">
               <a:ext uri="{FF2B5EF4-FFF2-40B4-BE49-F238E27FC236}">
-                <a16:creationId xmlns:a16="http://schemas.microsoft.com/office/drawing/2014/main" id="{3EACD36F-2AB2-459F-9E2F-7B607DB9C1E9}"/>
+                <a16:creationId xmlns:a16="http://schemas.microsoft.com/office/drawing/2014/main" id="{83587500-EC27-4018-85F7-895C55DC430D}"/>
               </a:ext>
             </a:extLst>
           </p:cNvPr>
@@ -11637,7 +11586,7 @@
           <p:cNvPr id="3" name="page">
             <a:extLst xmlns:a="http://schemas.openxmlformats.org/drawingml/2006/main">
               <a:ext uri="{FF2B5EF4-FFF2-40B4-BE49-F238E27FC236}">
-                <a16:creationId xmlns:a16="http://schemas.microsoft.com/office/drawing/2014/main" id="{D7567DD5-C323-4CCD-BAFF-B834AFCE64D7}"/>
+                <a16:creationId xmlns:a16="http://schemas.microsoft.com/office/drawing/2014/main" id="{0B19483D-EB2D-4B00-908A-26568CB04293}"/>
               </a:ext>
             </a:extLst>
           </p:cNvPr>
@@ -11694,7 +11643,7 @@
           <p:cNvPr id="4" name="text">
             <a:extLst xmlns:a="http://schemas.openxmlformats.org/drawingml/2006/main">
               <a:ext uri="{FF2B5EF4-FFF2-40B4-BE49-F238E27FC236}">
-                <a16:creationId xmlns:a16="http://schemas.microsoft.com/office/drawing/2014/main" id="{3A709A2F-BE70-4EE6-B926-5D67DC9DEE47}"/>
+                <a16:creationId xmlns:a16="http://schemas.microsoft.com/office/drawing/2014/main" id="{1F572849-B4BD-4896-B9C1-2B8F1BC011AB}"/>
               </a:ext>
             </a:extLst>
           </p:cNvPr>
@@ -11751,7 +11700,7 @@
           <p:cNvPr id="5" name="text">
             <a:extLst xmlns:a="http://schemas.openxmlformats.org/drawingml/2006/main">
               <a:ext uri="{FF2B5EF4-FFF2-40B4-BE49-F238E27FC236}">
-                <a16:creationId xmlns:a16="http://schemas.microsoft.com/office/drawing/2014/main" id="{A5AFB3B0-F6CF-4DE6-A9BE-7477B934650E}"/>
+                <a16:creationId xmlns:a16="http://schemas.microsoft.com/office/drawing/2014/main" id="{A1A0AB64-3B64-47C4-964F-F3CBEDE2DB8E}"/>
               </a:ext>
             </a:extLst>
           </p:cNvPr>
@@ -11808,7 +11757,7 @@
           <p:cNvPr id="6" name="text">
             <a:extLst xmlns:a="http://schemas.openxmlformats.org/drawingml/2006/main">
               <a:ext uri="{FF2B5EF4-FFF2-40B4-BE49-F238E27FC236}">
-                <a16:creationId xmlns:a16="http://schemas.microsoft.com/office/drawing/2014/main" id="{61BAFC7A-BD1F-458C-A325-1B1B20D2D332}"/>
+                <a16:creationId xmlns:a16="http://schemas.microsoft.com/office/drawing/2014/main" id="{FE20050E-FF54-4AC4-80F2-10B9E2B57315}"/>
               </a:ext>
             </a:extLst>
           </p:cNvPr>
@@ -11865,7 +11814,7 @@
           <p:cNvPr id="7" name="text">
             <a:extLst xmlns:a="http://schemas.openxmlformats.org/drawingml/2006/main">
               <a:ext uri="{FF2B5EF4-FFF2-40B4-BE49-F238E27FC236}">
-                <a16:creationId xmlns:a16="http://schemas.microsoft.com/office/drawing/2014/main" id="{C186342F-C26E-4B19-BFA3-4C86DF6F287C}"/>
+                <a16:creationId xmlns:a16="http://schemas.microsoft.com/office/drawing/2014/main" id="{E97B3C02-BF7A-4042-B007-E8E0C5595928}"/>
               </a:ext>
             </a:extLst>
           </p:cNvPr>
@@ -11922,7 +11871,7 @@
           <p:cNvPr id="8" name="text">
             <a:extLst xmlns:a="http://schemas.openxmlformats.org/drawingml/2006/main">
               <a:ext uri="{FF2B5EF4-FFF2-40B4-BE49-F238E27FC236}">
-                <a16:creationId xmlns:a16="http://schemas.microsoft.com/office/drawing/2014/main" id="{BCB70E3B-FF49-4A16-92F1-6DCD915FA62D}"/>
+                <a16:creationId xmlns:a16="http://schemas.microsoft.com/office/drawing/2014/main" id="{167C2361-EC24-4448-85CA-05EB70A473D3}"/>
               </a:ext>
             </a:extLst>
           </p:cNvPr>
@@ -11979,7 +11928,7 @@
           <p:cNvPr id="9" name="text">
             <a:extLst xmlns:a="http://schemas.openxmlformats.org/drawingml/2006/main">
               <a:ext uri="{FF2B5EF4-FFF2-40B4-BE49-F238E27FC236}">
-                <a16:creationId xmlns:a16="http://schemas.microsoft.com/office/drawing/2014/main" id="{F2BE0B91-E1E3-4BB8-87B0-CBC57EA43B37}"/>
+                <a16:creationId xmlns:a16="http://schemas.microsoft.com/office/drawing/2014/main" id="{5F5B95EB-6BB2-4951-A52A-045CCF96E055}"/>
               </a:ext>
             </a:extLst>
           </p:cNvPr>
@@ -12034,7 +11983,7 @@
     </p:spTree>
     <p:extLst>
       <p:ext uri="{BB962C8B-B14F-4D97-AF65-F5344CB8AC3E}">
-        <p14:creationId xmlns:p14="http://schemas.microsoft.com/office/powerpoint/2010/main" val="1172222158"/>
+        <p14:creationId xmlns:p14="http://schemas.microsoft.com/office/powerpoint/2010/main" val="2074196964"/>
       </p:ext>
     </p:extLst>
   </p:cSld>
@@ -12065,7 +12014,7 @@
           <p:cNvPr id="10" name="course">
             <a:extLst xmlns:a="http://schemas.openxmlformats.org/drawingml/2006/main">
               <a:ext uri="{FF2B5EF4-FFF2-40B4-BE49-F238E27FC236}">
-                <a16:creationId xmlns:a16="http://schemas.microsoft.com/office/drawing/2014/main" id="{5F058ECD-F51F-4C81-A720-C1D08C841C31}"/>
+                <a16:creationId xmlns:a16="http://schemas.microsoft.com/office/drawing/2014/main" id="{995476E4-27D7-42CF-9C14-5F4E964E48A8}"/>
               </a:ext>
             </a:extLst>
           </p:cNvPr>
@@ -12122,7 +12071,7 @@
           <p:cNvPr id="2" name="title">
             <a:extLst xmlns:a="http://schemas.openxmlformats.org/drawingml/2006/main">
               <a:ext uri="{FF2B5EF4-FFF2-40B4-BE49-F238E27FC236}">
-                <a16:creationId xmlns:a16="http://schemas.microsoft.com/office/drawing/2014/main" id="{A5E3B66F-A7DD-4679-9840-1B991C2CE036}"/>
+                <a16:creationId xmlns:a16="http://schemas.microsoft.com/office/drawing/2014/main" id="{E5F4FD57-256E-47DF-820A-059196F14959}"/>
               </a:ext>
             </a:extLst>
           </p:cNvPr>
@@ -12179,7 +12128,7 @@
           <p:cNvPr id="3" name="page">
             <a:extLst xmlns:a="http://schemas.openxmlformats.org/drawingml/2006/main">
               <a:ext uri="{FF2B5EF4-FFF2-40B4-BE49-F238E27FC236}">
-                <a16:creationId xmlns:a16="http://schemas.microsoft.com/office/drawing/2014/main" id="{0095FC5E-C0CB-429E-8CB8-9FA00BE73215}"/>
+                <a16:creationId xmlns:a16="http://schemas.microsoft.com/office/drawing/2014/main" id="{26279580-BA9E-4D88-89E6-D69D2455B739}"/>
               </a:ext>
             </a:extLst>
           </p:cNvPr>
@@ -12236,7 +12185,7 @@
           <p:cNvPr id="4" name="text">
             <a:extLst xmlns:a="http://schemas.openxmlformats.org/drawingml/2006/main">
               <a:ext uri="{FF2B5EF4-FFF2-40B4-BE49-F238E27FC236}">
-                <a16:creationId xmlns:a16="http://schemas.microsoft.com/office/drawing/2014/main" id="{8DCBF2AB-28DD-4FE0-8113-0E983A20399B}"/>
+                <a16:creationId xmlns:a16="http://schemas.microsoft.com/office/drawing/2014/main" id="{E6F0EF37-B837-433B-9A32-48ED3ABA48E8}"/>
               </a:ext>
             </a:extLst>
           </p:cNvPr>
@@ -12293,7 +12242,7 @@
           <p:cNvPr id="5" name="text">
             <a:extLst xmlns:a="http://schemas.openxmlformats.org/drawingml/2006/main">
               <a:ext uri="{FF2B5EF4-FFF2-40B4-BE49-F238E27FC236}">
-                <a16:creationId xmlns:a16="http://schemas.microsoft.com/office/drawing/2014/main" id="{DCF41874-C411-4969-9742-384275E1CF42}"/>
+                <a16:creationId xmlns:a16="http://schemas.microsoft.com/office/drawing/2014/main" id="{4B6F7460-F4F6-4865-A40D-EE8FA3C8C138}"/>
               </a:ext>
             </a:extLst>
           </p:cNvPr>
@@ -12350,7 +12299,7 @@
           <p:cNvPr id="6" name="text">
             <a:extLst xmlns:a="http://schemas.openxmlformats.org/drawingml/2006/main">
               <a:ext uri="{FF2B5EF4-FFF2-40B4-BE49-F238E27FC236}">
-                <a16:creationId xmlns:a16="http://schemas.microsoft.com/office/drawing/2014/main" id="{C01E0403-33C0-47B0-B1CE-CFCD2BE57610}"/>
+                <a16:creationId xmlns:a16="http://schemas.microsoft.com/office/drawing/2014/main" id="{51E0C151-7BA4-4B2C-921F-8ABF99E0C3FF}"/>
               </a:ext>
             </a:extLst>
           </p:cNvPr>
@@ -12407,7 +12356,7 @@
           <p:cNvPr id="7" name="text">
             <a:extLst xmlns:a="http://schemas.openxmlformats.org/drawingml/2006/main">
               <a:ext uri="{FF2B5EF4-FFF2-40B4-BE49-F238E27FC236}">
-                <a16:creationId xmlns:a16="http://schemas.microsoft.com/office/drawing/2014/main" id="{89BEB10E-6C49-4B51-9D5E-33D6E1E86BDF}"/>
+                <a16:creationId xmlns:a16="http://schemas.microsoft.com/office/drawing/2014/main" id="{BFFDCFC5-4D23-43C6-9077-D93EE943B4AC}"/>
               </a:ext>
             </a:extLst>
           </p:cNvPr>
@@ -12464,7 +12413,7 @@
           <p:cNvPr id="8" name="text">
             <a:extLst xmlns:a="http://schemas.openxmlformats.org/drawingml/2006/main">
               <a:ext uri="{FF2B5EF4-FFF2-40B4-BE49-F238E27FC236}">
-                <a16:creationId xmlns:a16="http://schemas.microsoft.com/office/drawing/2014/main" id="{2699E270-7347-4992-9D62-DCFC361CDEB7}"/>
+                <a16:creationId xmlns:a16="http://schemas.microsoft.com/office/drawing/2014/main" id="{1AD8F7EF-F628-4E1F-BCEE-72CE5BA32C46}"/>
               </a:ext>
             </a:extLst>
           </p:cNvPr>
@@ -12521,7 +12470,7 @@
           <p:cNvPr id="9" name="text">
             <a:extLst xmlns:a="http://schemas.openxmlformats.org/drawingml/2006/main">
               <a:ext uri="{FF2B5EF4-FFF2-40B4-BE49-F238E27FC236}">
-                <a16:creationId xmlns:a16="http://schemas.microsoft.com/office/drawing/2014/main" id="{E18722BA-A418-4C99-BD9E-BFED7BC86F59}"/>
+                <a16:creationId xmlns:a16="http://schemas.microsoft.com/office/drawing/2014/main" id="{88B3C64B-FE14-4ABF-98E2-70FA12DDCC5F}"/>
               </a:ext>
             </a:extLst>
           </p:cNvPr>
@@ -12576,7 +12525,7 @@
     </p:spTree>
     <p:extLst>
       <p:ext uri="{BB962C8B-B14F-4D97-AF65-F5344CB8AC3E}">
-        <p14:creationId xmlns:p14="http://schemas.microsoft.com/office/powerpoint/2010/main" val="202896178"/>
+        <p14:creationId xmlns:p14="http://schemas.microsoft.com/office/powerpoint/2010/main" val="1114766798"/>
       </p:ext>
     </p:extLst>
   </p:cSld>
@@ -12607,7 +12556,7 @@
           <p:cNvPr id="12" name="course">
             <a:extLst xmlns:a="http://schemas.openxmlformats.org/drawingml/2006/main">
               <a:ext uri="{FF2B5EF4-FFF2-40B4-BE49-F238E27FC236}">
-                <a16:creationId xmlns:a16="http://schemas.microsoft.com/office/drawing/2014/main" id="{69ED3DF2-FD61-4D0B-B0C3-6D47CF491197}"/>
+                <a16:creationId xmlns:a16="http://schemas.microsoft.com/office/drawing/2014/main" id="{A59A0FC6-86AD-4C64-AD22-9EDFB6ED15D0}"/>
               </a:ext>
             </a:extLst>
           </p:cNvPr>
@@ -12664,7 +12613,7 @@
           <p:cNvPr id="2" name="title">
             <a:extLst xmlns:a="http://schemas.openxmlformats.org/drawingml/2006/main">
               <a:ext uri="{FF2B5EF4-FFF2-40B4-BE49-F238E27FC236}">
-                <a16:creationId xmlns:a16="http://schemas.microsoft.com/office/drawing/2014/main" id="{13C06046-88D4-469D-B2D1-B03826A951AC}"/>
+                <a16:creationId xmlns:a16="http://schemas.microsoft.com/office/drawing/2014/main" id="{AFE3B5FC-1B6A-43B4-8BF1-5B5CFF84FF60}"/>
               </a:ext>
             </a:extLst>
           </p:cNvPr>
@@ -12721,7 +12670,7 @@
           <p:cNvPr id="3" name="page">
             <a:extLst xmlns:a="http://schemas.openxmlformats.org/drawingml/2006/main">
               <a:ext uri="{FF2B5EF4-FFF2-40B4-BE49-F238E27FC236}">
-                <a16:creationId xmlns:a16="http://schemas.microsoft.com/office/drawing/2014/main" id="{1643F518-4324-425E-863F-0025FED0EA07}"/>
+                <a16:creationId xmlns:a16="http://schemas.microsoft.com/office/drawing/2014/main" id="{9F862273-C277-42FC-A37F-9ACD79DED385}"/>
               </a:ext>
             </a:extLst>
           </p:cNvPr>
@@ -12778,7 +12727,7 @@
           <p:cNvPr id="4" name="text">
             <a:extLst xmlns:a="http://schemas.openxmlformats.org/drawingml/2006/main">
               <a:ext uri="{FF2B5EF4-FFF2-40B4-BE49-F238E27FC236}">
-                <a16:creationId xmlns:a16="http://schemas.microsoft.com/office/drawing/2014/main" id="{2FEE931B-75CE-4354-B83F-CAAD57721B14}"/>
+                <a16:creationId xmlns:a16="http://schemas.microsoft.com/office/drawing/2014/main" id="{F51655F0-CBF2-4B17-8590-E5DB84E0B162}"/>
               </a:ext>
             </a:extLst>
           </p:cNvPr>
@@ -12835,7 +12784,7 @@
           <p:cNvPr id="5" name="text">
             <a:extLst xmlns:a="http://schemas.openxmlformats.org/drawingml/2006/main">
               <a:ext uri="{FF2B5EF4-FFF2-40B4-BE49-F238E27FC236}">
-                <a16:creationId xmlns:a16="http://schemas.microsoft.com/office/drawing/2014/main" id="{3BF3AC94-E931-4F9E-921B-0403A1CC27D8}"/>
+                <a16:creationId xmlns:a16="http://schemas.microsoft.com/office/drawing/2014/main" id="{19851FB0-3C6D-4648-BB68-B9E9F7702681}"/>
               </a:ext>
             </a:extLst>
           </p:cNvPr>
@@ -12892,7 +12841,7 @@
           <p:cNvPr id="6" name="text">
             <a:extLst xmlns:a="http://schemas.openxmlformats.org/drawingml/2006/main">
               <a:ext uri="{FF2B5EF4-FFF2-40B4-BE49-F238E27FC236}">
-                <a16:creationId xmlns:a16="http://schemas.microsoft.com/office/drawing/2014/main" id="{360880CA-9BDC-4CE2-A2B0-67E1199F8513}"/>
+                <a16:creationId xmlns:a16="http://schemas.microsoft.com/office/drawing/2014/main" id="{5463379E-3992-44A4-A363-FABED6909FA0}"/>
               </a:ext>
             </a:extLst>
           </p:cNvPr>
@@ -12949,7 +12898,7 @@
           <p:cNvPr id="7" name="text">
             <a:extLst xmlns:a="http://schemas.openxmlformats.org/drawingml/2006/main">
               <a:ext uri="{FF2B5EF4-FFF2-40B4-BE49-F238E27FC236}">
-                <a16:creationId xmlns:a16="http://schemas.microsoft.com/office/drawing/2014/main" id="{3D0ECC41-E2E5-4911-AFA2-55F5E7270AB5}"/>
+                <a16:creationId xmlns:a16="http://schemas.microsoft.com/office/drawing/2014/main" id="{3E0CEFFF-84AE-4DFD-811E-2E6809354881}"/>
               </a:ext>
             </a:extLst>
           </p:cNvPr>
@@ -13006,7 +12955,7 @@
           <p:cNvPr id="8" name="text">
             <a:extLst xmlns:a="http://schemas.openxmlformats.org/drawingml/2006/main">
               <a:ext uri="{FF2B5EF4-FFF2-40B4-BE49-F238E27FC236}">
-                <a16:creationId xmlns:a16="http://schemas.microsoft.com/office/drawing/2014/main" id="{7B30964A-36AA-4E04-B50F-0C23295826AF}"/>
+                <a16:creationId xmlns:a16="http://schemas.microsoft.com/office/drawing/2014/main" id="{2DED8EB3-AE47-47F2-BBD5-9363A578AFF2}"/>
               </a:ext>
             </a:extLst>
           </p:cNvPr>
@@ -13063,7 +13012,7 @@
           <p:cNvPr id="9" name="text">
             <a:extLst xmlns:a="http://schemas.openxmlformats.org/drawingml/2006/main">
               <a:ext uri="{FF2B5EF4-FFF2-40B4-BE49-F238E27FC236}">
-                <a16:creationId xmlns:a16="http://schemas.microsoft.com/office/drawing/2014/main" id="{2B38C4D0-046D-4F50-9571-5DD33AC137AB}"/>
+                <a16:creationId xmlns:a16="http://schemas.microsoft.com/office/drawing/2014/main" id="{13C318ED-1700-4C53-B482-7AC853AD5D02}"/>
               </a:ext>
             </a:extLst>
           </p:cNvPr>
@@ -13120,7 +13069,7 @@
           <p:cNvPr id="10" name="text">
             <a:extLst xmlns:a="http://schemas.openxmlformats.org/drawingml/2006/main">
               <a:ext uri="{FF2B5EF4-FFF2-40B4-BE49-F238E27FC236}">
-                <a16:creationId xmlns:a16="http://schemas.microsoft.com/office/drawing/2014/main" id="{2251A8FD-895D-41A8-811A-FD00425530FA}"/>
+                <a16:creationId xmlns:a16="http://schemas.microsoft.com/office/drawing/2014/main" id="{59938CD1-84B6-48D3-A891-A8B4274D2483}"/>
               </a:ext>
             </a:extLst>
           </p:cNvPr>
@@ -13177,7 +13126,7 @@
           <p:cNvPr id="11" name="text">
             <a:extLst xmlns:a="http://schemas.openxmlformats.org/drawingml/2006/main">
               <a:ext uri="{FF2B5EF4-FFF2-40B4-BE49-F238E27FC236}">
-                <a16:creationId xmlns:a16="http://schemas.microsoft.com/office/drawing/2014/main" id="{F4310011-5658-4DCD-BD09-620522C76544}"/>
+                <a16:creationId xmlns:a16="http://schemas.microsoft.com/office/drawing/2014/main" id="{2FE46551-6BB1-4A81-B520-CEC8739EE914}"/>
               </a:ext>
             </a:extLst>
           </p:cNvPr>
@@ -13232,7 +13181,7 @@
     </p:spTree>
     <p:extLst>
       <p:ext uri="{BB962C8B-B14F-4D97-AF65-F5344CB8AC3E}">
-        <p14:creationId xmlns:p14="http://schemas.microsoft.com/office/powerpoint/2010/main" val="1737427035"/>
+        <p14:creationId xmlns:p14="http://schemas.microsoft.com/office/powerpoint/2010/main" val="1686289337"/>
       </p:ext>
     </p:extLst>
   </p:cSld>
@@ -13263,7 +13212,7 @@
           <p:cNvPr id="6" name="course">
             <a:extLst xmlns:a="http://schemas.openxmlformats.org/drawingml/2006/main">
               <a:ext uri="{FF2B5EF4-FFF2-40B4-BE49-F238E27FC236}">
-                <a16:creationId xmlns:a16="http://schemas.microsoft.com/office/drawing/2014/main" id="{06DE1DC0-AD79-46FB-B738-9AB0B69945E4}"/>
+                <a16:creationId xmlns:a16="http://schemas.microsoft.com/office/drawing/2014/main" id="{EAEB55CB-E081-4D93-A3C7-594909FF1033}"/>
               </a:ext>
             </a:extLst>
           </p:cNvPr>
@@ -13320,7 +13269,7 @@
           <p:cNvPr id="2" name="title">
             <a:extLst xmlns:a="http://schemas.openxmlformats.org/drawingml/2006/main">
               <a:ext uri="{FF2B5EF4-FFF2-40B4-BE49-F238E27FC236}">
-                <a16:creationId xmlns:a16="http://schemas.microsoft.com/office/drawing/2014/main" id="{66D12F69-E72B-426A-BFF4-A1F085648C48}"/>
+                <a16:creationId xmlns:a16="http://schemas.microsoft.com/office/drawing/2014/main" id="{CEBE8D37-F16A-4A4F-B350-E8D5AA65B6E4}"/>
               </a:ext>
             </a:extLst>
           </p:cNvPr>
@@ -13377,7 +13326,7 @@
           <p:cNvPr id="3" name="page">
             <a:extLst xmlns:a="http://schemas.openxmlformats.org/drawingml/2006/main">
               <a:ext uri="{FF2B5EF4-FFF2-40B4-BE49-F238E27FC236}">
-                <a16:creationId xmlns:a16="http://schemas.microsoft.com/office/drawing/2014/main" id="{498DD163-A60C-4F5B-853E-7C05A47D8A87}"/>
+                <a16:creationId xmlns:a16="http://schemas.microsoft.com/office/drawing/2014/main" id="{11E2FCAA-9E36-4A97-80A6-D84E24B51996}"/>
               </a:ext>
             </a:extLst>
           </p:cNvPr>
@@ -13434,7 +13383,7 @@
           <p:cNvPr id="4" name="code">
             <a:extLst xmlns:a="http://schemas.openxmlformats.org/drawingml/2006/main">
               <a:ext uri="{FF2B5EF4-FFF2-40B4-BE49-F238E27FC236}">
-                <a16:creationId xmlns:a16="http://schemas.microsoft.com/office/drawing/2014/main" id="{C666FF10-05FD-4F84-8535-0E64AED90F5A}"/>
+                <a16:creationId xmlns:a16="http://schemas.microsoft.com/office/drawing/2014/main" id="{16DFD505-D9D4-4889-A1BA-88B9754C90EB}"/>
               </a:ext>
             </a:extLst>
           </p:cNvPr>
@@ -13590,7 +13539,7 @@
           <p:cNvPr id="5" name="text">
             <a:extLst xmlns:a="http://schemas.openxmlformats.org/drawingml/2006/main">
               <a:ext uri="{FF2B5EF4-FFF2-40B4-BE49-F238E27FC236}">
-                <a16:creationId xmlns:a16="http://schemas.microsoft.com/office/drawing/2014/main" id="{C7ADE931-AFEC-49C0-8A7D-5C384F6B2554}"/>
+                <a16:creationId xmlns:a16="http://schemas.microsoft.com/office/drawing/2014/main" id="{1F8E44F3-0638-4896-B7A2-411A05A4D14D}"/>
               </a:ext>
             </a:extLst>
           </p:cNvPr>
@@ -13645,7 +13594,7 @@
     </p:spTree>
     <p:extLst>
       <p:ext uri="{BB962C8B-B14F-4D97-AF65-F5344CB8AC3E}">
-        <p14:creationId xmlns:p14="http://schemas.microsoft.com/office/powerpoint/2010/main" val="1433905789"/>
+        <p14:creationId xmlns:p14="http://schemas.microsoft.com/office/powerpoint/2010/main" val="463600250"/>
       </p:ext>
     </p:extLst>
   </p:cSld>
@@ -13676,7 +13625,7 @@
           <p:cNvPr id="6" name="course">
             <a:extLst xmlns:a="http://schemas.openxmlformats.org/drawingml/2006/main">
               <a:ext uri="{FF2B5EF4-FFF2-40B4-BE49-F238E27FC236}">
-                <a16:creationId xmlns:a16="http://schemas.microsoft.com/office/drawing/2014/main" id="{FE90B08F-6EB5-4C80-BC53-7042A651C9A2}"/>
+                <a16:creationId xmlns:a16="http://schemas.microsoft.com/office/drawing/2014/main" id="{133824A9-99B1-4801-BFAC-A6715A97CCF5}"/>
               </a:ext>
             </a:extLst>
           </p:cNvPr>
@@ -13733,7 +13682,7 @@
           <p:cNvPr id="2" name="title">
             <a:extLst xmlns:a="http://schemas.openxmlformats.org/drawingml/2006/main">
               <a:ext uri="{FF2B5EF4-FFF2-40B4-BE49-F238E27FC236}">
-                <a16:creationId xmlns:a16="http://schemas.microsoft.com/office/drawing/2014/main" id="{4583CBF5-6320-4119-9373-3500002384E7}"/>
+                <a16:creationId xmlns:a16="http://schemas.microsoft.com/office/drawing/2014/main" id="{41A8BA6F-A90A-4E75-B948-25CA12F7E737}"/>
               </a:ext>
             </a:extLst>
           </p:cNvPr>
@@ -13790,7 +13739,7 @@
           <p:cNvPr id="3" name="page">
             <a:extLst xmlns:a="http://schemas.openxmlformats.org/drawingml/2006/main">
               <a:ext uri="{FF2B5EF4-FFF2-40B4-BE49-F238E27FC236}">
-                <a16:creationId xmlns:a16="http://schemas.microsoft.com/office/drawing/2014/main" id="{2B8545B5-B0A1-47E1-8DA3-AE9B7F5C290A}"/>
+                <a16:creationId xmlns:a16="http://schemas.microsoft.com/office/drawing/2014/main" id="{5C483C04-472C-4747-9A31-8463AB8CA1F5}"/>
               </a:ext>
             </a:extLst>
           </p:cNvPr>
@@ -13847,7 +13796,7 @@
           <p:cNvPr id="4" name="code">
             <a:extLst xmlns:a="http://schemas.openxmlformats.org/drawingml/2006/main">
               <a:ext uri="{FF2B5EF4-FFF2-40B4-BE49-F238E27FC236}">
-                <a16:creationId xmlns:a16="http://schemas.microsoft.com/office/drawing/2014/main" id="{1A1157CF-33CF-4071-987A-8FF30020EF7E}"/>
+                <a16:creationId xmlns:a16="http://schemas.microsoft.com/office/drawing/2014/main" id="{A474F468-C44C-4EF7-98C8-0EF45A061CB3}"/>
               </a:ext>
             </a:extLst>
           </p:cNvPr>
@@ -14003,7 +13952,7 @@
           <p:cNvPr id="5" name="text">
             <a:extLst xmlns:a="http://schemas.openxmlformats.org/drawingml/2006/main">
               <a:ext uri="{FF2B5EF4-FFF2-40B4-BE49-F238E27FC236}">
-                <a16:creationId xmlns:a16="http://schemas.microsoft.com/office/drawing/2014/main" id="{1F9C3D71-09BA-48E6-9C3F-7944182E463D}"/>
+                <a16:creationId xmlns:a16="http://schemas.microsoft.com/office/drawing/2014/main" id="{B7BDFB4F-54E1-4085-980C-F1CE2E0C8B82}"/>
               </a:ext>
             </a:extLst>
           </p:cNvPr>
@@ -14058,7 +14007,7 @@
     </p:spTree>
     <p:extLst>
       <p:ext uri="{BB962C8B-B14F-4D97-AF65-F5344CB8AC3E}">
-        <p14:creationId xmlns:p14="http://schemas.microsoft.com/office/powerpoint/2010/main" val="2077292433"/>
+        <p14:creationId xmlns:p14="http://schemas.microsoft.com/office/powerpoint/2010/main" val="438000330"/>
       </p:ext>
     </p:extLst>
   </p:cSld>
@@ -14089,7 +14038,7 @@
           <p:cNvPr id="11" name="course">
             <a:extLst xmlns:a="http://schemas.openxmlformats.org/drawingml/2006/main">
               <a:ext uri="{FF2B5EF4-FFF2-40B4-BE49-F238E27FC236}">
-                <a16:creationId xmlns:a16="http://schemas.microsoft.com/office/drawing/2014/main" id="{87424C6D-9123-4314-9E7C-C7C5AE22F40A}"/>
+                <a16:creationId xmlns:a16="http://schemas.microsoft.com/office/drawing/2014/main" id="{581A9820-6375-4671-90D7-2F42266011E4}"/>
               </a:ext>
             </a:extLst>
           </p:cNvPr>
@@ -14146,7 +14095,7 @@
           <p:cNvPr id="2" name="title">
             <a:extLst xmlns:a="http://schemas.openxmlformats.org/drawingml/2006/main">
               <a:ext uri="{FF2B5EF4-FFF2-40B4-BE49-F238E27FC236}">
-                <a16:creationId xmlns:a16="http://schemas.microsoft.com/office/drawing/2014/main" id="{88BC5D19-CEDA-45FD-B083-975E53A79D53}"/>
+                <a16:creationId xmlns:a16="http://schemas.microsoft.com/office/drawing/2014/main" id="{55018F4E-016C-4721-95CB-85BC6BD49216}"/>
               </a:ext>
             </a:extLst>
           </p:cNvPr>
@@ -14203,7 +14152,7 @@
           <p:cNvPr id="3" name="page">
             <a:extLst xmlns:a="http://schemas.openxmlformats.org/drawingml/2006/main">
               <a:ext uri="{FF2B5EF4-FFF2-40B4-BE49-F238E27FC236}">
-                <a16:creationId xmlns:a16="http://schemas.microsoft.com/office/drawing/2014/main" id="{8192C4CA-FAEF-40FE-AEB7-2B2ACF058A84}"/>
+                <a16:creationId xmlns:a16="http://schemas.microsoft.com/office/drawing/2014/main" id="{24FF7C02-D2FF-4438-A0CC-448487F3CA77}"/>
               </a:ext>
             </a:extLst>
           </p:cNvPr>
@@ -14260,7 +14209,7 @@
           <p:cNvPr id="4" name="text">
             <a:extLst xmlns:a="http://schemas.openxmlformats.org/drawingml/2006/main">
               <a:ext uri="{FF2B5EF4-FFF2-40B4-BE49-F238E27FC236}">
-                <a16:creationId xmlns:a16="http://schemas.microsoft.com/office/drawing/2014/main" id="{3D4FCE0C-8F37-4BF3-B04A-60B041D206E7}"/>
+                <a16:creationId xmlns:a16="http://schemas.microsoft.com/office/drawing/2014/main" id="{2A9FB539-3815-4AB1-8D9C-E12A9DA0EDFE}"/>
               </a:ext>
             </a:extLst>
           </p:cNvPr>
@@ -14317,7 +14266,7 @@
           <p:cNvPr id="5" name="text">
             <a:extLst xmlns:a="http://schemas.openxmlformats.org/drawingml/2006/main">
               <a:ext uri="{FF2B5EF4-FFF2-40B4-BE49-F238E27FC236}">
-                <a16:creationId xmlns:a16="http://schemas.microsoft.com/office/drawing/2014/main" id="{2B5F5633-6C70-4249-AA15-812ECC8E0858}"/>
+                <a16:creationId xmlns:a16="http://schemas.microsoft.com/office/drawing/2014/main" id="{7F4C448B-3A3A-4920-AFF9-E2F42209B2D9}"/>
               </a:ext>
             </a:extLst>
           </p:cNvPr>
@@ -14374,7 +14323,7 @@
           <p:cNvPr id="6" name="text">
             <a:extLst xmlns:a="http://schemas.openxmlformats.org/drawingml/2006/main">
               <a:ext uri="{FF2B5EF4-FFF2-40B4-BE49-F238E27FC236}">
-                <a16:creationId xmlns:a16="http://schemas.microsoft.com/office/drawing/2014/main" id="{2B8ADAEB-175A-4DCB-8E51-2AE254BC2E9C}"/>
+                <a16:creationId xmlns:a16="http://schemas.microsoft.com/office/drawing/2014/main" id="{D6CB9FA8-D908-44E6-96D9-C842EE9CBFAF}"/>
               </a:ext>
             </a:extLst>
           </p:cNvPr>
@@ -14431,7 +14380,7 @@
           <p:cNvPr id="7" name="text">
             <a:extLst xmlns:a="http://schemas.openxmlformats.org/drawingml/2006/main">
               <a:ext uri="{FF2B5EF4-FFF2-40B4-BE49-F238E27FC236}">
-                <a16:creationId xmlns:a16="http://schemas.microsoft.com/office/drawing/2014/main" id="{FF4223FF-3B32-4FAF-9EB5-261869C67C4F}"/>
+                <a16:creationId xmlns:a16="http://schemas.microsoft.com/office/drawing/2014/main" id="{A502CC4F-B125-4AC9-BFF5-E292C811E86C}"/>
               </a:ext>
             </a:extLst>
           </p:cNvPr>
@@ -14488,7 +14437,7 @@
           <p:cNvPr id="8" name="text">
             <a:extLst xmlns:a="http://schemas.openxmlformats.org/drawingml/2006/main">
               <a:ext uri="{FF2B5EF4-FFF2-40B4-BE49-F238E27FC236}">
-                <a16:creationId xmlns:a16="http://schemas.microsoft.com/office/drawing/2014/main" id="{59E51484-B204-4E44-95A1-301424C10EB4}"/>
+                <a16:creationId xmlns:a16="http://schemas.microsoft.com/office/drawing/2014/main" id="{DC8319C9-2685-4F1C-9D21-1F11AA117377}"/>
               </a:ext>
             </a:extLst>
           </p:cNvPr>
@@ -14545,7 +14494,7 @@
           <p:cNvPr id="9" name="text">
             <a:extLst xmlns:a="http://schemas.openxmlformats.org/drawingml/2006/main">
               <a:ext uri="{FF2B5EF4-FFF2-40B4-BE49-F238E27FC236}">
-                <a16:creationId xmlns:a16="http://schemas.microsoft.com/office/drawing/2014/main" id="{F5C264D5-07CA-41C5-AAAD-5E241F60A69E}"/>
+                <a16:creationId xmlns:a16="http://schemas.microsoft.com/office/drawing/2014/main" id="{0EC3C7E0-99BC-4FBD-97F1-4A0001624A36}"/>
               </a:ext>
             </a:extLst>
           </p:cNvPr>
@@ -14602,7 +14551,7 @@
           <p:cNvPr id="10" name="text">
             <a:extLst xmlns:a="http://schemas.openxmlformats.org/drawingml/2006/main">
               <a:ext uri="{FF2B5EF4-FFF2-40B4-BE49-F238E27FC236}">
-                <a16:creationId xmlns:a16="http://schemas.microsoft.com/office/drawing/2014/main" id="{D785B611-CD71-4781-AA34-0DC370BB9E8C}"/>
+                <a16:creationId xmlns:a16="http://schemas.microsoft.com/office/drawing/2014/main" id="{0DA948EC-530B-48BE-8727-C1564C80533B}"/>
               </a:ext>
             </a:extLst>
           </p:cNvPr>
@@ -14657,7 +14606,7 @@
     </p:spTree>
     <p:extLst>
       <p:ext uri="{BB962C8B-B14F-4D97-AF65-F5344CB8AC3E}">
-        <p14:creationId xmlns:p14="http://schemas.microsoft.com/office/powerpoint/2010/main" val="1394685178"/>
+        <p14:creationId xmlns:p14="http://schemas.microsoft.com/office/powerpoint/2010/main" val="23353857"/>
       </p:ext>
     </p:extLst>
   </p:cSld>
@@ -14688,7 +14637,7 @@
           <p:cNvPr id="11" name="course">
             <a:extLst xmlns:a="http://schemas.openxmlformats.org/drawingml/2006/main">
               <a:ext uri="{FF2B5EF4-FFF2-40B4-BE49-F238E27FC236}">
-                <a16:creationId xmlns:a16="http://schemas.microsoft.com/office/drawing/2014/main" id="{4FB77A0A-203F-4122-9EEC-1502D9193618}"/>
+                <a16:creationId xmlns:a16="http://schemas.microsoft.com/office/drawing/2014/main" id="{3F8DF515-DC0B-40B9-989E-E43F186D2D18}"/>
               </a:ext>
             </a:extLst>
           </p:cNvPr>
@@ -14745,7 +14694,7 @@
           <p:cNvPr id="2" name="title">
             <a:extLst xmlns:a="http://schemas.openxmlformats.org/drawingml/2006/main">
               <a:ext uri="{FF2B5EF4-FFF2-40B4-BE49-F238E27FC236}">
-                <a16:creationId xmlns:a16="http://schemas.microsoft.com/office/drawing/2014/main" id="{B76652DB-E482-4D4B-AA25-23EC35039FAC}"/>
+                <a16:creationId xmlns:a16="http://schemas.microsoft.com/office/drawing/2014/main" id="{80FFB6B8-0D52-4903-8CF5-676F69142EF3}"/>
               </a:ext>
             </a:extLst>
           </p:cNvPr>
@@ -14802,7 +14751,7 @@
           <p:cNvPr id="3" name="page">
             <a:extLst xmlns:a="http://schemas.openxmlformats.org/drawingml/2006/main">
               <a:ext uri="{FF2B5EF4-FFF2-40B4-BE49-F238E27FC236}">
-                <a16:creationId xmlns:a16="http://schemas.microsoft.com/office/drawing/2014/main" id="{B2DD60B1-0FA7-42A1-A87D-859820EC3EC7}"/>
+                <a16:creationId xmlns:a16="http://schemas.microsoft.com/office/drawing/2014/main" id="{BA6196B4-CECE-45BB-AA7F-A0B1FB3C9038}"/>
               </a:ext>
             </a:extLst>
           </p:cNvPr>
@@ -14859,7 +14808,7 @@
           <p:cNvPr id="4" name="text">
             <a:extLst xmlns:a="http://schemas.openxmlformats.org/drawingml/2006/main">
               <a:ext uri="{FF2B5EF4-FFF2-40B4-BE49-F238E27FC236}">
-                <a16:creationId xmlns:a16="http://schemas.microsoft.com/office/drawing/2014/main" id="{77A3D9B4-ED0B-44D1-A162-66E0C26264BA}"/>
+                <a16:creationId xmlns:a16="http://schemas.microsoft.com/office/drawing/2014/main" id="{76B16583-D4D7-4C86-A7A8-EDC29EFBDC7D}"/>
               </a:ext>
             </a:extLst>
           </p:cNvPr>
@@ -14916,7 +14865,7 @@
           <p:cNvPr id="5" name="text">
             <a:extLst xmlns:a="http://schemas.openxmlformats.org/drawingml/2006/main">
               <a:ext uri="{FF2B5EF4-FFF2-40B4-BE49-F238E27FC236}">
-                <a16:creationId xmlns:a16="http://schemas.microsoft.com/office/drawing/2014/main" id="{B40FD066-374D-4AD5-B950-0A251C57402F}"/>
+                <a16:creationId xmlns:a16="http://schemas.microsoft.com/office/drawing/2014/main" id="{73E565E0-B34D-4331-B380-1921C8AB76E3}"/>
               </a:ext>
             </a:extLst>
           </p:cNvPr>
@@ -14973,7 +14922,7 @@
           <p:cNvPr id="6" name="text">
             <a:extLst xmlns:a="http://schemas.openxmlformats.org/drawingml/2006/main">
               <a:ext uri="{FF2B5EF4-FFF2-40B4-BE49-F238E27FC236}">
-                <a16:creationId xmlns:a16="http://schemas.microsoft.com/office/drawing/2014/main" id="{0EC26BB8-E994-4C32-B470-B0E25A1FEA65}"/>
+                <a16:creationId xmlns:a16="http://schemas.microsoft.com/office/drawing/2014/main" id="{CB355C99-AD91-44EC-8AC4-7BC4256B7FDD}"/>
               </a:ext>
             </a:extLst>
           </p:cNvPr>
@@ -15030,7 +14979,7 @@
           <p:cNvPr id="7" name="text">
             <a:extLst xmlns:a="http://schemas.openxmlformats.org/drawingml/2006/main">
               <a:ext uri="{FF2B5EF4-FFF2-40B4-BE49-F238E27FC236}">
-                <a16:creationId xmlns:a16="http://schemas.microsoft.com/office/drawing/2014/main" id="{6D1A3546-B380-4BA7-A8FA-54C2F77C5538}"/>
+                <a16:creationId xmlns:a16="http://schemas.microsoft.com/office/drawing/2014/main" id="{8BD262CA-AB6D-49B4-B410-899DED45189C}"/>
               </a:ext>
             </a:extLst>
           </p:cNvPr>
@@ -15087,7 +15036,7 @@
           <p:cNvPr id="8" name="text">
             <a:extLst xmlns:a="http://schemas.openxmlformats.org/drawingml/2006/main">
               <a:ext uri="{FF2B5EF4-FFF2-40B4-BE49-F238E27FC236}">
-                <a16:creationId xmlns:a16="http://schemas.microsoft.com/office/drawing/2014/main" id="{947BCD1A-AF23-4708-8DF7-04AB8EC5BD20}"/>
+                <a16:creationId xmlns:a16="http://schemas.microsoft.com/office/drawing/2014/main" id="{40CA00EC-D815-4652-9AE9-DEF2FBC45450}"/>
               </a:ext>
             </a:extLst>
           </p:cNvPr>
@@ -15144,7 +15093,7 @@
           <p:cNvPr id="9" name="text">
             <a:extLst xmlns:a="http://schemas.openxmlformats.org/drawingml/2006/main">
               <a:ext uri="{FF2B5EF4-FFF2-40B4-BE49-F238E27FC236}">
-                <a16:creationId xmlns:a16="http://schemas.microsoft.com/office/drawing/2014/main" id="{56F78E88-4E23-4281-B636-A6106214ECC5}"/>
+                <a16:creationId xmlns:a16="http://schemas.microsoft.com/office/drawing/2014/main" id="{93DB729B-67A9-42A5-9A84-FE984C7D1FFB}"/>
               </a:ext>
             </a:extLst>
           </p:cNvPr>
@@ -15201,7 +15150,7 @@
           <p:cNvPr id="10" name="text">
             <a:extLst xmlns:a="http://schemas.openxmlformats.org/drawingml/2006/main">
               <a:ext uri="{FF2B5EF4-FFF2-40B4-BE49-F238E27FC236}">
-                <a16:creationId xmlns:a16="http://schemas.microsoft.com/office/drawing/2014/main" id="{18A32870-F3CA-40D4-B90C-A05F59A2DBFE}"/>
+                <a16:creationId xmlns:a16="http://schemas.microsoft.com/office/drawing/2014/main" id="{F10FDB56-E0BF-4AE0-A4F1-B7CACBD53DB5}"/>
               </a:ext>
             </a:extLst>
           </p:cNvPr>
@@ -15256,7 +15205,7 @@
     </p:spTree>
     <p:extLst>
       <p:ext uri="{BB962C8B-B14F-4D97-AF65-F5344CB8AC3E}">
-        <p14:creationId xmlns:p14="http://schemas.microsoft.com/office/powerpoint/2010/main" val="199426630"/>
+        <p14:creationId xmlns:p14="http://schemas.microsoft.com/office/powerpoint/2010/main" val="2028152262"/>
       </p:ext>
     </p:extLst>
   </p:cSld>

--- a/site/docs/MIE402_Lecture02_Sampling_Jupyter_PreLab1_Fall2026.pptx
+++ b/site/docs/MIE402_Lecture02_Sampling_Jupyter_PreLab1_Fall2026.pptx
@@ -1,3 +1,519 @@
+
+<file path=ppt/presentation.xml><?xml version="1.0" encoding="utf-8"?>
+<p:presentation xmlns:p="http://schemas.openxmlformats.org/presentationml/2006/main">
+  <p:sldMasterIdLst>
+    <p:sldMasterId xmlns:r="http://schemas.openxmlformats.org/officeDocument/2006/relationships" id="2147483648" r:id="R49d13992dc214991"/>
+  </p:sldMasterIdLst>
+  <p:notesMasterIdLst>
+    <p:notesMasterId xmlns:r="http://schemas.openxmlformats.org/officeDocument/2006/relationships" r:id="R235865c8eae84aac"/>
+  </p:notesMasterIdLst>
+  <p:sldIdLst>
+    <p:sldId xmlns:r="http://schemas.openxmlformats.org/officeDocument/2006/relationships" id="256" r:id="R54f6654cac9e4d65"/>
+    <p:sldId xmlns:r="http://schemas.openxmlformats.org/officeDocument/2006/relationships" id="257" r:id="Rf42113260478471d"/>
+    <p:sldId xmlns:r="http://schemas.openxmlformats.org/officeDocument/2006/relationships" id="258" r:id="Rfecc586111fe4810"/>
+    <p:sldId xmlns:r="http://schemas.openxmlformats.org/officeDocument/2006/relationships" id="259" r:id="Rd6eb6def048a40b4"/>
+    <p:sldId xmlns:r="http://schemas.openxmlformats.org/officeDocument/2006/relationships" id="260" r:id="Rc61311b015144e8b"/>
+    <p:sldId xmlns:r="http://schemas.openxmlformats.org/officeDocument/2006/relationships" id="261" r:id="Rd5a40516325944b4"/>
+    <p:sldId xmlns:r="http://schemas.openxmlformats.org/officeDocument/2006/relationships" id="262" r:id="Rdd776c0cce90416b"/>
+    <p:sldId xmlns:r="http://schemas.openxmlformats.org/officeDocument/2006/relationships" id="263" r:id="R3ecfd743211d42d2"/>
+    <p:sldId xmlns:r="http://schemas.openxmlformats.org/officeDocument/2006/relationships" id="264" r:id="Re818a916208e487d"/>
+    <p:sldId xmlns:r="http://schemas.openxmlformats.org/officeDocument/2006/relationships" id="265" r:id="Rcffc398728a742eb"/>
+    <p:sldId xmlns:r="http://schemas.openxmlformats.org/officeDocument/2006/relationships" id="266" r:id="R23a2b60c31014873"/>
+    <p:sldId xmlns:r="http://schemas.openxmlformats.org/officeDocument/2006/relationships" id="267" r:id="Rf0c25dee53de4f0e"/>
+    <p:sldId xmlns:r="http://schemas.openxmlformats.org/officeDocument/2006/relationships" id="268" r:id="Ra28fcf58d58b481c"/>
+    <p:sldId xmlns:r="http://schemas.openxmlformats.org/officeDocument/2006/relationships" id="269" r:id="R67b4e3b5ce314a72"/>
+    <p:sldId xmlns:r="http://schemas.openxmlformats.org/officeDocument/2006/relationships" id="270" r:id="R0026ff6c5ab642b3"/>
+    <p:sldId xmlns:r="http://schemas.openxmlformats.org/officeDocument/2006/relationships" id="271" r:id="Raf6a9c9831624d73"/>
+    <p:sldId xmlns:r="http://schemas.openxmlformats.org/officeDocument/2006/relationships" id="272" r:id="R679bf41163f94f22"/>
+    <p:sldId xmlns:r="http://schemas.openxmlformats.org/officeDocument/2006/relationships" id="273" r:id="Rb229d0bae0ac4ec4"/>
+    <p:sldId xmlns:r="http://schemas.openxmlformats.org/officeDocument/2006/relationships" id="274" r:id="R8514c89f55434f7e"/>
+    <p:sldId xmlns:r="http://schemas.openxmlformats.org/officeDocument/2006/relationships" id="275" r:id="Rc4e1f9386fdc40fc"/>
+    <p:sldId xmlns:r="http://schemas.openxmlformats.org/officeDocument/2006/relationships" id="276" r:id="R52190d235cb24db6"/>
+    <p:sldId xmlns:r="http://schemas.openxmlformats.org/officeDocument/2006/relationships" id="277" r:id="R5af46803480c44d4"/>
+    <p:sldId xmlns:r="http://schemas.openxmlformats.org/officeDocument/2006/relationships" id="278" r:id="R05055a95e059403c"/>
+    <p:sldId xmlns:r="http://schemas.openxmlformats.org/officeDocument/2006/relationships" id="279" r:id="R67660ef8ee7348ea"/>
+  </p:sldIdLst>
+  <p:sldSz cx="12192000" cy="6858000"/>
+  <p:notesSz cx="6858000" cy="9144000"/>
+</p:presentation>
+</file>
+
+<file path=ppt/notesMasters/notesMaster1.xml><?xml version="1.0" encoding="utf-8"?>
+<p:notesMaster xmlns:p="http://schemas.openxmlformats.org/presentationml/2006/main">
+  <p:cSld>
+    <p:bg>
+      <p:bgRef idx="1001">
+        <a:schemeClr xmlns:a="http://schemas.openxmlformats.org/drawingml/2006/main" val="bg1"/>
+      </p:bgRef>
+    </p:bg>
+    <p:spTree>
+      <p:nvGrpSpPr>
+        <p:cNvPr id="1" name=""/>
+        <p:cNvGrpSpPr/>
+        <p:nvPr/>
+      </p:nvGrpSpPr>
+      <p:grpSpPr>
+        <a:xfrm xmlns:a="http://schemas.openxmlformats.org/drawingml/2006/main"/>
+      </p:grpSpPr>
+      <p:sp>
+        <p:nvSpPr>
+          <p:cNvPr id="2" name="Header Placeholder"/>
+          <p:cNvSpPr/>
+          <p:nvPr>
+            <p:ph type="hdr" sz="quarter"/>
+          </p:nvPr>
+        </p:nvSpPr>
+        <p:spPr>
+          <a:prstGeom xmlns:a="http://schemas.openxmlformats.org/drawingml/2006/main" prst="rect">
+            <a:avLst/>
+          </a:prstGeom>
+        </p:spPr>
+        <p:txBody>
+          <a:bodyPr xmlns:a="http://schemas.openxmlformats.org/drawingml/2006/main"/>
+          <a:lstStyle xmlns:a="http://schemas.openxmlformats.org/drawingml/2006/main"/>
+          <a:p xmlns:a="http://schemas.openxmlformats.org/drawingml/2006/main"/>
+        </p:txBody>
+      </p:sp>
+      <p:sp>
+        <p:nvSpPr>
+          <p:cNvPr id="3" name="Date Placeholder"/>
+          <p:cNvSpPr/>
+          <p:nvPr>
+            <p:ph type="dt" sz="quarter" idx="1"/>
+          </p:nvPr>
+        </p:nvSpPr>
+        <p:spPr>
+          <a:prstGeom xmlns:a="http://schemas.openxmlformats.org/drawingml/2006/main" prst="rect">
+            <a:avLst/>
+          </a:prstGeom>
+        </p:spPr>
+        <p:txBody>
+          <a:bodyPr xmlns:a="http://schemas.openxmlformats.org/drawingml/2006/main"/>
+          <a:lstStyle xmlns:a="http://schemas.openxmlformats.org/drawingml/2006/main"/>
+          <a:p xmlns:a="http://schemas.openxmlformats.org/drawingml/2006/main"/>
+        </p:txBody>
+      </p:sp>
+      <p:sp>
+        <p:nvSpPr>
+          <p:cNvPr id="4" name="Slide Image Placeholder"/>
+          <p:cNvSpPr/>
+          <p:nvPr>
+            <p:ph type="sldImg" idx="2"/>
+          </p:nvPr>
+        </p:nvSpPr>
+        <p:spPr>
+          <a:prstGeom xmlns:a="http://schemas.openxmlformats.org/drawingml/2006/main" prst="rect">
+            <a:avLst/>
+          </a:prstGeom>
+        </p:spPr>
+        <p:txBody>
+          <a:bodyPr xmlns:a="http://schemas.openxmlformats.org/drawingml/2006/main"/>
+          <a:lstStyle xmlns:a="http://schemas.openxmlformats.org/drawingml/2006/main"/>
+          <a:p xmlns:a="http://schemas.openxmlformats.org/drawingml/2006/main"/>
+        </p:txBody>
+      </p:sp>
+      <p:sp>
+        <p:nvSpPr>
+          <p:cNvPr id="5" name="Notes Placeholder"/>
+          <p:cNvSpPr/>
+          <p:nvPr>
+            <p:ph type="body" sz="quarter" idx="3"/>
+          </p:nvPr>
+        </p:nvSpPr>
+        <p:spPr>
+          <a:prstGeom xmlns:a="http://schemas.openxmlformats.org/drawingml/2006/main" prst="rect">
+            <a:avLst/>
+          </a:prstGeom>
+        </p:spPr>
+        <p:txBody>
+          <a:bodyPr xmlns:a="http://schemas.openxmlformats.org/drawingml/2006/main"/>
+          <a:lstStyle xmlns:a="http://schemas.openxmlformats.org/drawingml/2006/main"/>
+          <a:p xmlns:a="http://schemas.openxmlformats.org/drawingml/2006/main"/>
+        </p:txBody>
+      </p:sp>
+      <p:sp>
+        <p:nvSpPr>
+          <p:cNvPr id="6" name="Footer Placeholder"/>
+          <p:cNvSpPr/>
+          <p:nvPr>
+            <p:ph type="ftr" sz="quarter" idx="4"/>
+          </p:nvPr>
+        </p:nvSpPr>
+        <p:spPr>
+          <a:prstGeom xmlns:a="http://schemas.openxmlformats.org/drawingml/2006/main" prst="rect">
+            <a:avLst/>
+          </a:prstGeom>
+        </p:spPr>
+        <p:txBody>
+          <a:bodyPr xmlns:a="http://schemas.openxmlformats.org/drawingml/2006/main"/>
+          <a:lstStyle xmlns:a="http://schemas.openxmlformats.org/drawingml/2006/main"/>
+          <a:p xmlns:a="http://schemas.openxmlformats.org/drawingml/2006/main"/>
+        </p:txBody>
+      </p:sp>
+      <p:sp>
+        <p:nvSpPr>
+          <p:cNvPr id="7" name="Slide Number Placeholder"/>
+          <p:cNvSpPr/>
+          <p:nvPr>
+            <p:ph type="sldNum" sz="quarter" idx="5"/>
+          </p:nvPr>
+        </p:nvSpPr>
+        <p:spPr>
+          <a:prstGeom xmlns:a="http://schemas.openxmlformats.org/drawingml/2006/main" prst="rect">
+            <a:avLst/>
+          </a:prstGeom>
+        </p:spPr>
+        <p:txBody>
+          <a:bodyPr xmlns:a="http://schemas.openxmlformats.org/drawingml/2006/main"/>
+          <a:lstStyle xmlns:a="http://schemas.openxmlformats.org/drawingml/2006/main"/>
+          <a:p xmlns:a="http://schemas.openxmlformats.org/drawingml/2006/main"/>
+        </p:txBody>
+      </p:sp>
+    </p:spTree>
+  </p:cSld>
+  <p:clrMap bg1="lt1" tx1="dk1" bg2="lt2" tx2="dk2" accent1="accent1" accent2="accent2" accent3="accent3" accent4="accent4" accent5="accent5" accent6="accent6" hlink="hlink" folHlink="folHlink"/>
+  <p:notesStyle>
+    <a:lvl1pPr xmlns:a="http://schemas.openxmlformats.org/drawingml/2006/main" marL="0" algn="l" defTabSz="914400" rtl="0" eaLnBrk="1" latinLnBrk="0" hangingPunct="1">
+      <a:defRPr sz="1200" kern="1200"/>
+    </a:lvl1pPr>
+  </p:notesStyle>
+</p:notesMaster>
+</file>
+
+<file path=ppt/notesMasters/theme/theme3.xml><?xml version="1.0" encoding="utf-8"?>
+<a:theme xmlns:a="http://schemas.openxmlformats.org/drawingml/2006/main" name="ChatGPT">
+  <a:themeElements>
+    <a:clrScheme name="ChatGPT">
+      <a:dk1>
+        <a:srgbClr val="000000"/>
+      </a:dk1>
+      <a:lt1>
+        <a:srgbClr val="FFFFFF"/>
+      </a:lt1>
+      <a:dk2>
+        <a:srgbClr val="0E2841"/>
+      </a:dk2>
+      <a:lt2>
+        <a:srgbClr val="E8E8E8"/>
+      </a:lt2>
+      <a:accent1>
+        <a:srgbClr val="156082"/>
+      </a:accent1>
+      <a:accent2>
+        <a:srgbClr val="E97132"/>
+      </a:accent2>
+      <a:accent3>
+        <a:srgbClr val="196B24"/>
+      </a:accent3>
+      <a:accent4>
+        <a:srgbClr val="0F9ED5"/>
+      </a:accent4>
+      <a:accent5>
+        <a:srgbClr val="A02B93"/>
+      </a:accent5>
+      <a:accent6>
+        <a:srgbClr val="4EA72E"/>
+      </a:accent6>
+      <a:hlink>
+        <a:srgbClr val="467886"/>
+      </a:hlink>
+      <a:folHlink>
+        <a:srgbClr val="96607D"/>
+      </a:folHlink>
+    </a:clrScheme>
+    <a:fontScheme name="Office">
+      <a:majorFont>
+        <a:latin typeface="Calibri Light"/>
+        <a:ea typeface="Calibri Light"/>
+        <a:cs typeface="Calibri Light"/>
+      </a:majorFont>
+      <a:minorFont>
+        <a:latin typeface="Calibri"/>
+        <a:ea typeface="Calibri"/>
+        <a:cs typeface="Calibri"/>
+      </a:minorFont>
+    </a:fontScheme>
+    <a:fmtScheme name="ChatGPT">
+      <a:fillStyleLst>
+        <a:solidFill>
+          <a:schemeClr val="phClr"/>
+        </a:solidFill>
+        <a:gradFill>
+          <a:gsLst>
+            <a:gs pos="0">
+              <a:schemeClr val="phClr">
+                <a:tint val="67000"/>
+                <a:lumMod val="110000"/>
+                <a:satMod val="105000"/>
+              </a:schemeClr>
+            </a:gs>
+            <a:gs pos="50000">
+              <a:schemeClr val="phClr">
+                <a:tint val="73000"/>
+                <a:lumMod val="105000"/>
+                <a:satMod val="103000"/>
+              </a:schemeClr>
+            </a:gs>
+            <a:gs pos="100000">
+              <a:schemeClr val="phClr">
+                <a:tint val="81000"/>
+                <a:lumMod val="105000"/>
+                <a:satMod val="109000"/>
+              </a:schemeClr>
+            </a:gs>
+          </a:gsLst>
+          <a:lin ang="5400000" scaled="0"/>
+        </a:gradFill>
+        <a:gradFill>
+          <a:gsLst>
+            <a:gs pos="0">
+              <a:schemeClr val="phClr">
+                <a:tint val="94000"/>
+                <a:lumMod val="102000"/>
+                <a:satMod val="103000"/>
+              </a:schemeClr>
+            </a:gs>
+            <a:gs pos="50000">
+              <a:schemeClr val="phClr">
+                <a:shade val="100000"/>
+                <a:lumMod val="100000"/>
+                <a:satMod val="110000"/>
+              </a:schemeClr>
+            </a:gs>
+            <a:gs pos="100000">
+              <a:schemeClr val="phClr">
+                <a:shade val="78000"/>
+                <a:lumMod val="99000"/>
+                <a:satMod val="120000"/>
+              </a:schemeClr>
+            </a:gs>
+          </a:gsLst>
+          <a:lin ang="5400000" scaled="0"/>
+        </a:gradFill>
+      </a:fillStyleLst>
+      <a:lnStyleLst>
+        <a:ln w="12700">
+          <a:solidFill>
+            <a:schemeClr val="phClr"/>
+          </a:solidFill>
+          <a:prstDash val="solid"/>
+        </a:ln>
+        <a:ln w="19050">
+          <a:solidFill>
+            <a:schemeClr val="phClr"/>
+          </a:solidFill>
+          <a:prstDash val="solid"/>
+        </a:ln>
+        <a:ln w="25400">
+          <a:solidFill>
+            <a:schemeClr val="phClr"/>
+          </a:solidFill>
+          <a:prstDash val="solid"/>
+        </a:ln>
+      </a:lnStyleLst>
+      <a:effectStyleLst>
+        <a:effectStyle>
+          <a:effectLst/>
+        </a:effectStyle>
+        <a:effectStyle>
+          <a:effectLst/>
+        </a:effectStyle>
+        <a:effectStyle>
+          <a:effectLst>
+            <a:outerShdw blurRad="57150" dist="19050" dir="5400000">
+              <a:srgbClr val="000000">
+                <a:alpha val="16000"/>
+              </a:srgbClr>
+            </a:outerShdw>
+          </a:effectLst>
+        </a:effectStyle>
+        <a:effectStyle>
+          <a:effectLst>
+            <a:outerShdw blurRad="19050" dist="9525" dir="5400000">
+              <a:srgbClr val="000000">
+                <a:alpha val="6000"/>
+              </a:srgbClr>
+            </a:outerShdw>
+          </a:effectLst>
+        </a:effectStyle>
+        <a:effectStyle>
+          <a:effectLst>
+            <a:outerShdw blurRad="28575" dist="9525" dir="5400000">
+              <a:srgbClr val="000000">
+                <a:alpha val="8000"/>
+              </a:srgbClr>
+            </a:outerShdw>
+          </a:effectLst>
+        </a:effectStyle>
+        <a:effectStyle>
+          <a:effectLst>
+            <a:outerShdw blurRad="57150" dist="19050" dir="5400000">
+              <a:srgbClr val="000000">
+                <a:alpha val="10000"/>
+              </a:srgbClr>
+            </a:outerShdw>
+          </a:effectLst>
+        </a:effectStyle>
+        <a:effectStyle>
+          <a:effectLst>
+            <a:outerShdw blurRad="114300" dist="38100" dir="5400000">
+              <a:srgbClr val="000000">
+                <a:alpha val="12000"/>
+              </a:srgbClr>
+            </a:outerShdw>
+          </a:effectLst>
+        </a:effectStyle>
+        <a:effectStyle>
+          <a:effectLst>
+            <a:outerShdw blurRad="171450" dist="57150" dir="5400000">
+              <a:srgbClr val="000000">
+                <a:alpha val="16000"/>
+              </a:srgbClr>
+            </a:outerShdw>
+          </a:effectLst>
+        </a:effectStyle>
+        <a:effectStyle>
+          <a:effectLst>
+            <a:outerShdw blurRad="266700" dist="95250" dir="5400000">
+              <a:srgbClr val="000000">
+                <a:alpha val="24000"/>
+              </a:srgbClr>
+            </a:outerShdw>
+          </a:effectLst>
+        </a:effectStyle>
+      </a:effectStyleLst>
+      <a:bgFillStyleLst>
+        <a:solidFill>
+          <a:schemeClr val="phClr"/>
+        </a:solidFill>
+        <a:solidFill>
+          <a:schemeClr val="phClr">
+            <a:tint val="95000"/>
+            <a:satMod val="170000"/>
+          </a:schemeClr>
+        </a:solidFill>
+        <a:gradFill>
+          <a:gsLst>
+            <a:gs pos="0">
+              <a:schemeClr val="phClr">
+                <a:tint val="93000"/>
+                <a:shade val="98000"/>
+                <a:lumMod val="102000"/>
+                <a:satMod val="150000"/>
+              </a:schemeClr>
+            </a:gs>
+            <a:gs pos="50000">
+              <a:schemeClr val="phClr">
+                <a:tint val="98000"/>
+                <a:shade val="90000"/>
+                <a:lumMod val="103000"/>
+                <a:satMod val="130000"/>
+              </a:schemeClr>
+            </a:gs>
+            <a:gs pos="100000">
+              <a:schemeClr val="phClr">
+                <a:shade val="63000"/>
+                <a:satMod val="120000"/>
+              </a:schemeClr>
+            </a:gs>
+          </a:gsLst>
+          <a:lin ang="5400000" scaled="0"/>
+        </a:gradFill>
+      </a:bgFillStyleLst>
+    </a:fmtScheme>
+  </a:themeElements>
+</a:theme>
+</file>
+
+<file path=ppt/notesSlides/notesSlide1.xml><?xml version="1.0" encoding="utf-8"?>
+<p:notes xmlns:p="http://schemas.openxmlformats.org/presentationml/2006/main">
+  <p:cSld>
+    <p:spTree>
+      <p:nvGrpSpPr>
+        <p:cNvPr id="1" name=""/>
+        <p:cNvGrpSpPr/>
+        <p:nvPr/>
+      </p:nvGrpSpPr>
+      <p:grpSpPr>
+        <a:xfrm xmlns:a="http://schemas.openxmlformats.org/drawingml/2006/main"/>
+      </p:grpSpPr>
+      <p:sp>
+        <p:nvSpPr>
+          <p:cNvPr id="2" name="Slide Image Placeholder 1"/>
+          <p:cNvSpPr>
+            <a:spLocks xmlns:a="http://schemas.openxmlformats.org/drawingml/2006/main" noGrp="1"/>
+          </p:cNvSpPr>
+          <p:nvPr>
+            <p:ph type="sldImg" idx="0"/>
+          </p:nvPr>
+        </p:nvSpPr>
+        <p:spPr/>
+      </p:sp>
+      <p:sp>
+        <p:nvSpPr>
+          <p:cNvPr id="3" name="Notes Placeholder 2"/>
+          <p:cNvSpPr>
+            <a:spLocks xmlns:a="http://schemas.openxmlformats.org/drawingml/2006/main" noGrp="1"/>
+          </p:cNvSpPr>
+          <p:nvPr>
+            <p:ph type="body" idx="1"/>
+          </p:nvPr>
+        </p:nvSpPr>
+        <p:spPr/>
+        <p:txBody>
+          <a:bodyPr xmlns:a="http://schemas.openxmlformats.org/drawingml/2006/main"/>
+          <a:lstStyle xmlns:a="http://schemas.openxmlformats.org/drawingml/2006/main"/>
+          <a:p xmlns:a="http://schemas.openxmlformats.org/drawingml/2006/main">
+            <a:r>
+              <a:t>TIME: 0–1 minutes (1 minutes)</a:t>
+            </a:r>
+          </a:p>
+          <a:p xmlns:a="http://schemas.openxmlformats.org/drawingml/2006/main">
+            <a:r>
+              <a:t/>
+            </a:r>
+          </a:p>
+          <a:p xmlns:a="http://schemas.openxmlformats.org/drawingml/2006/main">
+            <a:r>
+              <a:t>Welcome students. Explain that today has two goals: understand what sampling can change, and learn enough Jupyter to complete Pre-Lab 1. Ask students to open the notebook now, but wait before running cells.</a:t>
+            </a:r>
+          </a:p>
+          <a:p xmlns:a="http://schemas.openxmlformats.org/drawingml/2006/main">
+            <a:r>
+              <a:t/>
+            </a:r>
+          </a:p>
+          <a:p xmlns:a="http://schemas.openxmlformats.org/drawingml/2006/main">
+            <a:r>
+              <a:t>SOURCE: MIE402_PreLab1_Fall2026_Student.ipynb, LAB1_MIE402.pdf, and supplied Spring 2026 Pre-Lab 1 materials.</a:t>
+            </a:r>
+          </a:p>
+        </p:txBody>
+      </p:sp>
+      <p:sp>
+        <p:nvSpPr>
+          <p:cNvPr id="4" name="Slide Number Placeholder 3"/>
+          <p:cNvSpPr>
+            <a:spLocks xmlns:a="http://schemas.openxmlformats.org/drawingml/2006/main" noGrp="1"/>
+          </p:cNvSpPr>
+          <p:nvPr>
+            <p:ph type="sldNum" idx="5"/>
+          </p:nvPr>
+        </p:nvSpPr>
+        <p:spPr/>
+        <p:txBody>
+          <a:bodyPr xmlns:a="http://schemas.openxmlformats.org/drawingml/2006/main"/>
+          <a:lstStyle xmlns:a="http://schemas.openxmlformats.org/drawingml/2006/main"/>
+          <a:p xmlns:a="http://schemas.openxmlformats.org/drawingml/2006/main"/>
+        </p:txBody>
+      </p:sp>
+    </p:spTree>
+  </p:cSld>
+  <p:clrMapOvr>
+    <a:masterClrMapping xmlns:a="http://schemas.openxmlformats.org/drawingml/2006/main"/>
+  </p:clrMapOvr>
+</p:notes>
+</file>
 
 <file path=ppt/notesSlides/notesSlide10.xml><?xml version="1.0" encoding="utf-8"?>
 <p:notes xmlns:p="http://schemas.openxmlformats.org/presentationml/2006/main">
@@ -899,6 +1415,96 @@
 </p:notes>
 </file>
 
+<file path=ppt/notesSlides/notesSlide2.xml><?xml version="1.0" encoding="utf-8"?>
+<p:notes xmlns:p="http://schemas.openxmlformats.org/presentationml/2006/main">
+  <p:cSld>
+    <p:spTree>
+      <p:nvGrpSpPr>
+        <p:cNvPr id="1" name=""/>
+        <p:cNvGrpSpPr/>
+        <p:nvPr/>
+      </p:nvGrpSpPr>
+      <p:grpSpPr>
+        <a:xfrm xmlns:a="http://schemas.openxmlformats.org/drawingml/2006/main"/>
+      </p:grpSpPr>
+      <p:sp>
+        <p:nvSpPr>
+          <p:cNvPr id="2" name="Slide Image Placeholder 1"/>
+          <p:cNvSpPr>
+            <a:spLocks xmlns:a="http://schemas.openxmlformats.org/drawingml/2006/main" noGrp="1"/>
+          </p:cNvSpPr>
+          <p:nvPr>
+            <p:ph type="sldImg" idx="0"/>
+          </p:nvPr>
+        </p:nvSpPr>
+        <p:spPr/>
+      </p:sp>
+      <p:sp>
+        <p:nvSpPr>
+          <p:cNvPr id="3" name="Notes Placeholder 2"/>
+          <p:cNvSpPr>
+            <a:spLocks xmlns:a="http://schemas.openxmlformats.org/drawingml/2006/main" noGrp="1"/>
+          </p:cNvSpPr>
+          <p:nvPr>
+            <p:ph type="body" idx="1"/>
+          </p:nvPr>
+        </p:nvSpPr>
+        <p:spPr/>
+        <p:txBody>
+          <a:bodyPr xmlns:a="http://schemas.openxmlformats.org/drawingml/2006/main"/>
+          <a:lstStyle xmlns:a="http://schemas.openxmlformats.org/drawingml/2006/main"/>
+          <a:p xmlns:a="http://schemas.openxmlformats.org/drawingml/2006/main">
+            <a:r>
+              <a:t>TIME: 1–2 minutes (1 minutes)</a:t>
+            </a:r>
+          </a:p>
+          <a:p xmlns:a="http://schemas.openxmlformats.org/drawingml/2006/main">
+            <a:r>
+              <a:t/>
+            </a:r>
+          </a:p>
+          <a:p xmlns:a="http://schemas.openxmlformats.org/drawingml/2006/main">
+            <a:r>
+              <a:t>Read the goals briefly. Tell students all Python code is provided. Their work is to calculate, predict, extract values from the output, compare cases, and explain the engineering meaning.</a:t>
+            </a:r>
+          </a:p>
+          <a:p xmlns:a="http://schemas.openxmlformats.org/drawingml/2006/main">
+            <a:r>
+              <a:t/>
+            </a:r>
+          </a:p>
+          <a:p xmlns:a="http://schemas.openxmlformats.org/drawingml/2006/main">
+            <a:r>
+              <a:t>SOURCE: MIE402_PreLab1_Fall2026_Student.ipynb, LAB1_MIE402.pdf, and supplied Spring 2026 Pre-Lab 1 materials.</a:t>
+            </a:r>
+          </a:p>
+        </p:txBody>
+      </p:sp>
+      <p:sp>
+        <p:nvSpPr>
+          <p:cNvPr id="4" name="Slide Number Placeholder 3"/>
+          <p:cNvSpPr>
+            <a:spLocks xmlns:a="http://schemas.openxmlformats.org/drawingml/2006/main" noGrp="1"/>
+          </p:cNvSpPr>
+          <p:nvPr>
+            <p:ph type="sldNum" idx="5"/>
+          </p:nvPr>
+        </p:nvSpPr>
+        <p:spPr/>
+        <p:txBody>
+          <a:bodyPr xmlns:a="http://schemas.openxmlformats.org/drawingml/2006/main"/>
+          <a:lstStyle xmlns:a="http://schemas.openxmlformats.org/drawingml/2006/main"/>
+          <a:p xmlns:a="http://schemas.openxmlformats.org/drawingml/2006/main"/>
+        </p:txBody>
+      </p:sp>
+    </p:spTree>
+  </p:cSld>
+  <p:clrMapOvr>
+    <a:masterClrMapping xmlns:a="http://schemas.openxmlformats.org/drawingml/2006/main"/>
+  </p:clrMapOvr>
+</p:notes>
+</file>
+
 <file path=ppt/notesSlides/notesSlide20.xml><?xml version="1.0" encoding="utf-8"?>
 <p:notes xmlns:p="http://schemas.openxmlformats.org/presentationml/2006/main">
   <p:cSld>
@@ -1349,6 +1955,366 @@
 </p:notes>
 </file>
 
+<file path=ppt/notesSlides/notesSlide3.xml><?xml version="1.0" encoding="utf-8"?>
+<p:notes xmlns:p="http://schemas.openxmlformats.org/presentationml/2006/main">
+  <p:cSld>
+    <p:spTree>
+      <p:nvGrpSpPr>
+        <p:cNvPr id="1" name=""/>
+        <p:cNvGrpSpPr/>
+        <p:nvPr/>
+      </p:nvGrpSpPr>
+      <p:grpSpPr>
+        <a:xfrm xmlns:a="http://schemas.openxmlformats.org/drawingml/2006/main"/>
+      </p:grpSpPr>
+      <p:sp>
+        <p:nvSpPr>
+          <p:cNvPr id="2" name="Slide Image Placeholder 1"/>
+          <p:cNvSpPr>
+            <a:spLocks xmlns:a="http://schemas.openxmlformats.org/drawingml/2006/main" noGrp="1"/>
+          </p:cNvSpPr>
+          <p:nvPr>
+            <p:ph type="sldImg" idx="0"/>
+          </p:nvPr>
+        </p:nvSpPr>
+        <p:spPr/>
+      </p:sp>
+      <p:sp>
+        <p:nvSpPr>
+          <p:cNvPr id="3" name="Notes Placeholder 2"/>
+          <p:cNvSpPr>
+            <a:spLocks xmlns:a="http://schemas.openxmlformats.org/drawingml/2006/main" noGrp="1"/>
+          </p:cNvSpPr>
+          <p:nvPr>
+            <p:ph type="body" idx="1"/>
+          </p:nvPr>
+        </p:nvSpPr>
+        <p:spPr/>
+        <p:txBody>
+          <a:bodyPr xmlns:a="http://schemas.openxmlformats.org/drawingml/2006/main"/>
+          <a:lstStyle xmlns:a="http://schemas.openxmlformats.org/drawingml/2006/main"/>
+          <a:p xmlns:a="http://schemas.openxmlformats.org/drawingml/2006/main">
+            <a:r>
+              <a:t>TIME: 2–4 minutes (2 minutes)</a:t>
+            </a:r>
+          </a:p>
+          <a:p xmlns:a="http://schemas.openxmlformats.org/drawingml/2006/main">
+            <a:r>
+              <a:t/>
+            </a:r>
+          </a:p>
+          <a:p xmlns:a="http://schemas.openxmlformats.org/drawingml/2006/main">
+            <a:r>
+              <a:t>Make the physical chain explicit: sound-pressure variation, microphone voltage, discrete samples, then plots. The pre-lab starts from a clean mathematical voltage. The laboratory adds noise, microphone response, harmonics, and imperfect excitation. The same analysis ideas apply.</a:t>
+            </a:r>
+          </a:p>
+          <a:p xmlns:a="http://schemas.openxmlformats.org/drawingml/2006/main">
+            <a:r>
+              <a:t/>
+            </a:r>
+          </a:p>
+          <a:p xmlns:a="http://schemas.openxmlformats.org/drawingml/2006/main">
+            <a:r>
+              <a:t>SOURCE: MIE402_PreLab1_Fall2026_Student.ipynb, LAB1_MIE402.pdf, and supplied Spring 2026 Pre-Lab 1 materials.</a:t>
+            </a:r>
+          </a:p>
+        </p:txBody>
+      </p:sp>
+      <p:sp>
+        <p:nvSpPr>
+          <p:cNvPr id="4" name="Slide Number Placeholder 3"/>
+          <p:cNvSpPr>
+            <a:spLocks xmlns:a="http://schemas.openxmlformats.org/drawingml/2006/main" noGrp="1"/>
+          </p:cNvSpPr>
+          <p:nvPr>
+            <p:ph type="sldNum" idx="5"/>
+          </p:nvPr>
+        </p:nvSpPr>
+        <p:spPr/>
+        <p:txBody>
+          <a:bodyPr xmlns:a="http://schemas.openxmlformats.org/drawingml/2006/main"/>
+          <a:lstStyle xmlns:a="http://schemas.openxmlformats.org/drawingml/2006/main"/>
+          <a:p xmlns:a="http://schemas.openxmlformats.org/drawingml/2006/main"/>
+        </p:txBody>
+      </p:sp>
+    </p:spTree>
+  </p:cSld>
+  <p:clrMapOvr>
+    <a:masterClrMapping xmlns:a="http://schemas.openxmlformats.org/drawingml/2006/main"/>
+  </p:clrMapOvr>
+</p:notes>
+</file>
+
+<file path=ppt/notesSlides/notesSlide4.xml><?xml version="1.0" encoding="utf-8"?>
+<p:notes xmlns:p="http://schemas.openxmlformats.org/presentationml/2006/main">
+  <p:cSld>
+    <p:spTree>
+      <p:nvGrpSpPr>
+        <p:cNvPr id="1" name=""/>
+        <p:cNvGrpSpPr/>
+        <p:nvPr/>
+      </p:nvGrpSpPr>
+      <p:grpSpPr>
+        <a:xfrm xmlns:a="http://schemas.openxmlformats.org/drawingml/2006/main"/>
+      </p:grpSpPr>
+      <p:sp>
+        <p:nvSpPr>
+          <p:cNvPr id="2" name="Slide Image Placeholder 1"/>
+          <p:cNvSpPr>
+            <a:spLocks xmlns:a="http://schemas.openxmlformats.org/drawingml/2006/main" noGrp="1"/>
+          </p:cNvSpPr>
+          <p:nvPr>
+            <p:ph type="sldImg" idx="0"/>
+          </p:nvPr>
+        </p:nvSpPr>
+        <p:spPr/>
+      </p:sp>
+      <p:sp>
+        <p:nvSpPr>
+          <p:cNvPr id="3" name="Notes Placeholder 2"/>
+          <p:cNvSpPr>
+            <a:spLocks xmlns:a="http://schemas.openxmlformats.org/drawingml/2006/main" noGrp="1"/>
+          </p:cNvSpPr>
+          <p:nvPr>
+            <p:ph type="body" idx="1"/>
+          </p:nvPr>
+        </p:nvSpPr>
+        <p:spPr/>
+        <p:txBody>
+          <a:bodyPr xmlns:a="http://schemas.openxmlformats.org/drawingml/2006/main"/>
+          <a:lstStyle xmlns:a="http://schemas.openxmlformats.org/drawingml/2006/main"/>
+          <a:p xmlns:a="http://schemas.openxmlformats.org/drawingml/2006/main">
+            <a:r>
+              <a:t>TIME: 4–7 minutes (3 minutes)</a:t>
+            </a:r>
+          </a:p>
+          <a:p xmlns:a="http://schemas.openxmlformats.org/drawingml/2006/main">
+            <a:r>
+              <a:t/>
+            </a:r>
+          </a:p>
+          <a:p xmlns:a="http://schemas.openxmlformats.org/drawingml/2006/main">
+            <a:r>
+              <a:t>Show the actual notebook on screen. Point to a Markdown cell and a code cell. Explain the execution count at the left. Emphasize that a notebook remembers variables only after the defining cell runs.</a:t>
+            </a:r>
+          </a:p>
+          <a:p xmlns:a="http://schemas.openxmlformats.org/drawingml/2006/main">
+            <a:r>
+              <a:t/>
+            </a:r>
+          </a:p>
+          <a:p xmlns:a="http://schemas.openxmlformats.org/drawingml/2006/main">
+            <a:r>
+              <a:t>SOURCE: MIE402_PreLab1_Fall2026_Student.ipynb, LAB1_MIE402.pdf, and supplied Spring 2026 Pre-Lab 1 materials.</a:t>
+            </a:r>
+          </a:p>
+        </p:txBody>
+      </p:sp>
+      <p:sp>
+        <p:nvSpPr>
+          <p:cNvPr id="4" name="Slide Number Placeholder 3"/>
+          <p:cNvSpPr>
+            <a:spLocks xmlns:a="http://schemas.openxmlformats.org/drawingml/2006/main" noGrp="1"/>
+          </p:cNvSpPr>
+          <p:nvPr>
+            <p:ph type="sldNum" idx="5"/>
+          </p:nvPr>
+        </p:nvSpPr>
+        <p:spPr/>
+        <p:txBody>
+          <a:bodyPr xmlns:a="http://schemas.openxmlformats.org/drawingml/2006/main"/>
+          <a:lstStyle xmlns:a="http://schemas.openxmlformats.org/drawingml/2006/main"/>
+          <a:p xmlns:a="http://schemas.openxmlformats.org/drawingml/2006/main"/>
+        </p:txBody>
+      </p:sp>
+    </p:spTree>
+  </p:cSld>
+  <p:clrMapOvr>
+    <a:masterClrMapping xmlns:a="http://schemas.openxmlformats.org/drawingml/2006/main"/>
+  </p:clrMapOvr>
+</p:notes>
+</file>
+
+<file path=ppt/notesSlides/notesSlide5.xml><?xml version="1.0" encoding="utf-8"?>
+<p:notes xmlns:p="http://schemas.openxmlformats.org/presentationml/2006/main">
+  <p:cSld>
+    <p:spTree>
+      <p:nvGrpSpPr>
+        <p:cNvPr id="1" name=""/>
+        <p:cNvGrpSpPr/>
+        <p:nvPr/>
+      </p:nvGrpSpPr>
+      <p:grpSpPr>
+        <a:xfrm xmlns:a="http://schemas.openxmlformats.org/drawingml/2006/main"/>
+      </p:grpSpPr>
+      <p:sp>
+        <p:nvSpPr>
+          <p:cNvPr id="2" name="Slide Image Placeholder 1"/>
+          <p:cNvSpPr>
+            <a:spLocks xmlns:a="http://schemas.openxmlformats.org/drawingml/2006/main" noGrp="1"/>
+          </p:cNvSpPr>
+          <p:nvPr>
+            <p:ph type="sldImg" idx="0"/>
+          </p:nvPr>
+        </p:nvSpPr>
+        <p:spPr/>
+      </p:sp>
+      <p:sp>
+        <p:nvSpPr>
+          <p:cNvPr id="3" name="Notes Placeholder 2"/>
+          <p:cNvSpPr>
+            <a:spLocks xmlns:a="http://schemas.openxmlformats.org/drawingml/2006/main" noGrp="1"/>
+          </p:cNvSpPr>
+          <p:nvPr>
+            <p:ph type="body" idx="1"/>
+          </p:nvPr>
+        </p:nvSpPr>
+        <p:spPr/>
+        <p:txBody>
+          <a:bodyPr xmlns:a="http://schemas.openxmlformats.org/drawingml/2006/main"/>
+          <a:lstStyle xmlns:a="http://schemas.openxmlformats.org/drawingml/2006/main"/>
+          <a:p xmlns:a="http://schemas.openxmlformats.org/drawingml/2006/main">
+            <a:r>
+              <a:t>TIME: 7–8 minutes (1 minutes)</a:t>
+            </a:r>
+          </a:p>
+          <a:p xmlns:a="http://schemas.openxmlformats.org/drawingml/2006/main">
+            <a:r>
+              <a:t/>
+            </a:r>
+          </a:p>
+          <a:p xmlns:a="http://schemas.openxmlformats.org/drawingml/2006/main">
+            <a:r>
+              <a:t>Demonstrate the Colab link from the course website. Remind students to save a personal copy and include their name in the filename if Canvas requests it.</a:t>
+            </a:r>
+          </a:p>
+          <a:p xmlns:a="http://schemas.openxmlformats.org/drawingml/2006/main">
+            <a:r>
+              <a:t/>
+            </a:r>
+          </a:p>
+          <a:p xmlns:a="http://schemas.openxmlformats.org/drawingml/2006/main">
+            <a:r>
+              <a:t>SOURCE: MIE402_PreLab1_Fall2026_Student.ipynb, LAB1_MIE402.pdf, and supplied Spring 2026 Pre-Lab 1 materials.</a:t>
+            </a:r>
+          </a:p>
+        </p:txBody>
+      </p:sp>
+      <p:sp>
+        <p:nvSpPr>
+          <p:cNvPr id="4" name="Slide Number Placeholder 3"/>
+          <p:cNvSpPr>
+            <a:spLocks xmlns:a="http://schemas.openxmlformats.org/drawingml/2006/main" noGrp="1"/>
+          </p:cNvSpPr>
+          <p:nvPr>
+            <p:ph type="sldNum" idx="5"/>
+          </p:nvPr>
+        </p:nvSpPr>
+        <p:spPr/>
+        <p:txBody>
+          <a:bodyPr xmlns:a="http://schemas.openxmlformats.org/drawingml/2006/main"/>
+          <a:lstStyle xmlns:a="http://schemas.openxmlformats.org/drawingml/2006/main"/>
+          <a:p xmlns:a="http://schemas.openxmlformats.org/drawingml/2006/main"/>
+        </p:txBody>
+      </p:sp>
+    </p:spTree>
+  </p:cSld>
+  <p:clrMapOvr>
+    <a:masterClrMapping xmlns:a="http://schemas.openxmlformats.org/drawingml/2006/main"/>
+  </p:clrMapOvr>
+</p:notes>
+</file>
+
+<file path=ppt/notesSlides/notesSlide6.xml><?xml version="1.0" encoding="utf-8"?>
+<p:notes xmlns:p="http://schemas.openxmlformats.org/presentationml/2006/main">
+  <p:cSld>
+    <p:spTree>
+      <p:nvGrpSpPr>
+        <p:cNvPr id="1" name=""/>
+        <p:cNvGrpSpPr/>
+        <p:nvPr/>
+      </p:nvGrpSpPr>
+      <p:grpSpPr>
+        <a:xfrm xmlns:a="http://schemas.openxmlformats.org/drawingml/2006/main"/>
+      </p:grpSpPr>
+      <p:sp>
+        <p:nvSpPr>
+          <p:cNvPr id="2" name="Slide Image Placeholder 1"/>
+          <p:cNvSpPr>
+            <a:spLocks xmlns:a="http://schemas.openxmlformats.org/drawingml/2006/main" noGrp="1"/>
+          </p:cNvSpPr>
+          <p:nvPr>
+            <p:ph type="sldImg" idx="0"/>
+          </p:nvPr>
+        </p:nvSpPr>
+        <p:spPr/>
+      </p:sp>
+      <p:sp>
+        <p:nvSpPr>
+          <p:cNvPr id="3" name="Notes Placeholder 2"/>
+          <p:cNvSpPr>
+            <a:spLocks xmlns:a="http://schemas.openxmlformats.org/drawingml/2006/main" noGrp="1"/>
+          </p:cNvSpPr>
+          <p:nvPr>
+            <p:ph type="body" idx="1"/>
+          </p:nvPr>
+        </p:nvSpPr>
+        <p:spPr/>
+        <p:txBody>
+          <a:bodyPr xmlns:a="http://schemas.openxmlformats.org/drawingml/2006/main"/>
+          <a:lstStyle xmlns:a="http://schemas.openxmlformats.org/drawingml/2006/main"/>
+          <a:p xmlns:a="http://schemas.openxmlformats.org/drawingml/2006/main">
+            <a:r>
+              <a:t>TIME: 8–10 minutes (2 minutes)</a:t>
+            </a:r>
+          </a:p>
+          <a:p xmlns:a="http://schemas.openxmlformats.org/drawingml/2006/main">
+            <a:r>
+              <a:t/>
+            </a:r>
+          </a:p>
+          <a:p xmlns:a="http://schemas.openxmlformats.org/drawingml/2006/main">
+            <a:r>
+              <a:t>Run the second line before defining A to demonstrate a NameError only if time allows. Then run the defining cell and try again. Show Kernel or Runtime restart and explain why Run All is a useful final check before submission.</a:t>
+            </a:r>
+          </a:p>
+          <a:p xmlns:a="http://schemas.openxmlformats.org/drawingml/2006/main">
+            <a:r>
+              <a:t/>
+            </a:r>
+          </a:p>
+          <a:p xmlns:a="http://schemas.openxmlformats.org/drawingml/2006/main">
+            <a:r>
+              <a:t>SOURCE: MIE402_PreLab1_Fall2026_Student.ipynb, LAB1_MIE402.pdf, and supplied Spring 2026 Pre-Lab 1 materials.</a:t>
+            </a:r>
+          </a:p>
+        </p:txBody>
+      </p:sp>
+      <p:sp>
+        <p:nvSpPr>
+          <p:cNvPr id="4" name="Slide Number Placeholder 3"/>
+          <p:cNvSpPr>
+            <a:spLocks xmlns:a="http://schemas.openxmlformats.org/drawingml/2006/main" noGrp="1"/>
+          </p:cNvSpPr>
+          <p:nvPr>
+            <p:ph type="sldNum" idx="5"/>
+          </p:nvPr>
+        </p:nvSpPr>
+        <p:spPr/>
+        <p:txBody>
+          <a:bodyPr xmlns:a="http://schemas.openxmlformats.org/drawingml/2006/main"/>
+          <a:lstStyle xmlns:a="http://schemas.openxmlformats.org/drawingml/2006/main"/>
+          <a:p xmlns:a="http://schemas.openxmlformats.org/drawingml/2006/main"/>
+        </p:txBody>
+      </p:sp>
+    </p:spTree>
+  </p:cSld>
+  <p:clrMapOvr>
+    <a:masterClrMapping xmlns:a="http://schemas.openxmlformats.org/drawingml/2006/main"/>
+  </p:clrMapOvr>
+</p:notes>
+</file>
+
 <file path=ppt/notesSlides/notesSlide7.xml><?xml version="1.0" encoding="utf-8"?>
 <p:notes xmlns:p="http://schemas.openxmlformats.org/presentationml/2006/main">
   <p:cSld>
@@ -1619,6 +2585,3439 @@
 </p:notes>
 </file>
 
+<file path=ppt/slideLayouts/slideLayout1.xml><?xml version="1.0" encoding="utf-8"?>
+<p:sldLayout xmlns:p="http://schemas.openxmlformats.org/presentationml/2006/main" type="title">
+  <p:cSld name="Title Slide">
+    <p:spTree>
+      <p:nvGrpSpPr>
+        <p:cNvPr id="1" name=""/>
+        <p:cNvGrpSpPr/>
+        <p:nvPr/>
+      </p:nvGrpSpPr>
+      <p:grpSpPr>
+        <a:xfrm xmlns:a="http://schemas.openxmlformats.org/drawingml/2006/main"/>
+      </p:grpSpPr>
+    </p:spTree>
+  </p:cSld>
+</p:sldLayout>
+</file>
+
+<file path=ppt/slideMasters/slideMaster1.xml><?xml version="1.0" encoding="utf-8"?>
+<p:sldMaster xmlns:p="http://schemas.openxmlformats.org/presentationml/2006/main">
+  <p:cSld name="Master">
+    <p:bg>
+      <p:bgRef idx="1001">
+        <a:schemeClr xmlns:a="http://schemas.openxmlformats.org/drawingml/2006/main" val="bg1"/>
+      </p:bgRef>
+    </p:bg>
+    <p:spTree>
+      <p:nvGrpSpPr>
+        <p:cNvPr id="1" name=""/>
+        <p:cNvGrpSpPr/>
+        <p:nvPr/>
+      </p:nvGrpSpPr>
+      <p:grpSpPr>
+        <a:xfrm xmlns:a="http://schemas.openxmlformats.org/drawingml/2006/main"/>
+      </p:grpSpPr>
+    </p:spTree>
+  </p:cSld>
+  <p:clrMap bg1="lt1" tx1="dk1" bg2="lt2" tx2="dk2" accent1="accent1" accent2="accent2" accent3="accent3" accent4="accent4" accent5="accent5" accent6="accent6" hlink="hlink" folHlink="folHlink"/>
+  <p:sldLayoutIdLst>
+    <p:sldLayoutId xmlns:r="http://schemas.openxmlformats.org/officeDocument/2006/relationships" id="2147483649" r:id="R88da38cdf611443d"/>
+  </p:sldLayoutIdLst>
+  <p:txStyles>
+    <p:titleStyle>
+      <a:lvl1pPr xmlns:a="http://schemas.openxmlformats.org/drawingml/2006/main" algn="l">
+        <a:lnSpc>
+          <a:spcPct val="90000"/>
+        </a:lnSpc>
+        <a:spcBef>
+          <a:spcPts val="0"/>
+        </a:spcBef>
+        <a:buNone/>
+        <a:defRPr sz="4400">
+          <a:solidFill>
+            <a:schemeClr val="tx1"/>
+          </a:solidFill>
+          <a:latin typeface="+mj-lt"/>
+          <a:ea typeface="+mj-lt"/>
+          <a:cs typeface="+mj-lt"/>
+        </a:defRPr>
+      </a:lvl1pPr>
+    </p:titleStyle>
+    <p:bodyStyle>
+      <a:lvl1pPr xmlns:a="http://schemas.openxmlformats.org/drawingml/2006/main" marL="228600" indent="-228600" algn="l">
+        <a:lnSpc>
+          <a:spcPct val="90000"/>
+        </a:lnSpc>
+        <a:spcBef>
+          <a:spcPts val="1000"/>
+        </a:spcBef>
+        <a:buChar char="•"/>
+        <a:defRPr sz="2800">
+          <a:solidFill>
+            <a:schemeClr val="tx1"/>
+          </a:solidFill>
+          <a:latin typeface="+mn-lt"/>
+          <a:ea typeface="+mn-lt"/>
+          <a:cs typeface="+mn-lt"/>
+        </a:defRPr>
+      </a:lvl1pPr>
+      <a:lvl2pPr xmlns:a="http://schemas.openxmlformats.org/drawingml/2006/main" marL="685800" indent="-228600" algn="l">
+        <a:lnSpc>
+          <a:spcPct val="90000"/>
+        </a:lnSpc>
+        <a:spcBef>
+          <a:spcPts val="500"/>
+        </a:spcBef>
+        <a:buChar char="•"/>
+        <a:defRPr sz="2400">
+          <a:solidFill>
+            <a:schemeClr val="tx1"/>
+          </a:solidFill>
+          <a:latin typeface="+mn-lt"/>
+          <a:ea typeface="+mn-lt"/>
+          <a:cs typeface="+mn-lt"/>
+        </a:defRPr>
+      </a:lvl2pPr>
+      <a:lvl3pPr xmlns:a="http://schemas.openxmlformats.org/drawingml/2006/main" marL="1143000" indent="-228600" algn="l">
+        <a:lnSpc>
+          <a:spcPct val="90000"/>
+        </a:lnSpc>
+        <a:spcBef>
+          <a:spcPts val="500"/>
+        </a:spcBef>
+        <a:buChar char="•"/>
+        <a:defRPr sz="2000">
+          <a:solidFill>
+            <a:schemeClr val="tx1"/>
+          </a:solidFill>
+          <a:latin typeface="+mn-lt"/>
+          <a:ea typeface="+mn-lt"/>
+          <a:cs typeface="+mn-lt"/>
+        </a:defRPr>
+      </a:lvl3pPr>
+      <a:lvl4pPr xmlns:a="http://schemas.openxmlformats.org/drawingml/2006/main" marL="1600200" indent="-228600" algn="l">
+        <a:lnSpc>
+          <a:spcPct val="90000"/>
+        </a:lnSpc>
+        <a:spcBef>
+          <a:spcPts val="500"/>
+        </a:spcBef>
+        <a:buChar char="•"/>
+        <a:defRPr sz="1800">
+          <a:solidFill>
+            <a:schemeClr val="tx1"/>
+          </a:solidFill>
+          <a:latin typeface="+mn-lt"/>
+          <a:ea typeface="+mn-lt"/>
+          <a:cs typeface="+mn-lt"/>
+        </a:defRPr>
+      </a:lvl4pPr>
+      <a:lvl5pPr xmlns:a="http://schemas.openxmlformats.org/drawingml/2006/main" marL="2057400" indent="-228600" algn="l">
+        <a:lnSpc>
+          <a:spcPct val="90000"/>
+        </a:lnSpc>
+        <a:spcBef>
+          <a:spcPts val="500"/>
+        </a:spcBef>
+        <a:buChar char="•"/>
+        <a:defRPr sz="1800">
+          <a:solidFill>
+            <a:schemeClr val="tx1"/>
+          </a:solidFill>
+          <a:latin typeface="+mn-lt"/>
+          <a:ea typeface="+mn-lt"/>
+          <a:cs typeface="+mn-lt"/>
+        </a:defRPr>
+      </a:lvl5pPr>
+      <a:lvl6pPr xmlns:a="http://schemas.openxmlformats.org/drawingml/2006/main" marL="2514600" indent="-228600" algn="l">
+        <a:lnSpc>
+          <a:spcPct val="90000"/>
+        </a:lnSpc>
+        <a:spcBef>
+          <a:spcPts val="500"/>
+        </a:spcBef>
+        <a:buChar char="•"/>
+        <a:defRPr sz="1800">
+          <a:solidFill>
+            <a:schemeClr val="tx1"/>
+          </a:solidFill>
+          <a:latin typeface="+mn-lt"/>
+          <a:ea typeface="+mn-lt"/>
+          <a:cs typeface="+mn-lt"/>
+        </a:defRPr>
+      </a:lvl6pPr>
+      <a:lvl7pPr xmlns:a="http://schemas.openxmlformats.org/drawingml/2006/main" marL="2971800" indent="-228600" algn="l">
+        <a:lnSpc>
+          <a:spcPct val="90000"/>
+        </a:lnSpc>
+        <a:spcBef>
+          <a:spcPts val="500"/>
+        </a:spcBef>
+        <a:buChar char="•"/>
+        <a:defRPr sz="1800">
+          <a:solidFill>
+            <a:schemeClr val="tx1"/>
+          </a:solidFill>
+          <a:latin typeface="+mn-lt"/>
+          <a:ea typeface="+mn-lt"/>
+          <a:cs typeface="+mn-lt"/>
+        </a:defRPr>
+      </a:lvl7pPr>
+      <a:lvl8pPr xmlns:a="http://schemas.openxmlformats.org/drawingml/2006/main" marL="3429000" indent="-228600" algn="l">
+        <a:lnSpc>
+          <a:spcPct val="90000"/>
+        </a:lnSpc>
+        <a:spcBef>
+          <a:spcPts val="500"/>
+        </a:spcBef>
+        <a:buChar char="•"/>
+        <a:defRPr sz="1800">
+          <a:solidFill>
+            <a:schemeClr val="tx1"/>
+          </a:solidFill>
+          <a:latin typeface="+mn-lt"/>
+          <a:ea typeface="+mn-lt"/>
+          <a:cs typeface="+mn-lt"/>
+        </a:defRPr>
+      </a:lvl8pPr>
+      <a:lvl9pPr xmlns:a="http://schemas.openxmlformats.org/drawingml/2006/main" marL="3886200" indent="-228600" algn="l">
+        <a:lnSpc>
+          <a:spcPct val="90000"/>
+        </a:lnSpc>
+        <a:spcBef>
+          <a:spcPts val="500"/>
+        </a:spcBef>
+        <a:buChar char="•"/>
+        <a:defRPr sz="1800">
+          <a:solidFill>
+            <a:schemeClr val="tx1"/>
+          </a:solidFill>
+          <a:latin typeface="+mn-lt"/>
+          <a:ea typeface="+mn-lt"/>
+          <a:cs typeface="+mn-lt"/>
+        </a:defRPr>
+      </a:lvl9pPr>
+    </p:bodyStyle>
+    <p:otherStyle>
+      <a:lvl1pPr xmlns:a="http://schemas.openxmlformats.org/drawingml/2006/main" marL="0" algn="l">
+        <a:buNone/>
+        <a:defRPr sz="1800">
+          <a:solidFill>
+            <a:schemeClr val="tx1"/>
+          </a:solidFill>
+          <a:latin typeface="+mn-lt"/>
+          <a:ea typeface="+mn-lt"/>
+          <a:cs typeface="+mn-lt"/>
+        </a:defRPr>
+      </a:lvl1pPr>
+      <a:lvl2pPr xmlns:a="http://schemas.openxmlformats.org/drawingml/2006/main" marL="457200" algn="l">
+        <a:buNone/>
+        <a:defRPr sz="1800">
+          <a:solidFill>
+            <a:schemeClr val="tx1"/>
+          </a:solidFill>
+          <a:latin typeface="+mn-lt"/>
+          <a:ea typeface="+mn-lt"/>
+          <a:cs typeface="+mn-lt"/>
+        </a:defRPr>
+      </a:lvl2pPr>
+      <a:lvl3pPr xmlns:a="http://schemas.openxmlformats.org/drawingml/2006/main" marL="914400" algn="l">
+        <a:buNone/>
+        <a:defRPr sz="1800">
+          <a:solidFill>
+            <a:schemeClr val="tx1"/>
+          </a:solidFill>
+          <a:latin typeface="+mn-lt"/>
+          <a:ea typeface="+mn-lt"/>
+          <a:cs typeface="+mn-lt"/>
+        </a:defRPr>
+      </a:lvl3pPr>
+      <a:lvl4pPr xmlns:a="http://schemas.openxmlformats.org/drawingml/2006/main" marL="1371600" algn="l">
+        <a:buNone/>
+        <a:defRPr sz="1800">
+          <a:solidFill>
+            <a:schemeClr val="tx1"/>
+          </a:solidFill>
+          <a:latin typeface="+mn-lt"/>
+          <a:ea typeface="+mn-lt"/>
+          <a:cs typeface="+mn-lt"/>
+        </a:defRPr>
+      </a:lvl4pPr>
+      <a:lvl5pPr xmlns:a="http://schemas.openxmlformats.org/drawingml/2006/main" marL="1828800" algn="l">
+        <a:buNone/>
+        <a:defRPr sz="1800">
+          <a:solidFill>
+            <a:schemeClr val="tx1"/>
+          </a:solidFill>
+          <a:latin typeface="+mn-lt"/>
+          <a:ea typeface="+mn-lt"/>
+          <a:cs typeface="+mn-lt"/>
+        </a:defRPr>
+      </a:lvl5pPr>
+      <a:lvl6pPr xmlns:a="http://schemas.openxmlformats.org/drawingml/2006/main" marL="2286000" algn="l">
+        <a:buNone/>
+        <a:defRPr sz="1800">
+          <a:solidFill>
+            <a:schemeClr val="tx1"/>
+          </a:solidFill>
+          <a:latin typeface="+mn-lt"/>
+          <a:ea typeface="+mn-lt"/>
+          <a:cs typeface="+mn-lt"/>
+        </a:defRPr>
+      </a:lvl6pPr>
+      <a:lvl7pPr xmlns:a="http://schemas.openxmlformats.org/drawingml/2006/main" marL="2743200" algn="l">
+        <a:buNone/>
+        <a:defRPr sz="1800">
+          <a:solidFill>
+            <a:schemeClr val="tx1"/>
+          </a:solidFill>
+          <a:latin typeface="+mn-lt"/>
+          <a:ea typeface="+mn-lt"/>
+          <a:cs typeface="+mn-lt"/>
+        </a:defRPr>
+      </a:lvl7pPr>
+      <a:lvl8pPr xmlns:a="http://schemas.openxmlformats.org/drawingml/2006/main" marL="3200400" algn="l">
+        <a:buNone/>
+        <a:defRPr sz="1800">
+          <a:solidFill>
+            <a:schemeClr val="tx1"/>
+          </a:solidFill>
+          <a:latin typeface="+mn-lt"/>
+          <a:ea typeface="+mn-lt"/>
+          <a:cs typeface="+mn-lt"/>
+        </a:defRPr>
+      </a:lvl8pPr>
+      <a:lvl9pPr xmlns:a="http://schemas.openxmlformats.org/drawingml/2006/main" marL="3657600" algn="l">
+        <a:buNone/>
+        <a:defRPr sz="1800">
+          <a:solidFill>
+            <a:schemeClr val="tx1"/>
+          </a:solidFill>
+          <a:latin typeface="+mn-lt"/>
+          <a:ea typeface="+mn-lt"/>
+          <a:cs typeface="+mn-lt"/>
+        </a:defRPr>
+      </a:lvl9pPr>
+    </p:otherStyle>
+  </p:txStyles>
+</p:sldMaster>
+</file>
+
+<file path=ppt/slideMasters/theme/theme2.xml><?xml version="1.0" encoding="utf-8"?>
+<a:theme xmlns:a="http://schemas.openxmlformats.org/drawingml/2006/main" name="ChatGPT">
+  <a:themeElements>
+    <a:clrScheme name="ChatGPT">
+      <a:dk1>
+        <a:srgbClr val="000000"/>
+      </a:dk1>
+      <a:lt1>
+        <a:srgbClr val="FFFFFF"/>
+      </a:lt1>
+      <a:dk2>
+        <a:srgbClr val="0E2841"/>
+      </a:dk2>
+      <a:lt2>
+        <a:srgbClr val="E8E8E8"/>
+      </a:lt2>
+      <a:accent1>
+        <a:srgbClr val="156082"/>
+      </a:accent1>
+      <a:accent2>
+        <a:srgbClr val="E97132"/>
+      </a:accent2>
+      <a:accent3>
+        <a:srgbClr val="196B24"/>
+      </a:accent3>
+      <a:accent4>
+        <a:srgbClr val="0F9ED5"/>
+      </a:accent4>
+      <a:accent5>
+        <a:srgbClr val="A02B93"/>
+      </a:accent5>
+      <a:accent6>
+        <a:srgbClr val="4EA72E"/>
+      </a:accent6>
+      <a:hlink>
+        <a:srgbClr val="467886"/>
+      </a:hlink>
+      <a:folHlink>
+        <a:srgbClr val="96607D"/>
+      </a:folHlink>
+    </a:clrScheme>
+    <a:fontScheme name="Office">
+      <a:majorFont>
+        <a:latin typeface="Calibri Light"/>
+        <a:ea typeface="Calibri Light"/>
+        <a:cs typeface="Calibri Light"/>
+      </a:majorFont>
+      <a:minorFont>
+        <a:latin typeface="Calibri"/>
+        <a:ea typeface="Calibri"/>
+        <a:cs typeface="Calibri"/>
+      </a:minorFont>
+    </a:fontScheme>
+    <a:fmtScheme name="ChatGPT">
+      <a:fillStyleLst>
+        <a:solidFill>
+          <a:schemeClr val="phClr"/>
+        </a:solidFill>
+        <a:gradFill>
+          <a:gsLst>
+            <a:gs pos="0">
+              <a:schemeClr val="phClr">
+                <a:tint val="67000"/>
+                <a:lumMod val="110000"/>
+                <a:satMod val="105000"/>
+              </a:schemeClr>
+            </a:gs>
+            <a:gs pos="50000">
+              <a:schemeClr val="phClr">
+                <a:tint val="73000"/>
+                <a:lumMod val="105000"/>
+                <a:satMod val="103000"/>
+              </a:schemeClr>
+            </a:gs>
+            <a:gs pos="100000">
+              <a:schemeClr val="phClr">
+                <a:tint val="81000"/>
+                <a:lumMod val="105000"/>
+                <a:satMod val="109000"/>
+              </a:schemeClr>
+            </a:gs>
+          </a:gsLst>
+          <a:lin ang="5400000" scaled="0"/>
+        </a:gradFill>
+        <a:gradFill>
+          <a:gsLst>
+            <a:gs pos="0">
+              <a:schemeClr val="phClr">
+                <a:tint val="94000"/>
+                <a:lumMod val="102000"/>
+                <a:satMod val="103000"/>
+              </a:schemeClr>
+            </a:gs>
+            <a:gs pos="50000">
+              <a:schemeClr val="phClr">
+                <a:shade val="100000"/>
+                <a:lumMod val="100000"/>
+                <a:satMod val="110000"/>
+              </a:schemeClr>
+            </a:gs>
+            <a:gs pos="100000">
+              <a:schemeClr val="phClr">
+                <a:shade val="78000"/>
+                <a:lumMod val="99000"/>
+                <a:satMod val="120000"/>
+              </a:schemeClr>
+            </a:gs>
+          </a:gsLst>
+          <a:lin ang="5400000" scaled="0"/>
+        </a:gradFill>
+      </a:fillStyleLst>
+      <a:lnStyleLst>
+        <a:ln w="12700">
+          <a:solidFill>
+            <a:schemeClr val="phClr"/>
+          </a:solidFill>
+          <a:prstDash val="solid"/>
+        </a:ln>
+        <a:ln w="19050">
+          <a:solidFill>
+            <a:schemeClr val="phClr"/>
+          </a:solidFill>
+          <a:prstDash val="solid"/>
+        </a:ln>
+        <a:ln w="25400">
+          <a:solidFill>
+            <a:schemeClr val="phClr"/>
+          </a:solidFill>
+          <a:prstDash val="solid"/>
+        </a:ln>
+      </a:lnStyleLst>
+      <a:effectStyleLst>
+        <a:effectStyle>
+          <a:effectLst/>
+        </a:effectStyle>
+        <a:effectStyle>
+          <a:effectLst/>
+        </a:effectStyle>
+        <a:effectStyle>
+          <a:effectLst>
+            <a:outerShdw blurRad="57150" dist="19050" dir="5400000">
+              <a:srgbClr val="000000">
+                <a:alpha val="16000"/>
+              </a:srgbClr>
+            </a:outerShdw>
+          </a:effectLst>
+        </a:effectStyle>
+        <a:effectStyle>
+          <a:effectLst>
+            <a:outerShdw blurRad="19050" dist="9525" dir="5400000">
+              <a:srgbClr val="000000">
+                <a:alpha val="6000"/>
+              </a:srgbClr>
+            </a:outerShdw>
+          </a:effectLst>
+        </a:effectStyle>
+        <a:effectStyle>
+          <a:effectLst>
+            <a:outerShdw blurRad="28575" dist="9525" dir="5400000">
+              <a:srgbClr val="000000">
+                <a:alpha val="8000"/>
+              </a:srgbClr>
+            </a:outerShdw>
+          </a:effectLst>
+        </a:effectStyle>
+        <a:effectStyle>
+          <a:effectLst>
+            <a:outerShdw blurRad="57150" dist="19050" dir="5400000">
+              <a:srgbClr val="000000">
+                <a:alpha val="10000"/>
+              </a:srgbClr>
+            </a:outerShdw>
+          </a:effectLst>
+        </a:effectStyle>
+        <a:effectStyle>
+          <a:effectLst>
+            <a:outerShdw blurRad="114300" dist="38100" dir="5400000">
+              <a:srgbClr val="000000">
+                <a:alpha val="12000"/>
+              </a:srgbClr>
+            </a:outerShdw>
+          </a:effectLst>
+        </a:effectStyle>
+        <a:effectStyle>
+          <a:effectLst>
+            <a:outerShdw blurRad="171450" dist="57150" dir="5400000">
+              <a:srgbClr val="000000">
+                <a:alpha val="16000"/>
+              </a:srgbClr>
+            </a:outerShdw>
+          </a:effectLst>
+        </a:effectStyle>
+        <a:effectStyle>
+          <a:effectLst>
+            <a:outerShdw blurRad="266700" dist="95250" dir="5400000">
+              <a:srgbClr val="000000">
+                <a:alpha val="24000"/>
+              </a:srgbClr>
+            </a:outerShdw>
+          </a:effectLst>
+        </a:effectStyle>
+      </a:effectStyleLst>
+      <a:bgFillStyleLst>
+        <a:solidFill>
+          <a:schemeClr val="phClr"/>
+        </a:solidFill>
+        <a:solidFill>
+          <a:schemeClr val="phClr">
+            <a:tint val="95000"/>
+            <a:satMod val="170000"/>
+          </a:schemeClr>
+        </a:solidFill>
+        <a:gradFill>
+          <a:gsLst>
+            <a:gs pos="0">
+              <a:schemeClr val="phClr">
+                <a:tint val="93000"/>
+                <a:shade val="98000"/>
+                <a:lumMod val="102000"/>
+                <a:satMod val="150000"/>
+              </a:schemeClr>
+            </a:gs>
+            <a:gs pos="50000">
+              <a:schemeClr val="phClr">
+                <a:tint val="98000"/>
+                <a:shade val="90000"/>
+                <a:lumMod val="103000"/>
+                <a:satMod val="130000"/>
+              </a:schemeClr>
+            </a:gs>
+            <a:gs pos="100000">
+              <a:schemeClr val="phClr">
+                <a:shade val="63000"/>
+                <a:satMod val="120000"/>
+              </a:schemeClr>
+            </a:gs>
+          </a:gsLst>
+          <a:lin ang="5400000" scaled="0"/>
+        </a:gradFill>
+      </a:bgFillStyleLst>
+    </a:fmtScheme>
+  </a:themeElements>
+</a:theme>
+</file>
+
+<file path=ppt/slides/charts/chart1.xml><?xml version="1.0" encoding="utf-8"?>
+<c:chartSpace xmlns:c="http://schemas.openxmlformats.org/drawingml/2006/chart" xmlns:r="http://schemas.openxmlformats.org/officeDocument/2006/relationships">
+  <c:lang val="en-US"/>
+  <c:chart>
+    <c:plotArea>
+      <c:scatterChart>
+        <c:ser>
+          <c:idx val="0"/>
+          <c:order val="0"/>
+          <c:tx>
+            <c:v>25 degree phase</c:v>
+          </c:tx>
+          <c:spPr>
+            <a:ln xmlns:a="http://schemas.openxmlformats.org/drawingml/2006/main" w="28575">
+              <a:solidFill>
+                <a:srgbClr val="286BB0"/>
+              </a:solidFill>
+            </a:ln>
+          </c:spPr>
+          <c:marker>
+            <c:symbol val="none"/>
+            <c:size val="7"/>
+            <c:spPr>
+              <a:solidFill xmlns:a="http://schemas.openxmlformats.org/drawingml/2006/main">
+                <a:srgbClr val="286BB0"/>
+              </a:solidFill>
+            </c:spPr>
+          </c:marker>
+          <c:xVal>
+            <c:numRef>
+              <c:f>'Chart Data'!$A$2:$A$402</c:f>
+              <c:numCache>
+                <c:formatCode>General</c:formatCode>
+                <c:ptCount val="401"/>
+                <c:pt idx="0">
+                  <c:v>0</c:v>
+                </c:pt>
+                <c:pt idx="1">
+                  <c:v>0.275</c:v>
+                </c:pt>
+                <c:pt idx="2">
+                  <c:v>0.55</c:v>
+                </c:pt>
+                <c:pt idx="3">
+                  <c:v>0.825</c:v>
+                </c:pt>
+                <c:pt idx="4">
+                  <c:v>1.1</c:v>
+                </c:pt>
+                <c:pt idx="5">
+                  <c:v>1.375</c:v>
+                </c:pt>
+                <c:pt idx="6">
+                  <c:v>1.65</c:v>
+                </c:pt>
+                <c:pt idx="7">
+                  <c:v>1.925</c:v>
+                </c:pt>
+                <c:pt idx="8">
+                  <c:v>2.2</c:v>
+                </c:pt>
+                <c:pt idx="9">
+                  <c:v>2.475</c:v>
+                </c:pt>
+                <c:pt idx="10">
+                  <c:v>2.75</c:v>
+                </c:pt>
+                <c:pt idx="11">
+                  <c:v>3.025</c:v>
+                </c:pt>
+                <c:pt idx="12">
+                  <c:v>3.3</c:v>
+                </c:pt>
+                <c:pt idx="13">
+                  <c:v>3.575</c:v>
+                </c:pt>
+                <c:pt idx="14">
+                  <c:v>3.85</c:v>
+                </c:pt>
+                <c:pt idx="15">
+                  <c:v>4.125</c:v>
+                </c:pt>
+                <c:pt idx="16">
+                  <c:v>4.4</c:v>
+                </c:pt>
+                <c:pt idx="17">
+                  <c:v>4.675</c:v>
+                </c:pt>
+                <c:pt idx="18">
+                  <c:v>4.95</c:v>
+                </c:pt>
+                <c:pt idx="19">
+                  <c:v>5.225</c:v>
+                </c:pt>
+                <c:pt idx="20">
+                  <c:v>5.5</c:v>
+                </c:pt>
+                <c:pt idx="21">
+                  <c:v>5.775</c:v>
+                </c:pt>
+                <c:pt idx="22">
+                  <c:v>6.05</c:v>
+                </c:pt>
+                <c:pt idx="23">
+                  <c:v>6.325</c:v>
+                </c:pt>
+                <c:pt idx="24">
+                  <c:v>6.6</c:v>
+                </c:pt>
+                <c:pt idx="25">
+                  <c:v>6.875</c:v>
+                </c:pt>
+                <c:pt idx="26">
+                  <c:v>7.15</c:v>
+                </c:pt>
+                <c:pt idx="27">
+                  <c:v>7.425</c:v>
+                </c:pt>
+                <c:pt idx="28">
+                  <c:v>7.7</c:v>
+                </c:pt>
+                <c:pt idx="29">
+                  <c:v>7.975</c:v>
+                </c:pt>
+                <c:pt idx="30">
+                  <c:v>8.25</c:v>
+                </c:pt>
+                <c:pt idx="31">
+                  <c:v>8.525</c:v>
+                </c:pt>
+                <c:pt idx="32">
+                  <c:v>8.8</c:v>
+                </c:pt>
+                <c:pt idx="33">
+                  <c:v>9.075</c:v>
+                </c:pt>
+                <c:pt idx="34">
+                  <c:v>9.35</c:v>
+                </c:pt>
+                <c:pt idx="35">
+                  <c:v>9.625</c:v>
+                </c:pt>
+                <c:pt idx="36">
+                  <c:v>9.9</c:v>
+                </c:pt>
+                <c:pt idx="37">
+                  <c:v>10.175</c:v>
+                </c:pt>
+                <c:pt idx="38">
+                  <c:v>10.45</c:v>
+                </c:pt>
+                <c:pt idx="39">
+                  <c:v>10.725</c:v>
+                </c:pt>
+                <c:pt idx="40">
+                  <c:v>11</c:v>
+                </c:pt>
+                <c:pt idx="41">
+                  <c:v>11.275</c:v>
+                </c:pt>
+                <c:pt idx="42">
+                  <c:v>11.55</c:v>
+                </c:pt>
+                <c:pt idx="43">
+                  <c:v>11.825</c:v>
+                </c:pt>
+                <c:pt idx="44">
+                  <c:v>12.1</c:v>
+                </c:pt>
+                <c:pt idx="45">
+                  <c:v>12.375</c:v>
+                </c:pt>
+                <c:pt idx="46">
+                  <c:v>12.65</c:v>
+                </c:pt>
+                <c:pt idx="47">
+                  <c:v>12.925</c:v>
+                </c:pt>
+                <c:pt idx="48">
+                  <c:v>13.2</c:v>
+                </c:pt>
+                <c:pt idx="49">
+                  <c:v>13.475</c:v>
+                </c:pt>
+                <c:pt idx="50">
+                  <c:v>13.75</c:v>
+                </c:pt>
+                <c:pt idx="51">
+                  <c:v>14.025</c:v>
+                </c:pt>
+                <c:pt idx="52">
+                  <c:v>14.3</c:v>
+                </c:pt>
+                <c:pt idx="53">
+                  <c:v>14.575</c:v>
+                </c:pt>
+                <c:pt idx="54">
+                  <c:v>14.85</c:v>
+                </c:pt>
+                <c:pt idx="55">
+                  <c:v>15.125</c:v>
+                </c:pt>
+                <c:pt idx="56">
+                  <c:v>15.4</c:v>
+                </c:pt>
+                <c:pt idx="57">
+                  <c:v>15.675</c:v>
+                </c:pt>
+                <c:pt idx="58">
+                  <c:v>15.95</c:v>
+                </c:pt>
+                <c:pt idx="59">
+                  <c:v>16.225</c:v>
+                </c:pt>
+                <c:pt idx="60">
+                  <c:v>16.5</c:v>
+                </c:pt>
+                <c:pt idx="61">
+                  <c:v>16.775</c:v>
+                </c:pt>
+                <c:pt idx="62">
+                  <c:v>17.05</c:v>
+                </c:pt>
+                <c:pt idx="63">
+                  <c:v>17.325</c:v>
+                </c:pt>
+                <c:pt idx="64">
+                  <c:v>17.6</c:v>
+                </c:pt>
+                <c:pt idx="65">
+                  <c:v>17.875</c:v>
+                </c:pt>
+                <c:pt idx="66">
+                  <c:v>18.15</c:v>
+                </c:pt>
+                <c:pt idx="67">
+                  <c:v>18.425</c:v>
+                </c:pt>
+                <c:pt idx="68">
+                  <c:v>18.7</c:v>
+                </c:pt>
+                <c:pt idx="69">
+                  <c:v>18.975</c:v>
+                </c:pt>
+                <c:pt idx="70">
+                  <c:v>19.25</c:v>
+                </c:pt>
+                <c:pt idx="71">
+                  <c:v>19.525</c:v>
+                </c:pt>
+                <c:pt idx="72">
+                  <c:v>19.8</c:v>
+                </c:pt>
+                <c:pt idx="73">
+                  <c:v>20.075</c:v>
+                </c:pt>
+                <c:pt idx="74">
+                  <c:v>20.35</c:v>
+                </c:pt>
+                <c:pt idx="75">
+                  <c:v>20.625</c:v>
+                </c:pt>
+                <c:pt idx="76">
+                  <c:v>20.9</c:v>
+                </c:pt>
+                <c:pt idx="77">
+                  <c:v>21.175</c:v>
+                </c:pt>
+                <c:pt idx="78">
+                  <c:v>21.45</c:v>
+                </c:pt>
+                <c:pt idx="79">
+                  <c:v>21.725</c:v>
+                </c:pt>
+                <c:pt idx="80">
+                  <c:v>22</c:v>
+                </c:pt>
+                <c:pt idx="81">
+                  <c:v>22.275</c:v>
+                </c:pt>
+                <c:pt idx="82">
+                  <c:v>22.55</c:v>
+                </c:pt>
+                <c:pt idx="83">
+                  <c:v>22.825</c:v>
+                </c:pt>
+                <c:pt idx="84">
+                  <c:v>23.1</c:v>
+                </c:pt>
+                <c:pt idx="85">
+                  <c:v>23.375</c:v>
+                </c:pt>
+                <c:pt idx="86">
+                  <c:v>23.65</c:v>
+                </c:pt>
+                <c:pt idx="87">
+                  <c:v>23.925</c:v>
+                </c:pt>
+                <c:pt idx="88">
+                  <c:v>24.2</c:v>
+                </c:pt>
+                <c:pt idx="89">
+                  <c:v>24.475</c:v>
+                </c:pt>
+                <c:pt idx="90">
+                  <c:v>24.75</c:v>
+                </c:pt>
+                <c:pt idx="91">
+                  <c:v>25.025</c:v>
+                </c:pt>
+                <c:pt idx="92">
+                  <c:v>25.3</c:v>
+                </c:pt>
+                <c:pt idx="93">
+                  <c:v>25.575</c:v>
+                </c:pt>
+                <c:pt idx="94">
+                  <c:v>25.85</c:v>
+                </c:pt>
+                <c:pt idx="95">
+                  <c:v>26.125</c:v>
+                </c:pt>
+                <c:pt idx="96">
+                  <c:v>26.4</c:v>
+                </c:pt>
+                <c:pt idx="97">
+                  <c:v>26.675</c:v>
+                </c:pt>
+                <c:pt idx="98">
+                  <c:v>26.95</c:v>
+                </c:pt>
+                <c:pt idx="99">
+                  <c:v>27.225</c:v>
+                </c:pt>
+                <c:pt idx="100">
+                  <c:v>27.5</c:v>
+                </c:pt>
+                <c:pt idx="101">
+                  <c:v>27.775</c:v>
+                </c:pt>
+                <c:pt idx="102">
+                  <c:v>28.05</c:v>
+                </c:pt>
+                <c:pt idx="103">
+                  <c:v>28.325</c:v>
+                </c:pt>
+                <c:pt idx="104">
+                  <c:v>28.6</c:v>
+                </c:pt>
+                <c:pt idx="105">
+                  <c:v>28.875</c:v>
+                </c:pt>
+                <c:pt idx="106">
+                  <c:v>29.15</c:v>
+                </c:pt>
+                <c:pt idx="107">
+                  <c:v>29.425</c:v>
+                </c:pt>
+                <c:pt idx="108">
+                  <c:v>29.7</c:v>
+                </c:pt>
+                <c:pt idx="109">
+                  <c:v>29.975</c:v>
+                </c:pt>
+                <c:pt idx="110">
+                  <c:v>30.25</c:v>
+                </c:pt>
+                <c:pt idx="111">
+                  <c:v>30.525</c:v>
+                </c:pt>
+                <c:pt idx="112">
+                  <c:v>30.8</c:v>
+                </c:pt>
+                <c:pt idx="113">
+                  <c:v>31.075</c:v>
+                </c:pt>
+                <c:pt idx="114">
+                  <c:v>31.35</c:v>
+                </c:pt>
+                <c:pt idx="115">
+                  <c:v>31.625</c:v>
+                </c:pt>
+                <c:pt idx="116">
+                  <c:v>31.9</c:v>
+                </c:pt>
+                <c:pt idx="117">
+                  <c:v>32.175</c:v>
+                </c:pt>
+                <c:pt idx="118">
+                  <c:v>32.45</c:v>
+                </c:pt>
+                <c:pt idx="119">
+                  <c:v>32.725</c:v>
+                </c:pt>
+                <c:pt idx="120">
+                  <c:v>33</c:v>
+                </c:pt>
+                <c:pt idx="121">
+                  <c:v>33.275</c:v>
+                </c:pt>
+                <c:pt idx="122">
+                  <c:v>33.55</c:v>
+                </c:pt>
+                <c:pt idx="123">
+                  <c:v>33.825</c:v>
+                </c:pt>
+                <c:pt idx="124">
+                  <c:v>34.1</c:v>
+                </c:pt>
+                <c:pt idx="125">
+                  <c:v>34.375</c:v>
+                </c:pt>
+                <c:pt idx="126">
+                  <c:v>34.65</c:v>
+                </c:pt>
+                <c:pt idx="127">
+                  <c:v>34.925</c:v>
+                </c:pt>
+                <c:pt idx="128">
+                  <c:v>35.2</c:v>
+                </c:pt>
+                <c:pt idx="129">
+                  <c:v>35.475</c:v>
+                </c:pt>
+                <c:pt idx="130">
+                  <c:v>35.75</c:v>
+                </c:pt>
+                <c:pt idx="131">
+                  <c:v>36.025</c:v>
+                </c:pt>
+                <c:pt idx="132">
+                  <c:v>36.3</c:v>
+                </c:pt>
+                <c:pt idx="133">
+                  <c:v>36.575</c:v>
+                </c:pt>
+                <c:pt idx="134">
+                  <c:v>36.85</c:v>
+                </c:pt>
+                <c:pt idx="135">
+                  <c:v>37.125</c:v>
+                </c:pt>
+                <c:pt idx="136">
+                  <c:v>37.4</c:v>
+                </c:pt>
+                <c:pt idx="137">
+                  <c:v>37.675</c:v>
+                </c:pt>
+                <c:pt idx="138">
+                  <c:v>37.95</c:v>
+                </c:pt>
+                <c:pt idx="139">
+                  <c:v>38.225</c:v>
+                </c:pt>
+                <c:pt idx="140">
+                  <c:v>38.5</c:v>
+                </c:pt>
+                <c:pt idx="141">
+                  <c:v>38.775</c:v>
+                </c:pt>
+                <c:pt idx="142">
+                  <c:v>39.05</c:v>
+                </c:pt>
+                <c:pt idx="143">
+                  <c:v>39.325</c:v>
+                </c:pt>
+                <c:pt idx="144">
+                  <c:v>39.6</c:v>
+                </c:pt>
+                <c:pt idx="145">
+                  <c:v>39.875</c:v>
+                </c:pt>
+                <c:pt idx="146">
+                  <c:v>40.15</c:v>
+                </c:pt>
+                <c:pt idx="147">
+                  <c:v>40.425</c:v>
+                </c:pt>
+                <c:pt idx="148">
+                  <c:v>40.7</c:v>
+                </c:pt>
+                <c:pt idx="149">
+                  <c:v>40.975</c:v>
+                </c:pt>
+                <c:pt idx="150">
+                  <c:v>41.25</c:v>
+                </c:pt>
+                <c:pt idx="151">
+                  <c:v>41.525</c:v>
+                </c:pt>
+                <c:pt idx="152">
+                  <c:v>41.8</c:v>
+                </c:pt>
+                <c:pt idx="153">
+                  <c:v>42.075</c:v>
+                </c:pt>
+                <c:pt idx="154">
+                  <c:v>42.35</c:v>
+                </c:pt>
+                <c:pt idx="155">
+                  <c:v>42.625</c:v>
+                </c:pt>
+                <c:pt idx="156">
+                  <c:v>42.9</c:v>
+                </c:pt>
+                <c:pt idx="157">
+                  <c:v>43.175</c:v>
+                </c:pt>
+                <c:pt idx="158">
+                  <c:v>43.45</c:v>
+                </c:pt>
+                <c:pt idx="159">
+                  <c:v>43.725</c:v>
+                </c:pt>
+                <c:pt idx="160">
+                  <c:v>44</c:v>
+                </c:pt>
+                <c:pt idx="161">
+                  <c:v>44.275</c:v>
+                </c:pt>
+                <c:pt idx="162">
+                  <c:v>44.55</c:v>
+                </c:pt>
+                <c:pt idx="163">
+                  <c:v>44.825</c:v>
+                </c:pt>
+                <c:pt idx="164">
+                  <c:v>45.1</c:v>
+                </c:pt>
+                <c:pt idx="165">
+                  <c:v>45.375</c:v>
+                </c:pt>
+                <c:pt idx="166">
+                  <c:v>45.65</c:v>
+                </c:pt>
+                <c:pt idx="167">
+                  <c:v>45.925</c:v>
+                </c:pt>
+                <c:pt idx="168">
+                  <c:v>46.2</c:v>
+                </c:pt>
+                <c:pt idx="169">
+                  <c:v>46.475</c:v>
+                </c:pt>
+                <c:pt idx="170">
+                  <c:v>46.75</c:v>
+                </c:pt>
+                <c:pt idx="171">
+                  <c:v>47.025</c:v>
+                </c:pt>
+                <c:pt idx="172">
+                  <c:v>47.3</c:v>
+                </c:pt>
+                <c:pt idx="173">
+                  <c:v>47.575</c:v>
+                </c:pt>
+                <c:pt idx="174">
+                  <c:v>47.85</c:v>
+                </c:pt>
+                <c:pt idx="175">
+                  <c:v>48.125</c:v>
+                </c:pt>
+                <c:pt idx="176">
+                  <c:v>48.4</c:v>
+                </c:pt>
+                <c:pt idx="177">
+                  <c:v>48.675</c:v>
+                </c:pt>
+                <c:pt idx="178">
+                  <c:v>48.95</c:v>
+                </c:pt>
+                <c:pt idx="179">
+                  <c:v>49.225</c:v>
+                </c:pt>
+                <c:pt idx="180">
+                  <c:v>49.5</c:v>
+                </c:pt>
+                <c:pt idx="181">
+                  <c:v>49.775</c:v>
+                </c:pt>
+                <c:pt idx="182">
+                  <c:v>50.05</c:v>
+                </c:pt>
+                <c:pt idx="183">
+                  <c:v>50.325</c:v>
+                </c:pt>
+                <c:pt idx="184">
+                  <c:v>50.6</c:v>
+                </c:pt>
+                <c:pt idx="185">
+                  <c:v>50.875</c:v>
+                </c:pt>
+                <c:pt idx="186">
+                  <c:v>51.15</c:v>
+                </c:pt>
+                <c:pt idx="187">
+                  <c:v>51.425</c:v>
+                </c:pt>
+                <c:pt idx="188">
+                  <c:v>51.7</c:v>
+                </c:pt>
+                <c:pt idx="189">
+                  <c:v>51.975</c:v>
+                </c:pt>
+                <c:pt idx="190">
+                  <c:v>52.25</c:v>
+                </c:pt>
+                <c:pt idx="191">
+                  <c:v>52.525</c:v>
+                </c:pt>
+                <c:pt idx="192">
+                  <c:v>52.8</c:v>
+                </c:pt>
+                <c:pt idx="193">
+                  <c:v>53.075</c:v>
+                </c:pt>
+                <c:pt idx="194">
+                  <c:v>53.35</c:v>
+                </c:pt>
+                <c:pt idx="195">
+                  <c:v>53.625</c:v>
+                </c:pt>
+                <c:pt idx="196">
+                  <c:v>53.9</c:v>
+                </c:pt>
+                <c:pt idx="197">
+                  <c:v>54.175</c:v>
+                </c:pt>
+                <c:pt idx="198">
+                  <c:v>54.45</c:v>
+                </c:pt>
+                <c:pt idx="199">
+                  <c:v>54.725</c:v>
+                </c:pt>
+                <c:pt idx="200">
+                  <c:v>55</c:v>
+                </c:pt>
+                <c:pt idx="201">
+                  <c:v>55.275</c:v>
+                </c:pt>
+                <c:pt idx="202">
+                  <c:v>55.55</c:v>
+                </c:pt>
+                <c:pt idx="203">
+                  <c:v>55.825</c:v>
+                </c:pt>
+                <c:pt idx="204">
+                  <c:v>56.1</c:v>
+                </c:pt>
+                <c:pt idx="205">
+                  <c:v>56.375</c:v>
+                </c:pt>
+                <c:pt idx="206">
+                  <c:v>56.65</c:v>
+                </c:pt>
+                <c:pt idx="207">
+                  <c:v>56.925</c:v>
+                </c:pt>
+                <c:pt idx="208">
+                  <c:v>57.2</c:v>
+                </c:pt>
+                <c:pt idx="209">
+                  <c:v>57.475</c:v>
+                </c:pt>
+                <c:pt idx="210">
+                  <c:v>57.75</c:v>
+                </c:pt>
+                <c:pt idx="211">
+                  <c:v>58.025</c:v>
+                </c:pt>
+                <c:pt idx="212">
+                  <c:v>58.3</c:v>
+                </c:pt>
+                <c:pt idx="213">
+                  <c:v>58.575</c:v>
+                </c:pt>
+                <c:pt idx="214">
+                  <c:v>58.85</c:v>
+                </c:pt>
+                <c:pt idx="215">
+                  <c:v>59.125</c:v>
+                </c:pt>
+                <c:pt idx="216">
+                  <c:v>59.4</c:v>
+                </c:pt>
+                <c:pt idx="217">
+                  <c:v>59.675</c:v>
+                </c:pt>
+                <c:pt idx="218">
+                  <c:v>59.95</c:v>
+                </c:pt>
+                <c:pt idx="219">
+                  <c:v>60.225</c:v>
+                </c:pt>
+                <c:pt idx="220">
+                  <c:v>60.5</c:v>
+                </c:pt>
+                <c:pt idx="221">
+                  <c:v>60.775</c:v>
+                </c:pt>
+                <c:pt idx="222">
+                  <c:v>61.05</c:v>
+                </c:pt>
+                <c:pt idx="223">
+                  <c:v>61.325</c:v>
+                </c:pt>
+                <c:pt idx="224">
+                  <c:v>61.6</c:v>
+                </c:pt>
+                <c:pt idx="225">
+                  <c:v>61.875</c:v>
+                </c:pt>
+                <c:pt idx="226">
+                  <c:v>62.15</c:v>
+                </c:pt>
+                <c:pt idx="227">
+                  <c:v>62.425</c:v>
+                </c:pt>
+                <c:pt idx="228">
+                  <c:v>62.7</c:v>
+                </c:pt>
+                <c:pt idx="229">
+                  <c:v>62.975</c:v>
+                </c:pt>
+                <c:pt idx="230">
+                  <c:v>63.25</c:v>
+                </c:pt>
+                <c:pt idx="231">
+                  <c:v>63.525</c:v>
+                </c:pt>
+                <c:pt idx="232">
+                  <c:v>63.8</c:v>
+                </c:pt>
+                <c:pt idx="233">
+                  <c:v>64.075</c:v>
+                </c:pt>
+                <c:pt idx="234">
+                  <c:v>64.35</c:v>
+                </c:pt>
+                <c:pt idx="235">
+                  <c:v>64.625</c:v>
+                </c:pt>
+                <c:pt idx="236">
+                  <c:v>64.9</c:v>
+                </c:pt>
+                <c:pt idx="237">
+                  <c:v>65.175</c:v>
+                </c:pt>
+                <c:pt idx="238">
+                  <c:v>65.45</c:v>
+                </c:pt>
+                <c:pt idx="239">
+                  <c:v>65.725</c:v>
+                </c:pt>
+                <c:pt idx="240">
+                  <c:v>66</c:v>
+                </c:pt>
+                <c:pt idx="241">
+                  <c:v>66.275</c:v>
+                </c:pt>
+                <c:pt idx="242">
+                  <c:v>66.55</c:v>
+                </c:pt>
+                <c:pt idx="243">
+                  <c:v>66.825</c:v>
+                </c:pt>
+                <c:pt idx="244">
+                  <c:v>67.1</c:v>
+                </c:pt>
+                <c:pt idx="245">
+                  <c:v>67.375</c:v>
+                </c:pt>
+                <c:pt idx="246">
+                  <c:v>67.65</c:v>
+                </c:pt>
+                <c:pt idx="247">
+                  <c:v>67.925</c:v>
+                </c:pt>
+                <c:pt idx="248">
+                  <c:v>68.2</c:v>
+                </c:pt>
+                <c:pt idx="249">
+                  <c:v>68.475</c:v>
+                </c:pt>
+                <c:pt idx="250">
+                  <c:v>68.75</c:v>
+                </c:pt>
+                <c:pt idx="251">
+                  <c:v>69.025</c:v>
+                </c:pt>
+                <c:pt idx="252">
+                  <c:v>69.3</c:v>
+                </c:pt>
+                <c:pt idx="253">
+                  <c:v>69.575</c:v>
+                </c:pt>
+                <c:pt idx="254">
+                  <c:v>69.85</c:v>
+                </c:pt>
+                <c:pt idx="255">
+                  <c:v>70.125</c:v>
+                </c:pt>
+                <c:pt idx="256">
+                  <c:v>70.4</c:v>
+                </c:pt>
+                <c:pt idx="257">
+                  <c:v>70.675</c:v>
+                </c:pt>
+                <c:pt idx="258">
+                  <c:v>70.95</c:v>
+                </c:pt>
+                <c:pt idx="259">
+                  <c:v>71.225</c:v>
+                </c:pt>
+                <c:pt idx="260">
+                  <c:v>71.5</c:v>
+                </c:pt>
+                <c:pt idx="261">
+                  <c:v>71.775</c:v>
+                </c:pt>
+                <c:pt idx="262">
+                  <c:v>72.05</c:v>
+                </c:pt>
+                <c:pt idx="263">
+                  <c:v>72.325</c:v>
+                </c:pt>
+                <c:pt idx="264">
+                  <c:v>72.6</c:v>
+                </c:pt>
+                <c:pt idx="265">
+                  <c:v>72.875</c:v>
+                </c:pt>
+                <c:pt idx="266">
+                  <c:v>73.15</c:v>
+                </c:pt>
+                <c:pt idx="267">
+                  <c:v>73.425</c:v>
+                </c:pt>
+                <c:pt idx="268">
+                  <c:v>73.7</c:v>
+                </c:pt>
+                <c:pt idx="269">
+                  <c:v>73.975</c:v>
+                </c:pt>
+                <c:pt idx="270">
+                  <c:v>74.25</c:v>
+                </c:pt>
+                <c:pt idx="271">
+                  <c:v>74.525</c:v>
+                </c:pt>
+                <c:pt idx="272">
+                  <c:v>74.8</c:v>
+                </c:pt>
+                <c:pt idx="273">
+                  <c:v>75.075</c:v>
+                </c:pt>
+                <c:pt idx="274">
+                  <c:v>75.35</c:v>
+                </c:pt>
+                <c:pt idx="275">
+                  <c:v>75.625</c:v>
+                </c:pt>
+                <c:pt idx="276">
+                  <c:v>75.9</c:v>
+                </c:pt>
+                <c:pt idx="277">
+                  <c:v>76.175</c:v>
+                </c:pt>
+                <c:pt idx="278">
+                  <c:v>76.45</c:v>
+                </c:pt>
+                <c:pt idx="279">
+                  <c:v>76.725</c:v>
+                </c:pt>
+                <c:pt idx="280">
+                  <c:v>77</c:v>
+                </c:pt>
+                <c:pt idx="281">
+                  <c:v>77.275</c:v>
+                </c:pt>
+                <c:pt idx="282">
+                  <c:v>77.55</c:v>
+                </c:pt>
+                <c:pt idx="283">
+                  <c:v>77.825</c:v>
+                </c:pt>
+                <c:pt idx="284">
+                  <c:v>78.1</c:v>
+                </c:pt>
+                <c:pt idx="285">
+                  <c:v>78.375</c:v>
+                </c:pt>
+                <c:pt idx="286">
+                  <c:v>78.65</c:v>
+                </c:pt>
+                <c:pt idx="287">
+                  <c:v>78.925</c:v>
+                </c:pt>
+                <c:pt idx="288">
+                  <c:v>79.2</c:v>
+                </c:pt>
+                <c:pt idx="289">
+                  <c:v>79.475</c:v>
+                </c:pt>
+                <c:pt idx="290">
+                  <c:v>79.75</c:v>
+                </c:pt>
+                <c:pt idx="291">
+                  <c:v>80.025</c:v>
+                </c:pt>
+                <c:pt idx="292">
+                  <c:v>80.3</c:v>
+                </c:pt>
+                <c:pt idx="293">
+                  <c:v>80.575</c:v>
+                </c:pt>
+                <c:pt idx="294">
+                  <c:v>80.85</c:v>
+                </c:pt>
+                <c:pt idx="295">
+                  <c:v>81.125</c:v>
+                </c:pt>
+                <c:pt idx="296">
+                  <c:v>81.4</c:v>
+                </c:pt>
+                <c:pt idx="297">
+                  <c:v>81.675</c:v>
+                </c:pt>
+                <c:pt idx="298">
+                  <c:v>81.95</c:v>
+                </c:pt>
+                <c:pt idx="299">
+                  <c:v>82.225</c:v>
+                </c:pt>
+                <c:pt idx="300">
+                  <c:v>82.5</c:v>
+                </c:pt>
+                <c:pt idx="301">
+                  <c:v>82.775</c:v>
+                </c:pt>
+                <c:pt idx="302">
+                  <c:v>83.05</c:v>
+                </c:pt>
+                <c:pt idx="303">
+                  <c:v>83.325</c:v>
+                </c:pt>
+                <c:pt idx="304">
+                  <c:v>83.6</c:v>
+                </c:pt>
+                <c:pt idx="305">
+                  <c:v>83.875</c:v>
+                </c:pt>
+                <c:pt idx="306">
+                  <c:v>84.15</c:v>
+                </c:pt>
+                <c:pt idx="307">
+                  <c:v>84.425</c:v>
+                </c:pt>
+                <c:pt idx="308">
+                  <c:v>84.7</c:v>
+                </c:pt>
+                <c:pt idx="309">
+                  <c:v>84.975</c:v>
+                </c:pt>
+                <c:pt idx="310">
+                  <c:v>85.25</c:v>
+                </c:pt>
+                <c:pt idx="311">
+                  <c:v>85.525</c:v>
+                </c:pt>
+                <c:pt idx="312">
+                  <c:v>85.8</c:v>
+                </c:pt>
+                <c:pt idx="313">
+                  <c:v>86.075</c:v>
+                </c:pt>
+                <c:pt idx="314">
+                  <c:v>86.35</c:v>
+                </c:pt>
+                <c:pt idx="315">
+                  <c:v>86.625</c:v>
+                </c:pt>
+                <c:pt idx="316">
+                  <c:v>86.9</c:v>
+                </c:pt>
+                <c:pt idx="317">
+                  <c:v>87.175</c:v>
+                </c:pt>
+                <c:pt idx="318">
+                  <c:v>87.45</c:v>
+                </c:pt>
+                <c:pt idx="319">
+                  <c:v>87.725</c:v>
+                </c:pt>
+                <c:pt idx="320">
+                  <c:v>88</c:v>
+                </c:pt>
+                <c:pt idx="321">
+                  <c:v>88.275</c:v>
+                </c:pt>
+                <c:pt idx="322">
+                  <c:v>88.55</c:v>
+                </c:pt>
+                <c:pt idx="323">
+                  <c:v>88.825</c:v>
+                </c:pt>
+                <c:pt idx="324">
+                  <c:v>89.1</c:v>
+                </c:pt>
+                <c:pt idx="325">
+                  <c:v>89.375</c:v>
+                </c:pt>
+                <c:pt idx="326">
+                  <c:v>89.65</c:v>
+                </c:pt>
+                <c:pt idx="327">
+                  <c:v>89.925</c:v>
+                </c:pt>
+                <c:pt idx="328">
+                  <c:v>90.2</c:v>
+                </c:pt>
+                <c:pt idx="329">
+                  <c:v>90.475</c:v>
+                </c:pt>
+                <c:pt idx="330">
+                  <c:v>90.75</c:v>
+                </c:pt>
+                <c:pt idx="331">
+                  <c:v>91.025</c:v>
+                </c:pt>
+                <c:pt idx="332">
+                  <c:v>91.3</c:v>
+                </c:pt>
+                <c:pt idx="333">
+                  <c:v>91.575</c:v>
+                </c:pt>
+                <c:pt idx="334">
+                  <c:v>91.85</c:v>
+                </c:pt>
+                <c:pt idx="335">
+                  <c:v>92.125</c:v>
+                </c:pt>
+                <c:pt idx="336">
+                  <c:v>92.4</c:v>
+                </c:pt>
+                <c:pt idx="337">
+                  <c:v>92.675</c:v>
+                </c:pt>
+                <c:pt idx="338">
+                  <c:v>92.95</c:v>
+                </c:pt>
+                <c:pt idx="339">
+                  <c:v>93.225</c:v>
+                </c:pt>
+                <c:pt idx="340">
+                  <c:v>93.5</c:v>
+                </c:pt>
+                <c:pt idx="341">
+                  <c:v>93.775</c:v>
+                </c:pt>
+                <c:pt idx="342">
+                  <c:v>94.05</c:v>
+                </c:pt>
+                <c:pt idx="343">
+                  <c:v>94.325</c:v>
+                </c:pt>
+                <c:pt idx="344">
+                  <c:v>94.6</c:v>
+                </c:pt>
+                <c:pt idx="345">
+                  <c:v>94.875</c:v>
+                </c:pt>
+                <c:pt idx="346">
+                  <c:v>95.15</c:v>
+                </c:pt>
+                <c:pt idx="347">
+                  <c:v>95.425</c:v>
+                </c:pt>
+                <c:pt idx="348">
+                  <c:v>95.7</c:v>
+                </c:pt>
+                <c:pt idx="349">
+                  <c:v>95.975</c:v>
+                </c:pt>
+                <c:pt idx="350">
+                  <c:v>96.25</c:v>
+                </c:pt>
+                <c:pt idx="351">
+                  <c:v>96.525</c:v>
+                </c:pt>
+                <c:pt idx="352">
+                  <c:v>96.8</c:v>
+                </c:pt>
+                <c:pt idx="353">
+                  <c:v>97.075</c:v>
+                </c:pt>
+                <c:pt idx="354">
+                  <c:v>97.35</c:v>
+                </c:pt>
+                <c:pt idx="355">
+                  <c:v>97.625</c:v>
+                </c:pt>
+                <c:pt idx="356">
+                  <c:v>97.9</c:v>
+                </c:pt>
+                <c:pt idx="357">
+                  <c:v>98.175</c:v>
+                </c:pt>
+                <c:pt idx="358">
+                  <c:v>98.45</c:v>
+                </c:pt>
+                <c:pt idx="359">
+                  <c:v>98.725</c:v>
+                </c:pt>
+                <c:pt idx="360">
+                  <c:v>99</c:v>
+                </c:pt>
+                <c:pt idx="361">
+                  <c:v>99.275</c:v>
+                </c:pt>
+                <c:pt idx="362">
+                  <c:v>99.55</c:v>
+                </c:pt>
+                <c:pt idx="363">
+                  <c:v>99.825</c:v>
+                </c:pt>
+                <c:pt idx="364">
+                  <c:v>100.1</c:v>
+                </c:pt>
+                <c:pt idx="365">
+                  <c:v>100.375</c:v>
+                </c:pt>
+                <c:pt idx="366">
+                  <c:v>100.65</c:v>
+                </c:pt>
+                <c:pt idx="367">
+                  <c:v>100.925</c:v>
+                </c:pt>
+                <c:pt idx="368">
+                  <c:v>101.2</c:v>
+                </c:pt>
+                <c:pt idx="369">
+                  <c:v>101.475</c:v>
+                </c:pt>
+                <c:pt idx="370">
+                  <c:v>101.75</c:v>
+                </c:pt>
+                <c:pt idx="371">
+                  <c:v>102.025</c:v>
+                </c:pt>
+                <c:pt idx="372">
+                  <c:v>102.3</c:v>
+                </c:pt>
+                <c:pt idx="373">
+                  <c:v>102.575</c:v>
+                </c:pt>
+                <c:pt idx="374">
+                  <c:v>102.85</c:v>
+                </c:pt>
+                <c:pt idx="375">
+                  <c:v>103.125</c:v>
+                </c:pt>
+                <c:pt idx="376">
+                  <c:v>103.4</c:v>
+                </c:pt>
+                <c:pt idx="377">
+                  <c:v>103.675</c:v>
+                </c:pt>
+                <c:pt idx="378">
+                  <c:v>103.95</c:v>
+                </c:pt>
+                <c:pt idx="379">
+                  <c:v>104.225</c:v>
+                </c:pt>
+                <c:pt idx="380">
+                  <c:v>104.5</c:v>
+                </c:pt>
+                <c:pt idx="381">
+                  <c:v>104.775</c:v>
+                </c:pt>
+                <c:pt idx="382">
+                  <c:v>105.05</c:v>
+                </c:pt>
+                <c:pt idx="383">
+                  <c:v>105.325</c:v>
+                </c:pt>
+                <c:pt idx="384">
+                  <c:v>105.6</c:v>
+                </c:pt>
+                <c:pt idx="385">
+                  <c:v>105.875</c:v>
+                </c:pt>
+                <c:pt idx="386">
+                  <c:v>106.15</c:v>
+                </c:pt>
+                <c:pt idx="387">
+                  <c:v>106.425</c:v>
+                </c:pt>
+                <c:pt idx="388">
+                  <c:v>106.7</c:v>
+                </c:pt>
+                <c:pt idx="389">
+                  <c:v>106.975</c:v>
+                </c:pt>
+                <c:pt idx="390">
+                  <c:v>107.25</c:v>
+                </c:pt>
+                <c:pt idx="391">
+                  <c:v>107.525</c:v>
+                </c:pt>
+                <c:pt idx="392">
+                  <c:v>107.8</c:v>
+                </c:pt>
+                <c:pt idx="393">
+                  <c:v>108.075</c:v>
+                </c:pt>
+                <c:pt idx="394">
+                  <c:v>108.35</c:v>
+                </c:pt>
+                <c:pt idx="395">
+                  <c:v>108.625</c:v>
+                </c:pt>
+                <c:pt idx="396">
+                  <c:v>108.9</c:v>
+                </c:pt>
+                <c:pt idx="397">
+                  <c:v>109.175</c:v>
+                </c:pt>
+                <c:pt idx="398">
+                  <c:v>109.45</c:v>
+                </c:pt>
+                <c:pt idx="399">
+                  <c:v>109.725</c:v>
+                </c:pt>
+                <c:pt idx="400">
+                  <c:v>110</c:v>
+                </c:pt>
+              </c:numCache>
+            </c:numRef>
+          </c:xVal>
+          <c:yVal>
+            <c:numRef>
+              <c:f>'Chart Data'!$B$2:$B$402</c:f>
+              <c:numCache>
+                <c:formatCode>0.0</c:formatCode>
+                <c:ptCount val="401"/>
+                <c:pt idx="0">
+                  <c:v>0.50714191</c:v>
+                </c:pt>
+                <c:pt idx="1">
+                  <c:v>0.54071653</c:v>
+                </c:pt>
+                <c:pt idx="2">
+                  <c:v>0.57376813</c:v>
+                </c:pt>
+                <c:pt idx="3">
+                  <c:v>0.60626477</c:v>
+                </c:pt>
+                <c:pt idx="4">
+                  <c:v>0.638175</c:v>
+                </c:pt>
+                <c:pt idx="5">
+                  <c:v>0.66946796</c:v>
+                </c:pt>
+                <c:pt idx="6">
+                  <c:v>0.70011338</c:v>
+                </c:pt>
+                <c:pt idx="7">
+                  <c:v>0.73008162</c:v>
+                </c:pt>
+                <c:pt idx="8">
+                  <c:v>0.7593437</c:v>
+                </c:pt>
+                <c:pt idx="9">
+                  <c:v>0.78787131</c:v>
+                </c:pt>
+                <c:pt idx="10">
+                  <c:v>0.81563686</c:v>
+                </c:pt>
+                <c:pt idx="11">
+                  <c:v>0.84261349</c:v>
+                </c:pt>
+                <c:pt idx="12">
+                  <c:v>0.86877511</c:v>
+                </c:pt>
+                <c:pt idx="13">
+                  <c:v>0.89409641</c:v>
+                </c:pt>
+                <c:pt idx="14">
+                  <c:v>0.9185529</c:v>
+                </c:pt>
+                <c:pt idx="15">
+                  <c:v>0.94212093</c:v>
+                </c:pt>
+                <c:pt idx="16">
+                  <c:v>0.96477771</c:v>
+                </c:pt>
+                <c:pt idx="17">
+                  <c:v>0.98650131</c:v>
+                </c:pt>
+                <c:pt idx="18">
+                  <c:v>1.00727072</c:v>
+                </c:pt>
+                <c:pt idx="19">
+                  <c:v>1.02706586</c:v>
+                </c:pt>
+                <c:pt idx="20">
+                  <c:v>1.04586758</c:v>
+                </c:pt>
+                <c:pt idx="21">
+                  <c:v>1.06365769</c:v>
+                </c:pt>
+                <c:pt idx="22">
+                  <c:v>1.08041898</c:v>
+                </c:pt>
+                <c:pt idx="23">
+                  <c:v>1.09613526</c:v>
+                </c:pt>
+                <c:pt idx="24">
+                  <c:v>1.1107913</c:v>
+                </c:pt>
+                <c:pt idx="25">
+                  <c:v>1.12437294</c:v>
+                </c:pt>
+                <c:pt idx="26">
+                  <c:v>1.13686703</c:v>
+                </c:pt>
+                <c:pt idx="27">
+                  <c:v>1.1482615</c:v>
+                </c:pt>
+                <c:pt idx="28">
+                  <c:v>1.15854533</c:v>
+                </c:pt>
+                <c:pt idx="29">
+                  <c:v>1.16770856</c:v>
+                </c:pt>
+                <c:pt idx="30">
+                  <c:v>1.17574234</c:v>
+                </c:pt>
+                <c:pt idx="31">
+                  <c:v>1.18263888</c:v>
+                </c:pt>
+                <c:pt idx="32">
+                  <c:v>1.18839153</c:v>
+                </c:pt>
+                <c:pt idx="33">
+                  <c:v>1.19299472</c:v>
+                </c:pt>
+                <c:pt idx="34">
+                  <c:v>1.19644399</c:v>
+                </c:pt>
+                <c:pt idx="35">
+                  <c:v>1.19873602</c:v>
+                </c:pt>
+                <c:pt idx="36">
+                  <c:v>1.19986857</c:v>
+                </c:pt>
+                <c:pt idx="37">
+                  <c:v>1.19984056</c:v>
+                </c:pt>
+                <c:pt idx="38">
+                  <c:v>1.19865202</c:v>
+                </c:pt>
+                <c:pt idx="39">
+                  <c:v>1.19630409</c:v>
+                </c:pt>
+                <c:pt idx="40">
+                  <c:v>1.19279904</c:v>
+                </c:pt>
+                <c:pt idx="41">
+                  <c:v>1.18814027</c:v>
+                </c:pt>
+                <c:pt idx="42">
+                  <c:v>1.18233228</c:v>
+                </c:pt>
+                <c:pt idx="43">
+                  <c:v>1.17538068</c:v>
+                </c:pt>
+                <c:pt idx="44">
+                  <c:v>1.16729221</c:v>
+                </c:pt>
+                <c:pt idx="45">
+                  <c:v>1.15807469</c:v>
+                </c:pt>
+                <c:pt idx="46">
+                  <c:v>1.14773703</c:v>
+                </c:pt>
+                <c:pt idx="47">
+                  <c:v>1.13628922</c:v>
+                </c:pt>
+                <c:pt idx="48">
+                  <c:v>1.12374236</c:v>
+                </c:pt>
+                <c:pt idx="49">
+                  <c:v>1.11010856</c:v>
+                </c:pt>
+                <c:pt idx="50">
+                  <c:v>1.09540101</c:v>
+                </c:pt>
+                <c:pt idx="51">
+                  <c:v>1.07963395</c:v>
+                </c:pt>
+                <c:pt idx="52">
+                  <c:v>1.06282262</c:v>
+                </c:pt>
+                <c:pt idx="53">
+                  <c:v>1.04498329</c:v>
+                </c:pt>
+                <c:pt idx="54">
+                  <c:v>1.0261332</c:v>
+                </c:pt>
+                <c:pt idx="55">
+                  <c:v>1.0062906</c:v>
+                </c:pt>
+                <c:pt idx="56">
+                  <c:v>0.98547467</c:v>
+                </c:pt>
+                <c:pt idx="57">
+                  <c:v>0.96370554</c:v>
+                </c:pt>
+                <c:pt idx="58">
+                  <c:v>0.94100428</c:v>
+                </c:pt>
+                <c:pt idx="59">
+                  <c:v>0.91739284</c:v>
+                </c:pt>
+                <c:pt idx="60">
+                  <c:v>0.89289406</c:v>
+                </c:pt>
+                <c:pt idx="61">
+                  <c:v>0.86753163</c:v>
+                </c:pt>
+                <c:pt idx="62">
+                  <c:v>0.8413301</c:v>
+                </c:pt>
+                <c:pt idx="63">
+                  <c:v>0.81431479</c:v>
+                </c:pt>
+                <c:pt idx="64">
+                  <c:v>0.78651184</c:v>
+                </c:pt>
+                <c:pt idx="65">
+                  <c:v>0.75794815</c:v>
+                </c:pt>
+                <c:pt idx="66">
+                  <c:v>0.72865133</c:v>
+                </c:pt>
+                <c:pt idx="67">
+                  <c:v>0.69864974</c:v>
+                </c:pt>
+                <c:pt idx="68">
+                  <c:v>0.66797238</c:v>
+                </c:pt>
+                <c:pt idx="69">
+                  <c:v>0.63664893</c:v>
+                </c:pt>
+                <c:pt idx="70">
+                  <c:v>0.60470968</c:v>
+                </c:pt>
+                <c:pt idx="71">
+                  <c:v>0.57218554</c:v>
+                </c:pt>
+                <c:pt idx="72">
+                  <c:v>0.53910795</c:v>
+                </c:pt>
+                <c:pt idx="73">
+                  <c:v>0.50550892</c:v>
+                </c:pt>
+                <c:pt idx="74">
+                  <c:v>0.47142094</c:v>
+                </c:pt>
+                <c:pt idx="75">
+                  <c:v>0.43687698</c:v>
+                </c:pt>
+                <c:pt idx="76">
+                  <c:v>0.40191045</c:v>
+                </c:pt>
+                <c:pt idx="77">
+                  <c:v>0.36655518</c:v>
+                </c:pt>
+                <c:pt idx="78">
+                  <c:v>0.33084536</c:v>
+                </c:pt>
+                <c:pt idx="79">
+                  <c:v>0.29481553</c:v>
+                </c:pt>
+                <c:pt idx="80">
+                  <c:v>0.25850054</c:v>
+                </c:pt>
+                <c:pt idx="81">
+                  <c:v>0.22193553</c:v>
+                </c:pt>
+                <c:pt idx="82">
+                  <c:v>0.18515584</c:v>
+                </c:pt>
+                <c:pt idx="83">
+                  <c:v>0.14819707</c:v>
+                </c:pt>
+                <c:pt idx="84">
+                  <c:v>0.11109496</c:v>
+                </c:pt>
+                <c:pt idx="85">
+                  <c:v>0.07388538</c:v>
+                </c:pt>
+                <c:pt idx="86">
+                  <c:v>0.03660435</c:v>
+                </c:pt>
+                <c:pt idx="87">
+                  <c:v>-0.00071209</c:v>
+                </c:pt>
+                <c:pt idx="88">
+                  <c:v>-0.03802785</c:v>
+                </c:pt>
+                <c:pt idx="89">
+                  <c:v>-0.07530682</c:v>
+                </c:pt>
+                <c:pt idx="90">
+                  <c:v>-0.11251295</c:v>
+                </c:pt>
+                <c:pt idx="91">
+                  <c:v>-0.14961025</c:v>
+                </c:pt>
+                <c:pt idx="92">
+                  <c:v>-0.18656285</c:v>
+                </c:pt>
+                <c:pt idx="93">
+                  <c:v>-0.22333499</c:v>
+                </c:pt>
+                <c:pt idx="94">
+                  <c:v>-0.25989111</c:v>
+                </c:pt>
+                <c:pt idx="95">
+                  <c:v>-0.29619586</c:v>
+                </c:pt>
+                <c:pt idx="96">
+                  <c:v>-0.33221411</c:v>
+                </c:pt>
+                <c:pt idx="97">
+                  <c:v>-0.36791104</c:v>
+                </c:pt>
+                <c:pt idx="98">
+                  <c:v>-0.4032521</c:v>
+                </c:pt>
+                <c:pt idx="99">
+                  <c:v>-0.43820312</c:v>
+                </c:pt>
+                <c:pt idx="100">
+                  <c:v>-0.47273029</c:v>
+                </c:pt>
+                <c:pt idx="101">
+                  <c:v>-0.50680022</c:v>
+                </c:pt>
+                <c:pt idx="102">
+                  <c:v>-0.54037995</c:v>
+                </c:pt>
+                <c:pt idx="103">
+                  <c:v>-0.573437</c:v>
+                </c:pt>
+                <c:pt idx="104">
+                  <c:v>-0.6059394</c:v>
+                </c:pt>
+                <c:pt idx="105">
+                  <c:v>-0.63785571</c:v>
+                </c:pt>
+                <c:pt idx="106">
+                  <c:v>-0.66915505</c:v>
+                </c:pt>
+                <c:pt idx="107">
+                  <c:v>-0.69980717</c:v>
+                </c:pt>
+                <c:pt idx="108">
+                  <c:v>-0.7297824</c:v>
+                </c:pt>
+                <c:pt idx="109">
+                  <c:v>-0.75905175</c:v>
+                </c:pt>
+                <c:pt idx="110">
+                  <c:v>-0.78758692</c:v>
+                </c:pt>
+                <c:pt idx="111">
+                  <c:v>-0.8153603</c:v>
+                </c:pt>
+                <c:pt idx="112">
+                  <c:v>-0.84234503</c:v>
+                </c:pt>
+                <c:pt idx="113">
+                  <c:v>-0.86851501</c:v>
+                </c:pt>
+                <c:pt idx="114">
+                  <c:v>-0.89384492</c:v>
+                </c:pt>
+                <c:pt idx="115">
+                  <c:v>-0.91831027</c:v>
+                </c:pt>
+                <c:pt idx="116">
+                  <c:v>-0.94188739</c:v>
+                </c:pt>
+                <c:pt idx="117">
+                  <c:v>-0.96455348</c:v>
+                </c:pt>
+                <c:pt idx="118">
+                  <c:v>-0.98628661</c:v>
+                </c:pt>
+                <c:pt idx="119">
+                  <c:v>-1.00706577</c:v>
+                </c:pt>
+                <c:pt idx="120">
+                  <c:v>-1.02687084</c:v>
+                </c:pt>
+                <c:pt idx="121">
+                  <c:v>-1.04568269</c:v>
+                </c:pt>
+                <c:pt idx="122">
+                  <c:v>-1.06348311</c:v>
+                </c:pt>
+                <c:pt idx="123">
+                  <c:v>-1.08025488</c:v>
+                </c:pt>
+                <c:pt idx="124">
+                  <c:v>-1.09598178</c:v>
+                </c:pt>
+                <c:pt idx="125">
+                  <c:v>-1.1106486</c:v>
+                </c:pt>
+                <c:pt idx="126">
+                  <c:v>-1.12424116</c:v>
+                </c:pt>
+                <c:pt idx="127">
+                  <c:v>-1.13674631</c:v>
+                </c:pt>
+                <c:pt idx="128">
+                  <c:v>-1.14815194</c:v>
+                </c:pt>
+                <c:pt idx="129">
+                  <c:v>-1.15844704</c:v>
+                </c:pt>
+                <c:pt idx="130">
+                  <c:v>-1.16762164</c:v>
+                </c:pt>
+                <c:pt idx="131">
+                  <c:v>-1.17566686</c:v>
+                </c:pt>
+                <c:pt idx="132">
+                  <c:v>-1.18257493</c:v>
+                </c:pt>
+                <c:pt idx="133">
+                  <c:v>-1.18833916</c:v>
+                </c:pt>
+                <c:pt idx="134">
+                  <c:v>-1.19295399</c:v>
+                </c:pt>
+                <c:pt idx="135">
+                  <c:v>-1.19641493</c:v>
+                </c:pt>
+                <c:pt idx="136">
+                  <c:v>-1.19871866</c:v>
+                </c:pt>
+                <c:pt idx="137">
+                  <c:v>-1.19986293</c:v>
+                </c:pt>
+                <c:pt idx="138">
+                  <c:v>-1.19984665</c:v>
+                </c:pt>
+                <c:pt idx="139">
+                  <c:v>-1.19866982</c:v>
+                </c:pt>
+                <c:pt idx="140">
+                  <c:v>-1.19633359</c:v>
+                </c:pt>
+                <c:pt idx="141">
+                  <c:v>-1.19284022</c:v>
+                </c:pt>
+                <c:pt idx="142">
+                  <c:v>-1.18819308</c:v>
+                </c:pt>
+                <c:pt idx="143">
+                  <c:v>-1.18239667</c:v>
+                </c:pt>
+                <c:pt idx="144">
+                  <c:v>-1.1754566</c:v>
+                </c:pt>
+                <c:pt idx="145">
+                  <c:v>-1.16737957</c:v>
+                </c:pt>
+                <c:pt idx="146">
+                  <c:v>-1.15817341</c:v>
+                </c:pt>
+                <c:pt idx="147">
+                  <c:v>-1.14784701</c:v>
+                </c:pt>
+                <c:pt idx="148">
+                  <c:v>-1.13641037</c:v>
+                </c:pt>
+                <c:pt idx="149">
+                  <c:v>-1.12387455</c:v>
+                </c:pt>
+                <c:pt idx="150">
+                  <c:v>-1.11025166</c:v>
+                </c:pt>
+                <c:pt idx="151">
+                  <c:v>-1.0955549</c:v>
+                </c:pt>
+                <c:pt idx="152">
+                  <c:v>-1.07979846</c:v>
+                </c:pt>
+                <c:pt idx="153">
+                  <c:v>-1.0629976</c:v>
+                </c:pt>
+                <c:pt idx="154">
+                  <c:v>-1.04516857</c:v>
+                </c:pt>
+                <c:pt idx="155">
+                  <c:v>-1.0263286</c:v>
+                </c:pt>
+                <c:pt idx="156">
+                  <c:v>-1.00649593</c:v>
+                </c:pt>
+                <c:pt idx="157">
+                  <c:v>-0.98568973</c:v>
+                </c:pt>
+                <c:pt idx="158">
+                  <c:v>-0.96393013</c:v>
+                </c:pt>
+                <c:pt idx="159">
+                  <c:v>-0.94123817</c:v>
+                </c:pt>
+                <c:pt idx="160">
+                  <c:v>-0.91763582</c:v>
+                </c:pt>
+                <c:pt idx="161">
+                  <c:v>-0.89314588</c:v>
+                </c:pt>
+                <c:pt idx="162">
+                  <c:v>-0.86779206</c:v>
+                </c:pt>
+                <c:pt idx="163">
+                  <c:v>-0.84159887</c:v>
+                </c:pt>
+                <c:pt idx="164">
+                  <c:v>-0.81459165</c:v>
+                </c:pt>
+                <c:pt idx="165">
+                  <c:v>-0.78679653</c:v>
+                </c:pt>
+                <c:pt idx="166">
+                  <c:v>-0.75824038</c:v>
+                </c:pt>
+                <c:pt idx="167">
+                  <c:v>-0.72895083</c:v>
+                </c:pt>
+                <c:pt idx="168">
+                  <c:v>-0.69895621</c:v>
+                </c:pt>
+                <c:pt idx="169">
+                  <c:v>-0.66828553</c:v>
+                </c:pt>
+                <c:pt idx="170">
+                  <c:v>-0.63696846</c:v>
+                </c:pt>
+                <c:pt idx="171">
+                  <c:v>-0.60503528</c:v>
+                </c:pt>
+                <c:pt idx="172">
+                  <c:v>-0.57251689</c:v>
+                </c:pt>
+                <c:pt idx="173">
+                  <c:v>-0.53944473</c:v>
+                </c:pt>
+                <c:pt idx="174">
+                  <c:v>-0.5058508</c:v>
+                </c:pt>
+                <c:pt idx="175">
+                  <c:v>-0.4717676</c:v>
+                </c:pt>
+                <c:pt idx="176">
+                  <c:v>-0.43722807</c:v>
+                </c:pt>
+                <c:pt idx="177">
+                  <c:v>-0.40226565</c:v>
+                </c:pt>
+                <c:pt idx="178">
+                  <c:v>-0.36691413</c:v>
+                </c:pt>
+                <c:pt idx="179">
+                  <c:v>-0.33120772</c:v>
+                </c:pt>
+                <c:pt idx="180">
+                  <c:v>-0.29518095</c:v>
+                </c:pt>
+                <c:pt idx="181">
+                  <c:v>-0.25886867</c:v>
+                </c:pt>
+                <c:pt idx="182">
+                  <c:v>-0.222306</c:v>
+                </c:pt>
+                <c:pt idx="183">
+                  <c:v>-0.18552831</c:v>
+                </c:pt>
+                <c:pt idx="184">
+                  <c:v>-0.14857117</c:v>
+                </c:pt>
+                <c:pt idx="185">
+                  <c:v>-0.11147032</c:v>
+                </c:pt>
+                <c:pt idx="186">
+                  <c:v>-0.07426166</c:v>
+                </c:pt>
+                <c:pt idx="187">
+                  <c:v>-0.03698116</c:v>
+                </c:pt>
+                <c:pt idx="188">
+                  <c:v>0.0003351</c:v>
+                </c:pt>
+                <c:pt idx="189">
+                  <c:v>0.03765104</c:v>
+                </c:pt>
+                <c:pt idx="190">
+                  <c:v>0.07493057</c:v>
+                </c:pt>
+                <c:pt idx="191">
+                  <c:v>0.11213761</c:v>
+                </c:pt>
+                <c:pt idx="192">
+                  <c:v>0.1492362</c:v>
+                </c:pt>
+                <c:pt idx="193">
+                  <c:v>0.18619043</c:v>
+                </c:pt>
+                <c:pt idx="194">
+                  <c:v>0.22296457</c:v>
+                </c:pt>
+                <c:pt idx="195">
+                  <c:v>0.25952306</c:v>
+                </c:pt>
+                <c:pt idx="196">
+                  <c:v>0.29583052</c:v>
+                </c:pt>
+                <c:pt idx="197">
+                  <c:v>0.33185184</c:v>
+                </c:pt>
+                <c:pt idx="198">
+                  <c:v>0.36755218</c:v>
+                </c:pt>
+                <c:pt idx="199">
+                  <c:v>0.40289701</c:v>
+                </c:pt>
+                <c:pt idx="200">
+                  <c:v>0.43785214</c:v>
+                </c:pt>
+                <c:pt idx="201">
+                  <c:v>0.47238376</c:v>
+                </c:pt>
+                <c:pt idx="202">
+                  <c:v>0.50645847</c:v>
+                </c:pt>
+                <c:pt idx="203">
+                  <c:v>0.54004332</c:v>
+                </c:pt>
+                <c:pt idx="204">
+                  <c:v>0.57310581</c:v>
+                </c:pt>
+                <c:pt idx="205">
+                  <c:v>0.60561397</c:v>
+                </c:pt>
+                <c:pt idx="206">
+                  <c:v>0.63753635</c:v>
+                </c:pt>
+                <c:pt idx="207">
+                  <c:v>0.66884208</c:v>
+                </c:pt>
+                <c:pt idx="208">
+                  <c:v>0.69950088</c:v>
+                </c:pt>
+                <c:pt idx="209">
+                  <c:v>0.7294831</c:v>
+                </c:pt>
+                <c:pt idx="210">
+                  <c:v>0.75875972</c:v>
+                </c:pt>
+                <c:pt idx="211">
+                  <c:v>0.78730245</c:v>
+                </c:pt>
+                <c:pt idx="212">
+                  <c:v>0.81508366</c:v>
+                </c:pt>
+                <c:pt idx="213">
+                  <c:v>0.84207649</c:v>
+                </c:pt>
+                <c:pt idx="214">
+                  <c:v>0.86825482</c:v>
+                </c:pt>
+                <c:pt idx="215">
+                  <c:v>0.89359334</c:v>
+                </c:pt>
+                <c:pt idx="216">
+                  <c:v>0.91806755</c:v>
+                </c:pt>
+                <c:pt idx="217">
+                  <c:v>0.94165376</c:v>
+                </c:pt>
+                <c:pt idx="218">
+                  <c:v>0.96432916</c:v>
+                </c:pt>
+                <c:pt idx="219">
+                  <c:v>0.98607182</c:v>
+                </c:pt>
+                <c:pt idx="220">
+                  <c:v>1.00686071</c:v>
+                </c:pt>
+                <c:pt idx="221">
+                  <c:v>1.02667573</c:v>
+                </c:pt>
+                <c:pt idx="222">
+                  <c:v>1.0454977</c:v>
+                </c:pt>
+                <c:pt idx="223">
+                  <c:v>1.06330842</c:v>
+                </c:pt>
+                <c:pt idx="224">
+                  <c:v>1.08009066</c:v>
+                </c:pt>
+                <c:pt idx="225">
+                  <c:v>1.0958282</c:v>
+                </c:pt>
+                <c:pt idx="226">
+                  <c:v>1.1105058</c:v>
+                </c:pt>
+                <c:pt idx="227">
+                  <c:v>1.12410928</c:v>
+                </c:pt>
+                <c:pt idx="228">
+                  <c:v>1.13662547</c:v>
+                </c:pt>
+                <c:pt idx="229">
+                  <c:v>1.14804227</c:v>
+                </c:pt>
+                <c:pt idx="230">
+                  <c:v>1.15834863</c:v>
+                </c:pt>
+                <c:pt idx="231">
+                  <c:v>1.1675346</c:v>
+                </c:pt>
+                <c:pt idx="232">
+                  <c:v>1.17559127</c:v>
+                </c:pt>
+                <c:pt idx="233">
+                  <c:v>1.18251086</c:v>
+                </c:pt>
+                <c:pt idx="234">
+                  <c:v>1.18828668</c:v>
+                </c:pt>
+                <c:pt idx="235">
+                  <c:v>1.19291314</c:v>
+                </c:pt>
+                <c:pt idx="236">
+                  <c:v>1.19638576</c:v>
+                </c:pt>
+                <c:pt idx="237">
+                  <c:v>1.19870118</c:v>
+                </c:pt>
+                <c:pt idx="238">
+                  <c:v>1.19985718</c:v>
+                </c:pt>
+                <c:pt idx="239">
+                  <c:v>1.19985262</c:v>
+                </c:pt>
+                <c:pt idx="240">
+                  <c:v>1.19868751</c:v>
+                </c:pt>
+                <c:pt idx="241">
+                  <c:v>1.19636298</c:v>
+                </c:pt>
+                <c:pt idx="242">
+                  <c:v>1.19288128</c:v>
+                </c:pt>
+                <c:pt idx="243">
+                  <c:v>1.18824577</c:v>
+                </c:pt>
+                <c:pt idx="244">
+                  <c:v>1.18246095</c:v>
+                </c:pt>
+                <c:pt idx="245">
+                  <c:v>1.1755324</c:v>
+                </c:pt>
+                <c:pt idx="246">
+                  <c:v>1.16746682</c:v>
+                </c:pt>
+                <c:pt idx="247">
+                  <c:v>1.15827202</c:v>
+                </c:pt>
+                <c:pt idx="248">
+                  <c:v>1.14795689</c:v>
+                </c:pt>
+                <c:pt idx="249">
+                  <c:v>1.13653141</c:v>
+                </c:pt>
+                <c:pt idx="250">
+                  <c:v>1.12400663</c:v>
+                </c:pt>
+                <c:pt idx="251">
+                  <c:v>1.11039466</c:v>
+                </c:pt>
+                <c:pt idx="252">
+                  <c:v>1.09570867</c:v>
+                </c:pt>
+                <c:pt idx="253">
+                  <c:v>1.07996287</c:v>
+                </c:pt>
+                <c:pt idx="254">
+                  <c:v>1.06317248</c:v>
+                </c:pt>
+                <c:pt idx="255">
+                  <c:v>1.04535374</c:v>
+                </c:pt>
+                <c:pt idx="256">
+                  <c:v>1.0265239</c:v>
+                </c:pt>
+                <c:pt idx="257">
+                  <c:v>1.00670116</c:v>
+                </c:pt>
+                <c:pt idx="258">
+                  <c:v>0.98590469</c:v>
+                </c:pt>
+                <c:pt idx="259">
+                  <c:v>0.96415462</c:v>
+                </c:pt>
+                <c:pt idx="260">
+                  <c:v>0.94147197</c:v>
+                </c:pt>
+                <c:pt idx="261">
+                  <c:v>0.9178787</c:v>
+                </c:pt>
+                <c:pt idx="262">
+                  <c:v>0.89339761</c:v>
+                </c:pt>
+                <c:pt idx="263">
+                  <c:v>0.8680524</c:v>
+                </c:pt>
+                <c:pt idx="264">
+                  <c:v>0.84186756</c:v>
+                </c:pt>
+                <c:pt idx="265">
+                  <c:v>0.81486844</c:v>
+                </c:pt>
+                <c:pt idx="266">
+                  <c:v>0.78708114</c:v>
+                </c:pt>
+                <c:pt idx="267">
+                  <c:v>0.75853254</c:v>
+                </c:pt>
+                <c:pt idx="268">
+                  <c:v>0.72925026</c:v>
+                </c:pt>
+                <c:pt idx="269">
+                  <c:v>0.69926262</c:v>
+                </c:pt>
+                <c:pt idx="270">
+                  <c:v>0.66859862</c:v>
+                </c:pt>
+                <c:pt idx="271">
+                  <c:v>0.63728792</c:v>
+                </c:pt>
+                <c:pt idx="272">
+                  <c:v>0.60536082</c:v>
+                </c:pt>
+                <c:pt idx="273">
+                  <c:v>0.57284818</c:v>
+                </c:pt>
+                <c:pt idx="274">
+                  <c:v>0.53978146</c:v>
+                </c:pt>
+                <c:pt idx="275">
+                  <c:v>0.50619264</c:v>
+                </c:pt>
+                <c:pt idx="276">
+                  <c:v>0.47211421</c:v>
+                </c:pt>
+                <c:pt idx="277">
+                  <c:v>0.43757913</c:v>
+                </c:pt>
+                <c:pt idx="278">
+                  <c:v>0.4026208</c:v>
+                </c:pt>
+                <c:pt idx="279">
+                  <c:v>0.36727305</c:v>
+                </c:pt>
+                <c:pt idx="280">
+                  <c:v>0.33157005</c:v>
+                </c:pt>
+                <c:pt idx="281">
+                  <c:v>0.29554634</c:v>
+                </c:pt>
+                <c:pt idx="282">
+                  <c:v>0.25923677</c:v>
+                </c:pt>
+                <c:pt idx="283">
+                  <c:v>0.22267646</c:v>
+                </c:pt>
+                <c:pt idx="284">
+                  <c:v>0.18590076</c:v>
+                </c:pt>
+                <c:pt idx="285">
+                  <c:v>0.14894525</c:v>
+                </c:pt>
+                <c:pt idx="286">
+                  <c:v>0.11184568</c:v>
+                </c:pt>
+                <c:pt idx="287">
+                  <c:v>0.07463792</c:v>
+                </c:pt>
+                <c:pt idx="288">
+                  <c:v>0.03735797</c:v>
+                </c:pt>
+                <c:pt idx="289">
+                  <c:v>4.189E-05</c:v>
+                </c:pt>
+                <c:pt idx="290">
+                  <c:v>-0.03727424</c:v>
+                </c:pt>
+                <c:pt idx="291">
+                  <c:v>-0.07455431</c:v>
+                </c:pt>
+                <c:pt idx="292">
+                  <c:v>-0.11176227</c:v>
+                </c:pt>
+                <c:pt idx="293">
+                  <c:v>-0.14886212</c:v>
+                </c:pt>
+                <c:pt idx="294">
+                  <c:v>-0.185818</c:v>
+                </c:pt>
+                <c:pt idx="295">
+                  <c:v>-0.22259414</c:v>
+                </c:pt>
+                <c:pt idx="296">
+                  <c:v>-0.25915498</c:v>
+                </c:pt>
+                <c:pt idx="297">
+                  <c:v>-0.29546515</c:v>
+                </c:pt>
+                <c:pt idx="298">
+                  <c:v>-0.33148954</c:v>
+                </c:pt>
+                <c:pt idx="299">
+                  <c:v>-0.36719329</c:v>
+                </c:pt>
+                <c:pt idx="300">
+                  <c:v>-0.40254188</c:v>
+                </c:pt>
+                <c:pt idx="301">
+                  <c:v>-0.43750112</c:v>
+                </c:pt>
+                <c:pt idx="302">
+                  <c:v>-0.47203719</c:v>
+                </c:pt>
+                <c:pt idx="303">
+                  <c:v>-0.50611668</c:v>
+                </c:pt>
+                <c:pt idx="304">
+                  <c:v>-0.53970663</c:v>
+                </c:pt>
+                <c:pt idx="305">
+                  <c:v>-0.57277456</c:v>
+                </c:pt>
+                <c:pt idx="306">
+                  <c:v>-0.60528848</c:v>
+                </c:pt>
+                <c:pt idx="307">
+                  <c:v>-0.63721694</c:v>
+                </c:pt>
+                <c:pt idx="308">
+                  <c:v>-0.66852905</c:v>
+                </c:pt>
+                <c:pt idx="309">
+                  <c:v>-0.69919453</c:v>
+                </c:pt>
+                <c:pt idx="310">
+                  <c:v>-0.72918373</c:v>
+                </c:pt>
+                <c:pt idx="311">
+                  <c:v>-0.75846762</c:v>
+                </c:pt>
+                <c:pt idx="312">
+                  <c:v>-0.7870179</c:v>
+                </c:pt>
+                <c:pt idx="313">
+                  <c:v>-0.81480694</c:v>
+                </c:pt>
+                <c:pt idx="314">
+                  <c:v>-0.84180786</c:v>
+                </c:pt>
+                <c:pt idx="315">
+                  <c:v>-0.86799455</c:v>
+                </c:pt>
+                <c:pt idx="316">
+                  <c:v>-0.89334168</c:v>
+                </c:pt>
+                <c:pt idx="317">
+                  <c:v>-0.91782473</c:v>
+                </c:pt>
+                <c:pt idx="318">
+                  <c:v>-0.94142003</c:v>
+                </c:pt>
+                <c:pt idx="319">
+                  <c:v>-0.96410474</c:v>
+                </c:pt>
+                <c:pt idx="320">
+                  <c:v>-0.98585693</c:v>
+                </c:pt>
+                <c:pt idx="321">
+                  <c:v>-1.00665556</c:v>
+                </c:pt>
+                <c:pt idx="322">
+                  <c:v>-1.02648051</c:v>
+                </c:pt>
+                <c:pt idx="323">
+                  <c:v>-1.0453126</c:v>
+                </c:pt>
+                <c:pt idx="324">
+                  <c:v>-1.06313363</c:v>
+                </c:pt>
+                <c:pt idx="325">
+                  <c:v>-1.07992634</c:v>
+                </c:pt>
+                <c:pt idx="326">
+                  <c:v>-1.09567451</c:v>
+                </c:pt>
+                <c:pt idx="327">
+                  <c:v>-1.11036289</c:v>
+                </c:pt>
+                <c:pt idx="328">
+                  <c:v>-1.12397729</c:v>
+                </c:pt>
+                <c:pt idx="329">
+                  <c:v>-1.13650452</c:v>
+                </c:pt>
+                <c:pt idx="330">
+                  <c:v>-1.14793248</c:v>
+                </c:pt>
+                <c:pt idx="331">
+                  <c:v>-1.15825012</c:v>
+                </c:pt>
+                <c:pt idx="332">
+                  <c:v>-1.16744744</c:v>
+                </c:pt>
+                <c:pt idx="333">
+                  <c:v>-1.17551556</c:v>
+                </c:pt>
+                <c:pt idx="334">
+                  <c:v>-1.18244667</c:v>
+                </c:pt>
+                <c:pt idx="335">
+                  <c:v>-1.18823407</c:v>
+                </c:pt>
+                <c:pt idx="336">
+                  <c:v>-1.19287217</c:v>
+                </c:pt>
+                <c:pt idx="337">
+                  <c:v>-1.19635646</c:v>
+                </c:pt>
+                <c:pt idx="338">
+                  <c:v>-1.19868359</c:v>
+                </c:pt>
+                <c:pt idx="339">
+                  <c:v>-1.1998513</c:v>
+                </c:pt>
+                <c:pt idx="340">
+                  <c:v>-1.19985847</c:v>
+                </c:pt>
+                <c:pt idx="341">
+                  <c:v>-1.19870508</c:v>
+                </c:pt>
+                <c:pt idx="342">
+                  <c:v>-1.19639225</c:v>
+                </c:pt>
+                <c:pt idx="343">
+                  <c:v>-1.19292222</c:v>
+                </c:pt>
+                <c:pt idx="344">
+                  <c:v>-1.18829835</c:v>
+                </c:pt>
+                <c:pt idx="345">
+                  <c:v>-1.18252511</c:v>
+                </c:pt>
+                <c:pt idx="346">
+                  <c:v>-1.17560808</c:v>
+                </c:pt>
+                <c:pt idx="347">
+                  <c:v>-1.16755395</c:v>
+                </c:pt>
+                <c:pt idx="348">
+                  <c:v>-1.15837051</c:v>
+                </c:pt>
+                <c:pt idx="349">
+                  <c:v>-1.14806665</c:v>
+                </c:pt>
+                <c:pt idx="350">
+                  <c:v>-1.13665233</c:v>
+                </c:pt>
+                <c:pt idx="351">
+                  <c:v>-1.1241386</c:v>
+                </c:pt>
+                <c:pt idx="352">
+                  <c:v>-1.11053755</c:v>
+                </c:pt>
+                <c:pt idx="353">
+                  <c:v>-1.09586234</c:v>
+                </c:pt>
+                <c:pt idx="354">
+                  <c:v>-1.08012716</c:v>
+                </c:pt>
+                <c:pt idx="355">
+                  <c:v>-1.06334725</c:v>
+                </c:pt>
+                <c:pt idx="356">
+                  <c:v>-1.04553881</c:v>
+                </c:pt>
+                <c:pt idx="357">
+                  <c:v>-1.02671909</c:v>
+                </c:pt>
+                <c:pt idx="358">
+                  <c:v>-1.00690629</c:v>
+                </c:pt>
+                <c:pt idx="359">
+                  <c:v>-0.98611956</c:v>
+                </c:pt>
+                <c:pt idx="360">
+                  <c:v>-0.96437902</c:v>
+                </c:pt>
+                <c:pt idx="361">
+                  <c:v>-0.94170568</c:v>
+                </c:pt>
+                <c:pt idx="362">
+                  <c:v>-0.91812149</c:v>
+                </c:pt>
+                <c:pt idx="363">
+                  <c:v>-0.89364926</c:v>
+                </c:pt>
+                <c:pt idx="364">
+                  <c:v>-0.86831265</c:v>
+                </c:pt>
+                <c:pt idx="365">
+                  <c:v>-0.84213617</c:v>
+                </c:pt>
+                <c:pt idx="366">
+                  <c:v>-0.81514514</c:v>
+                </c:pt>
+                <c:pt idx="367">
+                  <c:v>-0.78736567</c:v>
+                </c:pt>
+                <c:pt idx="368">
+                  <c:v>-0.75882463</c:v>
+                </c:pt>
+                <c:pt idx="369">
+                  <c:v>-0.72954962</c:v>
+                </c:pt>
+                <c:pt idx="370">
+                  <c:v>-0.69956895</c:v>
+                </c:pt>
+                <c:pt idx="371">
+                  <c:v>-0.66891164</c:v>
+                </c:pt>
+                <c:pt idx="372">
+                  <c:v>-0.63760733</c:v>
+                </c:pt>
+                <c:pt idx="373">
+                  <c:v>-0.60568629</c:v>
+                </c:pt>
+                <c:pt idx="374">
+                  <c:v>-0.57317941</c:v>
+                </c:pt>
+                <c:pt idx="375">
+                  <c:v>-0.54011813</c:v>
+                </c:pt>
+                <c:pt idx="376">
+                  <c:v>-0.50653442</c:v>
+                </c:pt>
+                <c:pt idx="377">
+                  <c:v>-0.47246077</c:v>
+                </c:pt>
+                <c:pt idx="378">
+                  <c:v>-0.43793014</c:v>
+                </c:pt>
+                <c:pt idx="379">
+                  <c:v>-0.40297592</c:v>
+                </c:pt>
+                <c:pt idx="380">
+                  <c:v>-0.36763193</c:v>
+                </c:pt>
+                <c:pt idx="381">
+                  <c:v>-0.33193235</c:v>
+                </c:pt>
+                <c:pt idx="382">
+                  <c:v>-0.29591171</c:v>
+                </c:pt>
+                <c:pt idx="383">
+                  <c:v>-0.25960485</c:v>
+                </c:pt>
+                <c:pt idx="384">
+                  <c:v>-0.22304689</c:v>
+                </c:pt>
+                <c:pt idx="385">
+                  <c:v>-0.18627319</c:v>
+                </c:pt>
+                <c:pt idx="386">
+                  <c:v>-0.14931932</c:v>
+                </c:pt>
+                <c:pt idx="387">
+                  <c:v>-0.11222102</c:v>
+                </c:pt>
+                <c:pt idx="388">
+                  <c:v>-0.07501418</c:v>
+                </c:pt>
+                <c:pt idx="389">
+                  <c:v>-0.03773478</c:v>
+                </c:pt>
+                <c:pt idx="390">
+                  <c:v>-0.00041888</c:v>
+                </c:pt>
+                <c:pt idx="391">
+                  <c:v>0.03689743</c:v>
+                </c:pt>
+                <c:pt idx="392">
+                  <c:v>0.07417804</c:v>
+                </c:pt>
+                <c:pt idx="393">
+                  <c:v>0.11138691</c:v>
+                </c:pt>
+                <c:pt idx="394">
+                  <c:v>0.14848804</c:v>
+                </c:pt>
+                <c:pt idx="395">
+                  <c:v>0.18544554</c:v>
+                </c:pt>
+                <c:pt idx="396">
+                  <c:v>0.22222368</c:v>
+                </c:pt>
+                <c:pt idx="397">
+                  <c:v>0.25878687</c:v>
+                </c:pt>
+                <c:pt idx="398">
+                  <c:v>0.29509975</c:v>
+                </c:pt>
+                <c:pt idx="399">
+                  <c:v>0.3311272</c:v>
+                </c:pt>
+                <c:pt idx="400">
+                  <c:v>0.36683437</c:v>
+                </c:pt>
+              </c:numCache>
+            </c:numRef>
+          </c:yVal>
+        </c:ser>
+        <c:ser>
+          <c:idx val="1"/>
+          <c:order val="1"/>
+          <c:tx>
+            <c:v>Amplitude = 1.20 V</c:v>
+          </c:tx>
+          <c:spPr>
+            <a:ln xmlns:a="http://schemas.openxmlformats.org/drawingml/2006/main" w="38100">
+              <a:solidFill>
+                <a:srgbClr val="881C1C"/>
+              </a:solidFill>
+            </a:ln>
+          </c:spPr>
+          <c:marker>
+            <c:symbol val="circle"/>
+            <c:size val="7"/>
+            <c:spPr>
+              <a:solidFill xmlns:a="http://schemas.openxmlformats.org/drawingml/2006/main">
+                <a:srgbClr val="881C1C"/>
+              </a:solidFill>
+            </c:spPr>
+          </c:marker>
+          <c:xVal>
+            <c:numRef>
+              <c:f>'Chart Data'!$C$2:$C$3</c:f>
+              <c:numCache>
+                <c:formatCode>General</c:formatCode>
+                <c:ptCount val="2"/>
+                <c:pt idx="0">
+                  <c:v>10.0308642</c:v>
+                </c:pt>
+                <c:pt idx="1">
+                  <c:v>10.0308642</c:v>
+                </c:pt>
+              </c:numCache>
+            </c:numRef>
+          </c:xVal>
+          <c:yVal>
+            <c:numRef>
+              <c:f>'Chart Data'!$D$2:$D$3</c:f>
+              <c:numCache>
+                <c:formatCode>0.0</c:formatCode>
+                <c:ptCount val="2"/>
+                <c:pt idx="0">
+                  <c:v>0</c:v>
+                </c:pt>
+                <c:pt idx="1">
+                  <c:v>1.2</c:v>
+                </c:pt>
+              </c:numCache>
+            </c:numRef>
+          </c:yVal>
+        </c:ser>
+        <c:ser>
+          <c:idx val="2"/>
+          <c:order val="2"/>
+          <c:tx>
+            <c:v>Period = 55.56 ms</c:v>
+          </c:tx>
+          <c:spPr>
+            <a:ln xmlns:a="http://schemas.openxmlformats.org/drawingml/2006/main" w="38100">
+              <a:solidFill>
+                <a:srgbClr val="267049"/>
+              </a:solidFill>
+            </a:ln>
+          </c:spPr>
+          <c:marker>
+            <c:symbol val="circle"/>
+            <c:size val="7"/>
+            <c:spPr>
+              <a:solidFill xmlns:a="http://schemas.openxmlformats.org/drawingml/2006/main">
+                <a:srgbClr val="267049"/>
+              </a:solidFill>
+            </c:spPr>
+          </c:marker>
+          <c:xVal>
+            <c:numRef>
+              <c:f>'Chart Data'!$E$2:$E$3</c:f>
+              <c:numCache>
+                <c:formatCode>General</c:formatCode>
+                <c:ptCount val="2"/>
+                <c:pt idx="0">
+                  <c:v>10.0308642</c:v>
+                </c:pt>
+                <c:pt idx="1">
+                  <c:v>65.58641975</c:v>
+                </c:pt>
+              </c:numCache>
+            </c:numRef>
+          </c:xVal>
+          <c:yVal>
+            <c:numRef>
+              <c:f>'Chart Data'!$F$2:$F$3</c:f>
+              <c:numCache>
+                <c:formatCode>0.0</c:formatCode>
+                <c:ptCount val="2"/>
+                <c:pt idx="0">
+                  <c:v>-1.5</c:v>
+                </c:pt>
+                <c:pt idx="1">
+                  <c:v>-1.5</c:v>
+                </c:pt>
+              </c:numCache>
+            </c:numRef>
+          </c:yVal>
+        </c:ser>
+        <c:ser>
+          <c:idx val="3"/>
+          <c:order val="3"/>
+          <c:tx>
+            <c:v>First peak guide</c:v>
+          </c:tx>
+          <c:spPr>
+            <a:ln xmlns:a="http://schemas.openxmlformats.org/drawingml/2006/main" w="9525">
+              <a:solidFill>
+                <a:srgbClr val="BBBBBB"/>
+              </a:solidFill>
+            </a:ln>
+          </c:spPr>
+          <c:marker>
+            <c:symbol val="none"/>
+            <c:size val="7"/>
+            <c:spPr>
+              <a:solidFill xmlns:a="http://schemas.openxmlformats.org/drawingml/2006/main">
+                <a:srgbClr val="BBBBBB"/>
+              </a:solidFill>
+            </c:spPr>
+          </c:marker>
+          <c:xVal>
+            <c:numRef>
+              <c:f>'Chart Data'!$G$2:$G$3</c:f>
+              <c:numCache>
+                <c:formatCode>General</c:formatCode>
+                <c:ptCount val="2"/>
+                <c:pt idx="0">
+                  <c:v>10.0308642</c:v>
+                </c:pt>
+                <c:pt idx="1">
+                  <c:v>10.0308642</c:v>
+                </c:pt>
+              </c:numCache>
+            </c:numRef>
+          </c:xVal>
+          <c:yVal>
+            <c:numRef>
+              <c:f>'Chart Data'!$H$2:$H$3</c:f>
+              <c:numCache>
+                <c:formatCode>0.0</c:formatCode>
+                <c:ptCount val="2"/>
+                <c:pt idx="0">
+                  <c:v>1.2</c:v>
+                </c:pt>
+                <c:pt idx="1">
+                  <c:v>-1.5</c:v>
+                </c:pt>
+              </c:numCache>
+            </c:numRef>
+          </c:yVal>
+        </c:ser>
+        <c:ser>
+          <c:idx val="4"/>
+          <c:order val="4"/>
+          <c:tx>
+            <c:v>Next peak guide</c:v>
+          </c:tx>
+          <c:spPr>
+            <a:ln xmlns:a="http://schemas.openxmlformats.org/drawingml/2006/main" w="9525">
+              <a:solidFill>
+                <a:srgbClr val="BBBBBB"/>
+              </a:solidFill>
+            </a:ln>
+          </c:spPr>
+          <c:marker>
+            <c:symbol val="none"/>
+            <c:size val="7"/>
+            <c:spPr>
+              <a:solidFill xmlns:a="http://schemas.openxmlformats.org/drawingml/2006/main">
+                <a:srgbClr val="BBBBBB"/>
+              </a:solidFill>
+            </c:spPr>
+          </c:marker>
+          <c:xVal>
+            <c:numRef>
+              <c:f>'Chart Data'!$I$2:$I$3</c:f>
+              <c:numCache>
+                <c:formatCode>General</c:formatCode>
+                <c:ptCount val="2"/>
+                <c:pt idx="0">
+                  <c:v>65.58641975</c:v>
+                </c:pt>
+                <c:pt idx="1">
+                  <c:v>65.58641975</c:v>
+                </c:pt>
+              </c:numCache>
+            </c:numRef>
+          </c:xVal>
+          <c:yVal>
+            <c:numRef>
+              <c:f>'Chart Data'!$J$2:$J$3</c:f>
+              <c:numCache>
+                <c:formatCode>0.0</c:formatCode>
+                <c:ptCount val="2"/>
+                <c:pt idx="0">
+                  <c:v>1.2</c:v>
+                </c:pt>
+                <c:pt idx="1">
+                  <c:v>-1.5</c:v>
+                </c:pt>
+              </c:numCache>
+            </c:numRef>
+          </c:yVal>
+        </c:ser>
+        <c:dLbls>
+          <c:txPr>
+            <a:bodyPr xmlns:a="http://schemas.openxmlformats.org/drawingml/2006/main" anchorCtr="1"/>
+            <a:lstStyle xmlns:a="http://schemas.openxmlformats.org/drawingml/2006/main"/>
+            <a:p xmlns:a="http://schemas.openxmlformats.org/drawingml/2006/main">
+              <a:pPr>
+                <a:defRPr>
+                  <a:latin typeface="Calibri"/>
+                  <a:ea typeface="Calibri"/>
+                  <a:cs typeface="Calibri"/>
+                </a:defRPr>
+              </a:pPr>
+            </a:p>
+          </c:txPr>
+          <c:showLegendKey val="0"/>
+          <c:showVal val="0"/>
+          <c:showCatName val="0"/>
+          <c:showSerName val="0"/>
+          <c:showPercent val="0"/>
+          <c:showBubbleSize val="0"/>
+          <c:showLeaderLines val="0"/>
+        </c:dLbls>
+        <c:axId val="48650112"/>
+        <c:axId val="48672768"/>
+      </c:scatterChart>
+      <c:valAx>
+        <c:axId val="48672768"/>
+        <c:scaling>
+          <c:orientation val="minMax"/>
+          <c:max val="1.8"/>
+          <c:min val="-1.8"/>
+        </c:scaling>
+        <c:delete val="0"/>
+        <c:axPos val="l"/>
+        <c:title>
+          <c:tx>
+            <c:rich>
+              <a:bodyPr xmlns:a="http://schemas.openxmlformats.org/drawingml/2006/main"/>
+              <a:lstStyle xmlns:a="http://schemas.openxmlformats.org/drawingml/2006/main"/>
+              <a:p xmlns:a="http://schemas.openxmlformats.org/drawingml/2006/main">
+                <a:r>
+                  <a:rPr sz="1500">
+                    <a:latin typeface="Calibri"/>
+                    <a:ea typeface="Calibri"/>
+                    <a:cs typeface="Calibri"/>
+                  </a:rPr>
+                  <a:t>Voltage (V)</a:t>
+                </a:r>
+              </a:p>
+            </c:rich>
+          </c:tx>
+          <c:overlay val="0"/>
+          <c:txPr>
+            <a:bodyPr xmlns:a="http://schemas.openxmlformats.org/drawingml/2006/main" anchorCtr="1"/>
+            <a:lstStyle xmlns:a="http://schemas.openxmlformats.org/drawingml/2006/main"/>
+            <a:p xmlns:a="http://schemas.openxmlformats.org/drawingml/2006/main">
+              <a:pPr>
+                <a:defRPr sz="1500">
+                  <a:latin typeface="Calibri"/>
+                  <a:ea typeface="Calibri"/>
+                  <a:cs typeface="Calibri"/>
+                </a:defRPr>
+              </a:pPr>
+            </a:p>
+          </c:txPr>
+        </c:title>
+        <c:numFmt formatCode="0.0"/>
+        <c:majorTickMark val="none"/>
+        <c:minorTickMark val="none"/>
+        <c:spPr>
+          <a:ln xmlns:a="http://schemas.openxmlformats.org/drawingml/2006/main" w="9525">
+            <a:solidFill>
+              <a:srgbClr val="D4D4D4"/>
+            </a:solidFill>
+            <a:prstDash val="solid"/>
+          </a:ln>
+        </c:spPr>
+        <c:txPr>
+          <a:bodyPr xmlns:a="http://schemas.openxmlformats.org/drawingml/2006/main" anchorCtr="1"/>
+          <a:lstStyle xmlns:a="http://schemas.openxmlformats.org/drawingml/2006/main"/>
+          <a:p xmlns:a="http://schemas.openxmlformats.org/drawingml/2006/main">
+            <a:pPr>
+              <a:defRPr sz="1350">
+                <a:solidFill>
+                  <a:srgbClr val="666666"/>
+                </a:solidFill>
+                <a:latin typeface="Calibri"/>
+                <a:ea typeface="Calibri"/>
+                <a:cs typeface="Calibri"/>
+              </a:defRPr>
+            </a:pPr>
+          </a:p>
+        </c:txPr>
+        <c:crossAx val="48650112"/>
+        <c:majorUnit val="0.6"/>
+      </c:valAx>
+      <c:valAx>
+        <c:axId val="48650112"/>
+        <c:scaling>
+          <c:orientation val="minMax"/>
+          <c:max val="110"/>
+          <c:min val="0"/>
+        </c:scaling>
+        <c:delete val="0"/>
+        <c:axPos val="b"/>
+        <c:title>
+          <c:tx>
+            <c:rich>
+              <a:bodyPr xmlns:a="http://schemas.openxmlformats.org/drawingml/2006/main"/>
+              <a:lstStyle xmlns:a="http://schemas.openxmlformats.org/drawingml/2006/main"/>
+              <a:p xmlns:a="http://schemas.openxmlformats.org/drawingml/2006/main">
+                <a:r>
+                  <a:rPr sz="1500">
+                    <a:latin typeface="Calibri"/>
+                    <a:ea typeface="Calibri"/>
+                    <a:cs typeface="Calibri"/>
+                  </a:rPr>
+                  <a:t>Time (ms)</a:t>
+                </a:r>
+              </a:p>
+            </c:rich>
+          </c:tx>
+          <c:overlay val="0"/>
+          <c:txPr>
+            <a:bodyPr xmlns:a="http://schemas.openxmlformats.org/drawingml/2006/main" anchorCtr="1"/>
+            <a:lstStyle xmlns:a="http://schemas.openxmlformats.org/drawingml/2006/main"/>
+            <a:p xmlns:a="http://schemas.openxmlformats.org/drawingml/2006/main">
+              <a:pPr>
+                <a:defRPr sz="1500">
+                  <a:latin typeface="Calibri"/>
+                  <a:ea typeface="Calibri"/>
+                  <a:cs typeface="Calibri"/>
+                </a:defRPr>
+              </a:pPr>
+            </a:p>
+          </c:txPr>
+        </c:title>
+        <c:numFmt formatCode="General"/>
+        <c:majorTickMark val="none"/>
+        <c:minorTickMark val="none"/>
+        <c:spPr>
+          <a:ln xmlns:a="http://schemas.openxmlformats.org/drawingml/2006/main" w="9525">
+            <a:solidFill>
+              <a:srgbClr val="D4D4D4"/>
+            </a:solidFill>
+            <a:prstDash val="solid"/>
+          </a:ln>
+        </c:spPr>
+        <c:txPr>
+          <a:bodyPr xmlns:a="http://schemas.openxmlformats.org/drawingml/2006/main" anchorCtr="1"/>
+          <a:lstStyle xmlns:a="http://schemas.openxmlformats.org/drawingml/2006/main"/>
+          <a:p xmlns:a="http://schemas.openxmlformats.org/drawingml/2006/main">
+            <a:pPr>
+              <a:defRPr sz="1350">
+                <a:solidFill>
+                  <a:srgbClr val="666666"/>
+                </a:solidFill>
+                <a:latin typeface="Calibri"/>
+                <a:ea typeface="Calibri"/>
+                <a:cs typeface="Calibri"/>
+              </a:defRPr>
+            </a:pPr>
+          </a:p>
+        </c:txPr>
+        <c:crossAx val="48672768"/>
+        <c:majorUnit val="22"/>
+      </c:valAx>
+      <c:spPr>
+        <a:solidFill xmlns:a="http://schemas.openxmlformats.org/drawingml/2006/main">
+          <a:srgbClr val="FFFFFF"/>
+        </a:solidFill>
+      </c:spPr>
+    </c:plotArea>
+    <c:legend>
+      <c:legendPos val="t"/>
+      <c:overlay val="0"/>
+      <c:txPr>
+        <a:bodyPr xmlns:a="http://schemas.openxmlformats.org/drawingml/2006/main" anchorCtr="1"/>
+        <a:lstStyle xmlns:a="http://schemas.openxmlformats.org/drawingml/2006/main"/>
+        <a:p xmlns:a="http://schemas.openxmlformats.org/drawingml/2006/main">
+          <a:pPr>
+            <a:defRPr sz="1500">
+              <a:latin typeface="Calibri"/>
+              <a:ea typeface="Calibri"/>
+              <a:cs typeface="Calibri"/>
+            </a:defRPr>
+          </a:pPr>
+        </a:p>
+      </c:txPr>
+    </c:legend>
+    <c:plotVisOnly val="1"/>
+  </c:chart>
+  <c:spPr>
+    <a:solidFill xmlns:a="http://schemas.openxmlformats.org/drawingml/2006/main">
+      <a:srgbClr val="FFFFFF"/>
+    </a:solidFill>
+  </c:spPr>
+  <c:externalData r:id="rIdChartSnapshot1">
+    <c:autoUpdate val="0"/>
+  </c:externalData>
+</c:chartSpace>
+</file>
+
 <file path=ppt/slides/charts/chart2.xml><?xml version="1.0" encoding="utf-8"?>
 <c:chartSpace xmlns:c="http://schemas.openxmlformats.org/drawingml/2006/chart" xmlns:r="http://schemas.openxmlformats.org/officeDocument/2006/relationships">
   <c:lang val="en-US"/>
@@ -18436,6 +22835,343 @@
 </c:chartSpace>
 </file>
 
+<file path=ppt/slides/slide1.xml><?xml version="1.0" encoding="utf-8"?>
+<p:sld xmlns:p="http://schemas.openxmlformats.org/presentationml/2006/main">
+  <p:cSld>
+    <p:bg>
+      <p:bgPr>
+        <a:solidFill xmlns:a="http://schemas.openxmlformats.org/drawingml/2006/main">
+          <a:srgbClr val="FFFFFF"/>
+        </a:solidFill>
+      </p:bgPr>
+    </p:bg>
+    <p:spTree>
+      <p:nvGrpSpPr>
+        <p:cNvPr id="1" name=""/>
+        <p:cNvGrpSpPr/>
+        <p:nvPr/>
+      </p:nvGrpSpPr>
+      <p:grpSpPr>
+        <a:xfrm xmlns:a="http://schemas.openxmlformats.org/drawingml/2006/main"/>
+      </p:grpSpPr>
+      <p:sp>
+        <p:nvSpPr>
+          <p:cNvPr id="6" name="text">
+            <a:extLst xmlns:a="http://schemas.openxmlformats.org/drawingml/2006/main">
+              <a:ext uri="{FF2B5EF4-FFF2-40B4-BE49-F238E27FC236}">
+                <a16:creationId xmlns:a16="http://schemas.microsoft.com/office/drawing/2014/main" id="{21EDF2BF-B052-4877-9A54-821A11755655}"/>
+              </a:ext>
+            </a:extLst>
+          </p:cNvPr>
+          <p:cNvSpPr>
+            <a:spLocks xmlns:a="http://schemas.openxmlformats.org/drawingml/2006/main" noGrp="1"/>
+          </p:cNvSpPr>
+          <p:nvPr/>
+        </p:nvSpPr>
+        <p:spPr>
+          <a:xfrm xmlns:a="http://schemas.openxmlformats.org/drawingml/2006/main">
+            <a:off x="495300" y="400050"/>
+            <a:ext cx="4953000" cy="304800"/>
+          </a:xfrm>
+          <a:prstGeom xmlns:a="http://schemas.openxmlformats.org/drawingml/2006/main" prst="rect">
+            <a:avLst/>
+          </a:prstGeom>
+          <a:noFill xmlns:a="http://schemas.openxmlformats.org/drawingml/2006/main"/>
+          <a:ln xmlns:a="http://schemas.openxmlformats.org/drawingml/2006/main" w="0">
+            <a:noFill/>
+          </a:ln>
+        </p:spPr>
+        <p:txBody>
+          <a:bodyPr xmlns:a="http://schemas.openxmlformats.org/drawingml/2006/main">
+            <a:noAutofit/>
+          </a:bodyPr>
+          <a:lstStyle xmlns:a="http://schemas.openxmlformats.org/drawingml/2006/main"/>
+          <a:p xmlns:a="http://schemas.openxmlformats.org/drawingml/2006/main">
+            <a:pPr>
+              <a:defRPr sz="1350" b="1">
+                <a:solidFill>
+                  <a:srgbClr val="881C1C"/>
+                </a:solidFill>
+                <a:latin typeface="Calibri"/>
+                <a:ea typeface="Calibri"/>
+                <a:cs typeface="Calibri"/>
+              </a:defRPr>
+            </a:pPr>
+            <a:r>
+              <a:rPr sz="1350" b="1">
+                <a:solidFill>
+                  <a:srgbClr val="881C1C"/>
+                </a:solidFill>
+                <a:latin typeface="Calibri"/>
+                <a:ea typeface="Calibri"/>
+                <a:cs typeface="Calibri"/>
+              </a:rPr>
+              <a:t>MIE 402  |  ME LAB II</a:t>
+            </a:r>
+          </a:p>
+        </p:txBody>
+      </p:sp>
+      <p:sp>
+        <p:nvSpPr>
+          <p:cNvPr id="2" name="text">
+            <a:extLst xmlns:a="http://schemas.openxmlformats.org/drawingml/2006/main">
+              <a:ext uri="{FF2B5EF4-FFF2-40B4-BE49-F238E27FC236}">
+                <a16:creationId xmlns:a16="http://schemas.microsoft.com/office/drawing/2014/main" id="{2C61B374-3496-41FD-9754-7401393DE29F}"/>
+              </a:ext>
+            </a:extLst>
+          </p:cNvPr>
+          <p:cNvSpPr>
+            <a:spLocks xmlns:a="http://schemas.openxmlformats.org/drawingml/2006/main" noGrp="1"/>
+          </p:cNvSpPr>
+          <p:nvPr/>
+        </p:nvSpPr>
+        <p:spPr>
+          <a:xfrm xmlns:a="http://schemas.openxmlformats.org/drawingml/2006/main">
+            <a:off x="495300" y="1381125"/>
+            <a:ext cx="10668000" cy="1666875"/>
+          </a:xfrm>
+          <a:prstGeom xmlns:a="http://schemas.openxmlformats.org/drawingml/2006/main" prst="rect">
+            <a:avLst/>
+          </a:prstGeom>
+          <a:noFill xmlns:a="http://schemas.openxmlformats.org/drawingml/2006/main"/>
+          <a:ln xmlns:a="http://schemas.openxmlformats.org/drawingml/2006/main" w="0">
+            <a:noFill/>
+          </a:ln>
+        </p:spPr>
+        <p:txBody>
+          <a:bodyPr xmlns:a="http://schemas.openxmlformats.org/drawingml/2006/main">
+            <a:noAutofit/>
+          </a:bodyPr>
+          <a:lstStyle xmlns:a="http://schemas.openxmlformats.org/drawingml/2006/main"/>
+          <a:p xmlns:a="http://schemas.openxmlformats.org/drawingml/2006/main">
+            <a:pPr>
+              <a:defRPr sz="3900" b="1">
+                <a:solidFill>
+                  <a:srgbClr val="111111"/>
+                </a:solidFill>
+                <a:latin typeface="Calibri"/>
+                <a:ea typeface="Calibri"/>
+                <a:cs typeface="Calibri"/>
+              </a:defRPr>
+            </a:pPr>
+            <a:r>
+              <a:rPr sz="3900" b="1">
+                <a:solidFill>
+                  <a:srgbClr val="111111"/>
+                </a:solidFill>
+                <a:latin typeface="Calibri"/>
+                <a:ea typeface="Calibri"/>
+                <a:cs typeface="Calibri"/>
+              </a:rPr>
+              <a:t>Sampling, FFT, and</a:t>
+            </a:r>
+          </a:p>
+          <a:p xmlns:a="http://schemas.openxmlformats.org/drawingml/2006/main">
+            <a:pPr>
+              <a:defRPr sz="3900" b="1">
+                <a:solidFill>
+                  <a:srgbClr val="111111"/>
+                </a:solidFill>
+                <a:latin typeface="Calibri"/>
+                <a:ea typeface="Calibri"/>
+                <a:cs typeface="Calibri"/>
+              </a:defRPr>
+            </a:pPr>
+            <a:r>
+              <a:rPr sz="3900" b="1">
+                <a:solidFill>
+                  <a:srgbClr val="111111"/>
+                </a:solidFill>
+                <a:latin typeface="Calibri"/>
+                <a:ea typeface="Calibri"/>
+                <a:cs typeface="Calibri"/>
+              </a:rPr>
+              <a:t>the Pre-Lab 1 notebook</a:t>
+            </a:r>
+          </a:p>
+        </p:txBody>
+      </p:sp>
+      <p:sp>
+        <p:nvSpPr>
+          <p:cNvPr id="3" name="text">
+            <a:extLst xmlns:a="http://schemas.openxmlformats.org/drawingml/2006/main">
+              <a:ext uri="{FF2B5EF4-FFF2-40B4-BE49-F238E27FC236}">
+                <a16:creationId xmlns:a16="http://schemas.microsoft.com/office/drawing/2014/main" id="{DE745D31-FB53-4E8E-8984-3EA4C3FD1C04}"/>
+              </a:ext>
+            </a:extLst>
+          </p:cNvPr>
+          <p:cNvSpPr>
+            <a:spLocks xmlns:a="http://schemas.openxmlformats.org/drawingml/2006/main" noGrp="1"/>
+          </p:cNvSpPr>
+          <p:nvPr/>
+        </p:nvSpPr>
+        <p:spPr>
+          <a:xfrm xmlns:a="http://schemas.openxmlformats.org/drawingml/2006/main">
+            <a:off x="523875" y="3333750"/>
+            <a:ext cx="6667500" cy="428625"/>
+          </a:xfrm>
+          <a:prstGeom xmlns:a="http://schemas.openxmlformats.org/drawingml/2006/main" prst="rect">
+            <a:avLst/>
+          </a:prstGeom>
+          <a:noFill xmlns:a="http://schemas.openxmlformats.org/drawingml/2006/main"/>
+          <a:ln xmlns:a="http://schemas.openxmlformats.org/drawingml/2006/main" w="0">
+            <a:noFill/>
+          </a:ln>
+        </p:spPr>
+        <p:txBody>
+          <a:bodyPr xmlns:a="http://schemas.openxmlformats.org/drawingml/2006/main">
+            <a:noAutofit/>
+          </a:bodyPr>
+          <a:lstStyle xmlns:a="http://schemas.openxmlformats.org/drawingml/2006/main"/>
+          <a:p xmlns:a="http://schemas.openxmlformats.org/drawingml/2006/main">
+            <a:pPr>
+              <a:defRPr sz="2025" b="0">
+                <a:solidFill>
+                  <a:srgbClr val="5F6368"/>
+                </a:solidFill>
+                <a:latin typeface="Calibri"/>
+                <a:ea typeface="Calibri"/>
+                <a:cs typeface="Calibri"/>
+              </a:defRPr>
+            </a:pPr>
+            <a:r>
+              <a:rPr sz="2025" b="0">
+                <a:solidFill>
+                  <a:srgbClr val="5F6368"/>
+                </a:solidFill>
+                <a:latin typeface="Calibri"/>
+                <a:ea typeface="Calibri"/>
+                <a:cs typeface="Calibri"/>
+              </a:rPr>
+              <a:t>Fall 2026 · Prof. Ehsan Roohi</a:t>
+            </a:r>
+          </a:p>
+        </p:txBody>
+      </p:sp>
+      <p:sp>
+        <p:nvSpPr>
+          <p:cNvPr id="4" name="text">
+            <a:extLst xmlns:a="http://schemas.openxmlformats.org/drawingml/2006/main">
+              <a:ext uri="{FF2B5EF4-FFF2-40B4-BE49-F238E27FC236}">
+                <a16:creationId xmlns:a16="http://schemas.microsoft.com/office/drawing/2014/main" id="{1BFD5499-E9F7-40CF-8AB4-AB91D6D735A8}"/>
+              </a:ext>
+            </a:extLst>
+          </p:cNvPr>
+          <p:cNvSpPr>
+            <a:spLocks xmlns:a="http://schemas.openxmlformats.org/drawingml/2006/main" noGrp="1"/>
+          </p:cNvSpPr>
+          <p:nvPr/>
+        </p:nvSpPr>
+        <p:spPr>
+          <a:xfrm xmlns:a="http://schemas.openxmlformats.org/drawingml/2006/main">
+            <a:off x="523875" y="3952875"/>
+            <a:ext cx="8096250" cy="428625"/>
+          </a:xfrm>
+          <a:prstGeom xmlns:a="http://schemas.openxmlformats.org/drawingml/2006/main" prst="rect">
+            <a:avLst/>
+          </a:prstGeom>
+          <a:noFill xmlns:a="http://schemas.openxmlformats.org/drawingml/2006/main"/>
+          <a:ln xmlns:a="http://schemas.openxmlformats.org/drawingml/2006/main" w="0">
+            <a:noFill/>
+          </a:ln>
+        </p:spPr>
+        <p:txBody>
+          <a:bodyPr xmlns:a="http://schemas.openxmlformats.org/drawingml/2006/main">
+            <a:noAutofit/>
+          </a:bodyPr>
+          <a:lstStyle xmlns:a="http://schemas.openxmlformats.org/drawingml/2006/main"/>
+          <a:p xmlns:a="http://schemas.openxmlformats.org/drawingml/2006/main">
+            <a:pPr>
+              <a:defRPr sz="2100" b="1">
+                <a:solidFill>
+                  <a:srgbClr val="881C1C"/>
+                </a:solidFill>
+                <a:latin typeface="Calibri"/>
+                <a:ea typeface="Calibri"/>
+                <a:cs typeface="Calibri"/>
+              </a:defRPr>
+            </a:pPr>
+            <a:r>
+              <a:rPr sz="2100" b="1">
+                <a:solidFill>
+                  <a:srgbClr val="881C1C"/>
+                </a:solidFill>
+                <a:latin typeface="Calibri"/>
+                <a:ea typeface="Calibri"/>
+                <a:cs typeface="Calibri"/>
+              </a:rPr>
+              <a:t>Lecture and guided Jupyter walkthrough</a:t>
+            </a:r>
+          </a:p>
+        </p:txBody>
+      </p:sp>
+      <p:sp>
+        <p:nvSpPr>
+          <p:cNvPr id="5" name="page">
+            <a:extLst xmlns:a="http://schemas.openxmlformats.org/drawingml/2006/main">
+              <a:ext uri="{FF2B5EF4-FFF2-40B4-BE49-F238E27FC236}">
+                <a16:creationId xmlns:a16="http://schemas.microsoft.com/office/drawing/2014/main" id="{F462C6C2-B3A3-42A5-8343-B8D6ADC73D80}"/>
+              </a:ext>
+            </a:extLst>
+          </p:cNvPr>
+          <p:cNvSpPr>
+            <a:spLocks xmlns:a="http://schemas.openxmlformats.org/drawingml/2006/main" noGrp="1"/>
+          </p:cNvSpPr>
+          <p:nvPr/>
+        </p:nvSpPr>
+        <p:spPr>
+          <a:xfrm xmlns:a="http://schemas.openxmlformats.org/drawingml/2006/main">
+            <a:off x="11334750" y="6572250"/>
+            <a:ext cx="428625" cy="171450"/>
+          </a:xfrm>
+          <a:prstGeom xmlns:a="http://schemas.openxmlformats.org/drawingml/2006/main" prst="rect">
+            <a:avLst/>
+          </a:prstGeom>
+          <a:noFill xmlns:a="http://schemas.openxmlformats.org/drawingml/2006/main"/>
+          <a:ln xmlns:a="http://schemas.openxmlformats.org/drawingml/2006/main" w="0">
+            <a:noFill/>
+          </a:ln>
+        </p:spPr>
+        <p:txBody>
+          <a:bodyPr xmlns:a="http://schemas.openxmlformats.org/drawingml/2006/main">
+            <a:noAutofit/>
+          </a:bodyPr>
+          <a:lstStyle xmlns:a="http://schemas.openxmlformats.org/drawingml/2006/main"/>
+          <a:p xmlns:a="http://schemas.openxmlformats.org/drawingml/2006/main">
+            <a:pPr>
+              <a:defRPr sz="1050" b="0">
+                <a:solidFill>
+                  <a:srgbClr val="5F6368"/>
+                </a:solidFill>
+                <a:latin typeface="Calibri"/>
+                <a:ea typeface="Calibri"/>
+                <a:cs typeface="Calibri"/>
+              </a:defRPr>
+            </a:pPr>
+            <a:r>
+              <a:rPr sz="1050" b="0">
+                <a:solidFill>
+                  <a:srgbClr val="5F6368"/>
+                </a:solidFill>
+                <a:latin typeface="Calibri"/>
+                <a:ea typeface="Calibri"/>
+                <a:cs typeface="Calibri"/>
+              </a:rPr>
+              <a:t>1</a:t>
+            </a:r>
+          </a:p>
+        </p:txBody>
+      </p:sp>
+    </p:spTree>
+    <p:extLst>
+      <p:ext uri="{BB962C8B-B14F-4D97-AF65-F5344CB8AC3E}">
+        <p14:creationId xmlns:p14="http://schemas.microsoft.com/office/powerpoint/2010/main" val="636262913"/>
+      </p:ext>
+    </p:extLst>
+  </p:cSld>
+</p:sld>
+</file>
+
 <file path=ppt/slides/slide10.xml><?xml version="1.0" encoding="utf-8"?>
 <p:sld xmlns:p="http://schemas.openxmlformats.org/presentationml/2006/main">
   <p:cSld>
@@ -23922,6 +28658,662 @@
 </p:sld>
 </file>
 
+<file path=ppt/slides/slide2.xml><?xml version="1.0" encoding="utf-8"?>
+<p:sld xmlns:p="http://schemas.openxmlformats.org/presentationml/2006/main">
+  <p:cSld>
+    <p:bg>
+      <p:bgPr>
+        <a:solidFill xmlns:a="http://schemas.openxmlformats.org/drawingml/2006/main">
+          <a:srgbClr val="FFFFFF"/>
+        </a:solidFill>
+      </p:bgPr>
+    </p:bg>
+    <p:spTree>
+      <p:nvGrpSpPr>
+        <p:cNvPr id="1" name=""/>
+        <p:cNvGrpSpPr/>
+        <p:nvPr/>
+      </p:nvGrpSpPr>
+      <p:grpSpPr>
+        <a:xfrm xmlns:a="http://schemas.openxmlformats.org/drawingml/2006/main"/>
+      </p:grpSpPr>
+      <p:sp>
+        <p:nvSpPr>
+          <p:cNvPr id="12" name="course">
+            <a:extLst xmlns:a="http://schemas.openxmlformats.org/drawingml/2006/main">
+              <a:ext uri="{FF2B5EF4-FFF2-40B4-BE49-F238E27FC236}">
+                <a16:creationId xmlns:a16="http://schemas.microsoft.com/office/drawing/2014/main" id="{8605A5C3-7380-4373-86C2-DEEF5C5671CB}"/>
+              </a:ext>
+            </a:extLst>
+          </p:cNvPr>
+          <p:cNvSpPr>
+            <a:spLocks xmlns:a="http://schemas.openxmlformats.org/drawingml/2006/main" noGrp="1"/>
+          </p:cNvSpPr>
+          <p:nvPr/>
+        </p:nvSpPr>
+        <p:spPr>
+          <a:xfrm xmlns:a="http://schemas.openxmlformats.org/drawingml/2006/main">
+            <a:off x="400050" y="228600"/>
+            <a:ext cx="4762500" cy="266700"/>
+          </a:xfrm>
+          <a:prstGeom xmlns:a="http://schemas.openxmlformats.org/drawingml/2006/main" prst="rect">
+            <a:avLst/>
+          </a:prstGeom>
+          <a:noFill xmlns:a="http://schemas.openxmlformats.org/drawingml/2006/main"/>
+          <a:ln xmlns:a="http://schemas.openxmlformats.org/drawingml/2006/main" w="0">
+            <a:noFill/>
+          </a:ln>
+        </p:spPr>
+        <p:txBody>
+          <a:bodyPr xmlns:a="http://schemas.openxmlformats.org/drawingml/2006/main">
+            <a:noAutofit/>
+          </a:bodyPr>
+          <a:lstStyle xmlns:a="http://schemas.openxmlformats.org/drawingml/2006/main"/>
+          <a:p xmlns:a="http://schemas.openxmlformats.org/drawingml/2006/main">
+            <a:pPr>
+              <a:defRPr sz="1275" b="1">
+                <a:solidFill>
+                  <a:srgbClr val="881C1C"/>
+                </a:solidFill>
+                <a:latin typeface="Calibri"/>
+                <a:ea typeface="Calibri"/>
+                <a:cs typeface="Calibri"/>
+              </a:defRPr>
+            </a:pPr>
+            <a:r>
+              <a:rPr sz="1275" b="1">
+                <a:solidFill>
+                  <a:srgbClr val="881C1C"/>
+                </a:solidFill>
+                <a:latin typeface="Calibri"/>
+                <a:ea typeface="Calibri"/>
+                <a:cs typeface="Calibri"/>
+              </a:rPr>
+              <a:t>MIE 402  |  ME LAB II</a:t>
+            </a:r>
+          </a:p>
+        </p:txBody>
+      </p:sp>
+      <p:sp>
+        <p:nvSpPr>
+          <p:cNvPr id="2" name="title">
+            <a:extLst xmlns:a="http://schemas.openxmlformats.org/drawingml/2006/main">
+              <a:ext uri="{FF2B5EF4-FFF2-40B4-BE49-F238E27FC236}">
+                <a16:creationId xmlns:a16="http://schemas.microsoft.com/office/drawing/2014/main" id="{D159E173-ED83-4555-A1AE-D2A57F8B5633}"/>
+              </a:ext>
+            </a:extLst>
+          </p:cNvPr>
+          <p:cNvSpPr>
+            <a:spLocks xmlns:a="http://schemas.openxmlformats.org/drawingml/2006/main" noGrp="1"/>
+          </p:cNvSpPr>
+          <p:nvPr/>
+        </p:nvSpPr>
+        <p:spPr>
+          <a:xfrm xmlns:a="http://schemas.openxmlformats.org/drawingml/2006/main">
+            <a:off x="400050" y="685800"/>
+            <a:ext cx="11334750" cy="685800"/>
+          </a:xfrm>
+          <a:prstGeom xmlns:a="http://schemas.openxmlformats.org/drawingml/2006/main" prst="rect">
+            <a:avLst/>
+          </a:prstGeom>
+          <a:noFill xmlns:a="http://schemas.openxmlformats.org/drawingml/2006/main"/>
+          <a:ln xmlns:a="http://schemas.openxmlformats.org/drawingml/2006/main" w="0">
+            <a:noFill/>
+          </a:ln>
+        </p:spPr>
+        <p:txBody>
+          <a:bodyPr xmlns:a="http://schemas.openxmlformats.org/drawingml/2006/main">
+            <a:noAutofit/>
+          </a:bodyPr>
+          <a:lstStyle xmlns:a="http://schemas.openxmlformats.org/drawingml/2006/main"/>
+          <a:p xmlns:a="http://schemas.openxmlformats.org/drawingml/2006/main">
+            <a:pPr>
+              <a:defRPr sz="3000" b="1">
+                <a:solidFill>
+                  <a:srgbClr val="111111"/>
+                </a:solidFill>
+                <a:latin typeface="Calibri"/>
+                <a:ea typeface="Calibri"/>
+                <a:cs typeface="Calibri"/>
+              </a:defRPr>
+            </a:pPr>
+            <a:r>
+              <a:rPr sz="3000" b="1">
+                <a:solidFill>
+                  <a:srgbClr val="111111"/>
+                </a:solidFill>
+                <a:latin typeface="Calibri"/>
+                <a:ea typeface="Calibri"/>
+                <a:cs typeface="Calibri"/>
+              </a:rPr>
+              <a:t>Learning goals</a:t>
+            </a:r>
+          </a:p>
+        </p:txBody>
+      </p:sp>
+      <p:sp>
+        <p:nvSpPr>
+          <p:cNvPr id="3" name="page">
+            <a:extLst xmlns:a="http://schemas.openxmlformats.org/drawingml/2006/main">
+              <a:ext uri="{FF2B5EF4-FFF2-40B4-BE49-F238E27FC236}">
+                <a16:creationId xmlns:a16="http://schemas.microsoft.com/office/drawing/2014/main" id="{250A64E5-440C-477E-8253-560175A5737B}"/>
+              </a:ext>
+            </a:extLst>
+          </p:cNvPr>
+          <p:cNvSpPr>
+            <a:spLocks xmlns:a="http://schemas.openxmlformats.org/drawingml/2006/main" noGrp="1"/>
+          </p:cNvSpPr>
+          <p:nvPr/>
+        </p:nvSpPr>
+        <p:spPr>
+          <a:xfrm xmlns:a="http://schemas.openxmlformats.org/drawingml/2006/main">
+            <a:off x="11334750" y="6572250"/>
+            <a:ext cx="428625" cy="171450"/>
+          </a:xfrm>
+          <a:prstGeom xmlns:a="http://schemas.openxmlformats.org/drawingml/2006/main" prst="rect">
+            <a:avLst/>
+          </a:prstGeom>
+          <a:noFill xmlns:a="http://schemas.openxmlformats.org/drawingml/2006/main"/>
+          <a:ln xmlns:a="http://schemas.openxmlformats.org/drawingml/2006/main" w="0">
+            <a:noFill/>
+          </a:ln>
+        </p:spPr>
+        <p:txBody>
+          <a:bodyPr xmlns:a="http://schemas.openxmlformats.org/drawingml/2006/main">
+            <a:noAutofit/>
+          </a:bodyPr>
+          <a:lstStyle xmlns:a="http://schemas.openxmlformats.org/drawingml/2006/main"/>
+          <a:p xmlns:a="http://schemas.openxmlformats.org/drawingml/2006/main">
+            <a:pPr>
+              <a:defRPr sz="1050" b="0">
+                <a:solidFill>
+                  <a:srgbClr val="5F6368"/>
+                </a:solidFill>
+                <a:latin typeface="Calibri"/>
+                <a:ea typeface="Calibri"/>
+                <a:cs typeface="Calibri"/>
+              </a:defRPr>
+            </a:pPr>
+            <a:r>
+              <a:rPr sz="1050" b="0">
+                <a:solidFill>
+                  <a:srgbClr val="5F6368"/>
+                </a:solidFill>
+                <a:latin typeface="Calibri"/>
+                <a:ea typeface="Calibri"/>
+                <a:cs typeface="Calibri"/>
+              </a:rPr>
+              <a:t>2</a:t>
+            </a:r>
+          </a:p>
+        </p:txBody>
+      </p:sp>
+      <p:sp>
+        <p:nvSpPr>
+          <p:cNvPr id="4" name="text">
+            <a:extLst xmlns:a="http://schemas.openxmlformats.org/drawingml/2006/main">
+              <a:ext uri="{FF2B5EF4-FFF2-40B4-BE49-F238E27FC236}">
+                <a16:creationId xmlns:a16="http://schemas.microsoft.com/office/drawing/2014/main" id="{8026096C-A402-4F32-9B8F-0544CB407EA7}"/>
+              </a:ext>
+            </a:extLst>
+          </p:cNvPr>
+          <p:cNvSpPr>
+            <a:spLocks xmlns:a="http://schemas.openxmlformats.org/drawingml/2006/main" noGrp="1"/>
+          </p:cNvSpPr>
+          <p:nvPr/>
+        </p:nvSpPr>
+        <p:spPr>
+          <a:xfrm xmlns:a="http://schemas.openxmlformats.org/drawingml/2006/main">
+            <a:off x="533400" y="1619250"/>
+            <a:ext cx="228600" cy="400050"/>
+          </a:xfrm>
+          <a:prstGeom xmlns:a="http://schemas.openxmlformats.org/drawingml/2006/main" prst="rect">
+            <a:avLst/>
+          </a:prstGeom>
+          <a:noFill xmlns:a="http://schemas.openxmlformats.org/drawingml/2006/main"/>
+          <a:ln xmlns:a="http://schemas.openxmlformats.org/drawingml/2006/main" w="0">
+            <a:noFill/>
+          </a:ln>
+        </p:spPr>
+        <p:txBody>
+          <a:bodyPr xmlns:a="http://schemas.openxmlformats.org/drawingml/2006/main">
+            <a:noAutofit/>
+          </a:bodyPr>
+          <a:lstStyle xmlns:a="http://schemas.openxmlformats.org/drawingml/2006/main"/>
+          <a:p xmlns:a="http://schemas.openxmlformats.org/drawingml/2006/main">
+            <a:pPr>
+              <a:defRPr sz="2025" b="1">
+                <a:solidFill>
+                  <a:srgbClr val="881C1C"/>
+                </a:solidFill>
+                <a:latin typeface="Calibri"/>
+                <a:ea typeface="Calibri"/>
+                <a:cs typeface="Calibri"/>
+              </a:defRPr>
+            </a:pPr>
+            <a:r>
+              <a:rPr sz="2025" b="1">
+                <a:solidFill>
+                  <a:srgbClr val="881C1C"/>
+                </a:solidFill>
+                <a:latin typeface="Calibri"/>
+                <a:ea typeface="Calibri"/>
+                <a:cs typeface="Calibri"/>
+              </a:rPr>
+              <a:t>•</a:t>
+            </a:r>
+          </a:p>
+        </p:txBody>
+      </p:sp>
+      <p:sp>
+        <p:nvSpPr>
+          <p:cNvPr id="5" name="text">
+            <a:extLst xmlns:a="http://schemas.openxmlformats.org/drawingml/2006/main">
+              <a:ext uri="{FF2B5EF4-FFF2-40B4-BE49-F238E27FC236}">
+                <a16:creationId xmlns:a16="http://schemas.microsoft.com/office/drawing/2014/main" id="{83412A6A-E27C-4E32-AC75-CD097DB6EAE4}"/>
+              </a:ext>
+            </a:extLst>
+          </p:cNvPr>
+          <p:cNvSpPr>
+            <a:spLocks xmlns:a="http://schemas.openxmlformats.org/drawingml/2006/main" noGrp="1"/>
+          </p:cNvSpPr>
+          <p:nvPr/>
+        </p:nvSpPr>
+        <p:spPr>
+          <a:xfrm xmlns:a="http://schemas.openxmlformats.org/drawingml/2006/main">
+            <a:off x="838200" y="1619250"/>
+            <a:ext cx="10477500" cy="647700"/>
+          </a:xfrm>
+          <a:prstGeom xmlns:a="http://schemas.openxmlformats.org/drawingml/2006/main" prst="rect">
+            <a:avLst/>
+          </a:prstGeom>
+          <a:noFill xmlns:a="http://schemas.openxmlformats.org/drawingml/2006/main"/>
+          <a:ln xmlns:a="http://schemas.openxmlformats.org/drawingml/2006/main" w="0">
+            <a:noFill/>
+          </a:ln>
+        </p:spPr>
+        <p:txBody>
+          <a:bodyPr xmlns:a="http://schemas.openxmlformats.org/drawingml/2006/main">
+            <a:noAutofit/>
+          </a:bodyPr>
+          <a:lstStyle xmlns:a="http://schemas.openxmlformats.org/drawingml/2006/main"/>
+          <a:p xmlns:a="http://schemas.openxmlformats.org/drawingml/2006/main">
+            <a:pPr>
+              <a:defRPr sz="2025" b="0">
+                <a:solidFill>
+                  <a:srgbClr val="161616"/>
+                </a:solidFill>
+                <a:latin typeface="Calibri"/>
+                <a:ea typeface="Calibri"/>
+                <a:cs typeface="Calibri"/>
+              </a:defRPr>
+            </a:pPr>
+            <a:r>
+              <a:rPr sz="2025" b="0">
+                <a:solidFill>
+                  <a:srgbClr val="161616"/>
+                </a:solidFill>
+                <a:latin typeface="Calibri"/>
+                <a:ea typeface="Calibri"/>
+                <a:cs typeface="Calibri"/>
+              </a:rPr>
+              <a:t>Explain sample rate, sample interval, record length, and Nyquist frequency</a:t>
+            </a:r>
+          </a:p>
+        </p:txBody>
+      </p:sp>
+      <p:sp>
+        <p:nvSpPr>
+          <p:cNvPr id="6" name="text">
+            <a:extLst xmlns:a="http://schemas.openxmlformats.org/drawingml/2006/main">
+              <a:ext uri="{FF2B5EF4-FFF2-40B4-BE49-F238E27FC236}">
+                <a16:creationId xmlns:a16="http://schemas.microsoft.com/office/drawing/2014/main" id="{057611F4-C5BF-4CAD-AB6A-DCF8BA63FC76}"/>
+              </a:ext>
+            </a:extLst>
+          </p:cNvPr>
+          <p:cNvSpPr>
+            <a:spLocks xmlns:a="http://schemas.openxmlformats.org/drawingml/2006/main" noGrp="1"/>
+          </p:cNvSpPr>
+          <p:nvPr/>
+        </p:nvSpPr>
+        <p:spPr>
+          <a:xfrm xmlns:a="http://schemas.openxmlformats.org/drawingml/2006/main">
+            <a:off x="533400" y="2400300"/>
+            <a:ext cx="228600" cy="400050"/>
+          </a:xfrm>
+          <a:prstGeom xmlns:a="http://schemas.openxmlformats.org/drawingml/2006/main" prst="rect">
+            <a:avLst/>
+          </a:prstGeom>
+          <a:noFill xmlns:a="http://schemas.openxmlformats.org/drawingml/2006/main"/>
+          <a:ln xmlns:a="http://schemas.openxmlformats.org/drawingml/2006/main" w="0">
+            <a:noFill/>
+          </a:ln>
+        </p:spPr>
+        <p:txBody>
+          <a:bodyPr xmlns:a="http://schemas.openxmlformats.org/drawingml/2006/main">
+            <a:noAutofit/>
+          </a:bodyPr>
+          <a:lstStyle xmlns:a="http://schemas.openxmlformats.org/drawingml/2006/main"/>
+          <a:p xmlns:a="http://schemas.openxmlformats.org/drawingml/2006/main">
+            <a:pPr>
+              <a:defRPr sz="2025" b="1">
+                <a:solidFill>
+                  <a:srgbClr val="881C1C"/>
+                </a:solidFill>
+                <a:latin typeface="Calibri"/>
+                <a:ea typeface="Calibri"/>
+                <a:cs typeface="Calibri"/>
+              </a:defRPr>
+            </a:pPr>
+            <a:r>
+              <a:rPr sz="2025" b="1">
+                <a:solidFill>
+                  <a:srgbClr val="881C1C"/>
+                </a:solidFill>
+                <a:latin typeface="Calibri"/>
+                <a:ea typeface="Calibri"/>
+                <a:cs typeface="Calibri"/>
+              </a:rPr>
+              <a:t>•</a:t>
+            </a:r>
+          </a:p>
+        </p:txBody>
+      </p:sp>
+      <p:sp>
+        <p:nvSpPr>
+          <p:cNvPr id="7" name="text">
+            <a:extLst xmlns:a="http://schemas.openxmlformats.org/drawingml/2006/main">
+              <a:ext uri="{FF2B5EF4-FFF2-40B4-BE49-F238E27FC236}">
+                <a16:creationId xmlns:a16="http://schemas.microsoft.com/office/drawing/2014/main" id="{D4E83B28-136A-4B81-8C0E-9E064CE4CEAD}"/>
+              </a:ext>
+            </a:extLst>
+          </p:cNvPr>
+          <p:cNvSpPr>
+            <a:spLocks xmlns:a="http://schemas.openxmlformats.org/drawingml/2006/main" noGrp="1"/>
+          </p:cNvSpPr>
+          <p:nvPr/>
+        </p:nvSpPr>
+        <p:spPr>
+          <a:xfrm xmlns:a="http://schemas.openxmlformats.org/drawingml/2006/main">
+            <a:off x="838200" y="2400300"/>
+            <a:ext cx="10477500" cy="647700"/>
+          </a:xfrm>
+          <a:prstGeom xmlns:a="http://schemas.openxmlformats.org/drawingml/2006/main" prst="rect">
+            <a:avLst/>
+          </a:prstGeom>
+          <a:noFill xmlns:a="http://schemas.openxmlformats.org/drawingml/2006/main"/>
+          <a:ln xmlns:a="http://schemas.openxmlformats.org/drawingml/2006/main" w="0">
+            <a:noFill/>
+          </a:ln>
+        </p:spPr>
+        <p:txBody>
+          <a:bodyPr xmlns:a="http://schemas.openxmlformats.org/drawingml/2006/main">
+            <a:noAutofit/>
+          </a:bodyPr>
+          <a:lstStyle xmlns:a="http://schemas.openxmlformats.org/drawingml/2006/main"/>
+          <a:p xmlns:a="http://schemas.openxmlformats.org/drawingml/2006/main">
+            <a:pPr>
+              <a:defRPr sz="2025" b="0">
+                <a:solidFill>
+                  <a:srgbClr val="161616"/>
+                </a:solidFill>
+                <a:latin typeface="Calibri"/>
+                <a:ea typeface="Calibri"/>
+                <a:cs typeface="Calibri"/>
+              </a:defRPr>
+            </a:pPr>
+            <a:r>
+              <a:rPr sz="2025" b="0">
+                <a:solidFill>
+                  <a:srgbClr val="161616"/>
+                </a:solidFill>
+                <a:latin typeface="Calibri"/>
+                <a:ea typeface="Calibri"/>
+                <a:cs typeface="Calibri"/>
+              </a:rPr>
+              <a:t>Run prepared analysis cells in a Jupyter notebook</a:t>
+            </a:r>
+          </a:p>
+        </p:txBody>
+      </p:sp>
+      <p:sp>
+        <p:nvSpPr>
+          <p:cNvPr id="8" name="text">
+            <a:extLst xmlns:a="http://schemas.openxmlformats.org/drawingml/2006/main">
+              <a:ext uri="{FF2B5EF4-FFF2-40B4-BE49-F238E27FC236}">
+                <a16:creationId xmlns:a16="http://schemas.microsoft.com/office/drawing/2014/main" id="{886A6201-F223-48F9-8169-02B0A1C258AA}"/>
+              </a:ext>
+            </a:extLst>
+          </p:cNvPr>
+          <p:cNvSpPr>
+            <a:spLocks xmlns:a="http://schemas.openxmlformats.org/drawingml/2006/main" noGrp="1"/>
+          </p:cNvSpPr>
+          <p:nvPr/>
+        </p:nvSpPr>
+        <p:spPr>
+          <a:xfrm xmlns:a="http://schemas.openxmlformats.org/drawingml/2006/main">
+            <a:off x="533400" y="3181350"/>
+            <a:ext cx="228600" cy="400050"/>
+          </a:xfrm>
+          <a:prstGeom xmlns:a="http://schemas.openxmlformats.org/drawingml/2006/main" prst="rect">
+            <a:avLst/>
+          </a:prstGeom>
+          <a:noFill xmlns:a="http://schemas.openxmlformats.org/drawingml/2006/main"/>
+          <a:ln xmlns:a="http://schemas.openxmlformats.org/drawingml/2006/main" w="0">
+            <a:noFill/>
+          </a:ln>
+        </p:spPr>
+        <p:txBody>
+          <a:bodyPr xmlns:a="http://schemas.openxmlformats.org/drawingml/2006/main">
+            <a:noAutofit/>
+          </a:bodyPr>
+          <a:lstStyle xmlns:a="http://schemas.openxmlformats.org/drawingml/2006/main"/>
+          <a:p xmlns:a="http://schemas.openxmlformats.org/drawingml/2006/main">
+            <a:pPr>
+              <a:defRPr sz="2025" b="1">
+                <a:solidFill>
+                  <a:srgbClr val="881C1C"/>
+                </a:solidFill>
+                <a:latin typeface="Calibri"/>
+                <a:ea typeface="Calibri"/>
+                <a:cs typeface="Calibri"/>
+              </a:defRPr>
+            </a:pPr>
+            <a:r>
+              <a:rPr sz="2025" b="1">
+                <a:solidFill>
+                  <a:srgbClr val="881C1C"/>
+                </a:solidFill>
+                <a:latin typeface="Calibri"/>
+                <a:ea typeface="Calibri"/>
+                <a:cs typeface="Calibri"/>
+              </a:rPr>
+              <a:t>•</a:t>
+            </a:r>
+          </a:p>
+        </p:txBody>
+      </p:sp>
+      <p:sp>
+        <p:nvSpPr>
+          <p:cNvPr id="9" name="text">
+            <a:extLst xmlns:a="http://schemas.openxmlformats.org/drawingml/2006/main">
+              <a:ext uri="{FF2B5EF4-FFF2-40B4-BE49-F238E27FC236}">
+                <a16:creationId xmlns:a16="http://schemas.microsoft.com/office/drawing/2014/main" id="{3DF2FD39-3422-41C0-B13B-4A51EBDDEDF2}"/>
+              </a:ext>
+            </a:extLst>
+          </p:cNvPr>
+          <p:cNvSpPr>
+            <a:spLocks xmlns:a="http://schemas.openxmlformats.org/drawingml/2006/main" noGrp="1"/>
+          </p:cNvSpPr>
+          <p:nvPr/>
+        </p:nvSpPr>
+        <p:spPr>
+          <a:xfrm xmlns:a="http://schemas.openxmlformats.org/drawingml/2006/main">
+            <a:off x="838200" y="3181350"/>
+            <a:ext cx="10477500" cy="647700"/>
+          </a:xfrm>
+          <a:prstGeom xmlns:a="http://schemas.openxmlformats.org/drawingml/2006/main" prst="rect">
+            <a:avLst/>
+          </a:prstGeom>
+          <a:noFill xmlns:a="http://schemas.openxmlformats.org/drawingml/2006/main"/>
+          <a:ln xmlns:a="http://schemas.openxmlformats.org/drawingml/2006/main" w="0">
+            <a:noFill/>
+          </a:ln>
+        </p:spPr>
+        <p:txBody>
+          <a:bodyPr xmlns:a="http://schemas.openxmlformats.org/drawingml/2006/main">
+            <a:noAutofit/>
+          </a:bodyPr>
+          <a:lstStyle xmlns:a="http://schemas.openxmlformats.org/drawingml/2006/main"/>
+          <a:p xmlns:a="http://schemas.openxmlformats.org/drawingml/2006/main">
+            <a:pPr>
+              <a:defRPr sz="2025" b="0">
+                <a:solidFill>
+                  <a:srgbClr val="161616"/>
+                </a:solidFill>
+                <a:latin typeface="Calibri"/>
+                <a:ea typeface="Calibri"/>
+                <a:cs typeface="Calibri"/>
+              </a:defRPr>
+            </a:pPr>
+            <a:r>
+              <a:rPr sz="2025" b="0">
+                <a:solidFill>
+                  <a:srgbClr val="161616"/>
+                </a:solidFill>
+                <a:latin typeface="Calibri"/>
+                <a:ea typeface="Calibri"/>
+                <a:cs typeface="Calibri"/>
+              </a:rPr>
+              <a:t>Interpret time histories, RMS values, and one-sided FFT spectra</a:t>
+            </a:r>
+          </a:p>
+        </p:txBody>
+      </p:sp>
+      <p:sp>
+        <p:nvSpPr>
+          <p:cNvPr id="10" name="text">
+            <a:extLst xmlns:a="http://schemas.openxmlformats.org/drawingml/2006/main">
+              <a:ext uri="{FF2B5EF4-FFF2-40B4-BE49-F238E27FC236}">
+                <a16:creationId xmlns:a16="http://schemas.microsoft.com/office/drawing/2014/main" id="{4761EA92-4031-48FC-B8CE-2A90A9056A91}"/>
+              </a:ext>
+            </a:extLst>
+          </p:cNvPr>
+          <p:cNvSpPr>
+            <a:spLocks xmlns:a="http://schemas.openxmlformats.org/drawingml/2006/main" noGrp="1"/>
+          </p:cNvSpPr>
+          <p:nvPr/>
+        </p:nvSpPr>
+        <p:spPr>
+          <a:xfrm xmlns:a="http://schemas.openxmlformats.org/drawingml/2006/main">
+            <a:off x="533400" y="3962400"/>
+            <a:ext cx="228600" cy="400050"/>
+          </a:xfrm>
+          <a:prstGeom xmlns:a="http://schemas.openxmlformats.org/drawingml/2006/main" prst="rect">
+            <a:avLst/>
+          </a:prstGeom>
+          <a:noFill xmlns:a="http://schemas.openxmlformats.org/drawingml/2006/main"/>
+          <a:ln xmlns:a="http://schemas.openxmlformats.org/drawingml/2006/main" w="0">
+            <a:noFill/>
+          </a:ln>
+        </p:spPr>
+        <p:txBody>
+          <a:bodyPr xmlns:a="http://schemas.openxmlformats.org/drawingml/2006/main">
+            <a:noAutofit/>
+          </a:bodyPr>
+          <a:lstStyle xmlns:a="http://schemas.openxmlformats.org/drawingml/2006/main"/>
+          <a:p xmlns:a="http://schemas.openxmlformats.org/drawingml/2006/main">
+            <a:pPr>
+              <a:defRPr sz="2025" b="1">
+                <a:solidFill>
+                  <a:srgbClr val="881C1C"/>
+                </a:solidFill>
+                <a:latin typeface="Calibri"/>
+                <a:ea typeface="Calibri"/>
+                <a:cs typeface="Calibri"/>
+              </a:defRPr>
+            </a:pPr>
+            <a:r>
+              <a:rPr sz="2025" b="1">
+                <a:solidFill>
+                  <a:srgbClr val="881C1C"/>
+                </a:solidFill>
+                <a:latin typeface="Calibri"/>
+                <a:ea typeface="Calibri"/>
+                <a:cs typeface="Calibri"/>
+              </a:rPr>
+              <a:t>•</a:t>
+            </a:r>
+          </a:p>
+        </p:txBody>
+      </p:sp>
+      <p:sp>
+        <p:nvSpPr>
+          <p:cNvPr id="11" name="text">
+            <a:extLst xmlns:a="http://schemas.openxmlformats.org/drawingml/2006/main">
+              <a:ext uri="{FF2B5EF4-FFF2-40B4-BE49-F238E27FC236}">
+                <a16:creationId xmlns:a16="http://schemas.microsoft.com/office/drawing/2014/main" id="{64552742-6ABD-436A-9F30-82D5B042FA64}"/>
+              </a:ext>
+            </a:extLst>
+          </p:cNvPr>
+          <p:cNvSpPr>
+            <a:spLocks xmlns:a="http://schemas.openxmlformats.org/drawingml/2006/main" noGrp="1"/>
+          </p:cNvSpPr>
+          <p:nvPr/>
+        </p:nvSpPr>
+        <p:spPr>
+          <a:xfrm xmlns:a="http://schemas.openxmlformats.org/drawingml/2006/main">
+            <a:off x="838200" y="3962400"/>
+            <a:ext cx="10477500" cy="647700"/>
+          </a:xfrm>
+          <a:prstGeom xmlns:a="http://schemas.openxmlformats.org/drawingml/2006/main" prst="rect">
+            <a:avLst/>
+          </a:prstGeom>
+          <a:noFill xmlns:a="http://schemas.openxmlformats.org/drawingml/2006/main"/>
+          <a:ln xmlns:a="http://schemas.openxmlformats.org/drawingml/2006/main" w="0">
+            <a:noFill/>
+          </a:ln>
+        </p:spPr>
+        <p:txBody>
+          <a:bodyPr xmlns:a="http://schemas.openxmlformats.org/drawingml/2006/main">
+            <a:noAutofit/>
+          </a:bodyPr>
+          <a:lstStyle xmlns:a="http://schemas.openxmlformats.org/drawingml/2006/main"/>
+          <a:p xmlns:a="http://schemas.openxmlformats.org/drawingml/2006/main">
+            <a:pPr>
+              <a:defRPr sz="2025" b="0">
+                <a:solidFill>
+                  <a:srgbClr val="161616"/>
+                </a:solidFill>
+                <a:latin typeface="Calibri"/>
+                <a:ea typeface="Calibri"/>
+                <a:cs typeface="Calibri"/>
+              </a:defRPr>
+            </a:pPr>
+            <a:r>
+              <a:rPr sz="2025" b="0">
+                <a:solidFill>
+                  <a:srgbClr val="161616"/>
+                </a:solidFill>
+                <a:latin typeface="Calibri"/>
+                <a:ea typeface="Calibri"/>
+                <a:cs typeface="Calibri"/>
+              </a:rPr>
+              <a:t>Recognize aliasing before collecting Lab 1 sound data</a:t>
+            </a:r>
+          </a:p>
+        </p:txBody>
+      </p:sp>
+    </p:spTree>
+    <p:extLst>
+      <p:ext uri="{BB962C8B-B14F-4D97-AF65-F5344CB8AC3E}">
+        <p14:creationId xmlns:p14="http://schemas.microsoft.com/office/powerpoint/2010/main" val="256002725"/>
+      </p:ext>
+    </p:extLst>
+  </p:cSld>
+</p:sld>
+</file>
+
 <file path=ppt/slides/slide20.xml><?xml version="1.0" encoding="utf-8"?>
 <p:sld xmlns:p="http://schemas.openxmlformats.org/presentationml/2006/main">
   <p:cSld>
@@ -27145,6 +32537,2512 @@
 </p:sld>
 </file>
 
+<file path=ppt/slides/slide3.xml><?xml version="1.0" encoding="utf-8"?>
+<p:sld xmlns:p="http://schemas.openxmlformats.org/presentationml/2006/main">
+  <p:cSld>
+    <p:bg>
+      <p:bgPr>
+        <a:solidFill xmlns:a="http://schemas.openxmlformats.org/drawingml/2006/main">
+          <a:srgbClr val="FFFFFF"/>
+        </a:solidFill>
+      </p:bgPr>
+    </p:bg>
+    <p:spTree>
+      <p:nvGrpSpPr>
+        <p:cNvPr id="1" name=""/>
+        <p:cNvGrpSpPr/>
+        <p:nvPr/>
+      </p:nvGrpSpPr>
+      <p:grpSpPr>
+        <a:xfrm xmlns:a="http://schemas.openxmlformats.org/drawingml/2006/main"/>
+      </p:grpSpPr>
+      <p:sp>
+        <p:nvSpPr>
+          <p:cNvPr id="10" name="course">
+            <a:extLst xmlns:a="http://schemas.openxmlformats.org/drawingml/2006/main">
+              <a:ext uri="{FF2B5EF4-FFF2-40B4-BE49-F238E27FC236}">
+                <a16:creationId xmlns:a16="http://schemas.microsoft.com/office/drawing/2014/main" id="{27BC29AC-216C-49D5-8862-5E44BC038A1F}"/>
+              </a:ext>
+            </a:extLst>
+          </p:cNvPr>
+          <p:cNvSpPr>
+            <a:spLocks xmlns:a="http://schemas.openxmlformats.org/drawingml/2006/main" noGrp="1"/>
+          </p:cNvSpPr>
+          <p:nvPr/>
+        </p:nvSpPr>
+        <p:spPr>
+          <a:xfrm xmlns:a="http://schemas.openxmlformats.org/drawingml/2006/main">
+            <a:off x="400050" y="228600"/>
+            <a:ext cx="4762500" cy="266700"/>
+          </a:xfrm>
+          <a:prstGeom xmlns:a="http://schemas.openxmlformats.org/drawingml/2006/main" prst="rect">
+            <a:avLst/>
+          </a:prstGeom>
+          <a:noFill xmlns:a="http://schemas.openxmlformats.org/drawingml/2006/main"/>
+          <a:ln xmlns:a="http://schemas.openxmlformats.org/drawingml/2006/main" w="0">
+            <a:noFill/>
+          </a:ln>
+        </p:spPr>
+        <p:txBody>
+          <a:bodyPr xmlns:a="http://schemas.openxmlformats.org/drawingml/2006/main">
+            <a:noAutofit/>
+          </a:bodyPr>
+          <a:lstStyle xmlns:a="http://schemas.openxmlformats.org/drawingml/2006/main"/>
+          <a:p xmlns:a="http://schemas.openxmlformats.org/drawingml/2006/main">
+            <a:pPr>
+              <a:defRPr sz="1275" b="1">
+                <a:solidFill>
+                  <a:srgbClr val="881C1C"/>
+                </a:solidFill>
+                <a:latin typeface="Calibri"/>
+                <a:ea typeface="Calibri"/>
+                <a:cs typeface="Calibri"/>
+              </a:defRPr>
+            </a:pPr>
+            <a:r>
+              <a:rPr sz="1275" b="1">
+                <a:solidFill>
+                  <a:srgbClr val="881C1C"/>
+                </a:solidFill>
+                <a:latin typeface="Calibri"/>
+                <a:ea typeface="Calibri"/>
+                <a:cs typeface="Calibri"/>
+              </a:rPr>
+              <a:t>MIE 402  |  ME LAB II</a:t>
+            </a:r>
+          </a:p>
+        </p:txBody>
+      </p:sp>
+      <p:sp>
+        <p:nvSpPr>
+          <p:cNvPr id="2" name="title">
+            <a:extLst xmlns:a="http://schemas.openxmlformats.org/drawingml/2006/main">
+              <a:ext uri="{FF2B5EF4-FFF2-40B4-BE49-F238E27FC236}">
+                <a16:creationId xmlns:a16="http://schemas.microsoft.com/office/drawing/2014/main" id="{9EC1E2C5-CB21-4BDC-B47B-6314A26398CB}"/>
+              </a:ext>
+            </a:extLst>
+          </p:cNvPr>
+          <p:cNvSpPr>
+            <a:spLocks xmlns:a="http://schemas.openxmlformats.org/drawingml/2006/main" noGrp="1"/>
+          </p:cNvSpPr>
+          <p:nvPr/>
+        </p:nvSpPr>
+        <p:spPr>
+          <a:xfrm xmlns:a="http://schemas.openxmlformats.org/drawingml/2006/main">
+            <a:off x="400050" y="685800"/>
+            <a:ext cx="11334750" cy="685800"/>
+          </a:xfrm>
+          <a:prstGeom xmlns:a="http://schemas.openxmlformats.org/drawingml/2006/main" prst="rect">
+            <a:avLst/>
+          </a:prstGeom>
+          <a:noFill xmlns:a="http://schemas.openxmlformats.org/drawingml/2006/main"/>
+          <a:ln xmlns:a="http://schemas.openxmlformats.org/drawingml/2006/main" w="0">
+            <a:noFill/>
+          </a:ln>
+        </p:spPr>
+        <p:txBody>
+          <a:bodyPr xmlns:a="http://schemas.openxmlformats.org/drawingml/2006/main">
+            <a:noAutofit/>
+          </a:bodyPr>
+          <a:lstStyle xmlns:a="http://schemas.openxmlformats.org/drawingml/2006/main"/>
+          <a:p xmlns:a="http://schemas.openxmlformats.org/drawingml/2006/main">
+            <a:pPr>
+              <a:defRPr sz="3000" b="1">
+                <a:solidFill>
+                  <a:srgbClr val="111111"/>
+                </a:solidFill>
+                <a:latin typeface="Calibri"/>
+                <a:ea typeface="Calibri"/>
+                <a:cs typeface="Calibri"/>
+              </a:defRPr>
+            </a:pPr>
+            <a:r>
+              <a:rPr sz="3000" b="1">
+                <a:solidFill>
+                  <a:srgbClr val="111111"/>
+                </a:solidFill>
+                <a:latin typeface="Calibri"/>
+                <a:ea typeface="Calibri"/>
+                <a:cs typeface="Calibri"/>
+              </a:rPr>
+              <a:t>Connection to Lab 1</a:t>
+            </a:r>
+          </a:p>
+        </p:txBody>
+      </p:sp>
+      <p:sp>
+        <p:nvSpPr>
+          <p:cNvPr id="3" name="page">
+            <a:extLst xmlns:a="http://schemas.openxmlformats.org/drawingml/2006/main">
+              <a:ext uri="{FF2B5EF4-FFF2-40B4-BE49-F238E27FC236}">
+                <a16:creationId xmlns:a16="http://schemas.microsoft.com/office/drawing/2014/main" id="{ED4E4905-C62C-4C5E-86DF-3126FFD6CC7C}"/>
+              </a:ext>
+            </a:extLst>
+          </p:cNvPr>
+          <p:cNvSpPr>
+            <a:spLocks xmlns:a="http://schemas.openxmlformats.org/drawingml/2006/main" noGrp="1"/>
+          </p:cNvSpPr>
+          <p:nvPr/>
+        </p:nvSpPr>
+        <p:spPr>
+          <a:xfrm xmlns:a="http://schemas.openxmlformats.org/drawingml/2006/main">
+            <a:off x="11334750" y="6572250"/>
+            <a:ext cx="428625" cy="171450"/>
+          </a:xfrm>
+          <a:prstGeom xmlns:a="http://schemas.openxmlformats.org/drawingml/2006/main" prst="rect">
+            <a:avLst/>
+          </a:prstGeom>
+          <a:noFill xmlns:a="http://schemas.openxmlformats.org/drawingml/2006/main"/>
+          <a:ln xmlns:a="http://schemas.openxmlformats.org/drawingml/2006/main" w="0">
+            <a:noFill/>
+          </a:ln>
+        </p:spPr>
+        <p:txBody>
+          <a:bodyPr xmlns:a="http://schemas.openxmlformats.org/drawingml/2006/main">
+            <a:noAutofit/>
+          </a:bodyPr>
+          <a:lstStyle xmlns:a="http://schemas.openxmlformats.org/drawingml/2006/main"/>
+          <a:p xmlns:a="http://schemas.openxmlformats.org/drawingml/2006/main">
+            <a:pPr>
+              <a:defRPr sz="1050" b="0">
+                <a:solidFill>
+                  <a:srgbClr val="5F6368"/>
+                </a:solidFill>
+                <a:latin typeface="Calibri"/>
+                <a:ea typeface="Calibri"/>
+                <a:cs typeface="Calibri"/>
+              </a:defRPr>
+            </a:pPr>
+            <a:r>
+              <a:rPr sz="1050" b="0">
+                <a:solidFill>
+                  <a:srgbClr val="5F6368"/>
+                </a:solidFill>
+                <a:latin typeface="Calibri"/>
+                <a:ea typeface="Calibri"/>
+                <a:cs typeface="Calibri"/>
+              </a:rPr>
+              <a:t>3</a:t>
+            </a:r>
+          </a:p>
+        </p:txBody>
+      </p:sp>
+      <p:sp>
+        <p:nvSpPr>
+          <p:cNvPr id="4" name="text">
+            <a:extLst xmlns:a="http://schemas.openxmlformats.org/drawingml/2006/main">
+              <a:ext uri="{FF2B5EF4-FFF2-40B4-BE49-F238E27FC236}">
+                <a16:creationId xmlns:a16="http://schemas.microsoft.com/office/drawing/2014/main" id="{1389E6B0-F1B3-4AAC-8AFF-B8E4857A058D}"/>
+              </a:ext>
+            </a:extLst>
+          </p:cNvPr>
+          <p:cNvSpPr>
+            <a:spLocks xmlns:a="http://schemas.openxmlformats.org/drawingml/2006/main" noGrp="1"/>
+          </p:cNvSpPr>
+          <p:nvPr/>
+        </p:nvSpPr>
+        <p:spPr>
+          <a:xfrm xmlns:a="http://schemas.openxmlformats.org/drawingml/2006/main">
+            <a:off x="523875" y="1619250"/>
+            <a:ext cx="5143500" cy="400050"/>
+          </a:xfrm>
+          <a:prstGeom xmlns:a="http://schemas.openxmlformats.org/drawingml/2006/main" prst="rect">
+            <a:avLst/>
+          </a:prstGeom>
+          <a:noFill xmlns:a="http://schemas.openxmlformats.org/drawingml/2006/main"/>
+          <a:ln xmlns:a="http://schemas.openxmlformats.org/drawingml/2006/main" w="0">
+            <a:noFill/>
+          </a:ln>
+        </p:spPr>
+        <p:txBody>
+          <a:bodyPr xmlns:a="http://schemas.openxmlformats.org/drawingml/2006/main">
+            <a:noAutofit/>
+          </a:bodyPr>
+          <a:lstStyle xmlns:a="http://schemas.openxmlformats.org/drawingml/2006/main"/>
+          <a:p xmlns:a="http://schemas.openxmlformats.org/drawingml/2006/main">
+            <a:pPr>
+              <a:defRPr sz="1875" b="1">
+                <a:solidFill>
+                  <a:srgbClr val="881C1C"/>
+                </a:solidFill>
+                <a:latin typeface="Calibri"/>
+                <a:ea typeface="Calibri"/>
+                <a:cs typeface="Calibri"/>
+              </a:defRPr>
+            </a:pPr>
+            <a:r>
+              <a:rPr sz="1875" b="1">
+                <a:solidFill>
+                  <a:srgbClr val="881C1C"/>
+                </a:solidFill>
+                <a:latin typeface="Calibri"/>
+                <a:ea typeface="Calibri"/>
+                <a:cs typeface="Calibri"/>
+              </a:rPr>
+              <a:t>PRE-LAB</a:t>
+            </a:r>
+          </a:p>
+        </p:txBody>
+      </p:sp>
+      <p:sp>
+        <p:nvSpPr>
+          <p:cNvPr id="5" name="text">
+            <a:extLst xmlns:a="http://schemas.openxmlformats.org/drawingml/2006/main">
+              <a:ext uri="{FF2B5EF4-FFF2-40B4-BE49-F238E27FC236}">
+                <a16:creationId xmlns:a16="http://schemas.microsoft.com/office/drawing/2014/main" id="{9971397A-ABEB-43DA-9F74-38E8FA5D4209}"/>
+              </a:ext>
+            </a:extLst>
+          </p:cNvPr>
+          <p:cNvSpPr>
+            <a:spLocks xmlns:a="http://schemas.openxmlformats.org/drawingml/2006/main" noGrp="1"/>
+          </p:cNvSpPr>
+          <p:nvPr/>
+        </p:nvSpPr>
+        <p:spPr>
+          <a:xfrm xmlns:a="http://schemas.openxmlformats.org/drawingml/2006/main">
+            <a:off x="6238875" y="1619250"/>
+            <a:ext cx="5143500" cy="400050"/>
+          </a:xfrm>
+          <a:prstGeom xmlns:a="http://schemas.openxmlformats.org/drawingml/2006/main" prst="rect">
+            <a:avLst/>
+          </a:prstGeom>
+          <a:noFill xmlns:a="http://schemas.openxmlformats.org/drawingml/2006/main"/>
+          <a:ln xmlns:a="http://schemas.openxmlformats.org/drawingml/2006/main" w="0">
+            <a:noFill/>
+          </a:ln>
+        </p:spPr>
+        <p:txBody>
+          <a:bodyPr xmlns:a="http://schemas.openxmlformats.org/drawingml/2006/main">
+            <a:noAutofit/>
+          </a:bodyPr>
+          <a:lstStyle xmlns:a="http://schemas.openxmlformats.org/drawingml/2006/main"/>
+          <a:p xmlns:a="http://schemas.openxmlformats.org/drawingml/2006/main">
+            <a:pPr>
+              <a:defRPr sz="1875" b="1">
+                <a:solidFill>
+                  <a:srgbClr val="881C1C"/>
+                </a:solidFill>
+                <a:latin typeface="Calibri"/>
+                <a:ea typeface="Calibri"/>
+                <a:cs typeface="Calibri"/>
+              </a:defRPr>
+            </a:pPr>
+            <a:r>
+              <a:rPr sz="1875" b="1">
+                <a:solidFill>
+                  <a:srgbClr val="881C1C"/>
+                </a:solidFill>
+                <a:latin typeface="Calibri"/>
+                <a:ea typeface="Calibri"/>
+                <a:cs typeface="Calibri"/>
+              </a:rPr>
+              <a:t>LABORATORY</a:t>
+            </a:r>
+          </a:p>
+        </p:txBody>
+      </p:sp>
+      <p:sp>
+        <p:nvSpPr>
+          <p:cNvPr id="6" name="text">
+            <a:extLst xmlns:a="http://schemas.openxmlformats.org/drawingml/2006/main">
+              <a:ext uri="{FF2B5EF4-FFF2-40B4-BE49-F238E27FC236}">
+                <a16:creationId xmlns:a16="http://schemas.microsoft.com/office/drawing/2014/main" id="{11C7736A-C75C-4C8C-A155-2910BB5FBF9A}"/>
+              </a:ext>
+            </a:extLst>
+          </p:cNvPr>
+          <p:cNvSpPr>
+            <a:spLocks xmlns:a="http://schemas.openxmlformats.org/drawingml/2006/main" noGrp="1"/>
+          </p:cNvSpPr>
+          <p:nvPr/>
+        </p:nvSpPr>
+        <p:spPr>
+          <a:xfrm xmlns:a="http://schemas.openxmlformats.org/drawingml/2006/main">
+            <a:off x="1047750" y="2095500"/>
+            <a:ext cx="5143500" cy="609600"/>
+          </a:xfrm>
+          <a:prstGeom xmlns:a="http://schemas.openxmlformats.org/drawingml/2006/main" prst="rect">
+            <a:avLst/>
+          </a:prstGeom>
+          <a:noFill xmlns:a="http://schemas.openxmlformats.org/drawingml/2006/main"/>
+          <a:ln xmlns:a="http://schemas.openxmlformats.org/drawingml/2006/main" w="0">
+            <a:noFill/>
+          </a:ln>
+        </p:spPr>
+        <p:txBody>
+          <a:bodyPr xmlns:a="http://schemas.openxmlformats.org/drawingml/2006/main">
+            <a:noAutofit/>
+          </a:bodyPr>
+          <a:lstStyle xmlns:a="http://schemas.openxmlformats.org/drawingml/2006/main"/>
+          <a:p xmlns:a="http://schemas.openxmlformats.org/drawingml/2006/main">
+            <a:pPr>
+              <a:defRPr sz="1950" b="0">
+                <a:solidFill>
+                  <a:srgbClr val="161616"/>
+                </a:solidFill>
+                <a:latin typeface="Calibri"/>
+                <a:ea typeface="Calibri"/>
+                <a:cs typeface="Calibri"/>
+              </a:defRPr>
+            </a:pPr>
+            <a:r>
+              <a:rPr sz="1950" b="0">
+                <a:solidFill>
+                  <a:srgbClr val="161616"/>
+                </a:solidFill>
+                <a:latin typeface="Calibri"/>
+                <a:ea typeface="Calibri"/>
+                <a:cs typeface="Calibri"/>
+              </a:rPr>
+              <a:t>A known voltage signal contains two pure tones.</a:t>
+            </a:r>
+          </a:p>
+        </p:txBody>
+      </p:sp>
+      <p:sp>
+        <p:nvSpPr>
+          <p:cNvPr id="7" name="text">
+            <a:extLst xmlns:a="http://schemas.openxmlformats.org/drawingml/2006/main">
+              <a:ext uri="{FF2B5EF4-FFF2-40B4-BE49-F238E27FC236}">
+                <a16:creationId xmlns:a16="http://schemas.microsoft.com/office/drawing/2014/main" id="{762F1E93-DD28-4CCC-8CCB-C0C45E8EFCB4}"/>
+              </a:ext>
+            </a:extLst>
+          </p:cNvPr>
+          <p:cNvSpPr>
+            <a:spLocks xmlns:a="http://schemas.openxmlformats.org/drawingml/2006/main" noGrp="1"/>
+          </p:cNvSpPr>
+          <p:nvPr/>
+        </p:nvSpPr>
+        <p:spPr>
+          <a:xfrm xmlns:a="http://schemas.openxmlformats.org/drawingml/2006/main">
+            <a:off x="1047750" y="2914650"/>
+            <a:ext cx="5143500" cy="609600"/>
+          </a:xfrm>
+          <a:prstGeom xmlns:a="http://schemas.openxmlformats.org/drawingml/2006/main" prst="rect">
+            <a:avLst/>
+          </a:prstGeom>
+          <a:noFill xmlns:a="http://schemas.openxmlformats.org/drawingml/2006/main"/>
+          <a:ln xmlns:a="http://schemas.openxmlformats.org/drawingml/2006/main" w="0">
+            <a:noFill/>
+          </a:ln>
+        </p:spPr>
+        <p:txBody>
+          <a:bodyPr xmlns:a="http://schemas.openxmlformats.org/drawingml/2006/main">
+            <a:noAutofit/>
+          </a:bodyPr>
+          <a:lstStyle xmlns:a="http://schemas.openxmlformats.org/drawingml/2006/main"/>
+          <a:p xmlns:a="http://schemas.openxmlformats.org/drawingml/2006/main">
+            <a:pPr>
+              <a:defRPr sz="1950" b="0">
+                <a:solidFill>
+                  <a:srgbClr val="161616"/>
+                </a:solidFill>
+                <a:latin typeface="Calibri"/>
+                <a:ea typeface="Calibri"/>
+                <a:cs typeface="Calibri"/>
+              </a:defRPr>
+            </a:pPr>
+            <a:r>
+              <a:rPr sz="1950" b="0">
+                <a:solidFill>
+                  <a:srgbClr val="161616"/>
+                </a:solidFill>
+                <a:latin typeface="Calibri"/>
+                <a:ea typeface="Calibri"/>
+                <a:cs typeface="Calibri"/>
+              </a:rPr>
+              <a:t>Amplitude describes signal size; frequency describes how fast it repeats; phase sets its starting position.</a:t>
+            </a:r>
+          </a:p>
+        </p:txBody>
+      </p:sp>
+      <p:sp>
+        <p:nvSpPr>
+          <p:cNvPr id="8" name="text">
+            <a:extLst xmlns:a="http://schemas.openxmlformats.org/drawingml/2006/main">
+              <a:ext uri="{FF2B5EF4-FFF2-40B4-BE49-F238E27FC236}">
+                <a16:creationId xmlns:a16="http://schemas.microsoft.com/office/drawing/2014/main" id="{B93DA0D8-6539-4A6E-B410-A155B615ABB5}"/>
+              </a:ext>
+            </a:extLst>
+          </p:cNvPr>
+          <p:cNvSpPr>
+            <a:spLocks xmlns:a="http://schemas.openxmlformats.org/drawingml/2006/main" noGrp="1"/>
+          </p:cNvSpPr>
+          <p:nvPr/>
+        </p:nvSpPr>
+        <p:spPr>
+          <a:xfrm xmlns:a="http://schemas.openxmlformats.org/drawingml/2006/main">
+            <a:off x="6238875" y="2095500"/>
+            <a:ext cx="5143500" cy="609600"/>
+          </a:xfrm>
+          <a:prstGeom xmlns:a="http://schemas.openxmlformats.org/drawingml/2006/main" prst="rect">
+            <a:avLst/>
+          </a:prstGeom>
+          <a:noFill xmlns:a="http://schemas.openxmlformats.org/drawingml/2006/main"/>
+          <a:ln xmlns:a="http://schemas.openxmlformats.org/drawingml/2006/main" w="0">
+            <a:noFill/>
+          </a:ln>
+        </p:spPr>
+        <p:txBody>
+          <a:bodyPr xmlns:a="http://schemas.openxmlformats.org/drawingml/2006/main">
+            <a:noAutofit/>
+          </a:bodyPr>
+          <a:lstStyle xmlns:a="http://schemas.openxmlformats.org/drawingml/2006/main"/>
+          <a:p xmlns:a="http://schemas.openxmlformats.org/drawingml/2006/main">
+            <a:pPr>
+              <a:defRPr sz="1950" b="0">
+                <a:solidFill>
+                  <a:srgbClr val="161616"/>
+                </a:solidFill>
+                <a:latin typeface="Calibri"/>
+                <a:ea typeface="Calibri"/>
+                <a:cs typeface="Calibri"/>
+              </a:defRPr>
+            </a:pPr>
+            <a:r>
+              <a:rPr sz="1950" b="0">
+                <a:solidFill>
+                  <a:srgbClr val="161616"/>
+                </a:solidFill>
+                <a:latin typeface="Calibri"/>
+                <a:ea typeface="Calibri"/>
+                <a:cs typeface="Calibri"/>
+              </a:rPr>
+              <a:t>A microphone converts changing sound pressure into changing voltage.</a:t>
+            </a:r>
+          </a:p>
+        </p:txBody>
+      </p:sp>
+      <p:sp>
+        <p:nvSpPr>
+          <p:cNvPr id="9" name="text">
+            <a:extLst xmlns:a="http://schemas.openxmlformats.org/drawingml/2006/main">
+              <a:ext uri="{FF2B5EF4-FFF2-40B4-BE49-F238E27FC236}">
+                <a16:creationId xmlns:a16="http://schemas.microsoft.com/office/drawing/2014/main" id="{45EC995E-C22D-4227-996C-3A4D19B6E051}"/>
+              </a:ext>
+            </a:extLst>
+          </p:cNvPr>
+          <p:cNvSpPr>
+            <a:spLocks xmlns:a="http://schemas.openxmlformats.org/drawingml/2006/main" noGrp="1"/>
+          </p:cNvSpPr>
+          <p:nvPr/>
+        </p:nvSpPr>
+        <p:spPr>
+          <a:xfrm xmlns:a="http://schemas.openxmlformats.org/drawingml/2006/main">
+            <a:off x="6238875" y="2914650"/>
+            <a:ext cx="5143500" cy="609600"/>
+          </a:xfrm>
+          <a:prstGeom xmlns:a="http://schemas.openxmlformats.org/drawingml/2006/main" prst="rect">
+            <a:avLst/>
+          </a:prstGeom>
+          <a:noFill xmlns:a="http://schemas.openxmlformats.org/drawingml/2006/main"/>
+          <a:ln xmlns:a="http://schemas.openxmlformats.org/drawingml/2006/main" w="0">
+            <a:noFill/>
+          </a:ln>
+        </p:spPr>
+        <p:txBody>
+          <a:bodyPr xmlns:a="http://schemas.openxmlformats.org/drawingml/2006/main">
+            <a:noAutofit/>
+          </a:bodyPr>
+          <a:lstStyle xmlns:a="http://schemas.openxmlformats.org/drawingml/2006/main"/>
+          <a:p xmlns:a="http://schemas.openxmlformats.org/drawingml/2006/main">
+            <a:pPr>
+              <a:defRPr sz="1950" b="0">
+                <a:solidFill>
+                  <a:srgbClr val="161616"/>
+                </a:solidFill>
+                <a:latin typeface="Calibri"/>
+                <a:ea typeface="Calibri"/>
+                <a:cs typeface="Calibri"/>
+              </a:defRPr>
+            </a:pPr>
+            <a:r>
+              <a:rPr sz="1950" b="0">
+                <a:solidFill>
+                  <a:srgbClr val="161616"/>
+                </a:solidFill>
+                <a:latin typeface="Calibri"/>
+                <a:ea typeface="Calibri"/>
+                <a:cs typeface="Calibri"/>
+              </a:rPr>
+              <a:t>Moku:Go stores voltage samples. The waveform shows change in time; the spectrum shows the frequencies present.</a:t>
+            </a:r>
+          </a:p>
+        </p:txBody>
+      </p:sp>
+    </p:spTree>
+    <p:extLst>
+      <p:ext uri="{BB962C8B-B14F-4D97-AF65-F5344CB8AC3E}">
+        <p14:creationId xmlns:p14="http://schemas.microsoft.com/office/powerpoint/2010/main" val="1097447383"/>
+      </p:ext>
+    </p:extLst>
+  </p:cSld>
+</p:sld>
+</file>
+
+<file path=ppt/slides/slide4.xml><?xml version="1.0" encoding="utf-8"?>
+<p:sld xmlns:p="http://schemas.openxmlformats.org/presentationml/2006/main">
+  <p:cSld>
+    <p:bg>
+      <p:bgPr>
+        <a:solidFill xmlns:a="http://schemas.openxmlformats.org/drawingml/2006/main">
+          <a:srgbClr val="FFFFFF"/>
+        </a:solidFill>
+      </p:bgPr>
+    </p:bg>
+    <p:spTree>
+      <p:nvGrpSpPr>
+        <p:cNvPr id="1" name=""/>
+        <p:cNvGrpSpPr/>
+        <p:nvPr/>
+      </p:nvGrpSpPr>
+      <p:grpSpPr>
+        <a:xfrm xmlns:a="http://schemas.openxmlformats.org/drawingml/2006/main"/>
+      </p:grpSpPr>
+      <p:sp>
+        <p:nvSpPr>
+          <p:cNvPr id="10" name="course">
+            <a:extLst xmlns:a="http://schemas.openxmlformats.org/drawingml/2006/main">
+              <a:ext uri="{FF2B5EF4-FFF2-40B4-BE49-F238E27FC236}">
+                <a16:creationId xmlns:a16="http://schemas.microsoft.com/office/drawing/2014/main" id="{1CBF0BEB-3418-4ECD-9806-67916DBF9E16}"/>
+              </a:ext>
+            </a:extLst>
+          </p:cNvPr>
+          <p:cNvSpPr>
+            <a:spLocks xmlns:a="http://schemas.openxmlformats.org/drawingml/2006/main" noGrp="1"/>
+          </p:cNvSpPr>
+          <p:nvPr/>
+        </p:nvSpPr>
+        <p:spPr>
+          <a:xfrm xmlns:a="http://schemas.openxmlformats.org/drawingml/2006/main">
+            <a:off x="400050" y="228600"/>
+            <a:ext cx="4762500" cy="266700"/>
+          </a:xfrm>
+          <a:prstGeom xmlns:a="http://schemas.openxmlformats.org/drawingml/2006/main" prst="rect">
+            <a:avLst/>
+          </a:prstGeom>
+          <a:noFill xmlns:a="http://schemas.openxmlformats.org/drawingml/2006/main"/>
+          <a:ln xmlns:a="http://schemas.openxmlformats.org/drawingml/2006/main" w="0">
+            <a:noFill/>
+          </a:ln>
+        </p:spPr>
+        <p:txBody>
+          <a:bodyPr xmlns:a="http://schemas.openxmlformats.org/drawingml/2006/main">
+            <a:noAutofit/>
+          </a:bodyPr>
+          <a:lstStyle xmlns:a="http://schemas.openxmlformats.org/drawingml/2006/main"/>
+          <a:p xmlns:a="http://schemas.openxmlformats.org/drawingml/2006/main">
+            <a:pPr>
+              <a:defRPr sz="1275" b="1">
+                <a:solidFill>
+                  <a:srgbClr val="881C1C"/>
+                </a:solidFill>
+                <a:latin typeface="Calibri"/>
+                <a:ea typeface="Calibri"/>
+                <a:cs typeface="Calibri"/>
+              </a:defRPr>
+            </a:pPr>
+            <a:r>
+              <a:rPr sz="1275" b="1">
+                <a:solidFill>
+                  <a:srgbClr val="881C1C"/>
+                </a:solidFill>
+                <a:latin typeface="Calibri"/>
+                <a:ea typeface="Calibri"/>
+                <a:cs typeface="Calibri"/>
+              </a:rPr>
+              <a:t>MIE 402  |  ME LAB II</a:t>
+            </a:r>
+          </a:p>
+        </p:txBody>
+      </p:sp>
+      <p:sp>
+        <p:nvSpPr>
+          <p:cNvPr id="2" name="title">
+            <a:extLst xmlns:a="http://schemas.openxmlformats.org/drawingml/2006/main">
+              <a:ext uri="{FF2B5EF4-FFF2-40B4-BE49-F238E27FC236}">
+                <a16:creationId xmlns:a16="http://schemas.microsoft.com/office/drawing/2014/main" id="{714267B4-A69E-4773-AE60-00C42B37ACD3}"/>
+              </a:ext>
+            </a:extLst>
+          </p:cNvPr>
+          <p:cNvSpPr>
+            <a:spLocks xmlns:a="http://schemas.openxmlformats.org/drawingml/2006/main" noGrp="1"/>
+          </p:cNvSpPr>
+          <p:nvPr/>
+        </p:nvSpPr>
+        <p:spPr>
+          <a:xfrm xmlns:a="http://schemas.openxmlformats.org/drawingml/2006/main">
+            <a:off x="400050" y="685800"/>
+            <a:ext cx="11334750" cy="685800"/>
+          </a:xfrm>
+          <a:prstGeom xmlns:a="http://schemas.openxmlformats.org/drawingml/2006/main" prst="rect">
+            <a:avLst/>
+          </a:prstGeom>
+          <a:noFill xmlns:a="http://schemas.openxmlformats.org/drawingml/2006/main"/>
+          <a:ln xmlns:a="http://schemas.openxmlformats.org/drawingml/2006/main" w="0">
+            <a:noFill/>
+          </a:ln>
+        </p:spPr>
+        <p:txBody>
+          <a:bodyPr xmlns:a="http://schemas.openxmlformats.org/drawingml/2006/main">
+            <a:noAutofit/>
+          </a:bodyPr>
+          <a:lstStyle xmlns:a="http://schemas.openxmlformats.org/drawingml/2006/main"/>
+          <a:p xmlns:a="http://schemas.openxmlformats.org/drawingml/2006/main">
+            <a:pPr>
+              <a:defRPr sz="3000" b="1">
+                <a:solidFill>
+                  <a:srgbClr val="111111"/>
+                </a:solidFill>
+                <a:latin typeface="Calibri"/>
+                <a:ea typeface="Calibri"/>
+                <a:cs typeface="Calibri"/>
+              </a:defRPr>
+            </a:pPr>
+            <a:r>
+              <a:rPr sz="3000" b="1">
+                <a:solidFill>
+                  <a:srgbClr val="111111"/>
+                </a:solidFill>
+                <a:latin typeface="Calibri"/>
+                <a:ea typeface="Calibri"/>
+                <a:cs typeface="Calibri"/>
+              </a:rPr>
+              <a:t>Jupyter notebook structure</a:t>
+            </a:r>
+          </a:p>
+        </p:txBody>
+      </p:sp>
+      <p:sp>
+        <p:nvSpPr>
+          <p:cNvPr id="3" name="page">
+            <a:extLst xmlns:a="http://schemas.openxmlformats.org/drawingml/2006/main">
+              <a:ext uri="{FF2B5EF4-FFF2-40B4-BE49-F238E27FC236}">
+                <a16:creationId xmlns:a16="http://schemas.microsoft.com/office/drawing/2014/main" id="{8C4FDCAE-6DA7-4918-9032-2C52A39C222C}"/>
+              </a:ext>
+            </a:extLst>
+          </p:cNvPr>
+          <p:cNvSpPr>
+            <a:spLocks xmlns:a="http://schemas.openxmlformats.org/drawingml/2006/main" noGrp="1"/>
+          </p:cNvSpPr>
+          <p:nvPr/>
+        </p:nvSpPr>
+        <p:spPr>
+          <a:xfrm xmlns:a="http://schemas.openxmlformats.org/drawingml/2006/main">
+            <a:off x="11334750" y="6572250"/>
+            <a:ext cx="428625" cy="171450"/>
+          </a:xfrm>
+          <a:prstGeom xmlns:a="http://schemas.openxmlformats.org/drawingml/2006/main" prst="rect">
+            <a:avLst/>
+          </a:prstGeom>
+          <a:noFill xmlns:a="http://schemas.openxmlformats.org/drawingml/2006/main"/>
+          <a:ln xmlns:a="http://schemas.openxmlformats.org/drawingml/2006/main" w="0">
+            <a:noFill/>
+          </a:ln>
+        </p:spPr>
+        <p:txBody>
+          <a:bodyPr xmlns:a="http://schemas.openxmlformats.org/drawingml/2006/main">
+            <a:noAutofit/>
+          </a:bodyPr>
+          <a:lstStyle xmlns:a="http://schemas.openxmlformats.org/drawingml/2006/main"/>
+          <a:p xmlns:a="http://schemas.openxmlformats.org/drawingml/2006/main">
+            <a:pPr>
+              <a:defRPr sz="1050" b="0">
+                <a:solidFill>
+                  <a:srgbClr val="5F6368"/>
+                </a:solidFill>
+                <a:latin typeface="Calibri"/>
+                <a:ea typeface="Calibri"/>
+                <a:cs typeface="Calibri"/>
+              </a:defRPr>
+            </a:pPr>
+            <a:r>
+              <a:rPr sz="1050" b="0">
+                <a:solidFill>
+                  <a:srgbClr val="5F6368"/>
+                </a:solidFill>
+                <a:latin typeface="Calibri"/>
+                <a:ea typeface="Calibri"/>
+                <a:cs typeface="Calibri"/>
+              </a:rPr>
+              <a:t>4</a:t>
+            </a:r>
+          </a:p>
+        </p:txBody>
+      </p:sp>
+      <p:sp>
+        <p:nvSpPr>
+          <p:cNvPr id="4" name="text">
+            <a:extLst xmlns:a="http://schemas.openxmlformats.org/drawingml/2006/main">
+              <a:ext uri="{FF2B5EF4-FFF2-40B4-BE49-F238E27FC236}">
+                <a16:creationId xmlns:a16="http://schemas.microsoft.com/office/drawing/2014/main" id="{97061D44-5DF4-4FCC-A950-BC03BE30CF13}"/>
+              </a:ext>
+            </a:extLst>
+          </p:cNvPr>
+          <p:cNvSpPr>
+            <a:spLocks xmlns:a="http://schemas.openxmlformats.org/drawingml/2006/main" noGrp="1"/>
+          </p:cNvSpPr>
+          <p:nvPr/>
+        </p:nvSpPr>
+        <p:spPr>
+          <a:xfrm xmlns:a="http://schemas.openxmlformats.org/drawingml/2006/main">
+            <a:off x="523875" y="1619250"/>
+            <a:ext cx="5143500" cy="400050"/>
+          </a:xfrm>
+          <a:prstGeom xmlns:a="http://schemas.openxmlformats.org/drawingml/2006/main" prst="rect">
+            <a:avLst/>
+          </a:prstGeom>
+          <a:noFill xmlns:a="http://schemas.openxmlformats.org/drawingml/2006/main"/>
+          <a:ln xmlns:a="http://schemas.openxmlformats.org/drawingml/2006/main" w="0">
+            <a:noFill/>
+          </a:ln>
+        </p:spPr>
+        <p:txBody>
+          <a:bodyPr xmlns:a="http://schemas.openxmlformats.org/drawingml/2006/main">
+            <a:noAutofit/>
+          </a:bodyPr>
+          <a:lstStyle xmlns:a="http://schemas.openxmlformats.org/drawingml/2006/main"/>
+          <a:p xmlns:a="http://schemas.openxmlformats.org/drawingml/2006/main">
+            <a:pPr>
+              <a:defRPr sz="1875" b="1">
+                <a:solidFill>
+                  <a:srgbClr val="881C1C"/>
+                </a:solidFill>
+                <a:latin typeface="Calibri"/>
+                <a:ea typeface="Calibri"/>
+                <a:cs typeface="Calibri"/>
+              </a:defRPr>
+            </a:pPr>
+            <a:r>
+              <a:rPr sz="1875" b="1">
+                <a:solidFill>
+                  <a:srgbClr val="881C1C"/>
+                </a:solidFill>
+                <a:latin typeface="Calibri"/>
+                <a:ea typeface="Calibri"/>
+                <a:cs typeface="Calibri"/>
+              </a:rPr>
+              <a:t>MARKDOWN CELLS</a:t>
+            </a:r>
+          </a:p>
+        </p:txBody>
+      </p:sp>
+      <p:sp>
+        <p:nvSpPr>
+          <p:cNvPr id="5" name="text">
+            <a:extLst xmlns:a="http://schemas.openxmlformats.org/drawingml/2006/main">
+              <a:ext uri="{FF2B5EF4-FFF2-40B4-BE49-F238E27FC236}">
+                <a16:creationId xmlns:a16="http://schemas.microsoft.com/office/drawing/2014/main" id="{D8306253-68DD-4D83-8B96-CC86A43C0F41}"/>
+              </a:ext>
+            </a:extLst>
+          </p:cNvPr>
+          <p:cNvSpPr>
+            <a:spLocks xmlns:a="http://schemas.openxmlformats.org/drawingml/2006/main" noGrp="1"/>
+          </p:cNvSpPr>
+          <p:nvPr/>
+        </p:nvSpPr>
+        <p:spPr>
+          <a:xfrm xmlns:a="http://schemas.openxmlformats.org/drawingml/2006/main">
+            <a:off x="6238875" y="1619250"/>
+            <a:ext cx="5143500" cy="400050"/>
+          </a:xfrm>
+          <a:prstGeom xmlns:a="http://schemas.openxmlformats.org/drawingml/2006/main" prst="rect">
+            <a:avLst/>
+          </a:prstGeom>
+          <a:noFill xmlns:a="http://schemas.openxmlformats.org/drawingml/2006/main"/>
+          <a:ln xmlns:a="http://schemas.openxmlformats.org/drawingml/2006/main" w="0">
+            <a:noFill/>
+          </a:ln>
+        </p:spPr>
+        <p:txBody>
+          <a:bodyPr xmlns:a="http://schemas.openxmlformats.org/drawingml/2006/main">
+            <a:noAutofit/>
+          </a:bodyPr>
+          <a:lstStyle xmlns:a="http://schemas.openxmlformats.org/drawingml/2006/main"/>
+          <a:p xmlns:a="http://schemas.openxmlformats.org/drawingml/2006/main">
+            <a:pPr>
+              <a:defRPr sz="1875" b="1">
+                <a:solidFill>
+                  <a:srgbClr val="881C1C"/>
+                </a:solidFill>
+                <a:latin typeface="Calibri"/>
+                <a:ea typeface="Calibri"/>
+                <a:cs typeface="Calibri"/>
+              </a:defRPr>
+            </a:pPr>
+            <a:r>
+              <a:rPr sz="1875" b="1">
+                <a:solidFill>
+                  <a:srgbClr val="881C1C"/>
+                </a:solidFill>
+                <a:latin typeface="Calibri"/>
+                <a:ea typeface="Calibri"/>
+                <a:cs typeface="Calibri"/>
+              </a:rPr>
+              <a:t>CODE CELLS</a:t>
+            </a:r>
+          </a:p>
+        </p:txBody>
+      </p:sp>
+      <p:sp>
+        <p:nvSpPr>
+          <p:cNvPr id="6" name="text">
+            <a:extLst xmlns:a="http://schemas.openxmlformats.org/drawingml/2006/main">
+              <a:ext uri="{FF2B5EF4-FFF2-40B4-BE49-F238E27FC236}">
+                <a16:creationId xmlns:a16="http://schemas.microsoft.com/office/drawing/2014/main" id="{E1663560-7436-4652-BDC9-C7873D33A8BC}"/>
+              </a:ext>
+            </a:extLst>
+          </p:cNvPr>
+          <p:cNvSpPr>
+            <a:spLocks xmlns:a="http://schemas.openxmlformats.org/drawingml/2006/main" noGrp="1"/>
+          </p:cNvSpPr>
+          <p:nvPr/>
+        </p:nvSpPr>
+        <p:spPr>
+          <a:xfrm xmlns:a="http://schemas.openxmlformats.org/drawingml/2006/main">
+            <a:off x="1047750" y="2095500"/>
+            <a:ext cx="5143500" cy="609600"/>
+          </a:xfrm>
+          <a:prstGeom xmlns:a="http://schemas.openxmlformats.org/drawingml/2006/main" prst="rect">
+            <a:avLst/>
+          </a:prstGeom>
+          <a:noFill xmlns:a="http://schemas.openxmlformats.org/drawingml/2006/main"/>
+          <a:ln xmlns:a="http://schemas.openxmlformats.org/drawingml/2006/main" w="0">
+            <a:noFill/>
+          </a:ln>
+        </p:spPr>
+        <p:txBody>
+          <a:bodyPr xmlns:a="http://schemas.openxmlformats.org/drawingml/2006/main">
+            <a:noAutofit/>
+          </a:bodyPr>
+          <a:lstStyle xmlns:a="http://schemas.openxmlformats.org/drawingml/2006/main"/>
+          <a:p xmlns:a="http://schemas.openxmlformats.org/drawingml/2006/main">
+            <a:pPr>
+              <a:defRPr sz="1950" b="0">
+                <a:solidFill>
+                  <a:srgbClr val="161616"/>
+                </a:solidFill>
+                <a:latin typeface="Calibri"/>
+                <a:ea typeface="Calibri"/>
+                <a:cs typeface="Calibri"/>
+              </a:defRPr>
+            </a:pPr>
+            <a:r>
+              <a:rPr sz="1950" b="0">
+                <a:solidFill>
+                  <a:srgbClr val="161616"/>
+                </a:solidFill>
+                <a:latin typeface="Calibri"/>
+                <a:ea typeface="Calibri"/>
+                <a:cs typeface="Calibri"/>
+              </a:rPr>
+              <a:t>Instructions, equations, and response areas.</a:t>
+            </a:r>
+          </a:p>
+        </p:txBody>
+      </p:sp>
+      <p:sp>
+        <p:nvSpPr>
+          <p:cNvPr id="7" name="text">
+            <a:extLst xmlns:a="http://schemas.openxmlformats.org/drawingml/2006/main">
+              <a:ext uri="{FF2B5EF4-FFF2-40B4-BE49-F238E27FC236}">
+                <a16:creationId xmlns:a16="http://schemas.microsoft.com/office/drawing/2014/main" id="{F691652F-69EE-4568-A0DA-9C74318E590C}"/>
+              </a:ext>
+            </a:extLst>
+          </p:cNvPr>
+          <p:cNvSpPr>
+            <a:spLocks xmlns:a="http://schemas.openxmlformats.org/drawingml/2006/main" noGrp="1"/>
+          </p:cNvSpPr>
+          <p:nvPr/>
+        </p:nvSpPr>
+        <p:spPr>
+          <a:xfrm xmlns:a="http://schemas.openxmlformats.org/drawingml/2006/main">
+            <a:off x="1047750" y="2914650"/>
+            <a:ext cx="5143500" cy="609600"/>
+          </a:xfrm>
+          <a:prstGeom xmlns:a="http://schemas.openxmlformats.org/drawingml/2006/main" prst="rect">
+            <a:avLst/>
+          </a:prstGeom>
+          <a:noFill xmlns:a="http://schemas.openxmlformats.org/drawingml/2006/main"/>
+          <a:ln xmlns:a="http://schemas.openxmlformats.org/drawingml/2006/main" w="0">
+            <a:noFill/>
+          </a:ln>
+        </p:spPr>
+        <p:txBody>
+          <a:bodyPr xmlns:a="http://schemas.openxmlformats.org/drawingml/2006/main">
+            <a:noAutofit/>
+          </a:bodyPr>
+          <a:lstStyle xmlns:a="http://schemas.openxmlformats.org/drawingml/2006/main"/>
+          <a:p xmlns:a="http://schemas.openxmlformats.org/drawingml/2006/main">
+            <a:pPr>
+              <a:defRPr sz="1950" b="0">
+                <a:solidFill>
+                  <a:srgbClr val="161616"/>
+                </a:solidFill>
+                <a:latin typeface="Calibri"/>
+                <a:ea typeface="Calibri"/>
+                <a:cs typeface="Calibri"/>
+              </a:defRPr>
+            </a:pPr>
+            <a:r>
+              <a:rPr sz="1950" b="0">
+                <a:solidFill>
+                  <a:srgbClr val="161616"/>
+                </a:solidFill>
+                <a:latin typeface="Calibri"/>
+                <a:ea typeface="Calibri"/>
+                <a:cs typeface="Calibri"/>
+              </a:rPr>
+              <a:t>Double-click to edit. Use Shift+Enter to render and move forward.</a:t>
+            </a:r>
+          </a:p>
+        </p:txBody>
+      </p:sp>
+      <p:sp>
+        <p:nvSpPr>
+          <p:cNvPr id="8" name="text">
+            <a:extLst xmlns:a="http://schemas.openxmlformats.org/drawingml/2006/main">
+              <a:ext uri="{FF2B5EF4-FFF2-40B4-BE49-F238E27FC236}">
+                <a16:creationId xmlns:a16="http://schemas.microsoft.com/office/drawing/2014/main" id="{99FF93AC-6CA4-4397-9E6C-C76EB40DDFDB}"/>
+              </a:ext>
+            </a:extLst>
+          </p:cNvPr>
+          <p:cNvSpPr>
+            <a:spLocks xmlns:a="http://schemas.openxmlformats.org/drawingml/2006/main" noGrp="1"/>
+          </p:cNvSpPr>
+          <p:nvPr/>
+        </p:nvSpPr>
+        <p:spPr>
+          <a:xfrm xmlns:a="http://schemas.openxmlformats.org/drawingml/2006/main">
+            <a:off x="6238875" y="2095500"/>
+            <a:ext cx="5143500" cy="609600"/>
+          </a:xfrm>
+          <a:prstGeom xmlns:a="http://schemas.openxmlformats.org/drawingml/2006/main" prst="rect">
+            <a:avLst/>
+          </a:prstGeom>
+          <a:noFill xmlns:a="http://schemas.openxmlformats.org/drawingml/2006/main"/>
+          <a:ln xmlns:a="http://schemas.openxmlformats.org/drawingml/2006/main" w="0">
+            <a:noFill/>
+          </a:ln>
+        </p:spPr>
+        <p:txBody>
+          <a:bodyPr xmlns:a="http://schemas.openxmlformats.org/drawingml/2006/main">
+            <a:noAutofit/>
+          </a:bodyPr>
+          <a:lstStyle xmlns:a="http://schemas.openxmlformats.org/drawingml/2006/main"/>
+          <a:p xmlns:a="http://schemas.openxmlformats.org/drawingml/2006/main">
+            <a:pPr>
+              <a:defRPr sz="1950" b="0">
+                <a:solidFill>
+                  <a:srgbClr val="161616"/>
+                </a:solidFill>
+                <a:latin typeface="Calibri"/>
+                <a:ea typeface="Calibri"/>
+                <a:cs typeface="Calibri"/>
+              </a:defRPr>
+            </a:pPr>
+            <a:r>
+              <a:rPr sz="1950" b="0">
+                <a:solidFill>
+                  <a:srgbClr val="161616"/>
+                </a:solidFill>
+                <a:latin typeface="Calibri"/>
+                <a:ea typeface="Calibri"/>
+                <a:cs typeface="Calibri"/>
+              </a:rPr>
+              <a:t>Python commands that define variables, calculate results, and make figures.</a:t>
+            </a:r>
+          </a:p>
+        </p:txBody>
+      </p:sp>
+      <p:sp>
+        <p:nvSpPr>
+          <p:cNvPr id="9" name="text">
+            <a:extLst xmlns:a="http://schemas.openxmlformats.org/drawingml/2006/main">
+              <a:ext uri="{FF2B5EF4-FFF2-40B4-BE49-F238E27FC236}">
+                <a16:creationId xmlns:a16="http://schemas.microsoft.com/office/drawing/2014/main" id="{A4804A18-0305-4F80-8BA4-3804E8559743}"/>
+              </a:ext>
+            </a:extLst>
+          </p:cNvPr>
+          <p:cNvSpPr>
+            <a:spLocks xmlns:a="http://schemas.openxmlformats.org/drawingml/2006/main" noGrp="1"/>
+          </p:cNvSpPr>
+          <p:nvPr/>
+        </p:nvSpPr>
+        <p:spPr>
+          <a:xfrm xmlns:a="http://schemas.openxmlformats.org/drawingml/2006/main">
+            <a:off x="6238875" y="2914650"/>
+            <a:ext cx="5143500" cy="609600"/>
+          </a:xfrm>
+          <a:prstGeom xmlns:a="http://schemas.openxmlformats.org/drawingml/2006/main" prst="rect">
+            <a:avLst/>
+          </a:prstGeom>
+          <a:noFill xmlns:a="http://schemas.openxmlformats.org/drawingml/2006/main"/>
+          <a:ln xmlns:a="http://schemas.openxmlformats.org/drawingml/2006/main" w="0">
+            <a:noFill/>
+          </a:ln>
+        </p:spPr>
+        <p:txBody>
+          <a:bodyPr xmlns:a="http://schemas.openxmlformats.org/drawingml/2006/main">
+            <a:noAutofit/>
+          </a:bodyPr>
+          <a:lstStyle xmlns:a="http://schemas.openxmlformats.org/drawingml/2006/main"/>
+          <a:p xmlns:a="http://schemas.openxmlformats.org/drawingml/2006/main">
+            <a:pPr>
+              <a:defRPr sz="1950" b="0">
+                <a:solidFill>
+                  <a:srgbClr val="161616"/>
+                </a:solidFill>
+                <a:latin typeface="Calibri"/>
+                <a:ea typeface="Calibri"/>
+                <a:cs typeface="Calibri"/>
+              </a:defRPr>
+            </a:pPr>
+            <a:r>
+              <a:rPr sz="1950" b="0">
+                <a:solidFill>
+                  <a:srgbClr val="161616"/>
+                </a:solidFill>
+                <a:latin typeface="Calibri"/>
+                <a:ea typeface="Calibri"/>
+                <a:cs typeface="Calibri"/>
+              </a:rPr>
+              <a:t>Run from top to bottom with Shift+Enter.</a:t>
+            </a:r>
+          </a:p>
+        </p:txBody>
+      </p:sp>
+    </p:spTree>
+    <p:extLst>
+      <p:ext uri="{BB962C8B-B14F-4D97-AF65-F5344CB8AC3E}">
+        <p14:creationId xmlns:p14="http://schemas.microsoft.com/office/powerpoint/2010/main" val="77048981"/>
+      </p:ext>
+    </p:extLst>
+  </p:cSld>
+</p:sld>
+</file>
+
+<file path=ppt/slides/slide5.xml><?xml version="1.0" encoding="utf-8"?>
+<p:sld xmlns:p="http://schemas.openxmlformats.org/presentationml/2006/main">
+  <p:cSld>
+    <p:bg>
+      <p:bgPr>
+        <a:solidFill xmlns:a="http://schemas.openxmlformats.org/drawingml/2006/main">
+          <a:srgbClr val="FFFFFF"/>
+        </a:solidFill>
+      </p:bgPr>
+    </p:bg>
+    <p:spTree>
+      <p:nvGrpSpPr>
+        <p:cNvPr id="1" name=""/>
+        <p:cNvGrpSpPr/>
+        <p:nvPr/>
+      </p:nvGrpSpPr>
+      <p:grpSpPr>
+        <a:xfrm xmlns:a="http://schemas.openxmlformats.org/drawingml/2006/main"/>
+      </p:grpSpPr>
+      <p:sp>
+        <p:nvSpPr>
+          <p:cNvPr id="12" name="course">
+            <a:extLst xmlns:a="http://schemas.openxmlformats.org/drawingml/2006/main">
+              <a:ext uri="{FF2B5EF4-FFF2-40B4-BE49-F238E27FC236}">
+                <a16:creationId xmlns:a16="http://schemas.microsoft.com/office/drawing/2014/main" id="{E18AEB73-19E5-40A9-BCDE-B19BFAC4AE55}"/>
+              </a:ext>
+            </a:extLst>
+          </p:cNvPr>
+          <p:cNvSpPr>
+            <a:spLocks xmlns:a="http://schemas.openxmlformats.org/drawingml/2006/main" noGrp="1"/>
+          </p:cNvSpPr>
+          <p:nvPr/>
+        </p:nvSpPr>
+        <p:spPr>
+          <a:xfrm xmlns:a="http://schemas.openxmlformats.org/drawingml/2006/main">
+            <a:off x="400050" y="228600"/>
+            <a:ext cx="4762500" cy="266700"/>
+          </a:xfrm>
+          <a:prstGeom xmlns:a="http://schemas.openxmlformats.org/drawingml/2006/main" prst="rect">
+            <a:avLst/>
+          </a:prstGeom>
+          <a:noFill xmlns:a="http://schemas.openxmlformats.org/drawingml/2006/main"/>
+          <a:ln xmlns:a="http://schemas.openxmlformats.org/drawingml/2006/main" w="0">
+            <a:noFill/>
+          </a:ln>
+        </p:spPr>
+        <p:txBody>
+          <a:bodyPr xmlns:a="http://schemas.openxmlformats.org/drawingml/2006/main">
+            <a:noAutofit/>
+          </a:bodyPr>
+          <a:lstStyle xmlns:a="http://schemas.openxmlformats.org/drawingml/2006/main"/>
+          <a:p xmlns:a="http://schemas.openxmlformats.org/drawingml/2006/main">
+            <a:pPr>
+              <a:defRPr sz="1275" b="1">
+                <a:solidFill>
+                  <a:srgbClr val="881C1C"/>
+                </a:solidFill>
+                <a:latin typeface="Calibri"/>
+                <a:ea typeface="Calibri"/>
+                <a:cs typeface="Calibri"/>
+              </a:defRPr>
+            </a:pPr>
+            <a:r>
+              <a:rPr sz="1275" b="1">
+                <a:solidFill>
+                  <a:srgbClr val="881C1C"/>
+                </a:solidFill>
+                <a:latin typeface="Calibri"/>
+                <a:ea typeface="Calibri"/>
+                <a:cs typeface="Calibri"/>
+              </a:rPr>
+              <a:t>MIE 402  |  ME LAB II</a:t>
+            </a:r>
+          </a:p>
+        </p:txBody>
+      </p:sp>
+      <p:sp>
+        <p:nvSpPr>
+          <p:cNvPr id="2" name="title">
+            <a:extLst xmlns:a="http://schemas.openxmlformats.org/drawingml/2006/main">
+              <a:ext uri="{FF2B5EF4-FFF2-40B4-BE49-F238E27FC236}">
+                <a16:creationId xmlns:a16="http://schemas.microsoft.com/office/drawing/2014/main" id="{C86309E3-036A-4625-99A5-A0C66B43F135}"/>
+              </a:ext>
+            </a:extLst>
+          </p:cNvPr>
+          <p:cNvSpPr>
+            <a:spLocks xmlns:a="http://schemas.openxmlformats.org/drawingml/2006/main" noGrp="1"/>
+          </p:cNvSpPr>
+          <p:nvPr/>
+        </p:nvSpPr>
+        <p:spPr>
+          <a:xfrm xmlns:a="http://schemas.openxmlformats.org/drawingml/2006/main">
+            <a:off x="400050" y="685800"/>
+            <a:ext cx="11334750" cy="685800"/>
+          </a:xfrm>
+          <a:prstGeom xmlns:a="http://schemas.openxmlformats.org/drawingml/2006/main" prst="rect">
+            <a:avLst/>
+          </a:prstGeom>
+          <a:noFill xmlns:a="http://schemas.openxmlformats.org/drawingml/2006/main"/>
+          <a:ln xmlns:a="http://schemas.openxmlformats.org/drawingml/2006/main" w="0">
+            <a:noFill/>
+          </a:ln>
+        </p:spPr>
+        <p:txBody>
+          <a:bodyPr xmlns:a="http://schemas.openxmlformats.org/drawingml/2006/main">
+            <a:noAutofit/>
+          </a:bodyPr>
+          <a:lstStyle xmlns:a="http://schemas.openxmlformats.org/drawingml/2006/main"/>
+          <a:p xmlns:a="http://schemas.openxmlformats.org/drawingml/2006/main">
+            <a:pPr>
+              <a:defRPr sz="3000" b="1">
+                <a:solidFill>
+                  <a:srgbClr val="111111"/>
+                </a:solidFill>
+                <a:latin typeface="Calibri"/>
+                <a:ea typeface="Calibri"/>
+                <a:cs typeface="Calibri"/>
+              </a:defRPr>
+            </a:pPr>
+            <a:r>
+              <a:rPr sz="3000" b="1">
+                <a:solidFill>
+                  <a:srgbClr val="111111"/>
+                </a:solidFill>
+                <a:latin typeface="Calibri"/>
+                <a:ea typeface="Calibri"/>
+                <a:cs typeface="Calibri"/>
+              </a:rPr>
+              <a:t>Opening and saving the notebook</a:t>
+            </a:r>
+          </a:p>
+        </p:txBody>
+      </p:sp>
+      <p:sp>
+        <p:nvSpPr>
+          <p:cNvPr id="3" name="page">
+            <a:extLst xmlns:a="http://schemas.openxmlformats.org/drawingml/2006/main">
+              <a:ext uri="{FF2B5EF4-FFF2-40B4-BE49-F238E27FC236}">
+                <a16:creationId xmlns:a16="http://schemas.microsoft.com/office/drawing/2014/main" id="{A179B327-DB87-4343-9087-726B45E8D9FB}"/>
+              </a:ext>
+            </a:extLst>
+          </p:cNvPr>
+          <p:cNvSpPr>
+            <a:spLocks xmlns:a="http://schemas.openxmlformats.org/drawingml/2006/main" noGrp="1"/>
+          </p:cNvSpPr>
+          <p:nvPr/>
+        </p:nvSpPr>
+        <p:spPr>
+          <a:xfrm xmlns:a="http://schemas.openxmlformats.org/drawingml/2006/main">
+            <a:off x="11334750" y="6572250"/>
+            <a:ext cx="428625" cy="171450"/>
+          </a:xfrm>
+          <a:prstGeom xmlns:a="http://schemas.openxmlformats.org/drawingml/2006/main" prst="rect">
+            <a:avLst/>
+          </a:prstGeom>
+          <a:noFill xmlns:a="http://schemas.openxmlformats.org/drawingml/2006/main"/>
+          <a:ln xmlns:a="http://schemas.openxmlformats.org/drawingml/2006/main" w="0">
+            <a:noFill/>
+          </a:ln>
+        </p:spPr>
+        <p:txBody>
+          <a:bodyPr xmlns:a="http://schemas.openxmlformats.org/drawingml/2006/main">
+            <a:noAutofit/>
+          </a:bodyPr>
+          <a:lstStyle xmlns:a="http://schemas.openxmlformats.org/drawingml/2006/main"/>
+          <a:p xmlns:a="http://schemas.openxmlformats.org/drawingml/2006/main">
+            <a:pPr>
+              <a:defRPr sz="1050" b="0">
+                <a:solidFill>
+                  <a:srgbClr val="5F6368"/>
+                </a:solidFill>
+                <a:latin typeface="Calibri"/>
+                <a:ea typeface="Calibri"/>
+                <a:cs typeface="Calibri"/>
+              </a:defRPr>
+            </a:pPr>
+            <a:r>
+              <a:rPr sz="1050" b="0">
+                <a:solidFill>
+                  <a:srgbClr val="5F6368"/>
+                </a:solidFill>
+                <a:latin typeface="Calibri"/>
+                <a:ea typeface="Calibri"/>
+                <a:cs typeface="Calibri"/>
+              </a:rPr>
+              <a:t>5</a:t>
+            </a:r>
+          </a:p>
+        </p:txBody>
+      </p:sp>
+      <p:sp>
+        <p:nvSpPr>
+          <p:cNvPr id="4" name="text">
+            <a:extLst xmlns:a="http://schemas.openxmlformats.org/drawingml/2006/main">
+              <a:ext uri="{FF2B5EF4-FFF2-40B4-BE49-F238E27FC236}">
+                <a16:creationId xmlns:a16="http://schemas.microsoft.com/office/drawing/2014/main" id="{17889639-1A5F-4A47-90CD-6BE913576900}"/>
+              </a:ext>
+            </a:extLst>
+          </p:cNvPr>
+          <p:cNvSpPr>
+            <a:spLocks xmlns:a="http://schemas.openxmlformats.org/drawingml/2006/main" noGrp="1"/>
+          </p:cNvSpPr>
+          <p:nvPr/>
+        </p:nvSpPr>
+        <p:spPr>
+          <a:xfrm xmlns:a="http://schemas.openxmlformats.org/drawingml/2006/main">
+            <a:off x="533400" y="1619250"/>
+            <a:ext cx="228600" cy="400050"/>
+          </a:xfrm>
+          <a:prstGeom xmlns:a="http://schemas.openxmlformats.org/drawingml/2006/main" prst="rect">
+            <a:avLst/>
+          </a:prstGeom>
+          <a:noFill xmlns:a="http://schemas.openxmlformats.org/drawingml/2006/main"/>
+          <a:ln xmlns:a="http://schemas.openxmlformats.org/drawingml/2006/main" w="0">
+            <a:noFill/>
+          </a:ln>
+        </p:spPr>
+        <p:txBody>
+          <a:bodyPr xmlns:a="http://schemas.openxmlformats.org/drawingml/2006/main">
+            <a:noAutofit/>
+          </a:bodyPr>
+          <a:lstStyle xmlns:a="http://schemas.openxmlformats.org/drawingml/2006/main"/>
+          <a:p xmlns:a="http://schemas.openxmlformats.org/drawingml/2006/main">
+            <a:pPr>
+              <a:defRPr sz="2025" b="1">
+                <a:solidFill>
+                  <a:srgbClr val="881C1C"/>
+                </a:solidFill>
+                <a:latin typeface="Calibri"/>
+                <a:ea typeface="Calibri"/>
+                <a:cs typeface="Calibri"/>
+              </a:defRPr>
+            </a:pPr>
+            <a:r>
+              <a:rPr sz="2025" b="1">
+                <a:solidFill>
+                  <a:srgbClr val="881C1C"/>
+                </a:solidFill>
+                <a:latin typeface="Calibri"/>
+                <a:ea typeface="Calibri"/>
+                <a:cs typeface="Calibri"/>
+              </a:rPr>
+              <a:t>•</a:t>
+            </a:r>
+          </a:p>
+        </p:txBody>
+      </p:sp>
+      <p:sp>
+        <p:nvSpPr>
+          <p:cNvPr id="5" name="text">
+            <a:extLst xmlns:a="http://schemas.openxmlformats.org/drawingml/2006/main">
+              <a:ext uri="{FF2B5EF4-FFF2-40B4-BE49-F238E27FC236}">
+                <a16:creationId xmlns:a16="http://schemas.microsoft.com/office/drawing/2014/main" id="{A7BDDD4A-CD85-4671-9392-FAEFDD3F2C8C}"/>
+              </a:ext>
+            </a:extLst>
+          </p:cNvPr>
+          <p:cNvSpPr>
+            <a:spLocks xmlns:a="http://schemas.openxmlformats.org/drawingml/2006/main" noGrp="1"/>
+          </p:cNvSpPr>
+          <p:nvPr/>
+        </p:nvSpPr>
+        <p:spPr>
+          <a:xfrm xmlns:a="http://schemas.openxmlformats.org/drawingml/2006/main">
+            <a:off x="838200" y="1619250"/>
+            <a:ext cx="10477500" cy="647700"/>
+          </a:xfrm>
+          <a:prstGeom xmlns:a="http://schemas.openxmlformats.org/drawingml/2006/main" prst="rect">
+            <a:avLst/>
+          </a:prstGeom>
+          <a:noFill xmlns:a="http://schemas.openxmlformats.org/drawingml/2006/main"/>
+          <a:ln xmlns:a="http://schemas.openxmlformats.org/drawingml/2006/main" w="0">
+            <a:noFill/>
+          </a:ln>
+        </p:spPr>
+        <p:txBody>
+          <a:bodyPr xmlns:a="http://schemas.openxmlformats.org/drawingml/2006/main">
+            <a:noAutofit/>
+          </a:bodyPr>
+          <a:lstStyle xmlns:a="http://schemas.openxmlformats.org/drawingml/2006/main"/>
+          <a:p xmlns:a="http://schemas.openxmlformats.org/drawingml/2006/main">
+            <a:pPr>
+              <a:defRPr sz="2025" b="0">
+                <a:solidFill>
+                  <a:srgbClr val="161616"/>
+                </a:solidFill>
+                <a:latin typeface="Calibri"/>
+                <a:ea typeface="Calibri"/>
+                <a:cs typeface="Calibri"/>
+              </a:defRPr>
+            </a:pPr>
+            <a:r>
+              <a:rPr sz="2025" b="0">
+                <a:solidFill>
+                  <a:srgbClr val="161616"/>
+                </a:solidFill>
+                <a:latin typeface="Calibri"/>
+                <a:ea typeface="Calibri"/>
+                <a:cs typeface="Calibri"/>
+              </a:rPr>
+              <a:t>Download the .ipynb file from Canvas or open it from the course website in Colab</a:t>
+            </a:r>
+          </a:p>
+        </p:txBody>
+      </p:sp>
+      <p:sp>
+        <p:nvSpPr>
+          <p:cNvPr id="6" name="text">
+            <a:extLst xmlns:a="http://schemas.openxmlformats.org/drawingml/2006/main">
+              <a:ext uri="{FF2B5EF4-FFF2-40B4-BE49-F238E27FC236}">
+                <a16:creationId xmlns:a16="http://schemas.microsoft.com/office/drawing/2014/main" id="{5B6B40F4-E80B-4CAF-9748-7D7EF14CE768}"/>
+              </a:ext>
+            </a:extLst>
+          </p:cNvPr>
+          <p:cNvSpPr>
+            <a:spLocks xmlns:a="http://schemas.openxmlformats.org/drawingml/2006/main" noGrp="1"/>
+          </p:cNvSpPr>
+          <p:nvPr/>
+        </p:nvSpPr>
+        <p:spPr>
+          <a:xfrm xmlns:a="http://schemas.openxmlformats.org/drawingml/2006/main">
+            <a:off x="533400" y="2400300"/>
+            <a:ext cx="228600" cy="400050"/>
+          </a:xfrm>
+          <a:prstGeom xmlns:a="http://schemas.openxmlformats.org/drawingml/2006/main" prst="rect">
+            <a:avLst/>
+          </a:prstGeom>
+          <a:noFill xmlns:a="http://schemas.openxmlformats.org/drawingml/2006/main"/>
+          <a:ln xmlns:a="http://schemas.openxmlformats.org/drawingml/2006/main" w="0">
+            <a:noFill/>
+          </a:ln>
+        </p:spPr>
+        <p:txBody>
+          <a:bodyPr xmlns:a="http://schemas.openxmlformats.org/drawingml/2006/main">
+            <a:noAutofit/>
+          </a:bodyPr>
+          <a:lstStyle xmlns:a="http://schemas.openxmlformats.org/drawingml/2006/main"/>
+          <a:p xmlns:a="http://schemas.openxmlformats.org/drawingml/2006/main">
+            <a:pPr>
+              <a:defRPr sz="2025" b="1">
+                <a:solidFill>
+                  <a:srgbClr val="881C1C"/>
+                </a:solidFill>
+                <a:latin typeface="Calibri"/>
+                <a:ea typeface="Calibri"/>
+                <a:cs typeface="Calibri"/>
+              </a:defRPr>
+            </a:pPr>
+            <a:r>
+              <a:rPr sz="2025" b="1">
+                <a:solidFill>
+                  <a:srgbClr val="881C1C"/>
+                </a:solidFill>
+                <a:latin typeface="Calibri"/>
+                <a:ea typeface="Calibri"/>
+                <a:cs typeface="Calibri"/>
+              </a:rPr>
+              <a:t>•</a:t>
+            </a:r>
+          </a:p>
+        </p:txBody>
+      </p:sp>
+      <p:sp>
+        <p:nvSpPr>
+          <p:cNvPr id="7" name="text">
+            <a:extLst xmlns:a="http://schemas.openxmlformats.org/drawingml/2006/main">
+              <a:ext uri="{FF2B5EF4-FFF2-40B4-BE49-F238E27FC236}">
+                <a16:creationId xmlns:a16="http://schemas.microsoft.com/office/drawing/2014/main" id="{A06CF0C7-AFFD-4E8E-99F8-1107DF738FE6}"/>
+              </a:ext>
+            </a:extLst>
+          </p:cNvPr>
+          <p:cNvSpPr>
+            <a:spLocks xmlns:a="http://schemas.openxmlformats.org/drawingml/2006/main" noGrp="1"/>
+          </p:cNvSpPr>
+          <p:nvPr/>
+        </p:nvSpPr>
+        <p:spPr>
+          <a:xfrm xmlns:a="http://schemas.openxmlformats.org/drawingml/2006/main">
+            <a:off x="838200" y="2400300"/>
+            <a:ext cx="10477500" cy="647700"/>
+          </a:xfrm>
+          <a:prstGeom xmlns:a="http://schemas.openxmlformats.org/drawingml/2006/main" prst="rect">
+            <a:avLst/>
+          </a:prstGeom>
+          <a:noFill xmlns:a="http://schemas.openxmlformats.org/drawingml/2006/main"/>
+          <a:ln xmlns:a="http://schemas.openxmlformats.org/drawingml/2006/main" w="0">
+            <a:noFill/>
+          </a:ln>
+        </p:spPr>
+        <p:txBody>
+          <a:bodyPr xmlns:a="http://schemas.openxmlformats.org/drawingml/2006/main">
+            <a:noAutofit/>
+          </a:bodyPr>
+          <a:lstStyle xmlns:a="http://schemas.openxmlformats.org/drawingml/2006/main"/>
+          <a:p xmlns:a="http://schemas.openxmlformats.org/drawingml/2006/main">
+            <a:pPr>
+              <a:defRPr sz="2025" b="0">
+                <a:solidFill>
+                  <a:srgbClr val="161616"/>
+                </a:solidFill>
+                <a:latin typeface="Calibri"/>
+                <a:ea typeface="Calibri"/>
+                <a:cs typeface="Calibri"/>
+              </a:defRPr>
+            </a:pPr>
+            <a:r>
+              <a:rPr sz="2025" b="0">
+                <a:solidFill>
+                  <a:srgbClr val="161616"/>
+                </a:solidFill>
+                <a:latin typeface="Calibri"/>
+                <a:ea typeface="Calibri"/>
+                <a:cs typeface="Calibri"/>
+              </a:rPr>
+              <a:t>Save a personal copy before editing</a:t>
+            </a:r>
+          </a:p>
+        </p:txBody>
+      </p:sp>
+      <p:sp>
+        <p:nvSpPr>
+          <p:cNvPr id="8" name="text">
+            <a:extLst xmlns:a="http://schemas.openxmlformats.org/drawingml/2006/main">
+              <a:ext uri="{FF2B5EF4-FFF2-40B4-BE49-F238E27FC236}">
+                <a16:creationId xmlns:a16="http://schemas.microsoft.com/office/drawing/2014/main" id="{CDC3A7D8-F5C9-45DF-BAE6-9100A575446B}"/>
+              </a:ext>
+            </a:extLst>
+          </p:cNvPr>
+          <p:cNvSpPr>
+            <a:spLocks xmlns:a="http://schemas.openxmlformats.org/drawingml/2006/main" noGrp="1"/>
+          </p:cNvSpPr>
+          <p:nvPr/>
+        </p:nvSpPr>
+        <p:spPr>
+          <a:xfrm xmlns:a="http://schemas.openxmlformats.org/drawingml/2006/main">
+            <a:off x="533400" y="3181350"/>
+            <a:ext cx="228600" cy="400050"/>
+          </a:xfrm>
+          <a:prstGeom xmlns:a="http://schemas.openxmlformats.org/drawingml/2006/main" prst="rect">
+            <a:avLst/>
+          </a:prstGeom>
+          <a:noFill xmlns:a="http://schemas.openxmlformats.org/drawingml/2006/main"/>
+          <a:ln xmlns:a="http://schemas.openxmlformats.org/drawingml/2006/main" w="0">
+            <a:noFill/>
+          </a:ln>
+        </p:spPr>
+        <p:txBody>
+          <a:bodyPr xmlns:a="http://schemas.openxmlformats.org/drawingml/2006/main">
+            <a:noAutofit/>
+          </a:bodyPr>
+          <a:lstStyle xmlns:a="http://schemas.openxmlformats.org/drawingml/2006/main"/>
+          <a:p xmlns:a="http://schemas.openxmlformats.org/drawingml/2006/main">
+            <a:pPr>
+              <a:defRPr sz="2025" b="1">
+                <a:solidFill>
+                  <a:srgbClr val="881C1C"/>
+                </a:solidFill>
+                <a:latin typeface="Calibri"/>
+                <a:ea typeface="Calibri"/>
+                <a:cs typeface="Calibri"/>
+              </a:defRPr>
+            </a:pPr>
+            <a:r>
+              <a:rPr sz="2025" b="1">
+                <a:solidFill>
+                  <a:srgbClr val="881C1C"/>
+                </a:solidFill>
+                <a:latin typeface="Calibri"/>
+                <a:ea typeface="Calibri"/>
+                <a:cs typeface="Calibri"/>
+              </a:rPr>
+              <a:t>•</a:t>
+            </a:r>
+          </a:p>
+        </p:txBody>
+      </p:sp>
+      <p:sp>
+        <p:nvSpPr>
+          <p:cNvPr id="9" name="text">
+            <a:extLst xmlns:a="http://schemas.openxmlformats.org/drawingml/2006/main">
+              <a:ext uri="{FF2B5EF4-FFF2-40B4-BE49-F238E27FC236}">
+                <a16:creationId xmlns:a16="http://schemas.microsoft.com/office/drawing/2014/main" id="{95810352-4E26-4DFF-AB37-9E6B3F950D8F}"/>
+              </a:ext>
+            </a:extLst>
+          </p:cNvPr>
+          <p:cNvSpPr>
+            <a:spLocks xmlns:a="http://schemas.openxmlformats.org/drawingml/2006/main" noGrp="1"/>
+          </p:cNvSpPr>
+          <p:nvPr/>
+        </p:nvSpPr>
+        <p:spPr>
+          <a:xfrm xmlns:a="http://schemas.openxmlformats.org/drawingml/2006/main">
+            <a:off x="838200" y="3181350"/>
+            <a:ext cx="10477500" cy="647700"/>
+          </a:xfrm>
+          <a:prstGeom xmlns:a="http://schemas.openxmlformats.org/drawingml/2006/main" prst="rect">
+            <a:avLst/>
+          </a:prstGeom>
+          <a:noFill xmlns:a="http://schemas.openxmlformats.org/drawingml/2006/main"/>
+          <a:ln xmlns:a="http://schemas.openxmlformats.org/drawingml/2006/main" w="0">
+            <a:noFill/>
+          </a:ln>
+        </p:spPr>
+        <p:txBody>
+          <a:bodyPr xmlns:a="http://schemas.openxmlformats.org/drawingml/2006/main">
+            <a:noAutofit/>
+          </a:bodyPr>
+          <a:lstStyle xmlns:a="http://schemas.openxmlformats.org/drawingml/2006/main"/>
+          <a:p xmlns:a="http://schemas.openxmlformats.org/drawingml/2006/main">
+            <a:pPr>
+              <a:defRPr sz="2025" b="0">
+                <a:solidFill>
+                  <a:srgbClr val="161616"/>
+                </a:solidFill>
+                <a:latin typeface="Calibri"/>
+                <a:ea typeface="Calibri"/>
+                <a:cs typeface="Calibri"/>
+              </a:defRPr>
+            </a:pPr>
+            <a:r>
+              <a:rPr sz="2025" b="0">
+                <a:solidFill>
+                  <a:srgbClr val="161616"/>
+                </a:solidFill>
+                <a:latin typeface="Calibri"/>
+                <a:ea typeface="Calibri"/>
+                <a:cs typeface="Calibri"/>
+              </a:rPr>
+              <a:t>Run cells from top to bottom</a:t>
+            </a:r>
+          </a:p>
+        </p:txBody>
+      </p:sp>
+      <p:sp>
+        <p:nvSpPr>
+          <p:cNvPr id="10" name="text">
+            <a:extLst xmlns:a="http://schemas.openxmlformats.org/drawingml/2006/main">
+              <a:ext uri="{FF2B5EF4-FFF2-40B4-BE49-F238E27FC236}">
+                <a16:creationId xmlns:a16="http://schemas.microsoft.com/office/drawing/2014/main" id="{0CB47001-0AF3-45EE-9CC4-7377AA6F8BBD}"/>
+              </a:ext>
+            </a:extLst>
+          </p:cNvPr>
+          <p:cNvSpPr>
+            <a:spLocks xmlns:a="http://schemas.openxmlformats.org/drawingml/2006/main" noGrp="1"/>
+          </p:cNvSpPr>
+          <p:nvPr/>
+        </p:nvSpPr>
+        <p:spPr>
+          <a:xfrm xmlns:a="http://schemas.openxmlformats.org/drawingml/2006/main">
+            <a:off x="533400" y="3962400"/>
+            <a:ext cx="228600" cy="400050"/>
+          </a:xfrm>
+          <a:prstGeom xmlns:a="http://schemas.openxmlformats.org/drawingml/2006/main" prst="rect">
+            <a:avLst/>
+          </a:prstGeom>
+          <a:noFill xmlns:a="http://schemas.openxmlformats.org/drawingml/2006/main"/>
+          <a:ln xmlns:a="http://schemas.openxmlformats.org/drawingml/2006/main" w="0">
+            <a:noFill/>
+          </a:ln>
+        </p:spPr>
+        <p:txBody>
+          <a:bodyPr xmlns:a="http://schemas.openxmlformats.org/drawingml/2006/main">
+            <a:noAutofit/>
+          </a:bodyPr>
+          <a:lstStyle xmlns:a="http://schemas.openxmlformats.org/drawingml/2006/main"/>
+          <a:p xmlns:a="http://schemas.openxmlformats.org/drawingml/2006/main">
+            <a:pPr>
+              <a:defRPr sz="2025" b="1">
+                <a:solidFill>
+                  <a:srgbClr val="881C1C"/>
+                </a:solidFill>
+                <a:latin typeface="Calibri"/>
+                <a:ea typeface="Calibri"/>
+                <a:cs typeface="Calibri"/>
+              </a:defRPr>
+            </a:pPr>
+            <a:r>
+              <a:rPr sz="2025" b="1">
+                <a:solidFill>
+                  <a:srgbClr val="881C1C"/>
+                </a:solidFill>
+                <a:latin typeface="Calibri"/>
+                <a:ea typeface="Calibri"/>
+                <a:cs typeface="Calibri"/>
+              </a:rPr>
+              <a:t>•</a:t>
+            </a:r>
+          </a:p>
+        </p:txBody>
+      </p:sp>
+      <p:sp>
+        <p:nvSpPr>
+          <p:cNvPr id="11" name="text">
+            <a:extLst xmlns:a="http://schemas.openxmlformats.org/drawingml/2006/main">
+              <a:ext uri="{FF2B5EF4-FFF2-40B4-BE49-F238E27FC236}">
+                <a16:creationId xmlns:a16="http://schemas.microsoft.com/office/drawing/2014/main" id="{5B9FBC5B-02EC-4ADE-8CE3-D45848DB966F}"/>
+              </a:ext>
+            </a:extLst>
+          </p:cNvPr>
+          <p:cNvSpPr>
+            <a:spLocks xmlns:a="http://schemas.openxmlformats.org/drawingml/2006/main" noGrp="1"/>
+          </p:cNvSpPr>
+          <p:nvPr/>
+        </p:nvSpPr>
+        <p:spPr>
+          <a:xfrm xmlns:a="http://schemas.openxmlformats.org/drawingml/2006/main">
+            <a:off x="838200" y="3962400"/>
+            <a:ext cx="10477500" cy="647700"/>
+          </a:xfrm>
+          <a:prstGeom xmlns:a="http://schemas.openxmlformats.org/drawingml/2006/main" prst="rect">
+            <a:avLst/>
+          </a:prstGeom>
+          <a:noFill xmlns:a="http://schemas.openxmlformats.org/drawingml/2006/main"/>
+          <a:ln xmlns:a="http://schemas.openxmlformats.org/drawingml/2006/main" w="0">
+            <a:noFill/>
+          </a:ln>
+        </p:spPr>
+        <p:txBody>
+          <a:bodyPr xmlns:a="http://schemas.openxmlformats.org/drawingml/2006/main">
+            <a:noAutofit/>
+          </a:bodyPr>
+          <a:lstStyle xmlns:a="http://schemas.openxmlformats.org/drawingml/2006/main"/>
+          <a:p xmlns:a="http://schemas.openxmlformats.org/drawingml/2006/main">
+            <a:pPr>
+              <a:defRPr sz="2025" b="0">
+                <a:solidFill>
+                  <a:srgbClr val="161616"/>
+                </a:solidFill>
+                <a:latin typeface="Calibri"/>
+                <a:ea typeface="Calibri"/>
+                <a:cs typeface="Calibri"/>
+              </a:defRPr>
+            </a:pPr>
+            <a:r>
+              <a:rPr sz="2025" b="0">
+                <a:solidFill>
+                  <a:srgbClr val="161616"/>
+                </a:solidFill>
+                <a:latin typeface="Calibri"/>
+                <a:ea typeface="Calibri"/>
+                <a:cs typeface="Calibri"/>
+              </a:rPr>
+              <a:t>Keep code outputs and figures in the submitted file</a:t>
+            </a:r>
+          </a:p>
+        </p:txBody>
+      </p:sp>
+    </p:spTree>
+    <p:extLst>
+      <p:ext uri="{BB962C8B-B14F-4D97-AF65-F5344CB8AC3E}">
+        <p14:creationId xmlns:p14="http://schemas.microsoft.com/office/powerpoint/2010/main" val="671246299"/>
+      </p:ext>
+    </p:extLst>
+  </p:cSld>
+</p:sld>
+</file>
+
+<file path=ppt/slides/slide6.xml><?xml version="1.0" encoding="utf-8"?>
+<p:sld xmlns:p="http://schemas.openxmlformats.org/presentationml/2006/main">
+  <p:cSld>
+    <p:bg>
+      <p:bgPr>
+        <a:solidFill xmlns:a="http://schemas.openxmlformats.org/drawingml/2006/main">
+          <a:srgbClr val="FFFFFF"/>
+        </a:solidFill>
+      </p:bgPr>
+    </p:bg>
+    <p:spTree>
+      <p:nvGrpSpPr>
+        <p:cNvPr id="1" name=""/>
+        <p:cNvGrpSpPr/>
+        <p:nvPr/>
+      </p:nvGrpSpPr>
+      <p:grpSpPr>
+        <a:xfrm xmlns:a="http://schemas.openxmlformats.org/drawingml/2006/main"/>
+      </p:grpSpPr>
+      <p:sp>
+        <p:nvSpPr>
+          <p:cNvPr id="6" name="course">
+            <a:extLst xmlns:a="http://schemas.openxmlformats.org/drawingml/2006/main">
+              <a:ext uri="{FF2B5EF4-FFF2-40B4-BE49-F238E27FC236}">
+                <a16:creationId xmlns:a16="http://schemas.microsoft.com/office/drawing/2014/main" id="{4A413590-724C-4472-BBA3-D6EB40D38B73}"/>
+              </a:ext>
+            </a:extLst>
+          </p:cNvPr>
+          <p:cNvSpPr>
+            <a:spLocks xmlns:a="http://schemas.openxmlformats.org/drawingml/2006/main" noGrp="1"/>
+          </p:cNvSpPr>
+          <p:nvPr/>
+        </p:nvSpPr>
+        <p:spPr>
+          <a:xfrm xmlns:a="http://schemas.openxmlformats.org/drawingml/2006/main">
+            <a:off x="400050" y="228600"/>
+            <a:ext cx="4762500" cy="266700"/>
+          </a:xfrm>
+          <a:prstGeom xmlns:a="http://schemas.openxmlformats.org/drawingml/2006/main" prst="rect">
+            <a:avLst/>
+          </a:prstGeom>
+          <a:noFill xmlns:a="http://schemas.openxmlformats.org/drawingml/2006/main"/>
+          <a:ln xmlns:a="http://schemas.openxmlformats.org/drawingml/2006/main" w="0">
+            <a:noFill/>
+          </a:ln>
+        </p:spPr>
+        <p:txBody>
+          <a:bodyPr xmlns:a="http://schemas.openxmlformats.org/drawingml/2006/main">
+            <a:noAutofit/>
+          </a:bodyPr>
+          <a:lstStyle xmlns:a="http://schemas.openxmlformats.org/drawingml/2006/main"/>
+          <a:p xmlns:a="http://schemas.openxmlformats.org/drawingml/2006/main">
+            <a:pPr>
+              <a:defRPr sz="1275" b="1">
+                <a:solidFill>
+                  <a:srgbClr val="881C1C"/>
+                </a:solidFill>
+                <a:latin typeface="Calibri"/>
+                <a:ea typeface="Calibri"/>
+                <a:cs typeface="Calibri"/>
+              </a:defRPr>
+            </a:pPr>
+            <a:r>
+              <a:rPr sz="1275" b="1">
+                <a:solidFill>
+                  <a:srgbClr val="881C1C"/>
+                </a:solidFill>
+                <a:latin typeface="Calibri"/>
+                <a:ea typeface="Calibri"/>
+                <a:cs typeface="Calibri"/>
+              </a:rPr>
+              <a:t>MIE 402  |  ME LAB II</a:t>
+            </a:r>
+          </a:p>
+        </p:txBody>
+      </p:sp>
+      <p:sp>
+        <p:nvSpPr>
+          <p:cNvPr id="2" name="title">
+            <a:extLst xmlns:a="http://schemas.openxmlformats.org/drawingml/2006/main">
+              <a:ext uri="{FF2B5EF4-FFF2-40B4-BE49-F238E27FC236}">
+                <a16:creationId xmlns:a16="http://schemas.microsoft.com/office/drawing/2014/main" id="{F373B731-3B48-4CDA-B17F-FDC127BF3F8E}"/>
+              </a:ext>
+            </a:extLst>
+          </p:cNvPr>
+          <p:cNvSpPr>
+            <a:spLocks xmlns:a="http://schemas.openxmlformats.org/drawingml/2006/main" noGrp="1"/>
+          </p:cNvSpPr>
+          <p:nvPr/>
+        </p:nvSpPr>
+        <p:spPr>
+          <a:xfrm xmlns:a="http://schemas.openxmlformats.org/drawingml/2006/main">
+            <a:off x="400050" y="685800"/>
+            <a:ext cx="11334750" cy="685800"/>
+          </a:xfrm>
+          <a:prstGeom xmlns:a="http://schemas.openxmlformats.org/drawingml/2006/main" prst="rect">
+            <a:avLst/>
+          </a:prstGeom>
+          <a:noFill xmlns:a="http://schemas.openxmlformats.org/drawingml/2006/main"/>
+          <a:ln xmlns:a="http://schemas.openxmlformats.org/drawingml/2006/main" w="0">
+            <a:noFill/>
+          </a:ln>
+        </p:spPr>
+        <p:txBody>
+          <a:bodyPr xmlns:a="http://schemas.openxmlformats.org/drawingml/2006/main">
+            <a:noAutofit/>
+          </a:bodyPr>
+          <a:lstStyle xmlns:a="http://schemas.openxmlformats.org/drawingml/2006/main"/>
+          <a:p xmlns:a="http://schemas.openxmlformats.org/drawingml/2006/main">
+            <a:pPr>
+              <a:defRPr sz="3000" b="1">
+                <a:solidFill>
+                  <a:srgbClr val="111111"/>
+                </a:solidFill>
+                <a:latin typeface="Calibri"/>
+                <a:ea typeface="Calibri"/>
+                <a:cs typeface="Calibri"/>
+              </a:defRPr>
+            </a:pPr>
+            <a:r>
+              <a:rPr sz="3000" b="1">
+                <a:solidFill>
+                  <a:srgbClr val="111111"/>
+                </a:solidFill>
+                <a:latin typeface="Calibri"/>
+                <a:ea typeface="Calibri"/>
+                <a:cs typeface="Calibri"/>
+              </a:rPr>
+              <a:t>Execution order matters</a:t>
+            </a:r>
+          </a:p>
+        </p:txBody>
+      </p:sp>
+      <p:sp>
+        <p:nvSpPr>
+          <p:cNvPr id="3" name="page">
+            <a:extLst xmlns:a="http://schemas.openxmlformats.org/drawingml/2006/main">
+              <a:ext uri="{FF2B5EF4-FFF2-40B4-BE49-F238E27FC236}">
+                <a16:creationId xmlns:a16="http://schemas.microsoft.com/office/drawing/2014/main" id="{FF2CC59E-F65F-4FDF-8CB6-A3E5ED215173}"/>
+              </a:ext>
+            </a:extLst>
+          </p:cNvPr>
+          <p:cNvSpPr>
+            <a:spLocks xmlns:a="http://schemas.openxmlformats.org/drawingml/2006/main" noGrp="1"/>
+          </p:cNvSpPr>
+          <p:nvPr/>
+        </p:nvSpPr>
+        <p:spPr>
+          <a:xfrm xmlns:a="http://schemas.openxmlformats.org/drawingml/2006/main">
+            <a:off x="11334750" y="6572250"/>
+            <a:ext cx="428625" cy="171450"/>
+          </a:xfrm>
+          <a:prstGeom xmlns:a="http://schemas.openxmlformats.org/drawingml/2006/main" prst="rect">
+            <a:avLst/>
+          </a:prstGeom>
+          <a:noFill xmlns:a="http://schemas.openxmlformats.org/drawingml/2006/main"/>
+          <a:ln xmlns:a="http://schemas.openxmlformats.org/drawingml/2006/main" w="0">
+            <a:noFill/>
+          </a:ln>
+        </p:spPr>
+        <p:txBody>
+          <a:bodyPr xmlns:a="http://schemas.openxmlformats.org/drawingml/2006/main">
+            <a:noAutofit/>
+          </a:bodyPr>
+          <a:lstStyle xmlns:a="http://schemas.openxmlformats.org/drawingml/2006/main"/>
+          <a:p xmlns:a="http://schemas.openxmlformats.org/drawingml/2006/main">
+            <a:pPr>
+              <a:defRPr sz="1050" b="0">
+                <a:solidFill>
+                  <a:srgbClr val="5F6368"/>
+                </a:solidFill>
+                <a:latin typeface="Calibri"/>
+                <a:ea typeface="Calibri"/>
+                <a:cs typeface="Calibri"/>
+              </a:defRPr>
+            </a:pPr>
+            <a:r>
+              <a:rPr sz="1050" b="0">
+                <a:solidFill>
+                  <a:srgbClr val="5F6368"/>
+                </a:solidFill>
+                <a:latin typeface="Calibri"/>
+                <a:ea typeface="Calibri"/>
+                <a:cs typeface="Calibri"/>
+              </a:rPr>
+              <a:t>6</a:t>
+            </a:r>
+          </a:p>
+        </p:txBody>
+      </p:sp>
+      <p:sp>
+        <p:nvSpPr>
+          <p:cNvPr id="4" name="code">
+            <a:extLst xmlns:a="http://schemas.openxmlformats.org/drawingml/2006/main">
+              <a:ext uri="{FF2B5EF4-FFF2-40B4-BE49-F238E27FC236}">
+                <a16:creationId xmlns:a16="http://schemas.microsoft.com/office/drawing/2014/main" id="{035C8623-9595-489A-8893-8A944498A7B0}"/>
+              </a:ext>
+            </a:extLst>
+          </p:cNvPr>
+          <p:cNvSpPr>
+            <a:spLocks xmlns:a="http://schemas.openxmlformats.org/drawingml/2006/main" noGrp="1"/>
+          </p:cNvSpPr>
+          <p:nvPr/>
+        </p:nvSpPr>
+        <p:spPr>
+          <a:xfrm xmlns:a="http://schemas.openxmlformats.org/drawingml/2006/main">
+            <a:off x="666750" y="1619250"/>
+            <a:ext cx="10858500" cy="4000500"/>
+          </a:xfrm>
+          <a:prstGeom xmlns:a="http://schemas.openxmlformats.org/drawingml/2006/main" prst="rect">
+            <a:avLst/>
+          </a:prstGeom>
+          <a:solidFill xmlns:a="http://schemas.openxmlformats.org/drawingml/2006/main">
+            <a:srgbClr val="F2F3F5"/>
+          </a:solidFill>
+          <a:ln xmlns:a="http://schemas.openxmlformats.org/drawingml/2006/main" w="0">
+            <a:noFill/>
+          </a:ln>
+        </p:spPr>
+        <p:txBody>
+          <a:bodyPr xmlns:a="http://schemas.openxmlformats.org/drawingml/2006/main">
+            <a:noAutofit/>
+          </a:bodyPr>
+          <a:lstStyle xmlns:a="http://schemas.openxmlformats.org/drawingml/2006/main"/>
+          <a:p xmlns:a="http://schemas.openxmlformats.org/drawingml/2006/main">
+            <a:pPr>
+              <a:defRPr sz="1725" b="0">
+                <a:solidFill>
+                  <a:srgbClr val="202124"/>
+                </a:solidFill>
+                <a:latin typeface="Consolas"/>
+                <a:ea typeface="Consolas"/>
+                <a:cs typeface="Consolas"/>
+              </a:defRPr>
+            </a:pPr>
+            <a:r>
+              <a:rPr sz="1725" b="0">
+                <a:solidFill>
+                  <a:srgbClr val="202124"/>
+                </a:solidFill>
+                <a:latin typeface="Consolas"/>
+                <a:ea typeface="Consolas"/>
+                <a:cs typeface="Consolas"/>
+              </a:rPr>
+              <a:t>import numpy as np</a:t>
+            </a:r>
+          </a:p>
+          <a:p xmlns:a="http://schemas.openxmlformats.org/drawingml/2006/main">
+            <a:pPr>
+              <a:defRPr sz="1725" b="0">
+                <a:solidFill>
+                  <a:srgbClr val="202124"/>
+                </a:solidFill>
+                <a:latin typeface="Consolas"/>
+                <a:ea typeface="Consolas"/>
+                <a:cs typeface="Consolas"/>
+              </a:defRPr>
+            </a:pPr>
+            <a:r>
+              <a:rPr sz="1725" b="0">
+                <a:solidFill>
+                  <a:srgbClr val="202124"/>
+                </a:solidFill>
+                <a:latin typeface="Consolas"/>
+                <a:ea typeface="Consolas"/>
+                <a:cs typeface="Consolas"/>
+              </a:rPr>
+              <a:t>A = 1.20</a:t>
+            </a:r>
+          </a:p>
+          <a:p xmlns:a="http://schemas.openxmlformats.org/drawingml/2006/main">
+            <a:pPr>
+              <a:defRPr sz="1725" b="0">
+                <a:solidFill>
+                  <a:srgbClr val="202124"/>
+                </a:solidFill>
+                <a:latin typeface="Consolas"/>
+                <a:ea typeface="Consolas"/>
+                <a:cs typeface="Consolas"/>
+              </a:defRPr>
+            </a:pPr>
+            <a:r>
+              <a:rPr sz="1725" b="0">
+                <a:solidFill>
+                  <a:srgbClr val="202124"/>
+                </a:solidFill>
+                <a:latin typeface="Consolas"/>
+                <a:ea typeface="Consolas"/>
+                <a:cs typeface="Consolas"/>
+              </a:rPr>
+              <a:t>print(A)</a:t>
+            </a:r>
+          </a:p>
+          <a:p xmlns:a="http://schemas.openxmlformats.org/drawingml/2006/main">
+            <a:r>
+              <a:t/>
+            </a:r>
+          </a:p>
+          <a:p xmlns:a="http://schemas.openxmlformats.org/drawingml/2006/main">
+            <a:pPr>
+              <a:defRPr sz="1725" b="0">
+                <a:solidFill>
+                  <a:srgbClr val="202124"/>
+                </a:solidFill>
+                <a:latin typeface="Consolas"/>
+                <a:ea typeface="Consolas"/>
+                <a:cs typeface="Consolas"/>
+              </a:defRPr>
+            </a:pPr>
+            <a:r>
+              <a:rPr sz="1725" b="0">
+                <a:solidFill>
+                  <a:srgbClr val="202124"/>
+                </a:solidFill>
+                <a:latin typeface="Consolas"/>
+                <a:ea typeface="Consolas"/>
+                <a:cs typeface="Consolas"/>
+              </a:rPr>
+              <a:t># A later cell can use A only after this cell runs.</a:t>
+            </a:r>
+          </a:p>
+          <a:p xmlns:a="http://schemas.openxmlformats.org/drawingml/2006/main">
+            <a:pPr>
+              <a:defRPr sz="1725" b="0">
+                <a:solidFill>
+                  <a:srgbClr val="202124"/>
+                </a:solidFill>
+                <a:latin typeface="Consolas"/>
+                <a:ea typeface="Consolas"/>
+                <a:cs typeface="Consolas"/>
+              </a:defRPr>
+            </a:pPr>
+            <a:r>
+              <a:rPr sz="1725" b="0">
+                <a:solidFill>
+                  <a:srgbClr val="202124"/>
+                </a:solidFill>
+                <a:latin typeface="Consolas"/>
+                <a:ea typeface="Consolas"/>
+                <a:cs typeface="Consolas"/>
+              </a:rPr>
+              <a:t>rms_component = A / np.sqrt(2)</a:t>
+            </a:r>
+          </a:p>
+          <a:p xmlns:a="http://schemas.openxmlformats.org/drawingml/2006/main">
+            <a:pPr>
+              <a:defRPr sz="1725" b="0">
+                <a:solidFill>
+                  <a:srgbClr val="202124"/>
+                </a:solidFill>
+                <a:latin typeface="Consolas"/>
+                <a:ea typeface="Consolas"/>
+                <a:cs typeface="Consolas"/>
+              </a:defRPr>
+            </a:pPr>
+            <a:r>
+              <a:rPr sz="1725" b="0">
+                <a:solidFill>
+                  <a:srgbClr val="202124"/>
+                </a:solidFill>
+                <a:latin typeface="Consolas"/>
+                <a:ea typeface="Consolas"/>
+                <a:cs typeface="Consolas"/>
+              </a:rPr>
+              <a:t>print(rms_component)</a:t>
+            </a:r>
+          </a:p>
+        </p:txBody>
+      </p:sp>
+      <p:sp>
+        <p:nvSpPr>
+          <p:cNvPr id="5" name="text">
+            <a:extLst xmlns:a="http://schemas.openxmlformats.org/drawingml/2006/main">
+              <a:ext uri="{FF2B5EF4-FFF2-40B4-BE49-F238E27FC236}">
+                <a16:creationId xmlns:a16="http://schemas.microsoft.com/office/drawing/2014/main" id="{0B9B7D2A-D6BC-4E7F-9FBF-177899B5DC01}"/>
+              </a:ext>
+            </a:extLst>
+          </p:cNvPr>
+          <p:cNvSpPr>
+            <a:spLocks xmlns:a="http://schemas.openxmlformats.org/drawingml/2006/main" noGrp="1"/>
+          </p:cNvSpPr>
+          <p:nvPr/>
+        </p:nvSpPr>
+        <p:spPr>
+          <a:xfrm xmlns:a="http://schemas.openxmlformats.org/drawingml/2006/main">
+            <a:off x="714375" y="5791200"/>
+            <a:ext cx="10668000" cy="514350"/>
+          </a:xfrm>
+          <a:prstGeom xmlns:a="http://schemas.openxmlformats.org/drawingml/2006/main" prst="rect">
+            <a:avLst/>
+          </a:prstGeom>
+          <a:noFill xmlns:a="http://schemas.openxmlformats.org/drawingml/2006/main"/>
+          <a:ln xmlns:a="http://schemas.openxmlformats.org/drawingml/2006/main" w="0">
+            <a:noFill/>
+          </a:ln>
+        </p:spPr>
+        <p:txBody>
+          <a:bodyPr xmlns:a="http://schemas.openxmlformats.org/drawingml/2006/main">
+            <a:noAutofit/>
+          </a:bodyPr>
+          <a:lstStyle xmlns:a="http://schemas.openxmlformats.org/drawingml/2006/main"/>
+          <a:p xmlns:a="http://schemas.openxmlformats.org/drawingml/2006/main">
+            <a:pPr>
+              <a:defRPr sz="1650" b="0">
+                <a:solidFill>
+                  <a:srgbClr val="5F6368"/>
+                </a:solidFill>
+                <a:latin typeface="Calibri"/>
+                <a:ea typeface="Calibri"/>
+                <a:cs typeface="Calibri"/>
+              </a:defRPr>
+            </a:pPr>
+            <a:r>
+              <a:rPr sz="1650" b="0">
+                <a:solidFill>
+                  <a:srgbClr val="5F6368"/>
+                </a:solidFill>
+                <a:latin typeface="Calibri"/>
+                <a:ea typeface="Calibri"/>
+                <a:cs typeface="Calibri"/>
+              </a:rPr>
+              <a:t>A restart clears stored variables. Run All rebuilds the notebook state from the first cell.</a:t>
+            </a:r>
+          </a:p>
+        </p:txBody>
+      </p:sp>
+    </p:spTree>
+    <p:extLst>
+      <p:ext uri="{BB962C8B-B14F-4D97-AF65-F5344CB8AC3E}">
+        <p14:creationId xmlns:p14="http://schemas.microsoft.com/office/powerpoint/2010/main" val="1494956778"/>
+      </p:ext>
+    </p:extLst>
+  </p:cSld>
+</p:sld>
+</file>
+
+<file path=ppt/slides/slide7.xml><?xml version="1.0" encoding="utf-8"?>
+<p:sld xmlns:p="http://schemas.openxmlformats.org/presentationml/2006/main">
+  <p:cSld>
+    <p:bg>
+      <p:bgPr>
+        <a:solidFill xmlns:a="http://schemas.openxmlformats.org/drawingml/2006/main">
+          <a:srgbClr val="FFFFFF"/>
+        </a:solidFill>
+      </p:bgPr>
+    </p:bg>
+    <p:spTree>
+      <p:nvGrpSpPr>
+        <p:cNvPr id="1" name=""/>
+        <p:cNvGrpSpPr/>
+        <p:nvPr/>
+      </p:nvGrpSpPr>
+      <p:grpSpPr>
+        <a:xfrm xmlns:a="http://schemas.openxmlformats.org/drawingml/2006/main"/>
+      </p:grpSpPr>
+      <p:sp>
+        <p:nvSpPr>
+          <p:cNvPr id="7" name="course">
+            <a:extLst xmlns:a="http://schemas.openxmlformats.org/drawingml/2006/main">
+              <a:ext uri="{FF2B5EF4-FFF2-40B4-BE49-F238E27FC236}">
+                <a16:creationId xmlns:a16="http://schemas.microsoft.com/office/drawing/2014/main" id="{0719E5D7-ED3F-4670-AAD0-67ECC99A140F}"/>
+              </a:ext>
+            </a:extLst>
+          </p:cNvPr>
+          <p:cNvSpPr>
+            <a:spLocks xmlns:a="http://schemas.openxmlformats.org/drawingml/2006/main" noGrp="1"/>
+          </p:cNvSpPr>
+          <p:nvPr/>
+        </p:nvSpPr>
+        <p:spPr>
+          <a:xfrm xmlns:a="http://schemas.openxmlformats.org/drawingml/2006/main">
+            <a:off x="400050" y="228600"/>
+            <a:ext cx="4762500" cy="266700"/>
+          </a:xfrm>
+          <a:prstGeom xmlns:a="http://schemas.openxmlformats.org/drawingml/2006/main" prst="rect">
+            <a:avLst/>
+          </a:prstGeom>
+          <a:noFill xmlns:a="http://schemas.openxmlformats.org/drawingml/2006/main"/>
+          <a:ln xmlns:a="http://schemas.openxmlformats.org/drawingml/2006/main" w="0">
+            <a:noFill/>
+          </a:ln>
+        </p:spPr>
+        <p:txBody>
+          <a:bodyPr xmlns:a="http://schemas.openxmlformats.org/drawingml/2006/main">
+            <a:noAutofit/>
+          </a:bodyPr>
+          <a:lstStyle xmlns:a="http://schemas.openxmlformats.org/drawingml/2006/main"/>
+          <a:p xmlns:a="http://schemas.openxmlformats.org/drawingml/2006/main">
+            <a:pPr>
+              <a:defRPr sz="1275" b="1">
+                <a:solidFill>
+                  <a:srgbClr val="881C1C"/>
+                </a:solidFill>
+                <a:latin typeface="Calibri"/>
+                <a:ea typeface="Calibri"/>
+                <a:cs typeface="Calibri"/>
+              </a:defRPr>
+            </a:pPr>
+            <a:r>
+              <a:rPr sz="1275" b="1">
+                <a:solidFill>
+                  <a:srgbClr val="881C1C"/>
+                </a:solidFill>
+                <a:latin typeface="Calibri"/>
+                <a:ea typeface="Calibri"/>
+                <a:cs typeface="Calibri"/>
+              </a:rPr>
+              <a:t>MIE 402  |  ME LAB II</a:t>
+            </a:r>
+          </a:p>
+        </p:txBody>
+      </p:sp>
+      <p:sp>
+        <p:nvSpPr>
+          <p:cNvPr id="2" name="title">
+            <a:extLst xmlns:a="http://schemas.openxmlformats.org/drawingml/2006/main">
+              <a:ext uri="{FF2B5EF4-FFF2-40B4-BE49-F238E27FC236}">
+                <a16:creationId xmlns:a16="http://schemas.microsoft.com/office/drawing/2014/main" id="{4B26DAF9-606E-40C7-A6FB-7267396ECEE2}"/>
+              </a:ext>
+            </a:extLst>
+          </p:cNvPr>
+          <p:cNvSpPr>
+            <a:spLocks xmlns:a="http://schemas.openxmlformats.org/drawingml/2006/main" noGrp="1"/>
+          </p:cNvSpPr>
+          <p:nvPr/>
+        </p:nvSpPr>
+        <p:spPr>
+          <a:xfrm xmlns:a="http://schemas.openxmlformats.org/drawingml/2006/main">
+            <a:off x="400050" y="685800"/>
+            <a:ext cx="11334750" cy="685800"/>
+          </a:xfrm>
+          <a:prstGeom xmlns:a="http://schemas.openxmlformats.org/drawingml/2006/main" prst="rect">
+            <a:avLst/>
+          </a:prstGeom>
+          <a:noFill xmlns:a="http://schemas.openxmlformats.org/drawingml/2006/main"/>
+          <a:ln xmlns:a="http://schemas.openxmlformats.org/drawingml/2006/main" w="0">
+            <a:noFill/>
+          </a:ln>
+        </p:spPr>
+        <p:txBody>
+          <a:bodyPr xmlns:a="http://schemas.openxmlformats.org/drawingml/2006/main">
+            <a:noAutofit/>
+          </a:bodyPr>
+          <a:lstStyle xmlns:a="http://schemas.openxmlformats.org/drawingml/2006/main"/>
+          <a:p xmlns:a="http://schemas.openxmlformats.org/drawingml/2006/main">
+            <a:pPr>
+              <a:defRPr sz="3000" b="1">
+                <a:solidFill>
+                  <a:srgbClr val="111111"/>
+                </a:solidFill>
+                <a:latin typeface="Calibri"/>
+                <a:ea typeface="Calibri"/>
+                <a:cs typeface="Calibri"/>
+              </a:defRPr>
+            </a:pPr>
+            <a:r>
+              <a:rPr sz="3000" b="1">
+                <a:solidFill>
+                  <a:srgbClr val="111111"/>
+                </a:solidFill>
+                <a:latin typeface="Calibri"/>
+                <a:ea typeface="Calibri"/>
+                <a:cs typeface="Calibri"/>
+              </a:rPr>
+              <a:t>A sinusoid: what the three parameters mean</a:t>
+            </a:r>
+          </a:p>
+        </p:txBody>
+      </p:sp>
+      <p:sp>
+        <p:nvSpPr>
+          <p:cNvPr id="3" name="page">
+            <a:extLst xmlns:a="http://schemas.openxmlformats.org/drawingml/2006/main">
+              <a:ext uri="{FF2B5EF4-FFF2-40B4-BE49-F238E27FC236}">
+                <a16:creationId xmlns:a16="http://schemas.microsoft.com/office/drawing/2014/main" id="{E5CFBE33-E944-4B23-B89C-CBBCBF8A5AF0}"/>
+              </a:ext>
+            </a:extLst>
+          </p:cNvPr>
+          <p:cNvSpPr>
+            <a:spLocks xmlns:a="http://schemas.openxmlformats.org/drawingml/2006/main" noGrp="1"/>
+          </p:cNvSpPr>
+          <p:nvPr/>
+        </p:nvSpPr>
+        <p:spPr>
+          <a:xfrm xmlns:a="http://schemas.openxmlformats.org/drawingml/2006/main">
+            <a:off x="11334750" y="6572250"/>
+            <a:ext cx="428625" cy="171450"/>
+          </a:xfrm>
+          <a:prstGeom xmlns:a="http://schemas.openxmlformats.org/drawingml/2006/main" prst="rect">
+            <a:avLst/>
+          </a:prstGeom>
+          <a:noFill xmlns:a="http://schemas.openxmlformats.org/drawingml/2006/main"/>
+          <a:ln xmlns:a="http://schemas.openxmlformats.org/drawingml/2006/main" w="0">
+            <a:noFill/>
+          </a:ln>
+        </p:spPr>
+        <p:txBody>
+          <a:bodyPr xmlns:a="http://schemas.openxmlformats.org/drawingml/2006/main">
+            <a:noAutofit/>
+          </a:bodyPr>
+          <a:lstStyle xmlns:a="http://schemas.openxmlformats.org/drawingml/2006/main"/>
+          <a:p xmlns:a="http://schemas.openxmlformats.org/drawingml/2006/main">
+            <a:pPr>
+              <a:defRPr sz="1050" b="0">
+                <a:solidFill>
+                  <a:srgbClr val="5F6368"/>
+                </a:solidFill>
+                <a:latin typeface="Calibri"/>
+                <a:ea typeface="Calibri"/>
+                <a:cs typeface="Calibri"/>
+              </a:defRPr>
+            </a:pPr>
+            <a:r>
+              <a:rPr sz="1050" b="0">
+                <a:solidFill>
+                  <a:srgbClr val="5F6368"/>
+                </a:solidFill>
+                <a:latin typeface="Calibri"/>
+                <a:ea typeface="Calibri"/>
+                <a:cs typeface="Calibri"/>
+              </a:rPr>
+              <a:t>7</a:t>
+            </a:r>
+          </a:p>
+        </p:txBody>
+      </p:sp>
+      <p:graphicFrame>
+        <p:nvGraphicFramePr>
+          <p:cNvPr id="10" name="Chart"/>
+          <p:cNvGraphicFramePr/>
+          <p:nvPr/>
+        </p:nvGraphicFramePr>
+        <p:xfrm>
+          <a:off xmlns:a="http://schemas.openxmlformats.org/drawingml/2006/main" x="571500" y="1524000"/>
+          <a:ext xmlns:a="http://schemas.openxmlformats.org/drawingml/2006/main" cx="10858500" cy="3905250"/>
+        </p:xfrm>
+        <a:graphic xmlns:a="http://schemas.openxmlformats.org/drawingml/2006/main">
+          <a:graphicData uri="http://schemas.openxmlformats.org/drawingml/2006/chart">
+            <c:chart xmlns:r="http://schemas.openxmlformats.org/officeDocument/2006/relationships" xmlns:c="http://schemas.openxmlformats.org/drawingml/2006/chart" r:id="Re220d187d8e84006"/>
+          </a:graphicData>
+        </a:graphic>
+      </p:graphicFrame>
+      <p:sp>
+        <p:nvSpPr>
+          <p:cNvPr id="5" name="text">
+            <a:extLst xmlns:a="http://schemas.openxmlformats.org/drawingml/2006/main">
+              <a:ext uri="{FF2B5EF4-FFF2-40B4-BE49-F238E27FC236}">
+                <a16:creationId xmlns:a16="http://schemas.microsoft.com/office/drawing/2014/main" id="{2A99EC2C-4126-4C16-9B7A-065295548911}"/>
+              </a:ext>
+            </a:extLst>
+          </p:cNvPr>
+          <p:cNvSpPr>
+            <a:spLocks xmlns:a="http://schemas.openxmlformats.org/drawingml/2006/main" noGrp="1"/>
+          </p:cNvSpPr>
+          <p:nvPr/>
+        </p:nvSpPr>
+        <p:spPr>
+          <a:xfrm xmlns:a="http://schemas.openxmlformats.org/drawingml/2006/main">
+            <a:off x="619125" y="5524500"/>
+            <a:ext cx="10953750" cy="523875"/>
+          </a:xfrm>
+          <a:prstGeom xmlns:a="http://schemas.openxmlformats.org/drawingml/2006/main" prst="rect">
+            <a:avLst/>
+          </a:prstGeom>
+          <a:noFill xmlns:a="http://schemas.openxmlformats.org/drawingml/2006/main"/>
+          <a:ln xmlns:a="http://schemas.openxmlformats.org/drawingml/2006/main" w="0">
+            <a:noFill/>
+          </a:ln>
+        </p:spPr>
+        <p:txBody>
+          <a:bodyPr xmlns:a="http://schemas.openxmlformats.org/drawingml/2006/main">
+            <a:noAutofit/>
+          </a:bodyPr>
+          <a:lstStyle xmlns:a="http://schemas.openxmlformats.org/drawingml/2006/main"/>
+          <a:p xmlns:a="http://schemas.openxmlformats.org/drawingml/2006/main">
+            <a:pPr>
+              <a:defRPr sz="1950" b="1">
+                <a:solidFill>
+                  <a:srgbClr val="881C1C"/>
+                </a:solidFill>
+                <a:latin typeface="Calibri"/>
+                <a:ea typeface="Calibri"/>
+                <a:cs typeface="Calibri"/>
+              </a:defRPr>
+            </a:pPr>
+            <a:r>
+              <a:rPr sz="1950" b="1">
+                <a:solidFill>
+                  <a:srgbClr val="881C1C"/>
+                </a:solidFill>
+                <a:latin typeface="Calibri"/>
+                <a:ea typeface="Calibri"/>
+                <a:cs typeface="Calibri"/>
+              </a:rPr>
+              <a:t>A₁ = 1.20 V from zero to peak. T₁ = 55.56 ms between consecutive peaks.</a:t>
+            </a:r>
+          </a:p>
+        </p:txBody>
+      </p:sp>
+      <p:sp>
+        <p:nvSpPr>
+          <p:cNvPr id="6" name="text">
+            <a:extLst xmlns:a="http://schemas.openxmlformats.org/drawingml/2006/main">
+              <a:ext uri="{FF2B5EF4-FFF2-40B4-BE49-F238E27FC236}">
+                <a16:creationId xmlns:a16="http://schemas.microsoft.com/office/drawing/2014/main" id="{3949C063-2B6A-4A03-AE89-B3BCD6C12EBB}"/>
+              </a:ext>
+            </a:extLst>
+          </p:cNvPr>
+          <p:cNvSpPr>
+            <a:spLocks xmlns:a="http://schemas.openxmlformats.org/drawingml/2006/main" noGrp="1"/>
+          </p:cNvSpPr>
+          <p:nvPr/>
+        </p:nvSpPr>
+        <p:spPr>
+          <a:xfrm xmlns:a="http://schemas.openxmlformats.org/drawingml/2006/main">
+            <a:off x="619125" y="6048375"/>
+            <a:ext cx="10953750" cy="361950"/>
+          </a:xfrm>
+          <a:prstGeom xmlns:a="http://schemas.openxmlformats.org/drawingml/2006/main" prst="rect">
+            <a:avLst/>
+          </a:prstGeom>
+          <a:noFill xmlns:a="http://schemas.openxmlformats.org/drawingml/2006/main"/>
+          <a:ln xmlns:a="http://schemas.openxmlformats.org/drawingml/2006/main" w="0">
+            <a:noFill/>
+          </a:ln>
+        </p:spPr>
+        <p:txBody>
+          <a:bodyPr xmlns:a="http://schemas.openxmlformats.org/drawingml/2006/main">
+            <a:noAutofit/>
+          </a:bodyPr>
+          <a:lstStyle xmlns:a="http://schemas.openxmlformats.org/drawingml/2006/main"/>
+          <a:p xmlns:a="http://schemas.openxmlformats.org/drawingml/2006/main">
+            <a:pPr>
+              <a:defRPr sz="1875" b="0">
+                <a:solidFill>
+                  <a:srgbClr val="161616"/>
+                </a:solidFill>
+                <a:latin typeface="Calibri"/>
+                <a:ea typeface="Calibri"/>
+                <a:cs typeface="Calibri"/>
+              </a:defRPr>
+            </a:pPr>
+            <a:r>
+              <a:rPr sz="1875" b="0">
+                <a:solidFill>
+                  <a:srgbClr val="161616"/>
+                </a:solidFill>
+                <a:latin typeface="Calibri"/>
+                <a:ea typeface="Calibri"/>
+                <a:cs typeface="Calibri"/>
+              </a:rPr>
+              <a:t>x₁(t) = A₁ sin(2πf₁t + φ₁), with f₁ = 18 Hz and φ₁ = 25°</a:t>
+            </a:r>
+          </a:p>
+        </p:txBody>
+      </p:sp>
+    </p:spTree>
+    <p:extLst>
+      <p:ext uri="{BB962C8B-B14F-4D97-AF65-F5344CB8AC3E}">
+        <p14:creationId xmlns:p14="http://schemas.microsoft.com/office/powerpoint/2010/main" val="162468337"/>
+      </p:ext>
+    </p:extLst>
+  </p:cSld>
+</p:sld>
+</file>
+
 <file path=ppt/slides/slide8.xml><?xml version="1.0" encoding="utf-8"?>
 <p:sld xmlns:p="http://schemas.openxmlformats.org/presentationml/2006/main">
   <p:cSld>
@@ -27886,4 +35784,249 @@
     </p:extLst>
   </p:cSld>
 </p:sld>
+</file>
+
+<file path=ppt/theme/theme1.xml><?xml version="1.0" encoding="utf-8"?>
+<a:theme xmlns:a="http://schemas.openxmlformats.org/drawingml/2006/main" name="ChatGPT">
+  <a:themeElements>
+    <a:clrScheme name="ChatGPT">
+      <a:dk1>
+        <a:srgbClr val="000000"/>
+      </a:dk1>
+      <a:lt1>
+        <a:srgbClr val="FFFFFF"/>
+      </a:lt1>
+      <a:dk2>
+        <a:srgbClr val="0E2841"/>
+      </a:dk2>
+      <a:lt2>
+        <a:srgbClr val="E8E8E8"/>
+      </a:lt2>
+      <a:accent1>
+        <a:srgbClr val="156082"/>
+      </a:accent1>
+      <a:accent2>
+        <a:srgbClr val="E97132"/>
+      </a:accent2>
+      <a:accent3>
+        <a:srgbClr val="196B24"/>
+      </a:accent3>
+      <a:accent4>
+        <a:srgbClr val="0F9ED5"/>
+      </a:accent4>
+      <a:accent5>
+        <a:srgbClr val="A02B93"/>
+      </a:accent5>
+      <a:accent6>
+        <a:srgbClr val="4EA72E"/>
+      </a:accent6>
+      <a:hlink>
+        <a:srgbClr val="467886"/>
+      </a:hlink>
+      <a:folHlink>
+        <a:srgbClr val="96607D"/>
+      </a:folHlink>
+    </a:clrScheme>
+    <a:fontScheme name="Office">
+      <a:majorFont>
+        <a:latin typeface="Calibri Light"/>
+        <a:ea typeface="Calibri Light"/>
+        <a:cs typeface="Calibri Light"/>
+      </a:majorFont>
+      <a:minorFont>
+        <a:latin typeface="Calibri"/>
+        <a:ea typeface="Calibri"/>
+        <a:cs typeface="Calibri"/>
+      </a:minorFont>
+    </a:fontScheme>
+    <a:fmtScheme name="ChatGPT">
+      <a:fillStyleLst>
+        <a:solidFill>
+          <a:schemeClr val="phClr"/>
+        </a:solidFill>
+        <a:gradFill>
+          <a:gsLst>
+            <a:gs pos="0">
+              <a:schemeClr val="phClr">
+                <a:tint val="67000"/>
+                <a:lumMod val="110000"/>
+                <a:satMod val="105000"/>
+              </a:schemeClr>
+            </a:gs>
+            <a:gs pos="50000">
+              <a:schemeClr val="phClr">
+                <a:tint val="73000"/>
+                <a:lumMod val="105000"/>
+                <a:satMod val="103000"/>
+              </a:schemeClr>
+            </a:gs>
+            <a:gs pos="100000">
+              <a:schemeClr val="phClr">
+                <a:tint val="81000"/>
+                <a:lumMod val="105000"/>
+                <a:satMod val="109000"/>
+              </a:schemeClr>
+            </a:gs>
+          </a:gsLst>
+          <a:lin ang="5400000" scaled="0"/>
+        </a:gradFill>
+        <a:gradFill>
+          <a:gsLst>
+            <a:gs pos="0">
+              <a:schemeClr val="phClr">
+                <a:tint val="94000"/>
+                <a:lumMod val="102000"/>
+                <a:satMod val="103000"/>
+              </a:schemeClr>
+            </a:gs>
+            <a:gs pos="50000">
+              <a:schemeClr val="phClr">
+                <a:shade val="100000"/>
+                <a:lumMod val="100000"/>
+                <a:satMod val="110000"/>
+              </a:schemeClr>
+            </a:gs>
+            <a:gs pos="100000">
+              <a:schemeClr val="phClr">
+                <a:shade val="78000"/>
+                <a:lumMod val="99000"/>
+                <a:satMod val="120000"/>
+              </a:schemeClr>
+            </a:gs>
+          </a:gsLst>
+          <a:lin ang="5400000" scaled="0"/>
+        </a:gradFill>
+      </a:fillStyleLst>
+      <a:lnStyleLst>
+        <a:ln w="12700">
+          <a:solidFill>
+            <a:schemeClr val="phClr"/>
+          </a:solidFill>
+          <a:prstDash val="solid"/>
+        </a:ln>
+        <a:ln w="19050">
+          <a:solidFill>
+            <a:schemeClr val="phClr"/>
+          </a:solidFill>
+          <a:prstDash val="solid"/>
+        </a:ln>
+        <a:ln w="25400">
+          <a:solidFill>
+            <a:schemeClr val="phClr"/>
+          </a:solidFill>
+          <a:prstDash val="solid"/>
+        </a:ln>
+      </a:lnStyleLst>
+      <a:effectStyleLst>
+        <a:effectStyle>
+          <a:effectLst/>
+        </a:effectStyle>
+        <a:effectStyle>
+          <a:effectLst/>
+        </a:effectStyle>
+        <a:effectStyle>
+          <a:effectLst>
+            <a:outerShdw blurRad="57150" dist="19050" dir="5400000">
+              <a:srgbClr val="000000">
+                <a:alpha val="16000"/>
+              </a:srgbClr>
+            </a:outerShdw>
+          </a:effectLst>
+        </a:effectStyle>
+        <a:effectStyle>
+          <a:effectLst>
+            <a:outerShdw blurRad="19050" dist="9525" dir="5400000">
+              <a:srgbClr val="000000">
+                <a:alpha val="6000"/>
+              </a:srgbClr>
+            </a:outerShdw>
+          </a:effectLst>
+        </a:effectStyle>
+        <a:effectStyle>
+          <a:effectLst>
+            <a:outerShdw blurRad="28575" dist="9525" dir="5400000">
+              <a:srgbClr val="000000">
+                <a:alpha val="8000"/>
+              </a:srgbClr>
+            </a:outerShdw>
+          </a:effectLst>
+        </a:effectStyle>
+        <a:effectStyle>
+          <a:effectLst>
+            <a:outerShdw blurRad="57150" dist="19050" dir="5400000">
+              <a:srgbClr val="000000">
+                <a:alpha val="10000"/>
+              </a:srgbClr>
+            </a:outerShdw>
+          </a:effectLst>
+        </a:effectStyle>
+        <a:effectStyle>
+          <a:effectLst>
+            <a:outerShdw blurRad="114300" dist="38100" dir="5400000">
+              <a:srgbClr val="000000">
+                <a:alpha val="12000"/>
+              </a:srgbClr>
+            </a:outerShdw>
+          </a:effectLst>
+        </a:effectStyle>
+        <a:effectStyle>
+          <a:effectLst>
+            <a:outerShdw blurRad="171450" dist="57150" dir="5400000">
+              <a:srgbClr val="000000">
+                <a:alpha val="16000"/>
+              </a:srgbClr>
+            </a:outerShdw>
+          </a:effectLst>
+        </a:effectStyle>
+        <a:effectStyle>
+          <a:effectLst>
+            <a:outerShdw blurRad="266700" dist="95250" dir="5400000">
+              <a:srgbClr val="000000">
+                <a:alpha val="24000"/>
+              </a:srgbClr>
+            </a:outerShdw>
+          </a:effectLst>
+        </a:effectStyle>
+      </a:effectStyleLst>
+      <a:bgFillStyleLst>
+        <a:solidFill>
+          <a:schemeClr val="phClr"/>
+        </a:solidFill>
+        <a:solidFill>
+          <a:schemeClr val="phClr">
+            <a:tint val="95000"/>
+            <a:satMod val="170000"/>
+          </a:schemeClr>
+        </a:solidFill>
+        <a:gradFill>
+          <a:gsLst>
+            <a:gs pos="0">
+              <a:schemeClr val="phClr">
+                <a:tint val="93000"/>
+                <a:shade val="98000"/>
+                <a:lumMod val="102000"/>
+                <a:satMod val="150000"/>
+              </a:schemeClr>
+            </a:gs>
+            <a:gs pos="50000">
+              <a:schemeClr val="phClr">
+                <a:tint val="98000"/>
+                <a:shade val="90000"/>
+                <a:lumMod val="103000"/>
+                <a:satMod val="130000"/>
+              </a:schemeClr>
+            </a:gs>
+            <a:gs pos="100000">
+              <a:schemeClr val="phClr">
+                <a:shade val="63000"/>
+                <a:satMod val="120000"/>
+              </a:schemeClr>
+            </a:gs>
+          </a:gsLst>
+          <a:lin ang="5400000" scaled="0"/>
+        </a:gradFill>
+      </a:bgFillStyleLst>
+    </a:fmtScheme>
+  </a:themeElements>
+</a:theme>
 </file>